--- a/decks/Immuno_01_Immunoassay-Principles-Test-Performance.pptx
+++ b/decks/Immuno_01_Immunoassay-Principles-Test-Performance.pptx
@@ -25,9 +25,14 @@
     <p:sldId id="273" r:id="rId19"/>
     <p:sldId id="274" r:id="rId20"/>
     <p:sldId id="275" r:id="rId21"/>
+    <p:sldId id="276" r:id="rId22"/>
+    <p:sldId id="277" r:id="rId23"/>
+    <p:sldId id="278" r:id="rId24"/>
+    <p:sldId id="279" r:id="rId25"/>
+    <p:sldId id="280" r:id="rId26"/>
   </p:sldIdLst>
   <p:notesMasterIdLst>
-    <p:notesMasterId r:id="rId22"/>
+    <p:notesMasterId r:id="rId27"/>
   </p:notesMasterIdLst>
   <p:sldSz cx="12191695" cy="6858000"/>
   <p:notesSz cx="6858000" cy="12191695"/>
@@ -1601,6 +1606,446 @@
             <a:fld id="{F7021451-1387-4CA6-816F-3879F97B5CBC}" type="slidenum">
               <a:rPr lang="en-US"/>
               <a:t>20</a:t>
+            </a:fld>
+            <a:endParaRPr lang="en-US"/>
+          </a:p>
+        </p:txBody>
+      </p:sp>
+    </p:spTree>
+    <p:extLst>
+      <p:ext uri="{BB962C8B-B14F-4D97-AF65-F5344CB8AC3E}">
+        <p14:creationId xmlns:p14="http://schemas.microsoft.com/office/powerpoint/2010/main" val="1024086991"/>
+      </p:ext>
+    </p:extLst>
+  </p:cSld>
+  <p:clrMapOvr>
+    <a:masterClrMapping/>
+  </p:clrMapOvr>
+</p:notes>
+</file>
+
+<file path=ppt/notesSlides/notesSlide21.xml><?xml version="1.0" encoding="utf-8"?>
+<p:notes xmlns:a="http://schemas.openxmlformats.org/drawingml/2006/main" xmlns:r="http://schemas.openxmlformats.org/officeDocument/2006/relationships" xmlns:p="http://schemas.openxmlformats.org/presentationml/2006/main">
+  <p:cSld>
+    <p:spTree>
+      <p:nvGrpSpPr>
+        <p:cNvPr id="1" name=""/>
+        <p:cNvGrpSpPr/>
+        <p:nvPr/>
+      </p:nvGrpSpPr>
+      <p:grpSpPr>
+        <a:xfrm>
+          <a:off x="0" y="0"/>
+          <a:ext cx="0" cy="0"/>
+          <a:chOff x="0" y="0"/>
+          <a:chExt cx="0" cy="0"/>
+        </a:xfrm>
+      </p:grpSpPr>
+      <p:sp>
+        <p:nvSpPr>
+          <p:cNvPr id="2" name="Slide Image Placeholder 1"/>
+          <p:cNvSpPr>
+            <a:spLocks noGrp="1" noRot="1" noChangeAspect="1"/>
+          </p:cNvSpPr>
+          <p:nvPr>
+            <p:ph type="sldImg"/>
+          </p:nvPr>
+        </p:nvSpPr>
+        <p:spPr/>
+      </p:sp>
+      <p:sp>
+        <p:nvSpPr>
+          <p:cNvPr id="3" name="Notes Placeholder 2"/>
+          <p:cNvSpPr>
+            <a:spLocks noGrp="1"/>
+          </p:cNvSpPr>
+          <p:nvPr>
+            <p:ph type="body" idx="1"/>
+          </p:nvPr>
+        </p:nvSpPr>
+        <p:spPr/>
+        <p:txBody>
+          <a:bodyPr/>
+          <a:lstStyle/>
+          <a:p>
+            <a:r>
+              <a:rPr lang="en-US" dirty="0"/>
+              <a:t/>
+            </a:r>
+            <a:endParaRPr lang="en-US" dirty="0"/>
+          </a:p>
+        </p:txBody>
+      </p:sp>
+      <p:sp>
+        <p:nvSpPr>
+          <p:cNvPr id="4" name="Slide Number Placeholder 3"/>
+          <p:cNvSpPr>
+            <a:spLocks noGrp="1"/>
+          </p:cNvSpPr>
+          <p:nvPr>
+            <p:ph type="sldNum" sz="quarter" idx="10"/>
+          </p:nvPr>
+        </p:nvSpPr>
+        <p:spPr/>
+        <p:txBody>
+          <a:bodyPr/>
+          <a:lstStyle/>
+          <a:p>
+            <a:fld id="{F7021451-1387-4CA6-816F-3879F97B5CBC}" type="slidenum">
+              <a:rPr lang="en-US"/>
+              <a:t>21</a:t>
+            </a:fld>
+            <a:endParaRPr lang="en-US"/>
+          </a:p>
+        </p:txBody>
+      </p:sp>
+    </p:spTree>
+    <p:extLst>
+      <p:ext uri="{BB962C8B-B14F-4D97-AF65-F5344CB8AC3E}">
+        <p14:creationId xmlns:p14="http://schemas.microsoft.com/office/powerpoint/2010/main" val="1024086991"/>
+      </p:ext>
+    </p:extLst>
+  </p:cSld>
+  <p:clrMapOvr>
+    <a:masterClrMapping/>
+  </p:clrMapOvr>
+</p:notes>
+</file>
+
+<file path=ppt/notesSlides/notesSlide22.xml><?xml version="1.0" encoding="utf-8"?>
+<p:notes xmlns:a="http://schemas.openxmlformats.org/drawingml/2006/main" xmlns:r="http://schemas.openxmlformats.org/officeDocument/2006/relationships" xmlns:p="http://schemas.openxmlformats.org/presentationml/2006/main">
+  <p:cSld>
+    <p:spTree>
+      <p:nvGrpSpPr>
+        <p:cNvPr id="1" name=""/>
+        <p:cNvGrpSpPr/>
+        <p:nvPr/>
+      </p:nvGrpSpPr>
+      <p:grpSpPr>
+        <a:xfrm>
+          <a:off x="0" y="0"/>
+          <a:ext cx="0" cy="0"/>
+          <a:chOff x="0" y="0"/>
+          <a:chExt cx="0" cy="0"/>
+        </a:xfrm>
+      </p:grpSpPr>
+      <p:sp>
+        <p:nvSpPr>
+          <p:cNvPr id="2" name="Slide Image Placeholder 1"/>
+          <p:cNvSpPr>
+            <a:spLocks noGrp="1" noRot="1" noChangeAspect="1"/>
+          </p:cNvSpPr>
+          <p:nvPr>
+            <p:ph type="sldImg"/>
+          </p:nvPr>
+        </p:nvSpPr>
+        <p:spPr/>
+      </p:sp>
+      <p:sp>
+        <p:nvSpPr>
+          <p:cNvPr id="3" name="Notes Placeholder 2"/>
+          <p:cNvSpPr>
+            <a:spLocks noGrp="1"/>
+          </p:cNvSpPr>
+          <p:nvPr>
+            <p:ph type="body" idx="1"/>
+          </p:nvPr>
+        </p:nvSpPr>
+        <p:spPr/>
+        <p:txBody>
+          <a:bodyPr/>
+          <a:lstStyle/>
+          <a:p>
+            <a:r>
+              <a:rPr lang="en-US" dirty="0"/>
+              <a:t/>
+            </a:r>
+            <a:endParaRPr lang="en-US" dirty="0"/>
+          </a:p>
+        </p:txBody>
+      </p:sp>
+      <p:sp>
+        <p:nvSpPr>
+          <p:cNvPr id="4" name="Slide Number Placeholder 3"/>
+          <p:cNvSpPr>
+            <a:spLocks noGrp="1"/>
+          </p:cNvSpPr>
+          <p:nvPr>
+            <p:ph type="sldNum" sz="quarter" idx="10"/>
+          </p:nvPr>
+        </p:nvSpPr>
+        <p:spPr/>
+        <p:txBody>
+          <a:bodyPr/>
+          <a:lstStyle/>
+          <a:p>
+            <a:fld id="{F7021451-1387-4CA6-816F-3879F97B5CBC}" type="slidenum">
+              <a:rPr lang="en-US"/>
+              <a:t>22</a:t>
+            </a:fld>
+            <a:endParaRPr lang="en-US"/>
+          </a:p>
+        </p:txBody>
+      </p:sp>
+    </p:spTree>
+    <p:extLst>
+      <p:ext uri="{BB962C8B-B14F-4D97-AF65-F5344CB8AC3E}">
+        <p14:creationId xmlns:p14="http://schemas.microsoft.com/office/powerpoint/2010/main" val="1024086991"/>
+      </p:ext>
+    </p:extLst>
+  </p:cSld>
+  <p:clrMapOvr>
+    <a:masterClrMapping/>
+  </p:clrMapOvr>
+</p:notes>
+</file>
+
+<file path=ppt/notesSlides/notesSlide23.xml><?xml version="1.0" encoding="utf-8"?>
+<p:notes xmlns:a="http://schemas.openxmlformats.org/drawingml/2006/main" xmlns:r="http://schemas.openxmlformats.org/officeDocument/2006/relationships" xmlns:p="http://schemas.openxmlformats.org/presentationml/2006/main">
+  <p:cSld>
+    <p:spTree>
+      <p:nvGrpSpPr>
+        <p:cNvPr id="1" name=""/>
+        <p:cNvGrpSpPr/>
+        <p:nvPr/>
+      </p:nvGrpSpPr>
+      <p:grpSpPr>
+        <a:xfrm>
+          <a:off x="0" y="0"/>
+          <a:ext cx="0" cy="0"/>
+          <a:chOff x="0" y="0"/>
+          <a:chExt cx="0" cy="0"/>
+        </a:xfrm>
+      </p:grpSpPr>
+      <p:sp>
+        <p:nvSpPr>
+          <p:cNvPr id="2" name="Slide Image Placeholder 1"/>
+          <p:cNvSpPr>
+            <a:spLocks noGrp="1" noRot="1" noChangeAspect="1"/>
+          </p:cNvSpPr>
+          <p:nvPr>
+            <p:ph type="sldImg"/>
+          </p:nvPr>
+        </p:nvSpPr>
+        <p:spPr/>
+      </p:sp>
+      <p:sp>
+        <p:nvSpPr>
+          <p:cNvPr id="3" name="Notes Placeholder 2"/>
+          <p:cNvSpPr>
+            <a:spLocks noGrp="1"/>
+          </p:cNvSpPr>
+          <p:nvPr>
+            <p:ph type="body" idx="1"/>
+          </p:nvPr>
+        </p:nvSpPr>
+        <p:spPr/>
+        <p:txBody>
+          <a:bodyPr/>
+          <a:lstStyle/>
+          <a:p>
+            <a:r>
+              <a:rPr lang="en-US" dirty="0"/>
+              <a:t/>
+            </a:r>
+            <a:endParaRPr lang="en-US" dirty="0"/>
+          </a:p>
+        </p:txBody>
+      </p:sp>
+      <p:sp>
+        <p:nvSpPr>
+          <p:cNvPr id="4" name="Slide Number Placeholder 3"/>
+          <p:cNvSpPr>
+            <a:spLocks noGrp="1"/>
+          </p:cNvSpPr>
+          <p:nvPr>
+            <p:ph type="sldNum" sz="quarter" idx="10"/>
+          </p:nvPr>
+        </p:nvSpPr>
+        <p:spPr/>
+        <p:txBody>
+          <a:bodyPr/>
+          <a:lstStyle/>
+          <a:p>
+            <a:fld id="{F7021451-1387-4CA6-816F-3879F97B5CBC}" type="slidenum">
+              <a:rPr lang="en-US"/>
+              <a:t>23</a:t>
+            </a:fld>
+            <a:endParaRPr lang="en-US"/>
+          </a:p>
+        </p:txBody>
+      </p:sp>
+    </p:spTree>
+    <p:extLst>
+      <p:ext uri="{BB962C8B-B14F-4D97-AF65-F5344CB8AC3E}">
+        <p14:creationId xmlns:p14="http://schemas.microsoft.com/office/powerpoint/2010/main" val="1024086991"/>
+      </p:ext>
+    </p:extLst>
+  </p:cSld>
+  <p:clrMapOvr>
+    <a:masterClrMapping/>
+  </p:clrMapOvr>
+</p:notes>
+</file>
+
+<file path=ppt/notesSlides/notesSlide24.xml><?xml version="1.0" encoding="utf-8"?>
+<p:notes xmlns:a="http://schemas.openxmlformats.org/drawingml/2006/main" xmlns:r="http://schemas.openxmlformats.org/officeDocument/2006/relationships" xmlns:p="http://schemas.openxmlformats.org/presentationml/2006/main">
+  <p:cSld>
+    <p:spTree>
+      <p:nvGrpSpPr>
+        <p:cNvPr id="1" name=""/>
+        <p:cNvGrpSpPr/>
+        <p:nvPr/>
+      </p:nvGrpSpPr>
+      <p:grpSpPr>
+        <a:xfrm>
+          <a:off x="0" y="0"/>
+          <a:ext cx="0" cy="0"/>
+          <a:chOff x="0" y="0"/>
+          <a:chExt cx="0" cy="0"/>
+        </a:xfrm>
+      </p:grpSpPr>
+      <p:sp>
+        <p:nvSpPr>
+          <p:cNvPr id="2" name="Slide Image Placeholder 1"/>
+          <p:cNvSpPr>
+            <a:spLocks noGrp="1" noRot="1" noChangeAspect="1"/>
+          </p:cNvSpPr>
+          <p:nvPr>
+            <p:ph type="sldImg"/>
+          </p:nvPr>
+        </p:nvSpPr>
+        <p:spPr/>
+      </p:sp>
+      <p:sp>
+        <p:nvSpPr>
+          <p:cNvPr id="3" name="Notes Placeholder 2"/>
+          <p:cNvSpPr>
+            <a:spLocks noGrp="1"/>
+          </p:cNvSpPr>
+          <p:nvPr>
+            <p:ph type="body" idx="1"/>
+          </p:nvPr>
+        </p:nvSpPr>
+        <p:spPr/>
+        <p:txBody>
+          <a:bodyPr/>
+          <a:lstStyle/>
+          <a:p>
+            <a:r>
+              <a:rPr lang="en-US" dirty="0"/>
+              <a:t/>
+            </a:r>
+            <a:endParaRPr lang="en-US" dirty="0"/>
+          </a:p>
+        </p:txBody>
+      </p:sp>
+      <p:sp>
+        <p:nvSpPr>
+          <p:cNvPr id="4" name="Slide Number Placeholder 3"/>
+          <p:cNvSpPr>
+            <a:spLocks noGrp="1"/>
+          </p:cNvSpPr>
+          <p:nvPr>
+            <p:ph type="sldNum" sz="quarter" idx="10"/>
+          </p:nvPr>
+        </p:nvSpPr>
+        <p:spPr/>
+        <p:txBody>
+          <a:bodyPr/>
+          <a:lstStyle/>
+          <a:p>
+            <a:fld id="{F7021451-1387-4CA6-816F-3879F97B5CBC}" type="slidenum">
+              <a:rPr lang="en-US"/>
+              <a:t>24</a:t>
+            </a:fld>
+            <a:endParaRPr lang="en-US"/>
+          </a:p>
+        </p:txBody>
+      </p:sp>
+    </p:spTree>
+    <p:extLst>
+      <p:ext uri="{BB962C8B-B14F-4D97-AF65-F5344CB8AC3E}">
+        <p14:creationId xmlns:p14="http://schemas.microsoft.com/office/powerpoint/2010/main" val="1024086991"/>
+      </p:ext>
+    </p:extLst>
+  </p:cSld>
+  <p:clrMapOvr>
+    <a:masterClrMapping/>
+  </p:clrMapOvr>
+</p:notes>
+</file>
+
+<file path=ppt/notesSlides/notesSlide25.xml><?xml version="1.0" encoding="utf-8"?>
+<p:notes xmlns:a="http://schemas.openxmlformats.org/drawingml/2006/main" xmlns:r="http://schemas.openxmlformats.org/officeDocument/2006/relationships" xmlns:p="http://schemas.openxmlformats.org/presentationml/2006/main">
+  <p:cSld>
+    <p:spTree>
+      <p:nvGrpSpPr>
+        <p:cNvPr id="1" name=""/>
+        <p:cNvGrpSpPr/>
+        <p:nvPr/>
+      </p:nvGrpSpPr>
+      <p:grpSpPr>
+        <a:xfrm>
+          <a:off x="0" y="0"/>
+          <a:ext cx="0" cy="0"/>
+          <a:chOff x="0" y="0"/>
+          <a:chExt cx="0" cy="0"/>
+        </a:xfrm>
+      </p:grpSpPr>
+      <p:sp>
+        <p:nvSpPr>
+          <p:cNvPr id="2" name="Slide Image Placeholder 1"/>
+          <p:cNvSpPr>
+            <a:spLocks noGrp="1" noRot="1" noChangeAspect="1"/>
+          </p:cNvSpPr>
+          <p:nvPr>
+            <p:ph type="sldImg"/>
+          </p:nvPr>
+        </p:nvSpPr>
+        <p:spPr/>
+      </p:sp>
+      <p:sp>
+        <p:nvSpPr>
+          <p:cNvPr id="3" name="Notes Placeholder 2"/>
+          <p:cNvSpPr>
+            <a:spLocks noGrp="1"/>
+          </p:cNvSpPr>
+          <p:nvPr>
+            <p:ph type="body" idx="1"/>
+          </p:nvPr>
+        </p:nvSpPr>
+        <p:spPr/>
+        <p:txBody>
+          <a:bodyPr/>
+          <a:lstStyle/>
+          <a:p>
+            <a:r>
+              <a:rPr lang="en-US" dirty="0"/>
+              <a:t/>
+            </a:r>
+            <a:endParaRPr lang="en-US" dirty="0"/>
+          </a:p>
+        </p:txBody>
+      </p:sp>
+      <p:sp>
+        <p:nvSpPr>
+          <p:cNvPr id="4" name="Slide Number Placeholder 3"/>
+          <p:cNvSpPr>
+            <a:spLocks noGrp="1"/>
+          </p:cNvSpPr>
+          <p:nvPr>
+            <p:ph type="sldNum" sz="quarter" idx="10"/>
+          </p:nvPr>
+        </p:nvSpPr>
+        <p:spPr/>
+        <p:txBody>
+          <a:bodyPr/>
+          <a:lstStyle/>
+          <a:p>
+            <a:fld id="{F7021451-1387-4CA6-816F-3879F97B5CBC}" type="slidenum">
+              <a:rPr lang="en-US"/>
+              <a:t>25</a:t>
             </a:fld>
             <a:endParaRPr lang="en-US"/>
           </a:p>
@@ -2804,7 +3249,7 @@
                 <a:ea typeface="Calibri" pitchFamily="34" charset="-122"/>
                 <a:cs typeface="Calibri" pitchFamily="34" charset="-120"/>
               </a:rPr>
-              <a:t>Sensitivity, Specificity, Predictive Values, and Interference</a:t>
+              <a:t>Formats, Interferences, and Interpreting Results Correctly</a:t>
             </a:r>
             <a:endParaRPr lang="en-US" sz="1900" dirty="0"/>
           </a:p>
@@ -2996,7 +3441,7 @@
                 <a:ea typeface="Calibri" pitchFamily="34" charset="-122"/>
                 <a:cs typeface="Calibri" pitchFamily="34" charset="-120"/>
               </a:rPr>
-              <a:t>IMMUNOLOGY &amp; SEROLOGY   ·   ALGORITHMS</a:t>
+              <a:t>IMMUNOLOGY &amp; SEROLOGY   ·   PERFORMANCE</a:t>
             </a:r>
             <a:endParaRPr lang="en-US" sz="1100" dirty="0"/>
           </a:p>
@@ -3035,7 +3480,7 @@
                 <a:ea typeface="Calibri" pitchFamily="34" charset="-122"/>
                 <a:cs typeface="Calibri" pitchFamily="34" charset="-120"/>
               </a:rPr>
-              <a:t>Screen Then Confirm</a:t>
+              <a:t>Sensitivity, Specificity &amp; Predictive Value</a:t>
             </a:r>
             <a:endParaRPr lang="en-US" sz="3000" dirty="0"/>
           </a:p>
@@ -3049,132 +3494,18 @@
         </p:nvSpPr>
         <p:spPr>
           <a:xfrm>
-            <a:off x="566928" y="1828800"/>
-            <a:ext cx="3442106" cy="1188720"/>
+            <a:off x="1066648" y="1481328"/>
+            <a:ext cx="10058400" cy="4187952"/>
           </a:xfrm>
           <a:prstGeom prst="roundRect">
             <a:avLst>
-              <a:gd name="adj" fmla="val 5385"/>
-            </a:avLst>
-          </a:prstGeom>
-          <a:solidFill>
-            <a:srgbClr val="6A1B9A"/>
-          </a:solidFill>
-          <a:ln w="15875">
-            <a:solidFill>
-              <a:srgbClr val="6A1B9A"/>
-            </a:solidFill>
-            <a:prstDash val="solid"/>
-          </a:ln>
-          <a:effectLst>
-            <a:outerShdw sx="100000" sy="100000" kx="0" ky="0" algn="bl" rotWithShape="0" blurRad="88900" dist="25400" dir="5400000">
-              <a:srgbClr val="22303C">
-                <a:alpha val="12000"/>
-              </a:srgbClr>
-            </a:outerShdw>
-          </a:effectLst>
-        </p:spPr>
-      </p:sp>
-      <p:sp>
-        <p:nvSpPr>
-          <p:cNvPr id="5" name="Text 3"/>
-          <p:cNvSpPr/>
-          <p:nvPr/>
-        </p:nvSpPr>
-        <p:spPr>
-          <a:xfrm>
-            <a:off x="621792" y="1828800"/>
-            <a:ext cx="3332378" cy="1188720"/>
-          </a:xfrm>
-          <a:prstGeom prst="rect">
-            <a:avLst/>
-          </a:prstGeom>
-          <a:noFill/>
-          <a:ln/>
-        </p:spPr>
-        <p:txBody>
-          <a:bodyPr wrap="square" lIns="25400" tIns="25400" rIns="25400" bIns="25400" rtlCol="0" anchor="ctr"/>
-          <a:lstStyle/>
-          <a:p>
-            <a:pPr algn="ctr" indent="0" marL="0">
-              <a:buNone/>
-            </a:pPr>
-            <a:r>
-              <a:rPr lang="en-US" sz="1150" b="1" dirty="0">
-                <a:solidFill>
-                  <a:srgbClr val="FFFFFF"/>
-                </a:solidFill>
-                <a:latin typeface="Calibri" pitchFamily="34" charset="0"/>
-                <a:ea typeface="Calibri" pitchFamily="34" charset="-122"/>
-                <a:cs typeface="Calibri" pitchFamily="34" charset="-120"/>
-              </a:rPr>
-              <a:t>Sensitive SCREEN</a:t>
-            </a:r>
-            <a:endParaRPr lang="en-US" sz="1150" dirty="0"/>
-          </a:p>
-          <a:p>
-            <a:pPr algn="ctr" indent="0" marL="0">
-              <a:buNone/>
-            </a:pPr>
-            <a:r>
-              <a:rPr lang="en-US" sz="1150" b="1" dirty="0">
-                <a:solidFill>
-                  <a:srgbClr val="FFFFFF"/>
-                </a:solidFill>
-                <a:latin typeface="Calibri" pitchFamily="34" charset="0"/>
-                <a:ea typeface="Calibri" pitchFamily="34" charset="-122"/>
-                <a:cs typeface="Calibri" pitchFamily="34" charset="-120"/>
-              </a:rPr>
-              <a:t>rule out disease</a:t>
-            </a:r>
-            <a:endParaRPr lang="en-US" sz="1150" dirty="0"/>
-          </a:p>
-        </p:txBody>
-      </p:sp>
-      <p:sp>
-        <p:nvSpPr>
-          <p:cNvPr id="6" name="Shape 4"/>
-          <p:cNvSpPr/>
-          <p:nvPr/>
-        </p:nvSpPr>
-        <p:spPr>
-          <a:xfrm>
-            <a:off x="4027322" y="2423160"/>
-            <a:ext cx="329184" cy="0"/>
-          </a:xfrm>
-          <a:prstGeom prst="line">
-            <a:avLst/>
-          </a:prstGeom>
-          <a:noFill/>
-          <a:ln w="22225">
-            <a:solidFill>
-              <a:srgbClr val="6A1B9A"/>
-            </a:solidFill>
-            <a:prstDash val="solid"/>
-            <a:tailEnd type="triangle"/>
-          </a:ln>
-        </p:spPr>
-      </p:sp>
-      <p:sp>
-        <p:nvSpPr>
-          <p:cNvPr id="7" name="Shape 5"/>
-          <p:cNvSpPr/>
-          <p:nvPr/>
-        </p:nvSpPr>
-        <p:spPr>
-          <a:xfrm>
-            <a:off x="4374794" y="1828800"/>
-            <a:ext cx="3442106" cy="1188720"/>
-          </a:xfrm>
-          <a:prstGeom prst="roundRect">
-            <a:avLst>
-              <a:gd name="adj" fmla="val 5385"/>
+              <a:gd name="adj" fmla="val 1965"/>
             </a:avLst>
           </a:prstGeom>
           <a:solidFill>
             <a:srgbClr val="FFFFFF"/>
           </a:solidFill>
-          <a:ln w="15875">
+          <a:ln w="12700">
             <a:solidFill>
               <a:srgbClr val="DCE4EC"/>
             </a:solidFill>
@@ -3189,314 +3520,72 @@
           </a:effectLst>
         </p:spPr>
       </p:sp>
-      <p:sp>
-        <p:nvSpPr>
-          <p:cNvPr id="8" name="Text 6"/>
-          <p:cNvSpPr/>
-          <p:nvPr/>
-        </p:nvSpPr>
-        <p:spPr>
-          <a:xfrm>
-            <a:off x="4429658" y="1828800"/>
-            <a:ext cx="3332378" cy="1188720"/>
-          </a:xfrm>
-          <a:prstGeom prst="rect">
-            <a:avLst/>
-          </a:prstGeom>
-          <a:noFill/>
-          <a:ln/>
-        </p:spPr>
-        <p:txBody>
-          <a:bodyPr wrap="square" lIns="25400" tIns="25400" rIns="25400" bIns="25400" rtlCol="0" anchor="ctr"/>
+      <p:pic>
+        <p:nvPicPr>
+          <p:cNvPr id="5" name="Image 0" descr="/tmp/cp_work2/art/immuno_perf.png">    </p:cNvPr>
+          <p:cNvPicPr>
+            <a:picLocks noChangeAspect="1"/>
+          </p:cNvPicPr>
+          <p:nvPr/>
+        </p:nvPicPr>
+        <p:blipFill>
+          <a:blip r:embed="rId1"/>
+          <a:stretch>
+            <a:fillRect/>
+          </a:stretch>
+        </p:blipFill>
+        <p:spPr>
+          <a:xfrm>
+            <a:off x="1194664" y="1609344"/>
+            <a:ext cx="9802368" cy="3931920"/>
+          </a:xfrm>
+          <a:prstGeom prst="rect">
+            <a:avLst/>
+          </a:prstGeom>
+        </p:spPr>
+      </p:pic>
+      <p:sp>
+        <p:nvSpPr>
+          <p:cNvPr id="6" name="Text 3"/>
+          <p:cNvSpPr/>
+          <p:nvPr/>
+        </p:nvSpPr>
+        <p:spPr>
+          <a:xfrm>
+            <a:off x="566928" y="5742432"/>
+            <a:ext cx="11057839" cy="365760"/>
+          </a:xfrm>
+          <a:prstGeom prst="rect">
+            <a:avLst/>
+          </a:prstGeom>
+          <a:noFill/>
+          <a:ln/>
+        </p:spPr>
+        <p:txBody>
+          <a:bodyPr wrap="square" lIns="0" tIns="0" rIns="0" bIns="0" rtlCol="0" anchor="t"/>
           <a:lstStyle/>
           <a:p>
             <a:pPr algn="ctr" indent="0" marL="0">
               <a:buNone/>
             </a:pPr>
             <a:r>
-              <a:rPr lang="en-US" sz="1150" b="1" dirty="0">
-                <a:solidFill>
-                  <a:srgbClr val="1B2A38"/>
-                </a:solidFill>
-                <a:latin typeface="Calibri" pitchFamily="34" charset="0"/>
-                <a:ea typeface="Calibri" pitchFamily="34" charset="-122"/>
-                <a:cs typeface="Calibri" pitchFamily="34" charset="-120"/>
-              </a:rPr>
-              <a:t>Reflex CONFIRM</a:t>
+              <a:rPr lang="en-US" sz="1150" i="1" dirty="0">
+                <a:solidFill>
+                  <a:srgbClr val="6B7B8A"/>
+                </a:solidFill>
+                <a:latin typeface="Calibri" pitchFamily="34" charset="0"/>
+                <a:ea typeface="Calibri" pitchFamily="34" charset="-122"/>
+                <a:cs typeface="Calibri" pitchFamily="34" charset="-120"/>
+              </a:rPr>
+              <a:t>Original schematic. Predictive values shift with disease prevalence even when sensitivity/specificity are fixed.</a:t>
             </a:r>
             <a:endParaRPr lang="en-US" sz="1150" dirty="0"/>
           </a:p>
-          <a:p>
-            <a:pPr algn="ctr" indent="0" marL="0">
-              <a:buNone/>
-            </a:pPr>
-            <a:r>
-              <a:rPr lang="en-US" sz="1150" b="1" dirty="0">
-                <a:solidFill>
-                  <a:srgbClr val="1B2A38"/>
-                </a:solidFill>
-                <a:latin typeface="Calibri" pitchFamily="34" charset="0"/>
-                <a:ea typeface="Calibri" pitchFamily="34" charset="-122"/>
-                <a:cs typeface="Calibri" pitchFamily="34" charset="-120"/>
-              </a:rPr>
-              <a:t>specific test on positives</a:t>
-            </a:r>
-            <a:endParaRPr lang="en-US" sz="1150" dirty="0"/>
-          </a:p>
-        </p:txBody>
-      </p:sp>
-      <p:sp>
-        <p:nvSpPr>
-          <p:cNvPr id="9" name="Shape 7"/>
-          <p:cNvSpPr/>
-          <p:nvPr/>
-        </p:nvSpPr>
-        <p:spPr>
-          <a:xfrm>
-            <a:off x="7835189" y="2423160"/>
-            <a:ext cx="329184" cy="0"/>
-          </a:xfrm>
-          <a:prstGeom prst="line">
-            <a:avLst/>
-          </a:prstGeom>
-          <a:noFill/>
-          <a:ln w="22225">
-            <a:solidFill>
-              <a:srgbClr val="6A1B9A"/>
-            </a:solidFill>
-            <a:prstDash val="solid"/>
-            <a:tailEnd type="triangle"/>
-          </a:ln>
-        </p:spPr>
-      </p:sp>
-      <p:sp>
-        <p:nvSpPr>
-          <p:cNvPr id="10" name="Shape 8"/>
-          <p:cNvSpPr/>
-          <p:nvPr/>
-        </p:nvSpPr>
-        <p:spPr>
-          <a:xfrm>
-            <a:off x="8182661" y="1828800"/>
-            <a:ext cx="3442106" cy="1188720"/>
-          </a:xfrm>
-          <a:prstGeom prst="roundRect">
-            <a:avLst>
-              <a:gd name="adj" fmla="val 5385"/>
-            </a:avLst>
-          </a:prstGeom>
-          <a:solidFill>
-            <a:srgbClr val="FFFFFF"/>
-          </a:solidFill>
-          <a:ln w="15875">
-            <a:solidFill>
-              <a:srgbClr val="DCE4EC"/>
-            </a:solidFill>
-            <a:prstDash val="solid"/>
-          </a:ln>
-          <a:effectLst>
-            <a:outerShdw sx="100000" sy="100000" kx="0" ky="0" algn="bl" rotWithShape="0" blurRad="88900" dist="25400" dir="5400000">
-              <a:srgbClr val="22303C">
-                <a:alpha val="12000"/>
-              </a:srgbClr>
-            </a:outerShdw>
-          </a:effectLst>
-        </p:spPr>
-      </p:sp>
-      <p:sp>
-        <p:nvSpPr>
-          <p:cNvPr id="11" name="Text 9"/>
-          <p:cNvSpPr/>
-          <p:nvPr/>
-        </p:nvSpPr>
-        <p:spPr>
-          <a:xfrm>
-            <a:off x="8237525" y="1828800"/>
-            <a:ext cx="3332378" cy="1188720"/>
-          </a:xfrm>
-          <a:prstGeom prst="rect">
-            <a:avLst/>
-          </a:prstGeom>
-          <a:noFill/>
-          <a:ln/>
-        </p:spPr>
-        <p:txBody>
-          <a:bodyPr wrap="square" lIns="25400" tIns="25400" rIns="25400" bIns="25400" rtlCol="0" anchor="ctr"/>
-          <a:lstStyle/>
-          <a:p>
-            <a:pPr algn="ctr" indent="0" marL="0">
-              <a:buNone/>
-            </a:pPr>
-            <a:r>
-              <a:rPr lang="en-US" sz="1150" b="1" dirty="0">
-                <a:solidFill>
-                  <a:srgbClr val="1B2A38"/>
-                </a:solidFill>
-                <a:latin typeface="Calibri" pitchFamily="34" charset="0"/>
-                <a:ea typeface="Calibri" pitchFamily="34" charset="-122"/>
-                <a:cs typeface="Calibri" pitchFamily="34" charset="-120"/>
-              </a:rPr>
-              <a:t>Report with</a:t>
-            </a:r>
-            <a:endParaRPr lang="en-US" sz="1150" dirty="0"/>
-          </a:p>
-          <a:p>
-            <a:pPr algn="ctr" indent="0" marL="0">
-              <a:buNone/>
-            </a:pPr>
-            <a:r>
-              <a:rPr lang="en-US" sz="1150" b="1" dirty="0">
-                <a:solidFill>
-                  <a:srgbClr val="1B2A38"/>
-                </a:solidFill>
-                <a:latin typeface="Calibri" pitchFamily="34" charset="0"/>
-                <a:ea typeface="Calibri" pitchFamily="34" charset="-122"/>
-                <a:cs typeface="Calibri" pitchFamily="34" charset="-120"/>
-              </a:rPr>
-              <a:t>clinical interpretation</a:t>
-            </a:r>
-            <a:endParaRPr lang="en-US" sz="1150" dirty="0"/>
-          </a:p>
-        </p:txBody>
-      </p:sp>
-      <p:sp>
-        <p:nvSpPr>
-          <p:cNvPr id="12" name="Shape 10"/>
-          <p:cNvSpPr/>
-          <p:nvPr/>
-        </p:nvSpPr>
-        <p:spPr>
-          <a:xfrm>
-            <a:off x="566928" y="3246120"/>
-            <a:ext cx="11057839" cy="914400"/>
-          </a:xfrm>
-          <a:prstGeom prst="roundRect">
-            <a:avLst>
-              <a:gd name="adj" fmla="val 9000"/>
-            </a:avLst>
-          </a:prstGeom>
-          <a:solidFill>
-            <a:srgbClr val="F1E8F7"/>
-          </a:solidFill>
-          <a:ln/>
-          <a:effectLst>
-            <a:outerShdw sx="100000" sy="100000" kx="0" ky="0" algn="bl" rotWithShape="0" blurRad="88900" dist="25400" dir="5400000">
-              <a:srgbClr val="22303C">
-                <a:alpha val="12000"/>
-              </a:srgbClr>
-            </a:outerShdw>
-          </a:effectLst>
-        </p:spPr>
-      </p:sp>
-      <p:sp>
-        <p:nvSpPr>
-          <p:cNvPr id="13" name="Text 11"/>
-          <p:cNvSpPr/>
-          <p:nvPr/>
-        </p:nvSpPr>
-        <p:spPr>
-          <a:xfrm>
-            <a:off x="841248" y="3246120"/>
-            <a:ext cx="10509199" cy="914400"/>
-          </a:xfrm>
-          <a:prstGeom prst="rect">
-            <a:avLst/>
-          </a:prstGeom>
-          <a:noFill/>
-          <a:ln/>
-        </p:spPr>
-        <p:txBody>
-          <a:bodyPr wrap="square" lIns="0" tIns="0" rIns="0" bIns="0" rtlCol="0" anchor="ctr"/>
-          <a:lstStyle/>
-          <a:p>
-            <a:pPr algn="l" indent="0" marL="0">
-              <a:lnSpc>
-                <a:spcPct val="105000"/>
-              </a:lnSpc>
-              <a:buNone/>
-            </a:pPr>
-            <a:r>
-              <a:rPr lang="en-US" sz="1300" dirty="0">
-                <a:solidFill>
-                  <a:srgbClr val="33444F"/>
-                </a:solidFill>
-                <a:latin typeface="Calibri" pitchFamily="34" charset="0"/>
-                <a:ea typeface="Calibri" pitchFamily="34" charset="-122"/>
-                <a:cs typeface="Calibri" pitchFamily="34" charset="-120"/>
-              </a:rPr>
-              <a:t>Screen-then-confirm pairs a sensitive first test (few false negatives) with a specific confirmatory test (controls false positives) — the logic behind HIV, syphilis, and many serologic algorithms.</a:t>
-            </a:r>
-            <a:endParaRPr lang="en-US" sz="1300" dirty="0"/>
-          </a:p>
-        </p:txBody>
-      </p:sp>
-      <p:sp>
-        <p:nvSpPr>
-          <p:cNvPr id="14" name="Text 12"/>
-          <p:cNvSpPr/>
-          <p:nvPr/>
-        </p:nvSpPr>
-        <p:spPr>
-          <a:xfrm>
-            <a:off x="566928" y="4343400"/>
-            <a:ext cx="11057839" cy="1965960"/>
-          </a:xfrm>
-          <a:prstGeom prst="rect">
-            <a:avLst/>
-          </a:prstGeom>
-          <a:noFill/>
-          <a:ln/>
-        </p:spPr>
-        <p:txBody>
-          <a:bodyPr wrap="square" lIns="0" tIns="0" rIns="0" bIns="0" rtlCol="0" anchor="t"/>
-          <a:lstStyle/>
-          <a:p>
-            <a:pPr algn="l" marL="177800" indent="-177800">
-              <a:spcAft>
-                <a:spcPts val="500"/>
-              </a:spcAft>
-              <a:buSzPct val="100000"/>
-              <a:buChar char="•"/>
-            </a:pPr>
-            <a:r>
-              <a:rPr lang="en-US" sz="1250" b="1" dirty="0">
-                <a:solidFill>
-                  <a:srgbClr val="1B2A38"/>
-                </a:solidFill>
-                <a:latin typeface="Calibri" pitchFamily="34" charset="0"/>
-                <a:ea typeface="Calibri" pitchFamily="34" charset="-122"/>
-                <a:cs typeface="Calibri" pitchFamily="34" charset="-120"/>
-              </a:rPr>
-              <a:t>Equivocal/gray-zone results: repeat, use an orthogonal method, or follow with paired/convalescent sampling.</a:t>
-            </a:r>
-            <a:endParaRPr lang="en-US" sz="1250" dirty="0"/>
-          </a:p>
-          <a:p>
-            <a:pPr algn="l" marL="177800" indent="-177800">
-              <a:spcAft>
-                <a:spcPts val="500"/>
-              </a:spcAft>
-              <a:buSzPct val="100000"/>
-              <a:buChar char="•"/>
-            </a:pPr>
-            <a:r>
-              <a:rPr lang="en-US" sz="1250" dirty="0">
-                <a:solidFill>
-                  <a:srgbClr val="33444F"/>
-                </a:solidFill>
-                <a:latin typeface="Calibri" pitchFamily="34" charset="0"/>
-                <a:ea typeface="Calibri" pitchFamily="34" charset="-122"/>
-                <a:cs typeface="Calibri" pitchFamily="34" charset="-120"/>
-              </a:rPr>
-              <a:t>Report presumptive vs confirmed clearly.</a:t>
-            </a:r>
-            <a:endParaRPr lang="en-US" sz="1250" dirty="0"/>
-          </a:p>
-        </p:txBody>
-      </p:sp>
-      <p:sp>
-        <p:nvSpPr>
-          <p:cNvPr id="15" name="Text 13"/>
+        </p:txBody>
+      </p:sp>
+      <p:sp>
+        <p:nvSpPr>
+          <p:cNvPr id="7" name="Text 4"/>
           <p:cNvSpPr/>
           <p:nvPr/>
         </p:nvSpPr>
@@ -3535,7 +3624,7 @@
       </p:sp>
       <p:sp>
         <p:nvSpPr>
-          <p:cNvPr id="16" name="Text 14"/>
+          <p:cNvPr id="8" name="Text 5"/>
           <p:cNvSpPr/>
           <p:nvPr/>
         </p:nvSpPr>
@@ -3614,7 +3703,7 @@
     <p:bg>
       <p:bgPr>
         <a:solidFill>
-          <a:srgbClr val="4A1269"/>
+          <a:srgbClr val="FFFFFF"/>
         </a:solidFill>
       </p:bgPr>
     </p:bg>
@@ -3634,58 +3723,295 @@
       </p:grpSpPr>
       <p:sp>
         <p:nvSpPr>
-          <p:cNvPr id="2" name="Shape 0"/>
-          <p:cNvSpPr/>
-          <p:nvPr/>
-        </p:nvSpPr>
-        <p:spPr>
-          <a:xfrm>
-            <a:off x="9509760" y="-1280160"/>
-            <a:ext cx="4754880" cy="4754880"/>
-          </a:xfrm>
-          <a:prstGeom prst="ellipse">
-            <a:avLst/>
+          <p:cNvPr id="2" name="Text 0"/>
+          <p:cNvSpPr/>
+          <p:nvPr/>
+        </p:nvSpPr>
+        <p:spPr>
+          <a:xfrm>
+            <a:off x="566928" y="329184"/>
+            <a:ext cx="10515600" cy="310896"/>
+          </a:xfrm>
+          <a:prstGeom prst="rect">
+            <a:avLst/>
+          </a:prstGeom>
+          <a:noFill/>
+          <a:ln/>
+        </p:spPr>
+        <p:txBody>
+          <a:bodyPr wrap="square" lIns="0" tIns="0" rIns="0" bIns="0" rtlCol="0" anchor="ctr"/>
+          <a:lstStyle/>
+          <a:p>
+            <a:pPr algn="l" indent="0" marL="0">
+              <a:buNone/>
+            </a:pPr>
+            <a:r>
+              <a:rPr lang="en-US" sz="1100" b="1" spc="150" kern="0" dirty="0">
+                <a:solidFill>
+                  <a:srgbClr val="6A1B9A"/>
+                </a:solidFill>
+                <a:latin typeface="Calibri" pitchFamily="34" charset="0"/>
+                <a:ea typeface="Calibri" pitchFamily="34" charset="-122"/>
+                <a:cs typeface="Calibri" pitchFamily="34" charset="-120"/>
+              </a:rPr>
+              <a:t>IMMUNOLOGY &amp; SEROLOGY   ·   INTERFERENCES</a:t>
+            </a:r>
+            <a:endParaRPr lang="en-US" sz="1100" dirty="0"/>
+          </a:p>
+        </p:txBody>
+      </p:sp>
+      <p:sp>
+        <p:nvSpPr>
+          <p:cNvPr id="3" name="Text 1"/>
+          <p:cNvSpPr/>
+          <p:nvPr/>
+        </p:nvSpPr>
+        <p:spPr>
+          <a:xfrm>
+            <a:off x="566928" y="713232"/>
+            <a:ext cx="11064240" cy="749808"/>
+          </a:xfrm>
+          <a:prstGeom prst="rect">
+            <a:avLst/>
+          </a:prstGeom>
+          <a:noFill/>
+          <a:ln/>
+        </p:spPr>
+        <p:txBody>
+          <a:bodyPr wrap="square" lIns="0" tIns="0" rIns="0" bIns="0" rtlCol="0" anchor="ctr"/>
+          <a:lstStyle/>
+          <a:p>
+            <a:pPr algn="l" indent="0" marL="0">
+              <a:buNone/>
+            </a:pPr>
+            <a:r>
+              <a:rPr lang="en-US" sz="3000" b="1" dirty="0">
+                <a:solidFill>
+                  <a:srgbClr val="0E3A5F"/>
+                </a:solidFill>
+                <a:latin typeface="Calibri" pitchFamily="34" charset="0"/>
+                <a:ea typeface="Calibri" pitchFamily="34" charset="-122"/>
+                <a:cs typeface="Calibri" pitchFamily="34" charset="-120"/>
+              </a:rPr>
+              <a:t>Classic Immunoassay Interferences</a:t>
+            </a:r>
+            <a:endParaRPr lang="en-US" sz="3000" dirty="0"/>
+          </a:p>
+        </p:txBody>
+      </p:sp>
+      <p:sp>
+        <p:nvSpPr>
+          <p:cNvPr id="4" name="Shape 2"/>
+          <p:cNvSpPr/>
+          <p:nvPr/>
+        </p:nvSpPr>
+        <p:spPr>
+          <a:xfrm>
+            <a:off x="566928" y="1517904"/>
+            <a:ext cx="5346040" cy="4114800"/>
+          </a:xfrm>
+          <a:prstGeom prst="roundRect">
+            <a:avLst>
+              <a:gd name="adj" fmla="val 2000"/>
+            </a:avLst>
           </a:prstGeom>
           <a:solidFill>
-            <a:srgbClr val="FFFFFF">
-              <a:alpha val="8000"/>
-            </a:srgbClr>
+            <a:srgbClr val="F1E8F7"/>
           </a:solidFill>
           <a:ln/>
-        </p:spPr>
-      </p:sp>
-      <p:sp>
-        <p:nvSpPr>
-          <p:cNvPr id="3" name="Shape 1"/>
-          <p:cNvSpPr/>
-          <p:nvPr/>
-        </p:nvSpPr>
-        <p:spPr>
-          <a:xfrm>
-            <a:off x="10607040" y="3931920"/>
-            <a:ext cx="3108960" cy="3108960"/>
-          </a:xfrm>
-          <a:prstGeom prst="ellipse">
-            <a:avLst/>
+          <a:effectLst>
+            <a:outerShdw sx="100000" sy="100000" kx="0" ky="0" algn="bl" rotWithShape="0" blurRad="88900" dist="25400" dir="5400000">
+              <a:srgbClr val="22303C">
+                <a:alpha val="12000"/>
+              </a:srgbClr>
+            </a:outerShdw>
+          </a:effectLst>
+        </p:spPr>
+      </p:sp>
+      <p:sp>
+        <p:nvSpPr>
+          <p:cNvPr id="5" name="Text 3"/>
+          <p:cNvSpPr/>
+          <p:nvPr/>
+        </p:nvSpPr>
+        <p:spPr>
+          <a:xfrm>
+            <a:off x="804672" y="1682496"/>
+            <a:ext cx="4888840" cy="274320"/>
+          </a:xfrm>
+          <a:prstGeom prst="rect">
+            <a:avLst/>
+          </a:prstGeom>
+          <a:noFill/>
+          <a:ln/>
+        </p:spPr>
+        <p:txBody>
+          <a:bodyPr wrap="square" lIns="0" tIns="0" rIns="0" bIns="0" rtlCol="0" anchor="ctr"/>
+          <a:lstStyle/>
+          <a:p>
+            <a:pPr indent="0" marL="0">
+              <a:buNone/>
+            </a:pPr>
+            <a:r>
+              <a:rPr lang="en-US" sz="1200" b="1" spc="100" kern="0" dirty="0">
+                <a:solidFill>
+                  <a:srgbClr val="4A1269"/>
+                </a:solidFill>
+                <a:latin typeface="Calibri" pitchFamily="34" charset="0"/>
+                <a:ea typeface="Calibri" pitchFamily="34" charset="-122"/>
+                <a:cs typeface="Calibri" pitchFamily="34" charset="-120"/>
+              </a:rPr>
+              <a:t>FALSELY LOW / HIGH SIGNAL</a:t>
+            </a:r>
+            <a:endParaRPr lang="en-US" sz="1200" dirty="0"/>
+          </a:p>
+        </p:txBody>
+      </p:sp>
+      <p:sp>
+        <p:nvSpPr>
+          <p:cNvPr id="6" name="Text 4"/>
+          <p:cNvSpPr/>
+          <p:nvPr/>
+        </p:nvSpPr>
+        <p:spPr>
+          <a:xfrm>
+            <a:off x="804672" y="2029968"/>
+            <a:ext cx="4870552" cy="3474720"/>
+          </a:xfrm>
+          <a:prstGeom prst="rect">
+            <a:avLst/>
+          </a:prstGeom>
+          <a:noFill/>
+          <a:ln/>
+        </p:spPr>
+        <p:txBody>
+          <a:bodyPr wrap="square" lIns="0" tIns="0" rIns="0" bIns="0" rtlCol="0" anchor="t"/>
+          <a:lstStyle/>
+          <a:p>
+            <a:pPr algn="l" marL="177800" indent="-177800">
+              <a:spcAft>
+                <a:spcPts val="900"/>
+              </a:spcAft>
+              <a:buSzPct val="100000"/>
+              <a:buChar char="•"/>
+            </a:pPr>
+            <a:r>
+              <a:rPr lang="en-US" sz="1200" b="1" dirty="0">
+                <a:solidFill>
+                  <a:srgbClr val="1B2A38"/>
+                </a:solidFill>
+                <a:latin typeface="Calibri" pitchFamily="34" charset="0"/>
+                <a:ea typeface="Calibri" pitchFamily="34" charset="-122"/>
+                <a:cs typeface="Calibri" pitchFamily="34" charset="-120"/>
+              </a:rPr>
+              <a:t>Hook effect: extremely high analyte saturates antibodies → falsely LOW result (dilute to unmask).</a:t>
+            </a:r>
+            <a:endParaRPr lang="en-US" sz="1200" dirty="0"/>
+          </a:p>
+          <a:p>
+            <a:pPr algn="l" marL="177800" indent="-177800">
+              <a:spcAft>
+                <a:spcPts val="900"/>
+              </a:spcAft>
+              <a:buSzPct val="100000"/>
+              <a:buChar char="•"/>
+            </a:pPr>
+            <a:r>
+              <a:rPr lang="en-US" sz="1200" dirty="0">
+                <a:solidFill>
+                  <a:srgbClr val="33444F"/>
+                </a:solidFill>
+                <a:latin typeface="Calibri" pitchFamily="34" charset="0"/>
+                <a:ea typeface="Calibri" pitchFamily="34" charset="-122"/>
+                <a:cs typeface="Calibri" pitchFamily="34" charset="-120"/>
+              </a:rPr>
+              <a:t>Biotin interferes with streptavidin-biotin assays (e.g., low TSH, high free T4).</a:t>
+            </a:r>
+            <a:endParaRPr lang="en-US" sz="1200" dirty="0"/>
+          </a:p>
+          <a:p>
+            <a:pPr algn="l" marL="177800" indent="-177800">
+              <a:spcAft>
+                <a:spcPts val="900"/>
+              </a:spcAft>
+              <a:buSzPct val="100000"/>
+              <a:buChar char="•"/>
+            </a:pPr>
+            <a:r>
+              <a:rPr lang="en-US" sz="1200" dirty="0">
+                <a:solidFill>
+                  <a:srgbClr val="33444F"/>
+                </a:solidFill>
+                <a:latin typeface="Calibri" pitchFamily="34" charset="0"/>
+                <a:ea typeface="Calibri" pitchFamily="34" charset="-122"/>
+                <a:cs typeface="Calibri" pitchFamily="34" charset="-120"/>
+              </a:rPr>
+              <a:t>Cross-reactivity with structurally similar molecules.</a:t>
+            </a:r>
+            <a:endParaRPr lang="en-US" sz="1200" dirty="0"/>
+          </a:p>
+          <a:p>
+            <a:pPr algn="l" marL="177800" indent="-177800">
+              <a:spcAft>
+                <a:spcPts val="900"/>
+              </a:spcAft>
+              <a:buSzPct val="100000"/>
+              <a:buChar char="•"/>
+            </a:pPr>
+            <a:r>
+              <a:rPr lang="en-US" sz="1200" dirty="0">
+                <a:solidFill>
+                  <a:srgbClr val="33444F"/>
+                </a:solidFill>
+                <a:latin typeface="Calibri" pitchFamily="34" charset="0"/>
+                <a:ea typeface="Calibri" pitchFamily="34" charset="-122"/>
+                <a:cs typeface="Calibri" pitchFamily="34" charset="-120"/>
+              </a:rPr>
+              <a:t>Matrix effects (lipemia, icterus, hemolysis).</a:t>
+            </a:r>
+            <a:endParaRPr lang="en-US" sz="1200" dirty="0"/>
+          </a:p>
+        </p:txBody>
+      </p:sp>
+      <p:sp>
+        <p:nvSpPr>
+          <p:cNvPr id="7" name="Shape 5"/>
+          <p:cNvSpPr/>
+          <p:nvPr/>
+        </p:nvSpPr>
+        <p:spPr>
+          <a:xfrm>
+            <a:off x="6278728" y="1517904"/>
+            <a:ext cx="5346040" cy="4114800"/>
+          </a:xfrm>
+          <a:prstGeom prst="roundRect">
+            <a:avLst>
+              <a:gd name="adj" fmla="val 2000"/>
+            </a:avLst>
           </a:prstGeom>
           <a:solidFill>
-            <a:srgbClr val="FFFFFF">
-              <a:alpha val="6000"/>
-            </a:srgbClr>
+            <a:srgbClr val="F1E9F7"/>
           </a:solidFill>
           <a:ln/>
-        </p:spPr>
-      </p:sp>
-      <p:sp>
-        <p:nvSpPr>
-          <p:cNvPr id="4" name="Text 2"/>
-          <p:cNvSpPr/>
-          <p:nvPr/>
-        </p:nvSpPr>
-        <p:spPr>
-          <a:xfrm>
-            <a:off x="566928" y="1783080"/>
-            <a:ext cx="2743200" cy="1463040"/>
+          <a:effectLst>
+            <a:outerShdw sx="100000" sy="100000" kx="0" ky="0" algn="bl" rotWithShape="0" blurRad="88900" dist="25400" dir="5400000">
+              <a:srgbClr val="22303C">
+                <a:alpha val="12000"/>
+              </a:srgbClr>
+            </a:outerShdw>
+          </a:effectLst>
+        </p:spPr>
+      </p:sp>
+      <p:sp>
+        <p:nvSpPr>
+          <p:cNvPr id="8" name="Text 6"/>
+          <p:cNvSpPr/>
+          <p:nvPr/>
+        </p:nvSpPr>
+        <p:spPr>
+          <a:xfrm>
+            <a:off x="6516472" y="1682496"/>
+            <a:ext cx="4888840" cy="274320"/>
           </a:xfrm>
           <a:prstGeom prst="rect">
             <a:avLst/>
@@ -3697,34 +4023,179 @@
           <a:bodyPr wrap="square" lIns="0" tIns="0" rIns="0" bIns="0" rtlCol="0" anchor="ctr"/>
           <a:lstStyle/>
           <a:p>
+            <a:pPr indent="0" marL="0">
+              <a:buNone/>
+            </a:pPr>
+            <a:r>
+              <a:rPr lang="en-US" sz="1200" b="1" spc="100" kern="0" dirty="0">
+                <a:solidFill>
+                  <a:srgbClr val="4A1269"/>
+                </a:solidFill>
+                <a:latin typeface="Calibri" pitchFamily="34" charset="0"/>
+                <a:ea typeface="Calibri" pitchFamily="34" charset="-122"/>
+                <a:cs typeface="Calibri" pitchFamily="34" charset="-120"/>
+              </a:rPr>
+              <a:t>HETEROPHILE &amp; AUTOANTIBODIES</a:t>
+            </a:r>
+            <a:endParaRPr lang="en-US" sz="1200" dirty="0"/>
+          </a:p>
+        </p:txBody>
+      </p:sp>
+      <p:sp>
+        <p:nvSpPr>
+          <p:cNvPr id="9" name="Text 7"/>
+          <p:cNvSpPr/>
+          <p:nvPr/>
+        </p:nvSpPr>
+        <p:spPr>
+          <a:xfrm>
+            <a:off x="6516472" y="2029968"/>
+            <a:ext cx="4870552" cy="3474720"/>
+          </a:xfrm>
+          <a:prstGeom prst="rect">
+            <a:avLst/>
+          </a:prstGeom>
+          <a:noFill/>
+          <a:ln/>
+        </p:spPr>
+        <p:txBody>
+          <a:bodyPr wrap="square" lIns="0" tIns="0" rIns="0" bIns="0" rtlCol="0" anchor="t"/>
+          <a:lstStyle/>
+          <a:p>
+            <a:pPr algn="l" marL="177800" indent="-177800">
+              <a:spcAft>
+                <a:spcPts val="900"/>
+              </a:spcAft>
+              <a:buSzPct val="100000"/>
+              <a:buChar char="•"/>
+            </a:pPr>
+            <a:r>
+              <a:rPr lang="en-US" sz="1200" b="1" dirty="0">
+                <a:solidFill>
+                  <a:srgbClr val="1B2A38"/>
+                </a:solidFill>
+                <a:latin typeface="Calibri" pitchFamily="34" charset="0"/>
+                <a:ea typeface="Calibri" pitchFamily="34" charset="-122"/>
+                <a:cs typeface="Calibri" pitchFamily="34" charset="-120"/>
+              </a:rPr>
+              <a:t>Heterophile antibodies bridge assay antibodies → false positives/negatives.</a:t>
+            </a:r>
+            <a:endParaRPr lang="en-US" sz="1200" dirty="0"/>
+          </a:p>
+          <a:p>
+            <a:pPr algn="l" marL="177800" indent="-177800">
+              <a:spcAft>
+                <a:spcPts val="900"/>
+              </a:spcAft>
+              <a:buSzPct val="100000"/>
+              <a:buChar char="•"/>
+            </a:pPr>
+            <a:r>
+              <a:rPr lang="en-US" sz="1200" dirty="0">
+                <a:solidFill>
+                  <a:srgbClr val="33444F"/>
+                </a:solidFill>
+                <a:latin typeface="Calibri" pitchFamily="34" charset="0"/>
+                <a:ea typeface="Calibri" pitchFamily="34" charset="-122"/>
+                <a:cs typeface="Calibri" pitchFamily="34" charset="-120"/>
+              </a:rPr>
+              <a:t>Macro-analytes (macroprolactin, macro-CK) cause spurious elevations.</a:t>
+            </a:r>
+            <a:endParaRPr lang="en-US" sz="1200" dirty="0"/>
+          </a:p>
+          <a:p>
+            <a:pPr algn="l" marL="177800" indent="-177800">
+              <a:spcAft>
+                <a:spcPts val="900"/>
+              </a:spcAft>
+              <a:buSzPct val="100000"/>
+              <a:buChar char="•"/>
+            </a:pPr>
+            <a:r>
+              <a:rPr lang="en-US" sz="1200" dirty="0">
+                <a:solidFill>
+                  <a:srgbClr val="33444F"/>
+                </a:solidFill>
+                <a:latin typeface="Calibri" pitchFamily="34" charset="0"/>
+                <a:ea typeface="Calibri" pitchFamily="34" charset="-122"/>
+                <a:cs typeface="Calibri" pitchFamily="34" charset="-120"/>
+              </a:rPr>
+              <a:t>Anti-analyte autoantibodies distort results.</a:t>
+            </a:r>
+            <a:endParaRPr lang="en-US" sz="1200" dirty="0"/>
+          </a:p>
+          <a:p>
+            <a:pPr algn="l" marL="177800" indent="-177800">
+              <a:spcAft>
+                <a:spcPts val="900"/>
+              </a:spcAft>
+              <a:buSzPct val="100000"/>
+              <a:buChar char="•"/>
+            </a:pPr>
+            <a:r>
+              <a:rPr lang="en-US" sz="1200" dirty="0">
+                <a:solidFill>
+                  <a:srgbClr val="33444F"/>
+                </a:solidFill>
+                <a:latin typeface="Calibri" pitchFamily="34" charset="0"/>
+                <a:ea typeface="Calibri" pitchFamily="34" charset="-122"/>
+                <a:cs typeface="Calibri" pitchFamily="34" charset="-120"/>
+              </a:rPr>
+              <a:t>Suspect interference when results don’t fit the patient.</a:t>
+            </a:r>
+            <a:endParaRPr lang="en-US" sz="1200" dirty="0"/>
+          </a:p>
+        </p:txBody>
+      </p:sp>
+      <p:sp>
+        <p:nvSpPr>
+          <p:cNvPr id="10" name="Text 8"/>
+          <p:cNvSpPr/>
+          <p:nvPr/>
+        </p:nvSpPr>
+        <p:spPr>
+          <a:xfrm>
+            <a:off x="566928" y="6473952"/>
+            <a:ext cx="7772400" cy="274320"/>
+          </a:xfrm>
+          <a:prstGeom prst="rect">
+            <a:avLst/>
+          </a:prstGeom>
+          <a:noFill/>
+          <a:ln/>
+        </p:spPr>
+        <p:txBody>
+          <a:bodyPr wrap="square" lIns="0" tIns="0" rIns="0" bIns="0" rtlCol="0" anchor="ctr"/>
+          <a:lstStyle/>
+          <a:p>
             <a:pPr algn="l" indent="0" marL="0">
               <a:buNone/>
             </a:pPr>
             <a:r>
-              <a:rPr lang="en-US" sz="6400" b="1" dirty="0">
-                <a:solidFill>
-                  <a:srgbClr val="F1E8F7"/>
-                </a:solidFill>
-                <a:latin typeface="Calibri" pitchFamily="34" charset="0"/>
-                <a:ea typeface="Calibri" pitchFamily="34" charset="-122"/>
-                <a:cs typeface="Calibri" pitchFamily="34" charset="-120"/>
-              </a:rPr>
-              <a:t>03</a:t>
-            </a:r>
-            <a:endParaRPr lang="en-US" sz="6400" dirty="0"/>
-          </a:p>
-        </p:txBody>
-      </p:sp>
-      <p:sp>
-        <p:nvSpPr>
-          <p:cNvPr id="5" name="Text 3"/>
-          <p:cNvSpPr/>
-          <p:nvPr/>
-        </p:nvSpPr>
-        <p:spPr>
-          <a:xfrm>
-            <a:off x="566928" y="3246120"/>
-            <a:ext cx="10058400" cy="365760"/>
+              <a:rPr lang="en-US" sz="850" dirty="0">
+                <a:solidFill>
+                  <a:srgbClr val="9AA8B4"/>
+                </a:solidFill>
+                <a:latin typeface="Calibri" pitchFamily="34" charset="0"/>
+                <a:ea typeface="Calibri" pitchFamily="34" charset="-122"/>
+                <a:cs typeface="Calibri" pitchFamily="34" charset="-120"/>
+              </a:rPr>
+              <a:t>Makassed General Hospital  ·  Department of Laboratory Medicine</a:t>
+            </a:r>
+            <a:endParaRPr lang="en-US" sz="850" dirty="0"/>
+          </a:p>
+        </p:txBody>
+      </p:sp>
+      <p:sp>
+        <p:nvSpPr>
+          <p:cNvPr id="11" name="Text 9"/>
+          <p:cNvSpPr/>
+          <p:nvPr/>
+        </p:nvSpPr>
+        <p:spPr>
+          <a:xfrm>
+            <a:off x="9814255" y="6473952"/>
+            <a:ext cx="1828800" cy="274320"/>
           </a:xfrm>
           <a:prstGeom prst="rect">
             <a:avLst/>
@@ -3736,60 +4207,49 @@
           <a:bodyPr wrap="square" lIns="0" tIns="0" rIns="0" bIns="0" rtlCol="0" anchor="ctr"/>
           <a:lstStyle/>
           <a:p>
-            <a:pPr algn="l" indent="0" marL="0">
-              <a:buNone/>
-            </a:pPr>
-            <a:r>
-              <a:rPr lang="en-US" sz="1300" b="1" spc="250" kern="0" dirty="0">
-                <a:solidFill>
-                  <a:srgbClr val="F2C9D9"/>
-                </a:solidFill>
-                <a:latin typeface="Calibri" pitchFamily="34" charset="0"/>
-                <a:ea typeface="Calibri" pitchFamily="34" charset="-122"/>
-                <a:cs typeface="Calibri" pitchFamily="34" charset="-120"/>
-              </a:rPr>
-              <a:t>PART THREE</a:t>
-            </a:r>
-            <a:endParaRPr lang="en-US" sz="1300" dirty="0"/>
-          </a:p>
-        </p:txBody>
-      </p:sp>
-      <p:sp>
-        <p:nvSpPr>
-          <p:cNvPr id="6" name="Text 4"/>
-          <p:cNvSpPr/>
-          <p:nvPr/>
-        </p:nvSpPr>
-        <p:spPr>
-          <a:xfrm>
-            <a:off x="566928" y="3611880"/>
-            <a:ext cx="10607040" cy="1463040"/>
-          </a:xfrm>
-          <a:prstGeom prst="rect">
-            <a:avLst/>
-          </a:prstGeom>
-          <a:noFill/>
-          <a:ln/>
-        </p:spPr>
-        <p:txBody>
-          <a:bodyPr wrap="square" lIns="0" tIns="0" rIns="0" bIns="0" rtlCol="0" anchor="t"/>
-          <a:lstStyle/>
-          <a:p>
-            <a:pPr algn="l" indent="0" marL="0">
-              <a:buNone/>
-            </a:pPr>
-            <a:r>
-              <a:rPr lang="en-US" sz="3800" b="1" dirty="0">
-                <a:solidFill>
-                  <a:srgbClr val="FFFFFF"/>
-                </a:solidFill>
-                <a:latin typeface="Calibri" pitchFamily="34" charset="0"/>
-                <a:ea typeface="Calibri" pitchFamily="34" charset="-122"/>
-                <a:cs typeface="Calibri" pitchFamily="34" charset="-120"/>
-              </a:rPr>
-              <a:t>Cases &amp; Board Review</a:t>
-            </a:r>
-            <a:endParaRPr lang="en-US" sz="3800" dirty="0"/>
+            <a:pPr algn="r" indent="0" marL="0">
+              <a:buNone/>
+            </a:pPr>
+            <a:r>
+              <a:rPr lang="en-US" sz="850" dirty="0">
+                <a:solidFill>
+                  <a:srgbClr val="9AA8B4"/>
+                </a:solidFill>
+                <a:latin typeface="Calibri" pitchFamily="34" charset="0"/>
+                <a:ea typeface="Calibri" pitchFamily="34" charset="-122"/>
+                <a:cs typeface="Calibri" pitchFamily="34" charset="-120"/>
+              </a:rPr>
+              <a:t>CP Lecture Series</a:t>
+            </a:r>
+            <a:pPr algn="r" indent="0" marL="0">
+              <a:buNone/>
+            </a:pPr>
+            <a:r>
+              <a:rPr lang="en-US" sz="850" dirty="0">
+                <a:solidFill>
+                  <a:srgbClr val="DCE4EC"/>
+                </a:solidFill>
+                <a:latin typeface="Calibri" pitchFamily="34" charset="0"/>
+                <a:ea typeface="Calibri" pitchFamily="34" charset="-122"/>
+                <a:cs typeface="Calibri" pitchFamily="34" charset="-120"/>
+              </a:rPr>
+              <a:t>   ·   </a:t>
+            </a:r>
+            <a:pPr algn="r" indent="0" marL="0">
+              <a:buNone/>
+            </a:pPr>
+            <a:r>
+              <a:rPr lang="en-US" sz="850" b="1" dirty="0">
+                <a:solidFill>
+                  <a:srgbClr val="6A1B9A"/>
+                </a:solidFill>
+                <a:latin typeface="Calibri" pitchFamily="34" charset="0"/>
+                <a:ea typeface="Calibri" pitchFamily="34" charset="-122"/>
+                <a:cs typeface="Calibri" pitchFamily="34" charset="-120"/>
+              </a:rPr>
+              <a:t>9</a:t>
+            </a:r>
+            <a:endParaRPr lang="en-US" sz="850" dirty="0"/>
           </a:p>
         </p:txBody>
       </p:sp>
@@ -3858,7 +4318,7 @@
                 <a:ea typeface="Calibri" pitchFamily="34" charset="-122"/>
                 <a:cs typeface="Calibri" pitchFamily="34" charset="-120"/>
               </a:rPr>
-              <a:t>IMMUNOLOGY &amp; SEROLOGY   ·   CASE 1</a:t>
+              <a:t>IMMUNOLOGY &amp; SEROLOGY   ·   PERFORMANCE</a:t>
             </a:r>
             <a:endParaRPr lang="en-US" sz="1100" dirty="0"/>
           </a:p>
@@ -3897,7 +4357,7 @@
                 <a:ea typeface="Calibri" pitchFamily="34" charset="-122"/>
                 <a:cs typeface="Calibri" pitchFamily="34" charset="-120"/>
               </a:rPr>
-              <a:t>Case 1</a:t>
+              <a:t>Predictive Value &amp; Prevalence</a:t>
             </a:r>
             <a:endParaRPr lang="en-US" sz="3000" dirty="0"/>
           </a:p>
@@ -3912,11 +4372,11 @@
         <p:spPr>
           <a:xfrm>
             <a:off x="566928" y="1517904"/>
-            <a:ext cx="11057839" cy="2788920"/>
+            <a:ext cx="5346040" cy="4114800"/>
           </a:xfrm>
           <a:prstGeom prst="roundRect">
             <a:avLst>
-              <a:gd name="adj" fmla="val 2951"/>
+              <a:gd name="adj" fmla="val 2000"/>
             </a:avLst>
           </a:prstGeom>
           <a:solidFill>
@@ -3940,8 +4400,8 @@
         </p:nvSpPr>
         <p:spPr>
           <a:xfrm>
-            <a:off x="841248" y="1700784"/>
-            <a:ext cx="5486400" cy="292608"/>
+            <a:off x="804672" y="1682496"/>
+            <a:ext cx="4888840" cy="274320"/>
           </a:xfrm>
           <a:prstGeom prst="rect">
             <a:avLst/>
@@ -3957,17 +4417,17 @@
               <a:buNone/>
             </a:pPr>
             <a:r>
-              <a:rPr lang="en-US" sz="1100" b="1" spc="150" kern="0" dirty="0">
-                <a:solidFill>
-                  <a:srgbClr val="6A1B9A"/>
-                </a:solidFill>
-                <a:latin typeface="Calibri" pitchFamily="34" charset="0"/>
-                <a:ea typeface="Calibri" pitchFamily="34" charset="-122"/>
-                <a:cs typeface="Calibri" pitchFamily="34" charset="-120"/>
-              </a:rPr>
-              <a:t>CLINICAL VIGNETTE</a:t>
-            </a:r>
-            <a:endParaRPr lang="en-US" sz="1100" dirty="0"/>
+              <a:rPr lang="en-US" sz="1200" b="1" spc="100" kern="0" dirty="0">
+                <a:solidFill>
+                  <a:srgbClr val="4A1269"/>
+                </a:solidFill>
+                <a:latin typeface="Calibri" pitchFamily="34" charset="0"/>
+                <a:ea typeface="Calibri" pitchFamily="34" charset="-122"/>
+                <a:cs typeface="Calibri" pitchFamily="34" charset="-120"/>
+              </a:rPr>
+              <a:t>THE CORE RELATIONSHIP</a:t>
+            </a:r>
+            <a:endParaRPr lang="en-US" sz="1200" dirty="0"/>
           </a:p>
         </p:txBody>
       </p:sp>
@@ -3979,8 +4439,8 @@
         </p:nvSpPr>
         <p:spPr>
           <a:xfrm>
-            <a:off x="841248" y="2029968"/>
-            <a:ext cx="10509199" cy="2148840"/>
+            <a:off x="804672" y="2029968"/>
+            <a:ext cx="4870552" cy="3474720"/>
           </a:xfrm>
           <a:prstGeom prst="rect">
             <a:avLst/>
@@ -3992,14 +4452,36 @@
           <a:bodyPr wrap="square" lIns="0" tIns="0" rIns="0" bIns="0" rtlCol="0" anchor="t"/>
           <a:lstStyle/>
           <a:p>
-            <a:pPr algn="l" indent="0" marL="0">
-              <a:lnSpc>
-                <a:spcPct val="108000"/>
-              </a:lnSpc>
-              <a:buNone/>
-            </a:pPr>
-            <a:r>
-              <a:rPr lang="en-US" sz="1450" dirty="0">
+            <a:pPr algn="l" marL="177800" indent="-177800">
+              <a:spcAft>
+                <a:spcPts val="900"/>
+              </a:spcAft>
+              <a:buSzPct val="100000"/>
+              <a:buChar char="•"/>
+            </a:pPr>
+            <a:r>
+              <a:rPr lang="en-US" sz="1250" b="1" dirty="0">
+                <a:solidFill>
+                  <a:srgbClr val="1B2A38"/>
+                </a:solidFill>
+                <a:latin typeface="Calibri" pitchFamily="34" charset="0"/>
+                <a:ea typeface="Calibri" pitchFamily="34" charset="-122"/>
+                <a:cs typeface="Calibri" pitchFamily="34" charset="-120"/>
+              </a:rPr>
+              <a:t>Sensitivity/specificity are assay properties; predictive values depend on prevalence.</a:t>
+            </a:r>
+            <a:endParaRPr lang="en-US" sz="1250" dirty="0"/>
+          </a:p>
+          <a:p>
+            <a:pPr algn="l" marL="177800" indent="-177800">
+              <a:spcAft>
+                <a:spcPts val="900"/>
+              </a:spcAft>
+              <a:buSzPct val="100000"/>
+              <a:buChar char="•"/>
+            </a:pPr>
+            <a:r>
+              <a:rPr lang="en-US" sz="1250" dirty="0">
                 <a:solidFill>
                   <a:srgbClr val="33444F"/>
                 </a:solidFill>
@@ -4007,9 +4489,51 @@
                 <a:ea typeface="Calibri" pitchFamily="34" charset="-122"/>
                 <a:cs typeface="Calibri" pitchFamily="34" charset="-120"/>
               </a:rPr>
-              <a:t>A healthy 25-year-old is screened for a rare disease (prevalence ~1 in 10,000) with a test that is 99% sensitive and 99% specific. The result is positive.</a:t>
-            </a:r>
-            <a:endParaRPr lang="en-US" sz="1450" dirty="0"/>
+              <a:t>In low-prevalence screening, even good tests yield many false positives (low PPV).</a:t>
+            </a:r>
+            <a:endParaRPr lang="en-US" sz="1250" dirty="0"/>
+          </a:p>
+          <a:p>
+            <a:pPr algn="l" marL="177800" indent="-177800">
+              <a:spcAft>
+                <a:spcPts val="900"/>
+              </a:spcAft>
+              <a:buSzPct val="100000"/>
+              <a:buChar char="•"/>
+            </a:pPr>
+            <a:r>
+              <a:rPr lang="en-US" sz="1250" dirty="0">
+                <a:solidFill>
+                  <a:srgbClr val="33444F"/>
+                </a:solidFill>
+                <a:latin typeface="Calibri" pitchFamily="34" charset="0"/>
+                <a:ea typeface="Calibri" pitchFamily="34" charset="-122"/>
+                <a:cs typeface="Calibri" pitchFamily="34" charset="-120"/>
+              </a:rPr>
+              <a:t>Confirm screen-positives with a more specific method.</a:t>
+            </a:r>
+            <a:endParaRPr lang="en-US" sz="1250" dirty="0"/>
+          </a:p>
+          <a:p>
+            <a:pPr algn="l" marL="177800" indent="-177800">
+              <a:spcAft>
+                <a:spcPts val="900"/>
+              </a:spcAft>
+              <a:buSzPct val="100000"/>
+              <a:buChar char="•"/>
+            </a:pPr>
+            <a:r>
+              <a:rPr lang="en-US" sz="1250" dirty="0">
+                <a:solidFill>
+                  <a:srgbClr val="33444F"/>
+                </a:solidFill>
+                <a:latin typeface="Calibri" pitchFamily="34" charset="0"/>
+                <a:ea typeface="Calibri" pitchFamily="34" charset="-122"/>
+                <a:cs typeface="Calibri" pitchFamily="34" charset="-120"/>
+              </a:rPr>
+              <a:t>Choose cutoffs by the clinical purpose (screen vs confirm).</a:t>
+            </a:r>
+            <a:endParaRPr lang="en-US" sz="1250" dirty="0"/>
           </a:p>
         </p:txBody>
       </p:sp>
@@ -4021,16 +4545,16 @@
         </p:nvSpPr>
         <p:spPr>
           <a:xfrm>
-            <a:off x="566928" y="4553712"/>
-            <a:ext cx="11057839" cy="1325880"/>
+            <a:off x="6278728" y="1517904"/>
+            <a:ext cx="5346040" cy="4114800"/>
           </a:xfrm>
           <a:prstGeom prst="roundRect">
             <a:avLst>
-              <a:gd name="adj" fmla="val 6207"/>
+              <a:gd name="adj" fmla="val 2000"/>
             </a:avLst>
           </a:prstGeom>
           <a:solidFill>
-            <a:srgbClr val="0E3A5F"/>
+            <a:srgbClr val="F1E9F7"/>
           </a:solidFill>
           <a:ln/>
           <a:effectLst>
@@ -4050,8 +4574,8 @@
         </p:nvSpPr>
         <p:spPr>
           <a:xfrm>
-            <a:off x="822960" y="4681728"/>
-            <a:ext cx="640080" cy="960120"/>
+            <a:off x="6516472" y="1682496"/>
+            <a:ext cx="4888840" cy="274320"/>
           </a:xfrm>
           <a:prstGeom prst="rect">
             <a:avLst/>
@@ -4063,21 +4587,21 @@
           <a:bodyPr wrap="square" lIns="0" tIns="0" rIns="0" bIns="0" rtlCol="0" anchor="ctr"/>
           <a:lstStyle/>
           <a:p>
-            <a:pPr algn="ctr" indent="0" marL="0">
-              <a:buNone/>
-            </a:pPr>
-            <a:r>
-              <a:rPr lang="en-US" sz="4000" b="1" dirty="0">
-                <a:solidFill>
-                  <a:srgbClr val="6A1B9A"/>
-                </a:solidFill>
-                <a:latin typeface="Calibri" pitchFamily="34" charset="0"/>
-                <a:ea typeface="Calibri" pitchFamily="34" charset="-122"/>
-                <a:cs typeface="Calibri" pitchFamily="34" charset="-120"/>
-              </a:rPr>
-              <a:t>?</a:t>
-            </a:r>
-            <a:endParaRPr lang="en-US" sz="4000" dirty="0"/>
+            <a:pPr indent="0" marL="0">
+              <a:buNone/>
+            </a:pPr>
+            <a:r>
+              <a:rPr lang="en-US" sz="1200" b="1" spc="100" kern="0" dirty="0">
+                <a:solidFill>
+                  <a:srgbClr val="4A1269"/>
+                </a:solidFill>
+                <a:latin typeface="Calibri" pitchFamily="34" charset="0"/>
+                <a:ea typeface="Calibri" pitchFamily="34" charset="-122"/>
+                <a:cs typeface="Calibri" pitchFamily="34" charset="-120"/>
+              </a:rPr>
+              <a:t>BORDERLINE &amp; DISCORDANT</a:t>
+            </a:r>
+            <a:endParaRPr lang="en-US" sz="1200" dirty="0"/>
           </a:p>
         </p:txBody>
       </p:sp>
@@ -4089,34 +4613,101 @@
         </p:nvSpPr>
         <p:spPr>
           <a:xfrm>
-            <a:off x="1618488" y="4553712"/>
-            <a:ext cx="9686239" cy="1325880"/>
-          </a:xfrm>
-          <a:prstGeom prst="rect">
-            <a:avLst/>
-          </a:prstGeom>
-          <a:noFill/>
-          <a:ln/>
-        </p:spPr>
-        <p:txBody>
-          <a:bodyPr wrap="square" lIns="0" tIns="0" rIns="0" bIns="0" rtlCol="0" anchor="ctr"/>
-          <a:lstStyle/>
-          <a:p>
-            <a:pPr algn="l" indent="0" marL="0">
-              <a:buNone/>
-            </a:pPr>
-            <a:r>
-              <a:rPr lang="en-US" sz="1500" b="1" dirty="0">
-                <a:solidFill>
-                  <a:srgbClr val="FFFFFF"/>
-                </a:solidFill>
-                <a:latin typeface="Calibri" pitchFamily="34" charset="0"/>
-                <a:ea typeface="Calibri" pitchFamily="34" charset="-122"/>
-                <a:cs typeface="Calibri" pitchFamily="34" charset="-120"/>
-              </a:rPr>
-              <a:t>How likely is true disease, and what does this teach about screening?</a:t>
-            </a:r>
-            <a:endParaRPr lang="en-US" sz="1500" dirty="0"/>
+            <a:off x="6516472" y="2029968"/>
+            <a:ext cx="4870552" cy="3474720"/>
+          </a:xfrm>
+          <a:prstGeom prst="rect">
+            <a:avLst/>
+          </a:prstGeom>
+          <a:noFill/>
+          <a:ln/>
+        </p:spPr>
+        <p:txBody>
+          <a:bodyPr wrap="square" lIns="0" tIns="0" rIns="0" bIns="0" rtlCol="0" anchor="t"/>
+          <a:lstStyle/>
+          <a:p>
+            <a:pPr algn="l" marL="177800" indent="-177800">
+              <a:spcAft>
+                <a:spcPts val="900"/>
+              </a:spcAft>
+              <a:buSzPct val="100000"/>
+              <a:buChar char="•"/>
+            </a:pPr>
+            <a:r>
+              <a:rPr lang="en-US" sz="1250" b="1" dirty="0">
+                <a:solidFill>
+                  <a:srgbClr val="1B2A38"/>
+                </a:solidFill>
+                <a:latin typeface="Calibri" pitchFamily="34" charset="0"/>
+                <a:ea typeface="Calibri" pitchFamily="34" charset="-122"/>
+                <a:cs typeface="Calibri" pitchFamily="34" charset="-120"/>
+              </a:rPr>
+              <a:t>Equivocal results warrant repeat, alternate method, or follow-up testing.</a:t>
+            </a:r>
+            <a:endParaRPr lang="en-US" sz="1250" dirty="0"/>
+          </a:p>
+          <a:p>
+            <a:pPr algn="l" marL="177800" indent="-177800">
+              <a:spcAft>
+                <a:spcPts val="900"/>
+              </a:spcAft>
+              <a:buSzPct val="100000"/>
+              <a:buChar char="•"/>
+            </a:pPr>
+            <a:r>
+              <a:rPr lang="en-US" sz="1250" dirty="0">
+                <a:solidFill>
+                  <a:srgbClr val="33444F"/>
+                </a:solidFill>
+                <a:latin typeface="Calibri" pitchFamily="34" charset="0"/>
+                <a:ea typeface="Calibri" pitchFamily="34" charset="-122"/>
+                <a:cs typeface="Calibri" pitchFamily="34" charset="-120"/>
+              </a:rPr>
+              <a:t>Discordant results suggest interference or a pre-analytic issue.</a:t>
+            </a:r>
+            <a:endParaRPr lang="en-US" sz="1250" dirty="0"/>
+          </a:p>
+          <a:p>
+            <a:pPr algn="l" marL="177800" indent="-177800">
+              <a:spcAft>
+                <a:spcPts val="900"/>
+              </a:spcAft>
+              <a:buSzPct val="100000"/>
+              <a:buChar char="•"/>
+            </a:pPr>
+            <a:r>
+              <a:rPr lang="en-US" sz="1250" dirty="0">
+                <a:solidFill>
+                  <a:srgbClr val="33444F"/>
+                </a:solidFill>
+                <a:latin typeface="Calibri" pitchFamily="34" charset="0"/>
+                <a:ea typeface="Calibri" pitchFamily="34" charset="-122"/>
+                <a:cs typeface="Calibri" pitchFamily="34" charset="-120"/>
+              </a:rPr>
+              <a:t>Report uncertainty rather than forcing a binary call.</a:t>
+            </a:r>
+            <a:endParaRPr lang="en-US" sz="1250" dirty="0"/>
+          </a:p>
+          <a:p>
+            <a:pPr algn="l" marL="177800" indent="-177800">
+              <a:spcAft>
+                <a:spcPts val="900"/>
+              </a:spcAft>
+              <a:buSzPct val="100000"/>
+              <a:buChar char="•"/>
+            </a:pPr>
+            <a:r>
+              <a:rPr lang="en-US" sz="1250" dirty="0">
+                <a:solidFill>
+                  <a:srgbClr val="33444F"/>
+                </a:solidFill>
+                <a:latin typeface="Calibri" pitchFamily="34" charset="0"/>
+                <a:ea typeface="Calibri" pitchFamily="34" charset="-122"/>
+                <a:cs typeface="Calibri" pitchFamily="34" charset="-120"/>
+              </a:rPr>
+              <a:t>Communicate caveats to the clinician.</a:t>
+            </a:r>
+            <a:endParaRPr lang="en-US" sz="1250" dirty="0"/>
           </a:p>
         </p:txBody>
       </p:sp>
@@ -4220,7 +4811,7 @@
                 <a:ea typeface="Calibri" pitchFamily="34" charset="-122"/>
                 <a:cs typeface="Calibri" pitchFamily="34" charset="-120"/>
               </a:rPr>
-              <a:t>9</a:t>
+              <a:t>10</a:t>
             </a:r>
             <a:endParaRPr lang="en-US" sz="850" dirty="0"/>
           </a:p>
@@ -4240,7 +4831,7 @@
     <p:bg>
       <p:bgPr>
         <a:solidFill>
-          <a:srgbClr val="FFFFFF"/>
+          <a:srgbClr val="4A1269"/>
         </a:solidFill>
       </p:bgPr>
     </p:bg>
@@ -4260,14 +4851,58 @@
       </p:grpSpPr>
       <p:sp>
         <p:nvSpPr>
-          <p:cNvPr id="2" name="Text 0"/>
-          <p:cNvSpPr/>
-          <p:nvPr/>
-        </p:nvSpPr>
-        <p:spPr>
-          <a:xfrm>
-            <a:off x="566928" y="329184"/>
-            <a:ext cx="10515600" cy="310896"/>
+          <p:cNvPr id="2" name="Shape 0"/>
+          <p:cNvSpPr/>
+          <p:nvPr/>
+        </p:nvSpPr>
+        <p:spPr>
+          <a:xfrm>
+            <a:off x="9509760" y="-1280160"/>
+            <a:ext cx="4754880" cy="4754880"/>
+          </a:xfrm>
+          <a:prstGeom prst="ellipse">
+            <a:avLst/>
+          </a:prstGeom>
+          <a:solidFill>
+            <a:srgbClr val="FFFFFF">
+              <a:alpha val="8000"/>
+            </a:srgbClr>
+          </a:solidFill>
+          <a:ln/>
+        </p:spPr>
+      </p:sp>
+      <p:sp>
+        <p:nvSpPr>
+          <p:cNvPr id="3" name="Shape 1"/>
+          <p:cNvSpPr/>
+          <p:nvPr/>
+        </p:nvSpPr>
+        <p:spPr>
+          <a:xfrm>
+            <a:off x="10607040" y="3931920"/>
+            <a:ext cx="3108960" cy="3108960"/>
+          </a:xfrm>
+          <a:prstGeom prst="ellipse">
+            <a:avLst/>
+          </a:prstGeom>
+          <a:solidFill>
+            <a:srgbClr val="FFFFFF">
+              <a:alpha val="6000"/>
+            </a:srgbClr>
+          </a:solidFill>
+          <a:ln/>
+        </p:spPr>
+      </p:sp>
+      <p:sp>
+        <p:nvSpPr>
+          <p:cNvPr id="4" name="Text 2"/>
+          <p:cNvSpPr/>
+          <p:nvPr/>
+        </p:nvSpPr>
+        <p:spPr>
+          <a:xfrm>
+            <a:off x="566928" y="1783080"/>
+            <a:ext cx="2743200" cy="1463040"/>
           </a:xfrm>
           <a:prstGeom prst="rect">
             <a:avLst/>
@@ -4283,30 +4918,30 @@
               <a:buNone/>
             </a:pPr>
             <a:r>
-              <a:rPr lang="en-US" sz="1100" b="1" spc="150" kern="0" dirty="0">
-                <a:solidFill>
-                  <a:srgbClr val="6A1B9A"/>
-                </a:solidFill>
-                <a:latin typeface="Calibri" pitchFamily="34" charset="0"/>
-                <a:ea typeface="Calibri" pitchFamily="34" charset="-122"/>
-                <a:cs typeface="Calibri" pitchFamily="34" charset="-120"/>
-              </a:rPr>
-              <a:t>IMMUNOLOGY &amp; SEROLOGY   ·   CASE 1  ·  RESOLUTION</a:t>
-            </a:r>
-            <a:endParaRPr lang="en-US" sz="1100" dirty="0"/>
-          </a:p>
-        </p:txBody>
-      </p:sp>
-      <p:sp>
-        <p:nvSpPr>
-          <p:cNvPr id="3" name="Text 1"/>
-          <p:cNvSpPr/>
-          <p:nvPr/>
-        </p:nvSpPr>
-        <p:spPr>
-          <a:xfrm>
-            <a:off x="566928" y="713232"/>
-            <a:ext cx="11064240" cy="749808"/>
+              <a:rPr lang="en-US" sz="6400" b="1" dirty="0">
+                <a:solidFill>
+                  <a:srgbClr val="F1E8F7"/>
+                </a:solidFill>
+                <a:latin typeface="Calibri" pitchFamily="34" charset="0"/>
+                <a:ea typeface="Calibri" pitchFamily="34" charset="-122"/>
+                <a:cs typeface="Calibri" pitchFamily="34" charset="-120"/>
+              </a:rPr>
+              <a:t>03</a:t>
+            </a:r>
+            <a:endParaRPr lang="en-US" sz="6400" dirty="0"/>
+          </a:p>
+        </p:txBody>
+      </p:sp>
+      <p:sp>
+        <p:nvSpPr>
+          <p:cNvPr id="5" name="Text 3"/>
+          <p:cNvSpPr/>
+          <p:nvPr/>
+        </p:nvSpPr>
+        <p:spPr>
+          <a:xfrm>
+            <a:off x="566928" y="3246120"/>
+            <a:ext cx="10058400" cy="365760"/>
           </a:xfrm>
           <a:prstGeom prst="rect">
             <a:avLst/>
@@ -4322,30 +4957,30 @@
               <a:buNone/>
             </a:pPr>
             <a:r>
-              <a:rPr lang="en-US" sz="3000" b="1" dirty="0">
-                <a:solidFill>
-                  <a:srgbClr val="0E3A5F"/>
-                </a:solidFill>
-                <a:latin typeface="Calibri" pitchFamily="34" charset="0"/>
-                <a:ea typeface="Calibri" pitchFamily="34" charset="-122"/>
-                <a:cs typeface="Calibri" pitchFamily="34" charset="-120"/>
-              </a:rPr>
-              <a:t>Case 1: Low Prevalence, Low PPV</a:t>
-            </a:r>
-            <a:endParaRPr lang="en-US" sz="3000" dirty="0"/>
-          </a:p>
-        </p:txBody>
-      </p:sp>
-      <p:sp>
-        <p:nvSpPr>
-          <p:cNvPr id="4" name="Text 2"/>
-          <p:cNvSpPr/>
-          <p:nvPr/>
-        </p:nvSpPr>
-        <p:spPr>
-          <a:xfrm>
-            <a:off x="566928" y="1554480"/>
-            <a:ext cx="6413547" cy="4023360"/>
+              <a:rPr lang="en-US" sz="1300" b="1" spc="250" kern="0" dirty="0">
+                <a:solidFill>
+                  <a:srgbClr val="F2C9D9"/>
+                </a:solidFill>
+                <a:latin typeface="Calibri" pitchFamily="34" charset="0"/>
+                <a:ea typeface="Calibri" pitchFamily="34" charset="-122"/>
+                <a:cs typeface="Calibri" pitchFamily="34" charset="-120"/>
+              </a:rPr>
+              <a:t>PART THREE</a:t>
+            </a:r>
+            <a:endParaRPr lang="en-US" sz="1300" dirty="0"/>
+          </a:p>
+        </p:txBody>
+      </p:sp>
+      <p:sp>
+        <p:nvSpPr>
+          <p:cNvPr id="6" name="Text 4"/>
+          <p:cNvSpPr/>
+          <p:nvPr/>
+        </p:nvSpPr>
+        <p:spPr>
+          <a:xfrm>
+            <a:off x="566928" y="3611880"/>
+            <a:ext cx="10607040" cy="1463040"/>
           </a:xfrm>
           <a:prstGeom prst="rect">
             <a:avLst/>
@@ -4357,304 +4992,21 @@
           <a:bodyPr wrap="square" lIns="0" tIns="0" rIns="0" bIns="0" rtlCol="0" anchor="t"/>
           <a:lstStyle/>
           <a:p>
-            <a:pPr algn="l" marL="177800" indent="-177800">
-              <a:spcAft>
-                <a:spcPts val="900"/>
-              </a:spcAft>
-              <a:buSzPct val="100000"/>
-              <a:buChar char="•"/>
-            </a:pPr>
-            <a:r>
-              <a:rPr lang="en-US" sz="1400" b="1" dirty="0">
-                <a:solidFill>
-                  <a:srgbClr val="1B2A38"/>
-                </a:solidFill>
-                <a:latin typeface="Calibri" pitchFamily="34" charset="0"/>
-                <a:ea typeface="Calibri" pitchFamily="34" charset="-122"/>
-                <a:cs typeface="Calibri" pitchFamily="34" charset="-120"/>
-              </a:rPr>
-              <a:t>Despite excellent sensitivity/specificity, the PPV is very low at such low prevalence — most positives are false.</a:t>
-            </a:r>
-            <a:endParaRPr lang="en-US" sz="1400" dirty="0"/>
-          </a:p>
-          <a:p>
-            <a:pPr algn="l" marL="177800" indent="-177800">
-              <a:spcAft>
-                <a:spcPts val="900"/>
-              </a:spcAft>
-              <a:buSzPct val="100000"/>
-              <a:buChar char="•"/>
-            </a:pPr>
-            <a:r>
-              <a:rPr lang="en-US" sz="1400" dirty="0">
-                <a:solidFill>
-                  <a:srgbClr val="33444F"/>
-                </a:solidFill>
-                <a:latin typeface="Calibri" pitchFamily="34" charset="0"/>
-                <a:ea typeface="Calibri" pitchFamily="34" charset="-122"/>
-                <a:cs typeface="Calibri" pitchFamily="34" charset="-120"/>
-              </a:rPr>
-              <a:t>Approximately: of 10,000 people, ~1 true case and ~100 false positives → PPV ~1%.</a:t>
-            </a:r>
-            <a:endParaRPr lang="en-US" sz="1400" dirty="0"/>
-          </a:p>
-          <a:p>
-            <a:pPr algn="l" marL="177800" indent="-177800">
-              <a:spcAft>
-                <a:spcPts val="900"/>
-              </a:spcAft>
-              <a:buSzPct val="100000"/>
-              <a:buChar char="•"/>
-            </a:pPr>
-            <a:r>
-              <a:rPr lang="en-US" sz="1400" dirty="0">
-                <a:solidFill>
-                  <a:srgbClr val="33444F"/>
-                </a:solidFill>
-                <a:latin typeface="Calibri" pitchFamily="34" charset="0"/>
-                <a:ea typeface="Calibri" pitchFamily="34" charset="-122"/>
-                <a:cs typeface="Calibri" pitchFamily="34" charset="-120"/>
-              </a:rPr>
-              <a:t>A positive screen in a low-probability setting demands confirmation before action.</a:t>
-            </a:r>
-            <a:endParaRPr lang="en-US" sz="1400" dirty="0"/>
-          </a:p>
-          <a:p>
-            <a:pPr algn="l" marL="177800" indent="-177800">
-              <a:spcAft>
-                <a:spcPts val="900"/>
-              </a:spcAft>
-              <a:buSzPct val="100000"/>
-              <a:buChar char="•"/>
-            </a:pPr>
-            <a:r>
-              <a:rPr lang="en-US" sz="1400" dirty="0">
-                <a:solidFill>
-                  <a:srgbClr val="33444F"/>
-                </a:solidFill>
-                <a:latin typeface="Calibri" pitchFamily="34" charset="0"/>
-                <a:ea typeface="Calibri" pitchFamily="34" charset="-122"/>
-                <a:cs typeface="Calibri" pitchFamily="34" charset="-120"/>
-              </a:rPr>
-              <a:t>Pretest probability is decisive.</a:t>
-            </a:r>
-            <a:endParaRPr lang="en-US" sz="1400" dirty="0"/>
-          </a:p>
-        </p:txBody>
-      </p:sp>
-      <p:sp>
-        <p:nvSpPr>
-          <p:cNvPr id="5" name="Shape 3"/>
-          <p:cNvSpPr/>
-          <p:nvPr/>
-        </p:nvSpPr>
-        <p:spPr>
-          <a:xfrm>
-            <a:off x="7422788" y="1554480"/>
-            <a:ext cx="4201979" cy="3977640"/>
-          </a:xfrm>
-          <a:prstGeom prst="roundRect">
-            <a:avLst>
-              <a:gd name="adj" fmla="val 2069"/>
-            </a:avLst>
-          </a:prstGeom>
-          <a:solidFill>
-            <a:srgbClr val="F1E8F7"/>
-          </a:solidFill>
-          <a:ln/>
-          <a:effectLst>
-            <a:outerShdw sx="100000" sy="100000" kx="0" ky="0" algn="bl" rotWithShape="0" blurRad="88900" dist="25400" dir="5400000">
-              <a:srgbClr val="22303C">
-                <a:alpha val="12000"/>
-              </a:srgbClr>
-            </a:outerShdw>
-          </a:effectLst>
-        </p:spPr>
-      </p:sp>
-      <p:sp>
-        <p:nvSpPr>
-          <p:cNvPr id="6" name="Text 4"/>
-          <p:cNvSpPr/>
-          <p:nvPr/>
-        </p:nvSpPr>
-        <p:spPr>
-          <a:xfrm>
-            <a:off x="7660532" y="1755648"/>
-            <a:ext cx="3744779" cy="310896"/>
-          </a:xfrm>
-          <a:prstGeom prst="rect">
-            <a:avLst/>
-          </a:prstGeom>
-          <a:noFill/>
-          <a:ln/>
-        </p:spPr>
-        <p:txBody>
-          <a:bodyPr wrap="square" lIns="0" tIns="0" rIns="0" bIns="0" rtlCol="0" anchor="ctr"/>
-          <a:lstStyle/>
-          <a:p>
-            <a:pPr indent="0" marL="0">
-              <a:buNone/>
-            </a:pPr>
-            <a:r>
-              <a:rPr lang="en-US" sz="1100" b="1" spc="140" kern="0" dirty="0">
-                <a:solidFill>
-                  <a:srgbClr val="6A1B9A"/>
-                </a:solidFill>
-                <a:latin typeface="Calibri" pitchFamily="34" charset="0"/>
-                <a:ea typeface="Calibri" pitchFamily="34" charset="-122"/>
-                <a:cs typeface="Calibri" pitchFamily="34" charset="-120"/>
-              </a:rPr>
-              <a:t>TEACHING POINT</a:t>
-            </a:r>
-            <a:endParaRPr lang="en-US" sz="1100" dirty="0"/>
-          </a:p>
-        </p:txBody>
-      </p:sp>
-      <p:sp>
-        <p:nvSpPr>
-          <p:cNvPr id="7" name="Text 5"/>
-          <p:cNvSpPr/>
-          <p:nvPr/>
-        </p:nvSpPr>
-        <p:spPr>
-          <a:xfrm>
-            <a:off x="7660532" y="2121408"/>
-            <a:ext cx="3726491" cy="3291840"/>
-          </a:xfrm>
-          <a:prstGeom prst="rect">
-            <a:avLst/>
-          </a:prstGeom>
-          <a:noFill/>
-          <a:ln/>
-        </p:spPr>
-        <p:txBody>
-          <a:bodyPr wrap="square" lIns="0" tIns="0" rIns="0" bIns="0" rtlCol="0" anchor="t"/>
-          <a:lstStyle/>
-          <a:p>
             <a:pPr algn="l" indent="0" marL="0">
-              <a:lnSpc>
-                <a:spcPct val="110000"/>
-              </a:lnSpc>
-              <a:buNone/>
-            </a:pPr>
-            <a:r>
-              <a:rPr lang="en-US" sz="1350" dirty="0">
-                <a:solidFill>
-                  <a:srgbClr val="33444F"/>
-                </a:solidFill>
-                <a:latin typeface="Calibri" pitchFamily="34" charset="0"/>
-                <a:ea typeface="Calibri" pitchFamily="34" charset="-122"/>
-                <a:cs typeface="Calibri" pitchFamily="34" charset="-120"/>
-              </a:rPr>
-              <a:t>In low-prevalence screening, a positive result is more likely false than true — always confirm and interpret against pretest probability.</a:t>
-            </a:r>
-            <a:endParaRPr lang="en-US" sz="1350" dirty="0"/>
-          </a:p>
-        </p:txBody>
-      </p:sp>
-      <p:sp>
-        <p:nvSpPr>
-          <p:cNvPr id="8" name="Text 6"/>
-          <p:cNvSpPr/>
-          <p:nvPr/>
-        </p:nvSpPr>
-        <p:spPr>
-          <a:xfrm>
-            <a:off x="566928" y="6473952"/>
-            <a:ext cx="7772400" cy="274320"/>
-          </a:xfrm>
-          <a:prstGeom prst="rect">
-            <a:avLst/>
-          </a:prstGeom>
-          <a:noFill/>
-          <a:ln/>
-        </p:spPr>
-        <p:txBody>
-          <a:bodyPr wrap="square" lIns="0" tIns="0" rIns="0" bIns="0" rtlCol="0" anchor="ctr"/>
-          <a:lstStyle/>
-          <a:p>
-            <a:pPr algn="l" indent="0" marL="0">
-              <a:buNone/>
-            </a:pPr>
-            <a:r>
-              <a:rPr lang="en-US" sz="850" dirty="0">
-                <a:solidFill>
-                  <a:srgbClr val="9AA8B4"/>
-                </a:solidFill>
-                <a:latin typeface="Calibri" pitchFamily="34" charset="0"/>
-                <a:ea typeface="Calibri" pitchFamily="34" charset="-122"/>
-                <a:cs typeface="Calibri" pitchFamily="34" charset="-120"/>
-              </a:rPr>
-              <a:t>Makassed General Hospital  ·  Department of Laboratory Medicine</a:t>
-            </a:r>
-            <a:endParaRPr lang="en-US" sz="850" dirty="0"/>
-          </a:p>
-        </p:txBody>
-      </p:sp>
-      <p:sp>
-        <p:nvSpPr>
-          <p:cNvPr id="9" name="Text 7"/>
-          <p:cNvSpPr/>
-          <p:nvPr/>
-        </p:nvSpPr>
-        <p:spPr>
-          <a:xfrm>
-            <a:off x="9814255" y="6473952"/>
-            <a:ext cx="1828800" cy="274320"/>
-          </a:xfrm>
-          <a:prstGeom prst="rect">
-            <a:avLst/>
-          </a:prstGeom>
-          <a:noFill/>
-          <a:ln/>
-        </p:spPr>
-        <p:txBody>
-          <a:bodyPr wrap="square" lIns="0" tIns="0" rIns="0" bIns="0" rtlCol="0" anchor="ctr"/>
-          <a:lstStyle/>
-          <a:p>
-            <a:pPr algn="r" indent="0" marL="0">
-              <a:buNone/>
-            </a:pPr>
-            <a:r>
-              <a:rPr lang="en-US" sz="850" dirty="0">
-                <a:solidFill>
-                  <a:srgbClr val="9AA8B4"/>
-                </a:solidFill>
-                <a:latin typeface="Calibri" pitchFamily="34" charset="0"/>
-                <a:ea typeface="Calibri" pitchFamily="34" charset="-122"/>
-                <a:cs typeface="Calibri" pitchFamily="34" charset="-120"/>
-              </a:rPr>
-              <a:t>CP Lecture Series</a:t>
-            </a:r>
-            <a:pPr algn="r" indent="0" marL="0">
-              <a:buNone/>
-            </a:pPr>
-            <a:r>
-              <a:rPr lang="en-US" sz="850" dirty="0">
-                <a:solidFill>
-                  <a:srgbClr val="DCE4EC"/>
-                </a:solidFill>
-                <a:latin typeface="Calibri" pitchFamily="34" charset="0"/>
-                <a:ea typeface="Calibri" pitchFamily="34" charset="-122"/>
-                <a:cs typeface="Calibri" pitchFamily="34" charset="-120"/>
-              </a:rPr>
-              <a:t>   ·   </a:t>
-            </a:r>
-            <a:pPr algn="r" indent="0" marL="0">
-              <a:buNone/>
-            </a:pPr>
-            <a:r>
-              <a:rPr lang="en-US" sz="850" b="1" dirty="0">
-                <a:solidFill>
-                  <a:srgbClr val="6A1B9A"/>
-                </a:solidFill>
-                <a:latin typeface="Calibri" pitchFamily="34" charset="0"/>
-                <a:ea typeface="Calibri" pitchFamily="34" charset="-122"/>
-                <a:cs typeface="Calibri" pitchFamily="34" charset="-120"/>
-              </a:rPr>
-              <a:t>10</a:t>
-            </a:r>
-            <a:endParaRPr lang="en-US" sz="850" dirty="0"/>
+              <a:buNone/>
+            </a:pPr>
+            <a:r>
+              <a:rPr lang="en-US" sz="3800" b="1" dirty="0">
+                <a:solidFill>
+                  <a:srgbClr val="FFFFFF"/>
+                </a:solidFill>
+                <a:latin typeface="Calibri" pitchFamily="34" charset="0"/>
+                <a:ea typeface="Calibri" pitchFamily="34" charset="-122"/>
+                <a:cs typeface="Calibri" pitchFamily="34" charset="-120"/>
+              </a:rPr>
+              <a:t>Cases &amp; Board Review</a:t>
+            </a:r>
+            <a:endParaRPr lang="en-US" sz="3800" dirty="0"/>
           </a:p>
         </p:txBody>
       </p:sp>
@@ -4723,7 +5075,7 @@
                 <a:ea typeface="Calibri" pitchFamily="34" charset="-122"/>
                 <a:cs typeface="Calibri" pitchFamily="34" charset="-120"/>
               </a:rPr>
-              <a:t>IMMUNOLOGY &amp; SEROLOGY   ·   CASE 2</a:t>
+              <a:t>IMMUNOLOGY &amp; SEROLOGY   ·   CASE 1</a:t>
             </a:r>
             <a:endParaRPr lang="en-US" sz="1100" dirty="0"/>
           </a:p>
@@ -4762,7 +5114,7 @@
                 <a:ea typeface="Calibri" pitchFamily="34" charset="-122"/>
                 <a:cs typeface="Calibri" pitchFamily="34" charset="-120"/>
               </a:rPr>
-              <a:t>Case 2</a:t>
+              <a:t>Case 1</a:t>
             </a:r>
             <a:endParaRPr lang="en-US" sz="3000" dirty="0"/>
           </a:p>
@@ -4872,7 +5224,7 @@
                 <a:ea typeface="Calibri" pitchFamily="34" charset="-122"/>
                 <a:cs typeface="Calibri" pitchFamily="34" charset="-120"/>
               </a:rPr>
-              <a:t>A non-pregnant woman has a positive qualitative hCG by one immunoassay but negative urine hCG and no clinical correlate. Serial dilution is non-linear; a second platform is negative.</a:t>
+              <a:t>A patient with a large tumor has a surprisingly low tumor-marker level that does not fit the clinical picture; on dilution the value rises markedly.</a:t>
             </a:r>
             <a:endParaRPr lang="en-US" sz="1450" dirty="0"/>
           </a:p>
@@ -4979,7 +5331,7 @@
                 <a:ea typeface="Calibri" pitchFamily="34" charset="-122"/>
                 <a:cs typeface="Calibri" pitchFamily="34" charset="-120"/>
               </a:rPr>
-              <a:t>What is the interference and how was it confirmed?</a:t>
+              <a:t>What artifact explains this, and how is it confirmed?</a:t>
             </a:r>
             <a:endParaRPr lang="en-US" sz="1500" dirty="0"/>
           </a:p>
@@ -5156,7 +5508,7 @@
                 <a:ea typeface="Calibri" pitchFamily="34" charset="-122"/>
                 <a:cs typeface="Calibri" pitchFamily="34" charset="-120"/>
               </a:rPr>
-              <a:t>IMMUNOLOGY &amp; SEROLOGY   ·   CASE 2  ·  RESOLUTION</a:t>
+              <a:t>IMMUNOLOGY &amp; SEROLOGY   ·   CASE 1  ·  RESOLUTION</a:t>
             </a:r>
             <a:endParaRPr lang="en-US" sz="1100" dirty="0"/>
           </a:p>
@@ -5195,7 +5547,7 @@
                 <a:ea typeface="Calibri" pitchFamily="34" charset="-122"/>
                 <a:cs typeface="Calibri" pitchFamily="34" charset="-120"/>
               </a:rPr>
-              <a:t>Case 2: Heterophile Interference</a:t>
+              <a:t>Case 1: High-Dose Hook Effect</a:t>
             </a:r>
             <a:endParaRPr lang="en-US" sz="3000" dirty="0"/>
           </a:p>
@@ -5238,7 +5590,7 @@
                 <a:ea typeface="Calibri" pitchFamily="34" charset="-122"/>
                 <a:cs typeface="Calibri" pitchFamily="34" charset="-120"/>
               </a:rPr>
-              <a:t>Heterophile antibodies produced a false-positive serum hCG.</a:t>
+              <a:t>Extremely high analyte saturated both antibodies, producing a falsely low result (hook effect).</a:t>
             </a:r>
             <a:endParaRPr lang="en-US" sz="1400" dirty="0"/>
           </a:p>
@@ -5259,7 +5611,7 @@
                 <a:ea typeface="Calibri" pitchFamily="34" charset="-122"/>
                 <a:cs typeface="Calibri" pitchFamily="34" charset="-120"/>
               </a:rPr>
-              <a:t>Non-linearity on dilution is a classic clue.</a:t>
+              <a:t>Serial dilution unmasks the true high concentration.</a:t>
             </a:r>
             <a:endParaRPr lang="en-US" sz="1400" dirty="0"/>
           </a:p>
@@ -5280,7 +5632,7 @@
                 <a:ea typeface="Calibri" pitchFamily="34" charset="-122"/>
                 <a:cs typeface="Calibri" pitchFamily="34" charset="-120"/>
               </a:rPr>
-              <a:t>Urine (which excludes most heterophiles) negative + a negative alternative platform confirm the artifact.</a:t>
+              <a:t>Occurs in one-step sandwich assays.</a:t>
             </a:r>
             <a:endParaRPr lang="en-US" sz="1400" dirty="0"/>
           </a:p>
@@ -5301,7 +5653,7 @@
                 <a:ea typeface="Calibri" pitchFamily="34" charset="-122"/>
                 <a:cs typeface="Calibri" pitchFamily="34" charset="-120"/>
               </a:rPr>
-              <a:t>Recognizing this avoids unnecessary, harmful interventions.</a:t>
+              <a:t>Suspect it when a low value contradicts a high clinical suspicion.</a:t>
             </a:r>
             <a:endParaRPr lang="en-US" sz="1400" dirty="0"/>
           </a:p>
@@ -5411,7 +5763,7 @@
                 <a:ea typeface="Calibri" pitchFamily="34" charset="-122"/>
                 <a:cs typeface="Calibri" pitchFamily="34" charset="-120"/>
               </a:rPr>
-              <a:t>Discordant results, non-linear dilution, and a negative orthogonal method point to heterophile interference — do not act on the false positive.</a:t>
+              <a:t>When a sandwich-assay result is implausibly low for the clinical context, dilute the sample to exclude the hook effect.</a:t>
             </a:r>
             <a:endParaRPr lang="en-US" sz="1350" dirty="0"/>
           </a:p>
@@ -5588,7 +5940,7 @@
                 <a:ea typeface="Calibri" pitchFamily="34" charset="-122"/>
                 <a:cs typeface="Calibri" pitchFamily="34" charset="-120"/>
               </a:rPr>
-              <a:t>IMMUNOLOGY &amp; SEROLOGY   ·   BOARD REVIEW  ·  Q1</a:t>
+              <a:t>IMMUNOLOGY &amp; SEROLOGY   ·   CASE 2</a:t>
             </a:r>
             <a:endParaRPr lang="en-US" sz="1100" dirty="0"/>
           </a:p>
@@ -5619,7 +5971,7 @@
               <a:buNone/>
             </a:pPr>
             <a:r>
-              <a:rPr lang="en-US" sz="2600" b="1" dirty="0">
+              <a:rPr lang="en-US" sz="3000" b="1" dirty="0">
                 <a:solidFill>
                   <a:srgbClr val="0E3A5F"/>
                 </a:solidFill>
@@ -5627,190 +5979,26 @@
                 <a:ea typeface="Calibri" pitchFamily="34" charset="-122"/>
                 <a:cs typeface="Calibri" pitchFamily="34" charset="-120"/>
               </a:rPr>
-              <a:t>Board-Style Review</a:t>
-            </a:r>
-            <a:endParaRPr lang="en-US" sz="2600" dirty="0"/>
-          </a:p>
-        </p:txBody>
-      </p:sp>
-      <p:sp>
-        <p:nvSpPr>
-          <p:cNvPr id="4" name="Text 2"/>
-          <p:cNvSpPr/>
-          <p:nvPr/>
-        </p:nvSpPr>
-        <p:spPr>
-          <a:xfrm>
-            <a:off x="566928" y="1417320"/>
-            <a:ext cx="11057839" cy="914400"/>
-          </a:xfrm>
-          <a:prstGeom prst="rect">
-            <a:avLst/>
-          </a:prstGeom>
-          <a:noFill/>
-          <a:ln/>
-        </p:spPr>
-        <p:txBody>
-          <a:bodyPr wrap="square" lIns="0" tIns="0" rIns="0" bIns="0" rtlCol="0" anchor="t"/>
-          <a:lstStyle/>
-          <a:p>
-            <a:pPr algn="l" indent="0" marL="0">
-              <a:lnSpc>
-                <a:spcPct val="105000"/>
-              </a:lnSpc>
-              <a:buNone/>
-            </a:pPr>
-            <a:r>
-              <a:rPr lang="en-US" sz="1450" b="1" dirty="0">
-                <a:solidFill>
-                  <a:srgbClr val="1B2A38"/>
-                </a:solidFill>
-                <a:latin typeface="Calibri" pitchFamily="34" charset="0"/>
-                <a:ea typeface="Calibri" pitchFamily="34" charset="-122"/>
-                <a:cs typeface="Calibri" pitchFamily="34" charset="-120"/>
-              </a:rPr>
-              <a:t>A highly SENSITIVE test is most useful clinically to:</a:t>
-            </a:r>
-            <a:endParaRPr lang="en-US" sz="1450" dirty="0"/>
-          </a:p>
-        </p:txBody>
-      </p:sp>
-      <p:sp>
-        <p:nvSpPr>
-          <p:cNvPr id="5" name="Text 3"/>
-          <p:cNvSpPr/>
-          <p:nvPr/>
-        </p:nvSpPr>
-        <p:spPr>
-          <a:xfrm>
-            <a:off x="658368" y="2395728"/>
-            <a:ext cx="6192390" cy="3017520"/>
-          </a:xfrm>
-          <a:prstGeom prst="rect">
-            <a:avLst/>
-          </a:prstGeom>
-          <a:noFill/>
-          <a:ln/>
-        </p:spPr>
-        <p:txBody>
-          <a:bodyPr wrap="square" lIns="0" tIns="0" rIns="0" bIns="0" rtlCol="0" anchor="t"/>
-          <a:lstStyle/>
-          <a:p>
-            <a:pPr algn="l" indent="0" marL="0">
-              <a:spcAft>
-                <a:spcPts val="600"/>
-              </a:spcAft>
-              <a:buNone/>
-            </a:pPr>
-            <a:r>
-              <a:rPr lang="en-US" sz="1350" dirty="0">
-                <a:solidFill>
-                  <a:srgbClr val="33444F"/>
-                </a:solidFill>
-                <a:latin typeface="Calibri" pitchFamily="34" charset="0"/>
-                <a:ea typeface="Calibri" pitchFamily="34" charset="-122"/>
-                <a:cs typeface="Calibri" pitchFamily="34" charset="-120"/>
-              </a:rPr>
-              <a:t>A. Confirm disease when positive</a:t>
-            </a:r>
-            <a:endParaRPr lang="en-US" sz="1350" dirty="0"/>
-          </a:p>
-          <a:p>
-            <a:pPr algn="l" indent="0" marL="0">
-              <a:spcAft>
-                <a:spcPts val="600"/>
-              </a:spcAft>
-              <a:buNone/>
-            </a:pPr>
-            <a:r>
-              <a:rPr lang="en-US" sz="1350" b="1" dirty="0">
-                <a:solidFill>
-                  <a:srgbClr val="4A1269"/>
-                </a:solidFill>
-                <a:latin typeface="Calibri" pitchFamily="34" charset="0"/>
-                <a:ea typeface="Calibri" pitchFamily="34" charset="-122"/>
-                <a:cs typeface="Calibri" pitchFamily="34" charset="-120"/>
-              </a:rPr>
-              <a:t>B. Rule OUT disease when negative</a:t>
-            </a:r>
-            <a:endParaRPr lang="en-US" sz="1350" dirty="0"/>
-          </a:p>
-          <a:p>
-            <a:pPr algn="l" indent="0" marL="0">
-              <a:spcAft>
-                <a:spcPts val="600"/>
-              </a:spcAft>
-              <a:buNone/>
-            </a:pPr>
-            <a:r>
-              <a:rPr lang="en-US" sz="1350" dirty="0">
-                <a:solidFill>
-                  <a:srgbClr val="33444F"/>
-                </a:solidFill>
-                <a:latin typeface="Calibri" pitchFamily="34" charset="0"/>
-                <a:ea typeface="Calibri" pitchFamily="34" charset="-122"/>
-                <a:cs typeface="Calibri" pitchFamily="34" charset="-120"/>
-              </a:rPr>
-              <a:t>C. Estimate prevalence</a:t>
-            </a:r>
-            <a:endParaRPr lang="en-US" sz="1350" dirty="0"/>
-          </a:p>
-          <a:p>
-            <a:pPr algn="l" indent="0" marL="0">
-              <a:spcAft>
-                <a:spcPts val="600"/>
-              </a:spcAft>
-              <a:buNone/>
-            </a:pPr>
-            <a:r>
-              <a:rPr lang="en-US" sz="1350" dirty="0">
-                <a:solidFill>
-                  <a:srgbClr val="33444F"/>
-                </a:solidFill>
-                <a:latin typeface="Calibri" pitchFamily="34" charset="0"/>
-                <a:ea typeface="Calibri" pitchFamily="34" charset="-122"/>
-                <a:cs typeface="Calibri" pitchFamily="34" charset="-120"/>
-              </a:rPr>
-              <a:t>D. Replace clinical judgment</a:t>
-            </a:r>
-            <a:endParaRPr lang="en-US" sz="1350" dirty="0"/>
-          </a:p>
-          <a:p>
-            <a:pPr algn="l" indent="0" marL="0">
-              <a:spcAft>
-                <a:spcPts val="600"/>
-              </a:spcAft>
-              <a:buNone/>
-            </a:pPr>
-            <a:r>
-              <a:rPr lang="en-US" sz="1350" dirty="0">
-                <a:solidFill>
-                  <a:srgbClr val="33444F"/>
-                </a:solidFill>
-                <a:latin typeface="Calibri" pitchFamily="34" charset="0"/>
-                <a:ea typeface="Calibri" pitchFamily="34" charset="-122"/>
-                <a:cs typeface="Calibri" pitchFamily="34" charset="-120"/>
-              </a:rPr>
-              <a:t>E. Increase false positives intentionally</a:t>
-            </a:r>
-            <a:endParaRPr lang="en-US" sz="1350" dirty="0"/>
-          </a:p>
-        </p:txBody>
-      </p:sp>
-      <p:sp>
-        <p:nvSpPr>
-          <p:cNvPr id="6" name="Shape 4"/>
-          <p:cNvSpPr/>
-          <p:nvPr/>
-        </p:nvSpPr>
-        <p:spPr>
-          <a:xfrm>
-            <a:off x="7201632" y="2395728"/>
-            <a:ext cx="4423136" cy="3246120"/>
+              <a:t>Case 2</a:t>
+            </a:r>
+            <a:endParaRPr lang="en-US" sz="3000" dirty="0"/>
+          </a:p>
+        </p:txBody>
+      </p:sp>
+      <p:sp>
+        <p:nvSpPr>
+          <p:cNvPr id="4" name="Shape 2"/>
+          <p:cNvSpPr/>
+          <p:nvPr/>
+        </p:nvSpPr>
+        <p:spPr>
+          <a:xfrm>
+            <a:off x="566928" y="1517904"/>
+            <a:ext cx="11057839" cy="2788920"/>
           </a:xfrm>
           <a:prstGeom prst="roundRect">
             <a:avLst>
-              <a:gd name="adj" fmla="val 2535"/>
+              <a:gd name="adj" fmla="val 2951"/>
             </a:avLst>
           </a:prstGeom>
           <a:solidFill>
@@ -5828,14 +6016,14 @@
       </p:sp>
       <p:sp>
         <p:nvSpPr>
-          <p:cNvPr id="7" name="Text 5"/>
-          <p:cNvSpPr/>
-          <p:nvPr/>
-        </p:nvSpPr>
-        <p:spPr>
-          <a:xfrm>
-            <a:off x="7439376" y="2578608"/>
-            <a:ext cx="3965936" cy="457200"/>
+          <p:cNvPr id="5" name="Text 3"/>
+          <p:cNvSpPr/>
+          <p:nvPr/>
+        </p:nvSpPr>
+        <p:spPr>
+          <a:xfrm>
+            <a:off x="841248" y="1700784"/>
+            <a:ext cx="5486400" cy="292608"/>
           </a:xfrm>
           <a:prstGeom prst="rect">
             <a:avLst/>
@@ -5851,7 +6039,7 @@
               <a:buNone/>
             </a:pPr>
             <a:r>
-              <a:rPr lang="en-US" sz="1500" b="1" dirty="0">
+              <a:rPr lang="en-US" sz="1100" b="1" spc="150" kern="0" dirty="0">
                 <a:solidFill>
                   <a:srgbClr val="6A1B9A"/>
                 </a:solidFill>
@@ -5859,36 +6047,22 @@
                 <a:ea typeface="Calibri" pitchFamily="34" charset="-122"/>
                 <a:cs typeface="Calibri" pitchFamily="34" charset="-120"/>
               </a:rPr>
-              <a:t>ANSWER  </a:t>
-            </a:r>
-            <a:pPr indent="0" marL="0">
-              <a:buNone/>
-            </a:pPr>
-            <a:r>
-              <a:rPr lang="en-US" sz="1500" b="1" dirty="0">
-                <a:solidFill>
-                  <a:srgbClr val="1B2A38"/>
-                </a:solidFill>
-                <a:latin typeface="Calibri" pitchFamily="34" charset="0"/>
-                <a:ea typeface="Calibri" pitchFamily="34" charset="-122"/>
-                <a:cs typeface="Calibri" pitchFamily="34" charset="-120"/>
-              </a:rPr>
-              <a:t>B — Rule out disease when negative</a:t>
-            </a:r>
-            <a:endParaRPr lang="en-US" sz="1500" dirty="0"/>
-          </a:p>
-        </p:txBody>
-      </p:sp>
-      <p:sp>
-        <p:nvSpPr>
-          <p:cNvPr id="8" name="Text 6"/>
-          <p:cNvSpPr/>
-          <p:nvPr/>
-        </p:nvSpPr>
-        <p:spPr>
-          <a:xfrm>
-            <a:off x="7439376" y="3127248"/>
-            <a:ext cx="3947648" cy="2377440"/>
+              <a:t>CLINICAL VIGNETTE</a:t>
+            </a:r>
+            <a:endParaRPr lang="en-US" sz="1100" dirty="0"/>
+          </a:p>
+        </p:txBody>
+      </p:sp>
+      <p:sp>
+        <p:nvSpPr>
+          <p:cNvPr id="6" name="Text 4"/>
+          <p:cNvSpPr/>
+          <p:nvPr/>
+        </p:nvSpPr>
+        <p:spPr>
+          <a:xfrm>
+            <a:off x="841248" y="2029968"/>
+            <a:ext cx="10509199" cy="2148840"/>
           </a:xfrm>
           <a:prstGeom prst="rect">
             <a:avLst/>
@@ -5907,7 +6081,7 @@
               <a:buNone/>
             </a:pPr>
             <a:r>
-              <a:rPr lang="en-US" sz="1250" dirty="0">
+              <a:rPr lang="en-US" sz="1450" dirty="0">
                 <a:solidFill>
                   <a:srgbClr val="33444F"/>
                 </a:solidFill>
@@ -5915,15 +6089,122 @@
                 <a:ea typeface="Calibri" pitchFamily="34" charset="-122"/>
                 <a:cs typeface="Calibri" pitchFamily="34" charset="-120"/>
               </a:rPr>
-              <a:t>High sensitivity means few false negatives, so a negative result effectively rules out disease (SnNOut). Specific tests are better for ruling in.</a:t>
-            </a:r>
-            <a:endParaRPr lang="en-US" sz="1250" dirty="0"/>
+              <a:t>A healthy person screens positive on a low-prevalence infectious serology; a specific confirmatory assay is negative.</a:t>
+            </a:r>
+            <a:endParaRPr lang="en-US" sz="1450" dirty="0"/>
+          </a:p>
+        </p:txBody>
+      </p:sp>
+      <p:sp>
+        <p:nvSpPr>
+          <p:cNvPr id="7" name="Shape 5"/>
+          <p:cNvSpPr/>
+          <p:nvPr/>
+        </p:nvSpPr>
+        <p:spPr>
+          <a:xfrm>
+            <a:off x="566928" y="4553712"/>
+            <a:ext cx="11057839" cy="1325880"/>
+          </a:xfrm>
+          <a:prstGeom prst="roundRect">
+            <a:avLst>
+              <a:gd name="adj" fmla="val 6207"/>
+            </a:avLst>
+          </a:prstGeom>
+          <a:solidFill>
+            <a:srgbClr val="0E3A5F"/>
+          </a:solidFill>
+          <a:ln/>
+          <a:effectLst>
+            <a:outerShdw sx="100000" sy="100000" kx="0" ky="0" algn="bl" rotWithShape="0" blurRad="88900" dist="25400" dir="5400000">
+              <a:srgbClr val="22303C">
+                <a:alpha val="12000"/>
+              </a:srgbClr>
+            </a:outerShdw>
+          </a:effectLst>
+        </p:spPr>
+      </p:sp>
+      <p:sp>
+        <p:nvSpPr>
+          <p:cNvPr id="8" name="Text 6"/>
+          <p:cNvSpPr/>
+          <p:nvPr/>
+        </p:nvSpPr>
+        <p:spPr>
+          <a:xfrm>
+            <a:off x="822960" y="4681728"/>
+            <a:ext cx="640080" cy="960120"/>
+          </a:xfrm>
+          <a:prstGeom prst="rect">
+            <a:avLst/>
+          </a:prstGeom>
+          <a:noFill/>
+          <a:ln/>
+        </p:spPr>
+        <p:txBody>
+          <a:bodyPr wrap="square" lIns="0" tIns="0" rIns="0" bIns="0" rtlCol="0" anchor="ctr"/>
+          <a:lstStyle/>
+          <a:p>
+            <a:pPr algn="ctr" indent="0" marL="0">
+              <a:buNone/>
+            </a:pPr>
+            <a:r>
+              <a:rPr lang="en-US" sz="4000" b="1" dirty="0">
+                <a:solidFill>
+                  <a:srgbClr val="6A1B9A"/>
+                </a:solidFill>
+                <a:latin typeface="Calibri" pitchFamily="34" charset="0"/>
+                <a:ea typeface="Calibri" pitchFamily="34" charset="-122"/>
+                <a:cs typeface="Calibri" pitchFamily="34" charset="-120"/>
+              </a:rPr>
+              <a:t>?</a:t>
+            </a:r>
+            <a:endParaRPr lang="en-US" sz="4000" dirty="0"/>
           </a:p>
         </p:txBody>
       </p:sp>
       <p:sp>
         <p:nvSpPr>
           <p:cNvPr id="9" name="Text 7"/>
+          <p:cNvSpPr/>
+          <p:nvPr/>
+        </p:nvSpPr>
+        <p:spPr>
+          <a:xfrm>
+            <a:off x="1618488" y="4553712"/>
+            <a:ext cx="9686239" cy="1325880"/>
+          </a:xfrm>
+          <a:prstGeom prst="rect">
+            <a:avLst/>
+          </a:prstGeom>
+          <a:noFill/>
+          <a:ln/>
+        </p:spPr>
+        <p:txBody>
+          <a:bodyPr wrap="square" lIns="0" tIns="0" rIns="0" bIns="0" rtlCol="0" anchor="ctr"/>
+          <a:lstStyle/>
+          <a:p>
+            <a:pPr algn="l" indent="0" marL="0">
+              <a:buNone/>
+            </a:pPr>
+            <a:r>
+              <a:rPr lang="en-US" sz="1500" b="1" dirty="0">
+                <a:solidFill>
+                  <a:srgbClr val="FFFFFF"/>
+                </a:solidFill>
+                <a:latin typeface="Calibri" pitchFamily="34" charset="0"/>
+                <a:ea typeface="Calibri" pitchFamily="34" charset="-122"/>
+                <a:cs typeface="Calibri" pitchFamily="34" charset="-120"/>
+              </a:rPr>
+              <a:t>How do you interpret the discordance?</a:t>
+            </a:r>
+            <a:endParaRPr lang="en-US" sz="1500" dirty="0"/>
+          </a:p>
+        </p:txBody>
+      </p:sp>
+      <p:sp>
+        <p:nvSpPr>
+          <p:cNvPr id="10" name="Text 8"/>
           <p:cNvSpPr/>
           <p:nvPr/>
         </p:nvSpPr>
@@ -5962,7 +6243,7 @@
       </p:sp>
       <p:sp>
         <p:nvSpPr>
-          <p:cNvPr id="10" name="Text 8"/>
+          <p:cNvPr id="11" name="Text 9"/>
           <p:cNvSpPr/>
           <p:nvPr/>
         </p:nvSpPr>
@@ -6092,7 +6373,7 @@
                 <a:ea typeface="Calibri" pitchFamily="34" charset="-122"/>
                 <a:cs typeface="Calibri" pitchFamily="34" charset="-120"/>
               </a:rPr>
-              <a:t>IMMUNOLOGY &amp; SEROLOGY   ·   BOARD REVIEW  ·  Q2</a:t>
+              <a:t>IMMUNOLOGY &amp; SEROLOGY   ·   CASE 2  ·  RESOLUTION</a:t>
             </a:r>
             <a:endParaRPr lang="en-US" sz="1100" dirty="0"/>
           </a:p>
@@ -6123,7 +6404,7 @@
               <a:buNone/>
             </a:pPr>
             <a:r>
-              <a:rPr lang="en-US" sz="2600" b="1" dirty="0">
+              <a:rPr lang="en-US" sz="3000" b="1" dirty="0">
                 <a:solidFill>
                   <a:srgbClr val="0E3A5F"/>
                 </a:solidFill>
@@ -6131,9 +6412,9 @@
                 <a:ea typeface="Calibri" pitchFamily="34" charset="-122"/>
                 <a:cs typeface="Calibri" pitchFamily="34" charset="-120"/>
               </a:rPr>
-              <a:t>Board-Style Review</a:t>
-            </a:r>
-            <a:endParaRPr lang="en-US" sz="2600" dirty="0"/>
+              <a:t>Case 2: Low Prevalence, Low PPV</a:t>
+            </a:r>
+            <a:endParaRPr lang="en-US" sz="3000" dirty="0"/>
           </a:p>
         </p:txBody>
       </p:sp>
@@ -6145,8 +6426,8 @@
         </p:nvSpPr>
         <p:spPr>
           <a:xfrm>
-            <a:off x="566928" y="1417320"/>
-            <a:ext cx="11057839" cy="914400"/>
+            <a:off x="566928" y="1554480"/>
+            <a:ext cx="6413547" cy="4023360"/>
           </a:xfrm>
           <a:prstGeom prst="rect">
             <a:avLst/>
@@ -6158,14 +6439,15 @@
           <a:bodyPr wrap="square" lIns="0" tIns="0" rIns="0" bIns="0" rtlCol="0" anchor="t"/>
           <a:lstStyle/>
           <a:p>
-            <a:pPr algn="l" indent="0" marL="0">
-              <a:lnSpc>
-                <a:spcPct val="105000"/>
-              </a:lnSpc>
-              <a:buNone/>
-            </a:pPr>
-            <a:r>
-              <a:rPr lang="en-US" sz="1450" b="1" dirty="0">
+            <a:pPr algn="l" marL="177800" indent="-177800">
+              <a:spcAft>
+                <a:spcPts val="900"/>
+              </a:spcAft>
+              <a:buSzPct val="100000"/>
+              <a:buChar char="•"/>
+            </a:pPr>
+            <a:r>
+              <a:rPr lang="en-US" sz="1400" b="1" dirty="0">
                 <a:solidFill>
                   <a:srgbClr val="1B2A38"/>
                 </a:solidFill>
@@ -6173,61 +6455,41 @@
                 <a:ea typeface="Calibri" pitchFamily="34" charset="-122"/>
                 <a:cs typeface="Calibri" pitchFamily="34" charset="-120"/>
               </a:rPr>
-              <a:t>As disease prevalence falls, with sensitivity and specificity held constant:</a:t>
-            </a:r>
-            <a:endParaRPr lang="en-US" sz="1450" dirty="0"/>
-          </a:p>
-        </p:txBody>
-      </p:sp>
-      <p:sp>
-        <p:nvSpPr>
-          <p:cNvPr id="5" name="Text 3"/>
-          <p:cNvSpPr/>
-          <p:nvPr/>
-        </p:nvSpPr>
-        <p:spPr>
-          <a:xfrm>
-            <a:off x="658368" y="2395728"/>
-            <a:ext cx="6192390" cy="3017520"/>
-          </a:xfrm>
-          <a:prstGeom prst="rect">
-            <a:avLst/>
-          </a:prstGeom>
-          <a:noFill/>
-          <a:ln/>
-        </p:spPr>
-        <p:txBody>
-          <a:bodyPr wrap="square" lIns="0" tIns="0" rIns="0" bIns="0" rtlCol="0" anchor="t"/>
-          <a:lstStyle/>
-          <a:p>
-            <a:pPr algn="l" indent="0" marL="0">
+              <a:t>In low-prevalence settings, a positive screen has a low positive predictive value — many positives are false.</a:t>
+            </a:r>
+            <a:endParaRPr lang="en-US" sz="1400" dirty="0"/>
+          </a:p>
+          <a:p>
+            <a:pPr algn="l" marL="177800" indent="-177800">
               <a:spcAft>
-                <a:spcPts val="600"/>
+                <a:spcPts val="900"/>
               </a:spcAft>
-              <a:buNone/>
-            </a:pPr>
-            <a:r>
-              <a:rPr lang="en-US" sz="1350" b="1" dirty="0">
-                <a:solidFill>
-                  <a:srgbClr val="4A1269"/>
-                </a:solidFill>
-                <a:latin typeface="Calibri" pitchFamily="34" charset="0"/>
-                <a:ea typeface="Calibri" pitchFamily="34" charset="-122"/>
-                <a:cs typeface="Calibri" pitchFamily="34" charset="-120"/>
-              </a:rPr>
-              <a:t>A. PPV falls and NPV rises</a:t>
-            </a:r>
-            <a:endParaRPr lang="en-US" sz="1350" dirty="0"/>
-          </a:p>
-          <a:p>
-            <a:pPr algn="l" indent="0" marL="0">
+              <a:buSzPct val="100000"/>
+              <a:buChar char="•"/>
+            </a:pPr>
+            <a:r>
+              <a:rPr lang="en-US" sz="1400" dirty="0">
+                <a:solidFill>
+                  <a:srgbClr val="33444F"/>
+                </a:solidFill>
+                <a:latin typeface="Calibri" pitchFamily="34" charset="0"/>
+                <a:ea typeface="Calibri" pitchFamily="34" charset="-122"/>
+                <a:cs typeface="Calibri" pitchFamily="34" charset="-120"/>
+              </a:rPr>
+              <a:t>A negative specific confirmatory test supports a false-positive screen.</a:t>
+            </a:r>
+            <a:endParaRPr lang="en-US" sz="1400" dirty="0"/>
+          </a:p>
+          <a:p>
+            <a:pPr algn="l" marL="177800" indent="-177800">
               <a:spcAft>
-                <a:spcPts val="600"/>
+                <a:spcPts val="900"/>
               </a:spcAft>
-              <a:buNone/>
-            </a:pPr>
-            <a:r>
-              <a:rPr lang="en-US" sz="1350" dirty="0">
+              <a:buSzPct val="100000"/>
+              <a:buChar char="•"/>
+            </a:pPr>
+            <a:r>
+              <a:rPr lang="en-US" sz="1400" dirty="0">
                 <a:solidFill>
                   <a:srgbClr val="33444F"/>
                 </a:solidFill>
@@ -6235,19 +6497,20 @@
                 <a:ea typeface="Calibri" pitchFamily="34" charset="-122"/>
                 <a:cs typeface="Calibri" pitchFamily="34" charset="-120"/>
               </a:rPr>
-              <a:t>B. PPV rises and NPV falls</a:t>
-            </a:r>
-            <a:endParaRPr lang="en-US" sz="1350" dirty="0"/>
-          </a:p>
-          <a:p>
-            <a:pPr algn="l" indent="0" marL="0">
+              <a:t>Algorithms pair a sensitive screen with a specific confirmation.</a:t>
+            </a:r>
+            <a:endParaRPr lang="en-US" sz="1400" dirty="0"/>
+          </a:p>
+          <a:p>
+            <a:pPr algn="l" marL="177800" indent="-177800">
               <a:spcAft>
-                <a:spcPts val="600"/>
+                <a:spcPts val="900"/>
               </a:spcAft>
-              <a:buNone/>
-            </a:pPr>
-            <a:r>
-              <a:rPr lang="en-US" sz="1350" dirty="0">
+              <a:buSzPct val="100000"/>
+              <a:buChar char="•"/>
+            </a:pPr>
+            <a:r>
+              <a:rPr lang="en-US" sz="1400" dirty="0">
                 <a:solidFill>
                   <a:srgbClr val="33444F"/>
                 </a:solidFill>
@@ -6255,66 +6518,26 @@
                 <a:ea typeface="Calibri" pitchFamily="34" charset="-122"/>
                 <a:cs typeface="Calibri" pitchFamily="34" charset="-120"/>
               </a:rPr>
-              <a:t>C. Both rise</a:t>
-            </a:r>
-            <a:endParaRPr lang="en-US" sz="1350" dirty="0"/>
-          </a:p>
-          <a:p>
-            <a:pPr algn="l" indent="0" marL="0">
-              <a:spcAft>
-                <a:spcPts val="600"/>
-              </a:spcAft>
-              <a:buNone/>
-            </a:pPr>
-            <a:r>
-              <a:rPr lang="en-US" sz="1350" dirty="0">
-                <a:solidFill>
-                  <a:srgbClr val="33444F"/>
-                </a:solidFill>
-                <a:latin typeface="Calibri" pitchFamily="34" charset="0"/>
-                <a:ea typeface="Calibri" pitchFamily="34" charset="-122"/>
-                <a:cs typeface="Calibri" pitchFamily="34" charset="-120"/>
-              </a:rPr>
-              <a:t>D. Both fall</a:t>
-            </a:r>
-            <a:endParaRPr lang="en-US" sz="1350" dirty="0"/>
-          </a:p>
-          <a:p>
-            <a:pPr algn="l" indent="0" marL="0">
-              <a:spcAft>
-                <a:spcPts val="600"/>
-              </a:spcAft>
-              <a:buNone/>
-            </a:pPr>
-            <a:r>
-              <a:rPr lang="en-US" sz="1350" dirty="0">
-                <a:solidFill>
-                  <a:srgbClr val="33444F"/>
-                </a:solidFill>
-                <a:latin typeface="Calibri" pitchFamily="34" charset="0"/>
-                <a:ea typeface="Calibri" pitchFamily="34" charset="-122"/>
-                <a:cs typeface="Calibri" pitchFamily="34" charset="-120"/>
-              </a:rPr>
-              <a:t>E. Neither changes</a:t>
-            </a:r>
-            <a:endParaRPr lang="en-US" sz="1350" dirty="0"/>
-          </a:p>
-        </p:txBody>
-      </p:sp>
-      <p:sp>
-        <p:nvSpPr>
-          <p:cNvPr id="6" name="Shape 4"/>
-          <p:cNvSpPr/>
-          <p:nvPr/>
-        </p:nvSpPr>
-        <p:spPr>
-          <a:xfrm>
-            <a:off x="7201632" y="2395728"/>
-            <a:ext cx="4423136" cy="3246120"/>
+              <a:t>Avoid alarming the patient on a single screen result.</a:t>
+            </a:r>
+            <a:endParaRPr lang="en-US" sz="1400" dirty="0"/>
+          </a:p>
+        </p:txBody>
+      </p:sp>
+      <p:sp>
+        <p:nvSpPr>
+          <p:cNvPr id="5" name="Shape 3"/>
+          <p:cNvSpPr/>
+          <p:nvPr/>
+        </p:nvSpPr>
+        <p:spPr>
+          <a:xfrm>
+            <a:off x="7422788" y="1554480"/>
+            <a:ext cx="4201979" cy="3977640"/>
           </a:xfrm>
           <a:prstGeom prst="roundRect">
             <a:avLst>
-              <a:gd name="adj" fmla="val 2535"/>
+              <a:gd name="adj" fmla="val 2069"/>
             </a:avLst>
           </a:prstGeom>
           <a:solidFill>
@@ -6332,67 +6555,53 @@
       </p:sp>
       <p:sp>
         <p:nvSpPr>
+          <p:cNvPr id="6" name="Text 4"/>
+          <p:cNvSpPr/>
+          <p:nvPr/>
+        </p:nvSpPr>
+        <p:spPr>
+          <a:xfrm>
+            <a:off x="7660532" y="1755648"/>
+            <a:ext cx="3744779" cy="310896"/>
+          </a:xfrm>
+          <a:prstGeom prst="rect">
+            <a:avLst/>
+          </a:prstGeom>
+          <a:noFill/>
+          <a:ln/>
+        </p:spPr>
+        <p:txBody>
+          <a:bodyPr wrap="square" lIns="0" tIns="0" rIns="0" bIns="0" rtlCol="0" anchor="ctr"/>
+          <a:lstStyle/>
+          <a:p>
+            <a:pPr indent="0" marL="0">
+              <a:buNone/>
+            </a:pPr>
+            <a:r>
+              <a:rPr lang="en-US" sz="1100" b="1" spc="140" kern="0" dirty="0">
+                <a:solidFill>
+                  <a:srgbClr val="6A1B9A"/>
+                </a:solidFill>
+                <a:latin typeface="Calibri" pitchFamily="34" charset="0"/>
+                <a:ea typeface="Calibri" pitchFamily="34" charset="-122"/>
+                <a:cs typeface="Calibri" pitchFamily="34" charset="-120"/>
+              </a:rPr>
+              <a:t>TEACHING POINT</a:t>
+            </a:r>
+            <a:endParaRPr lang="en-US" sz="1100" dirty="0"/>
+          </a:p>
+        </p:txBody>
+      </p:sp>
+      <p:sp>
+        <p:nvSpPr>
           <p:cNvPr id="7" name="Text 5"/>
           <p:cNvSpPr/>
           <p:nvPr/>
         </p:nvSpPr>
         <p:spPr>
           <a:xfrm>
-            <a:off x="7439376" y="2578608"/>
-            <a:ext cx="3965936" cy="457200"/>
-          </a:xfrm>
-          <a:prstGeom prst="rect">
-            <a:avLst/>
-          </a:prstGeom>
-          <a:noFill/>
-          <a:ln/>
-        </p:spPr>
-        <p:txBody>
-          <a:bodyPr wrap="square" lIns="0" tIns="0" rIns="0" bIns="0" rtlCol="0" anchor="ctr"/>
-          <a:lstStyle/>
-          <a:p>
-            <a:pPr indent="0" marL="0">
-              <a:buNone/>
-            </a:pPr>
-            <a:r>
-              <a:rPr lang="en-US" sz="1500" b="1" dirty="0">
-                <a:solidFill>
-                  <a:srgbClr val="6A1B9A"/>
-                </a:solidFill>
-                <a:latin typeface="Calibri" pitchFamily="34" charset="0"/>
-                <a:ea typeface="Calibri" pitchFamily="34" charset="-122"/>
-                <a:cs typeface="Calibri" pitchFamily="34" charset="-120"/>
-              </a:rPr>
-              <a:t>ANSWER  </a:t>
-            </a:r>
-            <a:pPr indent="0" marL="0">
-              <a:buNone/>
-            </a:pPr>
-            <a:r>
-              <a:rPr lang="en-US" sz="1500" b="1" dirty="0">
-                <a:solidFill>
-                  <a:srgbClr val="1B2A38"/>
-                </a:solidFill>
-                <a:latin typeface="Calibri" pitchFamily="34" charset="0"/>
-                <a:ea typeface="Calibri" pitchFamily="34" charset="-122"/>
-                <a:cs typeface="Calibri" pitchFamily="34" charset="-120"/>
-              </a:rPr>
-              <a:t>A — PPV falls, NPV rises</a:t>
-            </a:r>
-            <a:endParaRPr lang="en-US" sz="1500" dirty="0"/>
-          </a:p>
-        </p:txBody>
-      </p:sp>
-      <p:sp>
-        <p:nvSpPr>
-          <p:cNvPr id="8" name="Text 6"/>
-          <p:cNvSpPr/>
-          <p:nvPr/>
-        </p:nvSpPr>
-        <p:spPr>
-          <a:xfrm>
-            <a:off x="7439376" y="3127248"/>
-            <a:ext cx="3947648" cy="2377440"/>
+            <a:off x="7660532" y="2121408"/>
+            <a:ext cx="3726491" cy="3291840"/>
           </a:xfrm>
           <a:prstGeom prst="rect">
             <a:avLst/>
@@ -6406,12 +6615,12 @@
           <a:p>
             <a:pPr algn="l" indent="0" marL="0">
               <a:lnSpc>
-                <a:spcPct val="108000"/>
+                <a:spcPct val="110000"/>
               </a:lnSpc>
               <a:buNone/>
             </a:pPr>
             <a:r>
-              <a:rPr lang="en-US" sz="1250" dirty="0">
+              <a:rPr lang="en-US" sz="1350" dirty="0">
                 <a:solidFill>
                   <a:srgbClr val="33444F"/>
                 </a:solidFill>
@@ -6419,15 +6628,15 @@
                 <a:ea typeface="Calibri" pitchFamily="34" charset="-122"/>
                 <a:cs typeface="Calibri" pitchFamily="34" charset="-120"/>
               </a:rPr>
-              <a:t>Lower prevalence increases the proportion of false positives among positives (lower PPV) and makes negatives more reliable (higher NPV).</a:t>
-            </a:r>
-            <a:endParaRPr lang="en-US" sz="1250" dirty="0"/>
-          </a:p>
-        </p:txBody>
-      </p:sp>
-      <p:sp>
-        <p:nvSpPr>
-          <p:cNvPr id="9" name="Text 7"/>
+              <a:t>Predictive value depends on prevalence: confirm screen-positives in low-prevalence populations before acting.</a:t>
+            </a:r>
+            <a:endParaRPr lang="en-US" sz="1350" dirty="0"/>
+          </a:p>
+        </p:txBody>
+      </p:sp>
+      <p:sp>
+        <p:nvSpPr>
+          <p:cNvPr id="8" name="Text 6"/>
           <p:cNvSpPr/>
           <p:nvPr/>
         </p:nvSpPr>
@@ -6466,7 +6675,7 @@
       </p:sp>
       <p:sp>
         <p:nvSpPr>
-          <p:cNvPr id="10" name="Text 8"/>
+          <p:cNvPr id="9" name="Text 7"/>
           <p:cNvSpPr/>
           <p:nvPr/>
         </p:nvSpPr>
@@ -6596,7 +6805,7 @@
                 <a:ea typeface="Calibri" pitchFamily="34" charset="-122"/>
                 <a:cs typeface="Calibri" pitchFamily="34" charset="-120"/>
               </a:rPr>
-              <a:t>IMMUNOLOGY &amp; SEROLOGY   ·   BOARD REVIEW  ·  Q3</a:t>
+              <a:t>IMMUNOLOGY &amp; SEROLOGY   ·   CASE 3</a:t>
             </a:r>
             <a:endParaRPr lang="en-US" sz="1100" dirty="0"/>
           </a:p>
@@ -6627,7 +6836,7 @@
               <a:buNone/>
             </a:pPr>
             <a:r>
-              <a:rPr lang="en-US" sz="2600" b="1" dirty="0">
+              <a:rPr lang="en-US" sz="3000" b="1" dirty="0">
                 <a:solidFill>
                   <a:srgbClr val="0E3A5F"/>
                 </a:solidFill>
@@ -6635,190 +6844,26 @@
                 <a:ea typeface="Calibri" pitchFamily="34" charset="-122"/>
                 <a:cs typeface="Calibri" pitchFamily="34" charset="-120"/>
               </a:rPr>
-              <a:t>Board-Style Review</a:t>
-            </a:r>
-            <a:endParaRPr lang="en-US" sz="2600" dirty="0"/>
-          </a:p>
-        </p:txBody>
-      </p:sp>
-      <p:sp>
-        <p:nvSpPr>
-          <p:cNvPr id="4" name="Text 2"/>
-          <p:cNvSpPr/>
-          <p:nvPr/>
-        </p:nvSpPr>
-        <p:spPr>
-          <a:xfrm>
-            <a:off x="566928" y="1417320"/>
-            <a:ext cx="11057839" cy="914400"/>
-          </a:xfrm>
-          <a:prstGeom prst="rect">
-            <a:avLst/>
-          </a:prstGeom>
-          <a:noFill/>
-          <a:ln/>
-        </p:spPr>
-        <p:txBody>
-          <a:bodyPr wrap="square" lIns="0" tIns="0" rIns="0" bIns="0" rtlCol="0" anchor="t"/>
-          <a:lstStyle/>
-          <a:p>
-            <a:pPr algn="l" indent="0" marL="0">
-              <a:lnSpc>
-                <a:spcPct val="105000"/>
-              </a:lnSpc>
-              <a:buNone/>
-            </a:pPr>
-            <a:r>
-              <a:rPr lang="en-US" sz="1450" b="1" dirty="0">
-                <a:solidFill>
-                  <a:srgbClr val="1B2A38"/>
-                </a:solidFill>
-                <a:latin typeface="Calibri" pitchFamily="34" charset="0"/>
-                <a:ea typeface="Calibri" pitchFamily="34" charset="-122"/>
-                <a:cs typeface="Calibri" pitchFamily="34" charset="-120"/>
-              </a:rPr>
-              <a:t>A surprising immunoassay result shows non-linearity on serial dilution. This most suggests:</a:t>
-            </a:r>
-            <a:endParaRPr lang="en-US" sz="1450" dirty="0"/>
-          </a:p>
-        </p:txBody>
-      </p:sp>
-      <p:sp>
-        <p:nvSpPr>
-          <p:cNvPr id="5" name="Text 3"/>
-          <p:cNvSpPr/>
-          <p:nvPr/>
-        </p:nvSpPr>
-        <p:spPr>
-          <a:xfrm>
-            <a:off x="658368" y="2395728"/>
-            <a:ext cx="6192390" cy="3017520"/>
-          </a:xfrm>
-          <a:prstGeom prst="rect">
-            <a:avLst/>
-          </a:prstGeom>
-          <a:noFill/>
-          <a:ln/>
-        </p:spPr>
-        <p:txBody>
-          <a:bodyPr wrap="square" lIns="0" tIns="0" rIns="0" bIns="0" rtlCol="0" anchor="t"/>
-          <a:lstStyle/>
-          <a:p>
-            <a:pPr algn="l" indent="0" marL="0">
-              <a:spcAft>
-                <a:spcPts val="600"/>
-              </a:spcAft>
-              <a:buNone/>
-            </a:pPr>
-            <a:r>
-              <a:rPr lang="en-US" sz="1350" dirty="0">
-                <a:solidFill>
-                  <a:srgbClr val="33444F"/>
-                </a:solidFill>
-                <a:latin typeface="Calibri" pitchFamily="34" charset="0"/>
-                <a:ea typeface="Calibri" pitchFamily="34" charset="-122"/>
-                <a:cs typeface="Calibri" pitchFamily="34" charset="-120"/>
-              </a:rPr>
-              <a:t>A. A true high value</a:t>
-            </a:r>
-            <a:endParaRPr lang="en-US" sz="1350" dirty="0"/>
-          </a:p>
-          <a:p>
-            <a:pPr algn="l" indent="0" marL="0">
-              <a:spcAft>
-                <a:spcPts val="600"/>
-              </a:spcAft>
-              <a:buNone/>
-            </a:pPr>
-            <a:r>
-              <a:rPr lang="en-US" sz="1350" b="1" dirty="0">
-                <a:solidFill>
-                  <a:srgbClr val="4A1269"/>
-                </a:solidFill>
-                <a:latin typeface="Calibri" pitchFamily="34" charset="0"/>
-                <a:ea typeface="Calibri" pitchFamily="34" charset="-122"/>
-                <a:cs typeface="Calibri" pitchFamily="34" charset="-120"/>
-              </a:rPr>
-              <a:t>B. Assay interference (e.g., heterophile)</a:t>
-            </a:r>
-            <a:endParaRPr lang="en-US" sz="1350" dirty="0"/>
-          </a:p>
-          <a:p>
-            <a:pPr algn="l" indent="0" marL="0">
-              <a:spcAft>
-                <a:spcPts val="600"/>
-              </a:spcAft>
-              <a:buNone/>
-            </a:pPr>
-            <a:r>
-              <a:rPr lang="en-US" sz="1350" dirty="0">
-                <a:solidFill>
-                  <a:srgbClr val="33444F"/>
-                </a:solidFill>
-                <a:latin typeface="Calibri" pitchFamily="34" charset="0"/>
-                <a:ea typeface="Calibri" pitchFamily="34" charset="-122"/>
-                <a:cs typeface="Calibri" pitchFamily="34" charset="-120"/>
-              </a:rPr>
-              <a:t>C. Correct calibration</a:t>
-            </a:r>
-            <a:endParaRPr lang="en-US" sz="1350" dirty="0"/>
-          </a:p>
-          <a:p>
-            <a:pPr algn="l" indent="0" marL="0">
-              <a:spcAft>
-                <a:spcPts val="600"/>
-              </a:spcAft>
-              <a:buNone/>
-            </a:pPr>
-            <a:r>
-              <a:rPr lang="en-US" sz="1350" dirty="0">
-                <a:solidFill>
-                  <a:srgbClr val="33444F"/>
-                </a:solidFill>
-                <a:latin typeface="Calibri" pitchFamily="34" charset="0"/>
-                <a:ea typeface="Calibri" pitchFamily="34" charset="-122"/>
-                <a:cs typeface="Calibri" pitchFamily="34" charset="-120"/>
-              </a:rPr>
-              <a:t>D. Low prevalence</a:t>
-            </a:r>
-            <a:endParaRPr lang="en-US" sz="1350" dirty="0"/>
-          </a:p>
-          <a:p>
-            <a:pPr algn="l" indent="0" marL="0">
-              <a:spcAft>
-                <a:spcPts val="600"/>
-              </a:spcAft>
-              <a:buNone/>
-            </a:pPr>
-            <a:r>
-              <a:rPr lang="en-US" sz="1350" dirty="0">
-                <a:solidFill>
-                  <a:srgbClr val="33444F"/>
-                </a:solidFill>
-                <a:latin typeface="Calibri" pitchFamily="34" charset="0"/>
-                <a:ea typeface="Calibri" pitchFamily="34" charset="-122"/>
-                <a:cs typeface="Calibri" pitchFamily="34" charset="-120"/>
-              </a:rPr>
-              <a:t>E. High specificity</a:t>
-            </a:r>
-            <a:endParaRPr lang="en-US" sz="1350" dirty="0"/>
-          </a:p>
-        </p:txBody>
-      </p:sp>
-      <p:sp>
-        <p:nvSpPr>
-          <p:cNvPr id="6" name="Shape 4"/>
-          <p:cNvSpPr/>
-          <p:nvPr/>
-        </p:nvSpPr>
-        <p:spPr>
-          <a:xfrm>
-            <a:off x="7201632" y="2395728"/>
-            <a:ext cx="4423136" cy="3246120"/>
+              <a:t>Case 3</a:t>
+            </a:r>
+            <a:endParaRPr lang="en-US" sz="3000" dirty="0"/>
+          </a:p>
+        </p:txBody>
+      </p:sp>
+      <p:sp>
+        <p:nvSpPr>
+          <p:cNvPr id="4" name="Shape 2"/>
+          <p:cNvSpPr/>
+          <p:nvPr/>
+        </p:nvSpPr>
+        <p:spPr>
+          <a:xfrm>
+            <a:off x="566928" y="1517904"/>
+            <a:ext cx="11057839" cy="2788920"/>
           </a:xfrm>
           <a:prstGeom prst="roundRect">
             <a:avLst>
-              <a:gd name="adj" fmla="val 2535"/>
+              <a:gd name="adj" fmla="val 2951"/>
             </a:avLst>
           </a:prstGeom>
           <a:solidFill>
@@ -6836,14 +6881,14 @@
       </p:sp>
       <p:sp>
         <p:nvSpPr>
-          <p:cNvPr id="7" name="Text 5"/>
-          <p:cNvSpPr/>
-          <p:nvPr/>
-        </p:nvSpPr>
-        <p:spPr>
-          <a:xfrm>
-            <a:off x="7439376" y="2578608"/>
-            <a:ext cx="3965936" cy="457200"/>
+          <p:cNvPr id="5" name="Text 3"/>
+          <p:cNvSpPr/>
+          <p:nvPr/>
+        </p:nvSpPr>
+        <p:spPr>
+          <a:xfrm>
+            <a:off x="841248" y="1700784"/>
+            <a:ext cx="5486400" cy="292608"/>
           </a:xfrm>
           <a:prstGeom prst="rect">
             <a:avLst/>
@@ -6859,7 +6904,7 @@
               <a:buNone/>
             </a:pPr>
             <a:r>
-              <a:rPr lang="en-US" sz="1500" b="1" dirty="0">
+              <a:rPr lang="en-US" sz="1100" b="1" spc="150" kern="0" dirty="0">
                 <a:solidFill>
                   <a:srgbClr val="6A1B9A"/>
                 </a:solidFill>
@@ -6867,36 +6912,22 @@
                 <a:ea typeface="Calibri" pitchFamily="34" charset="-122"/>
                 <a:cs typeface="Calibri" pitchFamily="34" charset="-120"/>
               </a:rPr>
-              <a:t>ANSWER  </a:t>
-            </a:r>
-            <a:pPr indent="0" marL="0">
-              <a:buNone/>
-            </a:pPr>
-            <a:r>
-              <a:rPr lang="en-US" sz="1500" b="1" dirty="0">
-                <a:solidFill>
-                  <a:srgbClr val="1B2A38"/>
-                </a:solidFill>
-                <a:latin typeface="Calibri" pitchFamily="34" charset="0"/>
-                <a:ea typeface="Calibri" pitchFamily="34" charset="-122"/>
-                <a:cs typeface="Calibri" pitchFamily="34" charset="-120"/>
-              </a:rPr>
-              <a:t>B — Assay interference</a:t>
-            </a:r>
-            <a:endParaRPr lang="en-US" sz="1500" dirty="0"/>
-          </a:p>
-        </p:txBody>
-      </p:sp>
-      <p:sp>
-        <p:nvSpPr>
-          <p:cNvPr id="8" name="Text 6"/>
-          <p:cNvSpPr/>
-          <p:nvPr/>
-        </p:nvSpPr>
-        <p:spPr>
-          <a:xfrm>
-            <a:off x="7439376" y="3127248"/>
-            <a:ext cx="3947648" cy="2377440"/>
+              <a:t>CLINICAL VIGNETTE</a:t>
+            </a:r>
+            <a:endParaRPr lang="en-US" sz="1100" dirty="0"/>
+          </a:p>
+        </p:txBody>
+      </p:sp>
+      <p:sp>
+        <p:nvSpPr>
+          <p:cNvPr id="6" name="Text 4"/>
+          <p:cNvSpPr/>
+          <p:nvPr/>
+        </p:nvSpPr>
+        <p:spPr>
+          <a:xfrm>
+            <a:off x="841248" y="2029968"/>
+            <a:ext cx="10509199" cy="2148840"/>
           </a:xfrm>
           <a:prstGeom prst="rect">
             <a:avLst/>
@@ -6915,7 +6946,7 @@
               <a:buNone/>
             </a:pPr>
             <a:r>
-              <a:rPr lang="en-US" sz="1250" dirty="0">
+              <a:rPr lang="en-US" sz="1450" dirty="0">
                 <a:solidFill>
                   <a:srgbClr val="33444F"/>
                 </a:solidFill>
@@ -6923,15 +6954,122 @@
                 <a:ea typeface="Calibri" pitchFamily="34" charset="-122"/>
                 <a:cs typeface="Calibri" pitchFamily="34" charset="-120"/>
               </a:rPr>
-              <a:t>Genuine analytes dilute linearly; non-linearity indicates interference such as heterophile antibodies, warranting confirmation by another method.</a:t>
-            </a:r>
-            <a:endParaRPr lang="en-US" sz="1250" dirty="0"/>
+              <a:t>A patient on a high-dose biotin supplement has thyroid results suggesting hyperthyroidism but is clinically euthyroid.</a:t>
+            </a:r>
+            <a:endParaRPr lang="en-US" sz="1450" dirty="0"/>
+          </a:p>
+        </p:txBody>
+      </p:sp>
+      <p:sp>
+        <p:nvSpPr>
+          <p:cNvPr id="7" name="Shape 5"/>
+          <p:cNvSpPr/>
+          <p:nvPr/>
+        </p:nvSpPr>
+        <p:spPr>
+          <a:xfrm>
+            <a:off x="566928" y="4553712"/>
+            <a:ext cx="11057839" cy="1325880"/>
+          </a:xfrm>
+          <a:prstGeom prst="roundRect">
+            <a:avLst>
+              <a:gd name="adj" fmla="val 6207"/>
+            </a:avLst>
+          </a:prstGeom>
+          <a:solidFill>
+            <a:srgbClr val="0E3A5F"/>
+          </a:solidFill>
+          <a:ln/>
+          <a:effectLst>
+            <a:outerShdw sx="100000" sy="100000" kx="0" ky="0" algn="bl" rotWithShape="0" blurRad="88900" dist="25400" dir="5400000">
+              <a:srgbClr val="22303C">
+                <a:alpha val="12000"/>
+              </a:srgbClr>
+            </a:outerShdw>
+          </a:effectLst>
+        </p:spPr>
+      </p:sp>
+      <p:sp>
+        <p:nvSpPr>
+          <p:cNvPr id="8" name="Text 6"/>
+          <p:cNvSpPr/>
+          <p:nvPr/>
+        </p:nvSpPr>
+        <p:spPr>
+          <a:xfrm>
+            <a:off x="822960" y="4681728"/>
+            <a:ext cx="640080" cy="960120"/>
+          </a:xfrm>
+          <a:prstGeom prst="rect">
+            <a:avLst/>
+          </a:prstGeom>
+          <a:noFill/>
+          <a:ln/>
+        </p:spPr>
+        <p:txBody>
+          <a:bodyPr wrap="square" lIns="0" tIns="0" rIns="0" bIns="0" rtlCol="0" anchor="ctr"/>
+          <a:lstStyle/>
+          <a:p>
+            <a:pPr algn="ctr" indent="0" marL="0">
+              <a:buNone/>
+            </a:pPr>
+            <a:r>
+              <a:rPr lang="en-US" sz="4000" b="1" dirty="0">
+                <a:solidFill>
+                  <a:srgbClr val="6A1B9A"/>
+                </a:solidFill>
+                <a:latin typeface="Calibri" pitchFamily="34" charset="0"/>
+                <a:ea typeface="Calibri" pitchFamily="34" charset="-122"/>
+                <a:cs typeface="Calibri" pitchFamily="34" charset="-120"/>
+              </a:rPr>
+              <a:t>?</a:t>
+            </a:r>
+            <a:endParaRPr lang="en-US" sz="4000" dirty="0"/>
           </a:p>
         </p:txBody>
       </p:sp>
       <p:sp>
         <p:nvSpPr>
           <p:cNvPr id="9" name="Text 7"/>
+          <p:cNvSpPr/>
+          <p:nvPr/>
+        </p:nvSpPr>
+        <p:spPr>
+          <a:xfrm>
+            <a:off x="1618488" y="4553712"/>
+            <a:ext cx="9686239" cy="1325880"/>
+          </a:xfrm>
+          <a:prstGeom prst="rect">
+            <a:avLst/>
+          </a:prstGeom>
+          <a:noFill/>
+          <a:ln/>
+        </p:spPr>
+        <p:txBody>
+          <a:bodyPr wrap="square" lIns="0" tIns="0" rIns="0" bIns="0" rtlCol="0" anchor="ctr"/>
+          <a:lstStyle/>
+          <a:p>
+            <a:pPr algn="l" indent="0" marL="0">
+              <a:buNone/>
+            </a:pPr>
+            <a:r>
+              <a:rPr lang="en-US" sz="1500" b="1" dirty="0">
+                <a:solidFill>
+                  <a:srgbClr val="FFFFFF"/>
+                </a:solidFill>
+                <a:latin typeface="Calibri" pitchFamily="34" charset="0"/>
+                <a:ea typeface="Calibri" pitchFamily="34" charset="-122"/>
+                <a:cs typeface="Calibri" pitchFamily="34" charset="-120"/>
+              </a:rPr>
+              <a:t>What is the likely cause and the fix?</a:t>
+            </a:r>
+            <a:endParaRPr lang="en-US" sz="1500" dirty="0"/>
+          </a:p>
+        </p:txBody>
+      </p:sp>
+      <p:sp>
+        <p:nvSpPr>
+          <p:cNvPr id="10" name="Text 8"/>
           <p:cNvSpPr/>
           <p:nvPr/>
         </p:nvSpPr>
@@ -6970,7 +7108,7 @@
       </p:sp>
       <p:sp>
         <p:nvSpPr>
-          <p:cNvPr id="10" name="Text 8"/>
+          <p:cNvPr id="11" name="Text 9"/>
           <p:cNvSpPr/>
           <p:nvPr/>
         </p:nvSpPr>
@@ -7049,7 +7187,7 @@
     <p:bg>
       <p:bgPr>
         <a:solidFill>
-          <a:srgbClr val="0A2A45"/>
+          <a:srgbClr val="FFFFFF"/>
         </a:solidFill>
       </p:bgPr>
     </p:bg>
@@ -7076,7 +7214,7 @@
         <p:spPr>
           <a:xfrm>
             <a:off x="566928" y="329184"/>
-            <a:ext cx="10058400" cy="310896"/>
+            <a:ext cx="10515600" cy="310896"/>
           </a:xfrm>
           <a:prstGeom prst="rect">
             <a:avLst/>
@@ -7088,7 +7226,7 @@
           <a:bodyPr wrap="square" lIns="0" tIns="0" rIns="0" bIns="0" rtlCol="0" anchor="ctr"/>
           <a:lstStyle/>
           <a:p>
-            <a:pPr indent="0" marL="0">
+            <a:pPr algn="l" indent="0" marL="0">
               <a:buNone/>
             </a:pPr>
             <a:r>
@@ -7100,7 +7238,7 @@
                 <a:ea typeface="Calibri" pitchFamily="34" charset="-122"/>
                 <a:cs typeface="Calibri" pitchFamily="34" charset="-120"/>
               </a:rPr>
-              <a:t>IMMUNOLOGY &amp; SEROLOGY</a:t>
+              <a:t>IMMUNOLOGY &amp; SEROLOGY   ·   CASE 3  ·  RESOLUTION</a:t>
             </a:r>
             <a:endParaRPr lang="en-US" sz="1100" dirty="0"/>
           </a:p>
@@ -7114,8 +7252,8 @@
         </p:nvSpPr>
         <p:spPr>
           <a:xfrm>
-            <a:off x="566928" y="676656"/>
-            <a:ext cx="10972800" cy="749808"/>
+            <a:off x="566928" y="713232"/>
+            <a:ext cx="11064240" cy="749808"/>
           </a:xfrm>
           <a:prstGeom prst="rect">
             <a:avLst/>
@@ -7127,19 +7265,19 @@
           <a:bodyPr wrap="square" lIns="0" tIns="0" rIns="0" bIns="0" rtlCol="0" anchor="ctr"/>
           <a:lstStyle/>
           <a:p>
-            <a:pPr indent="0" marL="0">
+            <a:pPr algn="l" indent="0" marL="0">
               <a:buNone/>
             </a:pPr>
             <a:r>
               <a:rPr lang="en-US" sz="3000" b="1" dirty="0">
                 <a:solidFill>
-                  <a:srgbClr val="FFFFFF"/>
-                </a:solidFill>
-                <a:latin typeface="Calibri" pitchFamily="34" charset="0"/>
-                <a:ea typeface="Calibri" pitchFamily="34" charset="-122"/>
-                <a:cs typeface="Calibri" pitchFamily="34" charset="-120"/>
-              </a:rPr>
-              <a:t>Key Take-Home Points</a:t>
+                  <a:srgbClr val="0E3A5F"/>
+                </a:solidFill>
+                <a:latin typeface="Calibri" pitchFamily="34" charset="0"/>
+                <a:ea typeface="Calibri" pitchFamily="34" charset="-122"/>
+                <a:cs typeface="Calibri" pitchFamily="34" charset="-120"/>
+              </a:rPr>
+              <a:t>Case 3: Biotin Interference</a:t>
             </a:r>
             <a:endParaRPr lang="en-US" sz="3000" dirty="0"/>
           </a:p>
@@ -7147,42 +7285,128 @@
       </p:sp>
       <p:sp>
         <p:nvSpPr>
-          <p:cNvPr id="4" name="Shape 2"/>
-          <p:cNvSpPr/>
-          <p:nvPr/>
-        </p:nvSpPr>
-        <p:spPr>
-          <a:xfrm>
-            <a:off x="566928" y="1517904"/>
-            <a:ext cx="11057839" cy="841248"/>
+          <p:cNvPr id="4" name="Text 2"/>
+          <p:cNvSpPr/>
+          <p:nvPr/>
+        </p:nvSpPr>
+        <p:spPr>
+          <a:xfrm>
+            <a:off x="566928" y="1554480"/>
+            <a:ext cx="6413547" cy="4023360"/>
+          </a:xfrm>
+          <a:prstGeom prst="rect">
+            <a:avLst/>
+          </a:prstGeom>
+          <a:noFill/>
+          <a:ln/>
+        </p:spPr>
+        <p:txBody>
+          <a:bodyPr wrap="square" lIns="0" tIns="0" rIns="0" bIns="0" rtlCol="0" anchor="t"/>
+          <a:lstStyle/>
+          <a:p>
+            <a:pPr algn="l" marL="177800" indent="-177800">
+              <a:spcAft>
+                <a:spcPts val="900"/>
+              </a:spcAft>
+              <a:buSzPct val="100000"/>
+              <a:buChar char="•"/>
+            </a:pPr>
+            <a:r>
+              <a:rPr lang="en-US" sz="1400" b="1" dirty="0">
+                <a:solidFill>
+                  <a:srgbClr val="1B2A38"/>
+                </a:solidFill>
+                <a:latin typeface="Calibri" pitchFamily="34" charset="0"/>
+                <a:ea typeface="Calibri" pitchFamily="34" charset="-122"/>
+                <a:cs typeface="Calibri" pitchFamily="34" charset="-120"/>
+              </a:rPr>
+              <a:t>Biotin interferes with streptavidin-biotin immunoassays, distorting thyroid results.</a:t>
+            </a:r>
+            <a:endParaRPr lang="en-US" sz="1400" dirty="0"/>
+          </a:p>
+          <a:p>
+            <a:pPr algn="l" marL="177800" indent="-177800">
+              <a:spcAft>
+                <a:spcPts val="900"/>
+              </a:spcAft>
+              <a:buSzPct val="100000"/>
+              <a:buChar char="•"/>
+            </a:pPr>
+            <a:r>
+              <a:rPr lang="en-US" sz="1400" dirty="0">
+                <a:solidFill>
+                  <a:srgbClr val="33444F"/>
+                </a:solidFill>
+                <a:latin typeface="Calibri" pitchFamily="34" charset="0"/>
+                <a:ea typeface="Calibri" pitchFamily="34" charset="-122"/>
+                <a:cs typeface="Calibri" pitchFamily="34" charset="-120"/>
+              </a:rPr>
+              <a:t>Pattern (low TSH, high free T4) mimics hyperthyroidism in a euthyroid patient.</a:t>
+            </a:r>
+            <a:endParaRPr lang="en-US" sz="1400" dirty="0"/>
+          </a:p>
+          <a:p>
+            <a:pPr algn="l" marL="177800" indent="-177800">
+              <a:spcAft>
+                <a:spcPts val="900"/>
+              </a:spcAft>
+              <a:buSzPct val="100000"/>
+              <a:buChar char="•"/>
+            </a:pPr>
+            <a:r>
+              <a:rPr lang="en-US" sz="1400" dirty="0">
+                <a:solidFill>
+                  <a:srgbClr val="33444F"/>
+                </a:solidFill>
+                <a:latin typeface="Calibri" pitchFamily="34" charset="0"/>
+                <a:ea typeface="Calibri" pitchFamily="34" charset="-122"/>
+                <a:cs typeface="Calibri" pitchFamily="34" charset="-120"/>
+              </a:rPr>
+              <a:t>Hold biotin and repeat.</a:t>
+            </a:r>
+            <a:endParaRPr lang="en-US" sz="1400" dirty="0"/>
+          </a:p>
+          <a:p>
+            <a:pPr algn="l" marL="177800" indent="-177800">
+              <a:spcAft>
+                <a:spcPts val="900"/>
+              </a:spcAft>
+              <a:buSzPct val="100000"/>
+              <a:buChar char="•"/>
+            </a:pPr>
+            <a:r>
+              <a:rPr lang="en-US" sz="1400" dirty="0">
+                <a:solidFill>
+                  <a:srgbClr val="33444F"/>
+                </a:solidFill>
+                <a:latin typeface="Calibri" pitchFamily="34" charset="0"/>
+                <a:ea typeface="Calibri" pitchFamily="34" charset="-122"/>
+                <a:cs typeface="Calibri" pitchFamily="34" charset="-120"/>
+              </a:rPr>
+              <a:t>Always reconcile assay results with the clinical state.</a:t>
+            </a:r>
+            <a:endParaRPr lang="en-US" sz="1400" dirty="0"/>
+          </a:p>
+        </p:txBody>
+      </p:sp>
+      <p:sp>
+        <p:nvSpPr>
+          <p:cNvPr id="5" name="Shape 3"/>
+          <p:cNvSpPr/>
+          <p:nvPr/>
+        </p:nvSpPr>
+        <p:spPr>
+          <a:xfrm>
+            <a:off x="7422788" y="1554480"/>
+            <a:ext cx="4201979" cy="3977640"/>
           </a:xfrm>
           <a:prstGeom prst="roundRect">
             <a:avLst>
-              <a:gd name="adj" fmla="val 7609"/>
+              <a:gd name="adj" fmla="val 2069"/>
             </a:avLst>
           </a:prstGeom>
           <a:solidFill>
-            <a:srgbClr val="143651"/>
-          </a:solidFill>
-          <a:ln/>
-        </p:spPr>
-      </p:sp>
-      <p:sp>
-        <p:nvSpPr>
-          <p:cNvPr id="5" name="Shape 3"/>
-          <p:cNvSpPr/>
-          <p:nvPr/>
-        </p:nvSpPr>
-        <p:spPr>
-          <a:xfrm>
-            <a:off x="749808" y="1755648"/>
-            <a:ext cx="365760" cy="365760"/>
-          </a:xfrm>
-          <a:prstGeom prst="ellipse">
-            <a:avLst/>
-          </a:prstGeom>
-          <a:solidFill>
-            <a:srgbClr val="6A1B9A"/>
+            <a:srgbClr val="F1E8F7"/>
           </a:solidFill>
           <a:ln/>
           <a:effectLst>
@@ -7202,8 +7426,8 @@
         </p:nvSpPr>
         <p:spPr>
           <a:xfrm>
-            <a:off x="749808" y="1755648"/>
-            <a:ext cx="365760" cy="365760"/>
+            <a:off x="7660532" y="1755648"/>
+            <a:ext cx="3744779" cy="310896"/>
           </a:xfrm>
           <a:prstGeom prst="rect">
             <a:avLst/>
@@ -7215,21 +7439,21 @@
           <a:bodyPr wrap="square" lIns="0" tIns="0" rIns="0" bIns="0" rtlCol="0" anchor="ctr"/>
           <a:lstStyle/>
           <a:p>
-            <a:pPr algn="ctr" indent="0" marL="0">
-              <a:buNone/>
-            </a:pPr>
-            <a:r>
-              <a:rPr lang="en-US" sz="1500" b="1" dirty="0">
-                <a:solidFill>
-                  <a:srgbClr val="FFFFFF"/>
-                </a:solidFill>
-                <a:latin typeface="Calibri" pitchFamily="34" charset="0"/>
-                <a:ea typeface="Calibri" pitchFamily="34" charset="-122"/>
-                <a:cs typeface="Calibri" pitchFamily="34" charset="-120"/>
-              </a:rPr>
-              <a:t>1</a:t>
-            </a:r>
-            <a:endParaRPr lang="en-US" sz="1500" dirty="0"/>
+            <a:pPr indent="0" marL="0">
+              <a:buNone/>
+            </a:pPr>
+            <a:r>
+              <a:rPr lang="en-US" sz="1100" b="1" spc="140" kern="0" dirty="0">
+                <a:solidFill>
+                  <a:srgbClr val="6A1B9A"/>
+                </a:solidFill>
+                <a:latin typeface="Calibri" pitchFamily="34" charset="0"/>
+                <a:ea typeface="Calibri" pitchFamily="34" charset="-122"/>
+                <a:cs typeface="Calibri" pitchFamily="34" charset="-120"/>
+              </a:rPr>
+              <a:t>TEACHING POINT</a:t>
+            </a:r>
+            <a:endParaRPr lang="en-US" sz="1100" dirty="0"/>
           </a:p>
         </p:txBody>
       </p:sp>
@@ -7241,8 +7465,50 @@
         </p:nvSpPr>
         <p:spPr>
           <a:xfrm>
-            <a:off x="1280160" y="1517904"/>
-            <a:ext cx="10143439" cy="841248"/>
+            <a:off x="7660532" y="2121408"/>
+            <a:ext cx="3726491" cy="3291840"/>
+          </a:xfrm>
+          <a:prstGeom prst="rect">
+            <a:avLst/>
+          </a:prstGeom>
+          <a:noFill/>
+          <a:ln/>
+        </p:spPr>
+        <p:txBody>
+          <a:bodyPr wrap="square" lIns="0" tIns="0" rIns="0" bIns="0" rtlCol="0" anchor="t"/>
+          <a:lstStyle/>
+          <a:p>
+            <a:pPr algn="l" indent="0" marL="0">
+              <a:lnSpc>
+                <a:spcPct val="110000"/>
+              </a:lnSpc>
+              <a:buNone/>
+            </a:pPr>
+            <a:r>
+              <a:rPr lang="en-US" sz="1350" dirty="0">
+                <a:solidFill>
+                  <a:srgbClr val="33444F"/>
+                </a:solidFill>
+                <a:latin typeface="Calibri" pitchFamily="34" charset="0"/>
+                <a:ea typeface="Calibri" pitchFamily="34" charset="-122"/>
+                <a:cs typeface="Calibri" pitchFamily="34" charset="-120"/>
+              </a:rPr>
+              <a:t>Ask about biotin when immunoassay results don’t fit the patient — a brief medication history prevents misdiagnosis.</a:t>
+            </a:r>
+            <a:endParaRPr lang="en-US" sz="1350" dirty="0"/>
+          </a:p>
+        </p:txBody>
+      </p:sp>
+      <p:sp>
+        <p:nvSpPr>
+          <p:cNvPr id="8" name="Text 6"/>
+          <p:cNvSpPr/>
+          <p:nvPr/>
+        </p:nvSpPr>
+        <p:spPr>
+          <a:xfrm>
+            <a:off x="566928" y="6473952"/>
+            <a:ext cx="7772400" cy="274320"/>
           </a:xfrm>
           <a:prstGeom prst="rect">
             <a:avLst/>
@@ -7258,79 +7524,30 @@
               <a:buNone/>
             </a:pPr>
             <a:r>
-              <a:rPr lang="en-US" sz="1350" dirty="0">
-                <a:solidFill>
-                  <a:srgbClr val="E7EEF4"/>
-                </a:solidFill>
-                <a:latin typeface="Calibri" pitchFamily="34" charset="0"/>
-                <a:ea typeface="Calibri" pitchFamily="34" charset="-122"/>
-                <a:cs typeface="Calibri" pitchFamily="34" charset="-120"/>
-              </a:rPr>
-              <a:t>Sensitivity/specificity are test properties; PPV/NPV depend on prevalence — interpret every result against pretest probability.</a:t>
-            </a:r>
-            <a:endParaRPr lang="en-US" sz="1350" dirty="0"/>
-          </a:p>
-        </p:txBody>
-      </p:sp>
-      <p:sp>
-        <p:nvSpPr>
-          <p:cNvPr id="8" name="Shape 6"/>
-          <p:cNvSpPr/>
-          <p:nvPr/>
-        </p:nvSpPr>
-        <p:spPr>
-          <a:xfrm>
-            <a:off x="566928" y="2505456"/>
-            <a:ext cx="11057839" cy="841248"/>
-          </a:xfrm>
-          <a:prstGeom prst="roundRect">
-            <a:avLst>
-              <a:gd name="adj" fmla="val 7609"/>
-            </a:avLst>
-          </a:prstGeom>
-          <a:solidFill>
-            <a:srgbClr val="143651"/>
-          </a:solidFill>
-          <a:ln/>
-        </p:spPr>
-      </p:sp>
-      <p:sp>
-        <p:nvSpPr>
-          <p:cNvPr id="9" name="Shape 7"/>
-          <p:cNvSpPr/>
-          <p:nvPr/>
-        </p:nvSpPr>
-        <p:spPr>
-          <a:xfrm>
-            <a:off x="749808" y="2743200"/>
-            <a:ext cx="365760" cy="365760"/>
-          </a:xfrm>
-          <a:prstGeom prst="ellipse">
-            <a:avLst/>
-          </a:prstGeom>
-          <a:solidFill>
-            <a:srgbClr val="6A1B9A"/>
-          </a:solidFill>
-          <a:ln/>
-          <a:effectLst>
-            <a:outerShdw sx="100000" sy="100000" kx="0" ky="0" algn="bl" rotWithShape="0" blurRad="88900" dist="25400" dir="5400000">
-              <a:srgbClr val="22303C">
-                <a:alpha val="12000"/>
-              </a:srgbClr>
-            </a:outerShdw>
-          </a:effectLst>
-        </p:spPr>
-      </p:sp>
-      <p:sp>
-        <p:nvSpPr>
-          <p:cNvPr id="10" name="Text 8"/>
-          <p:cNvSpPr/>
-          <p:nvPr/>
-        </p:nvSpPr>
-        <p:spPr>
-          <a:xfrm>
-            <a:off x="749808" y="2743200"/>
-            <a:ext cx="365760" cy="365760"/>
+              <a:rPr lang="en-US" sz="850" dirty="0">
+                <a:solidFill>
+                  <a:srgbClr val="9AA8B4"/>
+                </a:solidFill>
+                <a:latin typeface="Calibri" pitchFamily="34" charset="0"/>
+                <a:ea typeface="Calibri" pitchFamily="34" charset="-122"/>
+                <a:cs typeface="Calibri" pitchFamily="34" charset="-120"/>
+              </a:rPr>
+              <a:t>Makassed General Hospital  ·  Department of Laboratory Medicine</a:t>
+            </a:r>
+            <a:endParaRPr lang="en-US" sz="850" dirty="0"/>
+          </a:p>
+        </p:txBody>
+      </p:sp>
+      <p:sp>
+        <p:nvSpPr>
+          <p:cNvPr id="9" name="Text 7"/>
+          <p:cNvSpPr/>
+          <p:nvPr/>
+        </p:nvSpPr>
+        <p:spPr>
+          <a:xfrm>
+            <a:off x="9814255" y="6473952"/>
+            <a:ext cx="1828800" cy="274320"/>
           </a:xfrm>
           <a:prstGeom prst="rect">
             <a:avLst/>
@@ -7342,504 +7559,34 @@
           <a:bodyPr wrap="square" lIns="0" tIns="0" rIns="0" bIns="0" rtlCol="0" anchor="ctr"/>
           <a:lstStyle/>
           <a:p>
-            <a:pPr algn="ctr" indent="0" marL="0">
-              <a:buNone/>
-            </a:pPr>
-            <a:r>
-              <a:rPr lang="en-US" sz="1500" b="1" dirty="0">
-                <a:solidFill>
-                  <a:srgbClr val="FFFFFF"/>
-                </a:solidFill>
-                <a:latin typeface="Calibri" pitchFamily="34" charset="0"/>
-                <a:ea typeface="Calibri" pitchFamily="34" charset="-122"/>
-                <a:cs typeface="Calibri" pitchFamily="34" charset="-120"/>
-              </a:rPr>
-              <a:t>2</a:t>
-            </a:r>
-            <a:endParaRPr lang="en-US" sz="1500" dirty="0"/>
-          </a:p>
-        </p:txBody>
-      </p:sp>
-      <p:sp>
-        <p:nvSpPr>
-          <p:cNvPr id="11" name="Text 9"/>
-          <p:cNvSpPr/>
-          <p:nvPr/>
-        </p:nvSpPr>
-        <p:spPr>
-          <a:xfrm>
-            <a:off x="1280160" y="2505456"/>
-            <a:ext cx="10143439" cy="841248"/>
-          </a:xfrm>
-          <a:prstGeom prst="rect">
-            <a:avLst/>
-          </a:prstGeom>
-          <a:noFill/>
-          <a:ln/>
-        </p:spPr>
-        <p:txBody>
-          <a:bodyPr wrap="square" lIns="0" tIns="0" rIns="0" bIns="0" rtlCol="0" anchor="ctr"/>
-          <a:lstStyle/>
-          <a:p>
-            <a:pPr algn="l" indent="0" marL="0">
-              <a:buNone/>
-            </a:pPr>
-            <a:r>
-              <a:rPr lang="en-US" sz="1350" dirty="0">
-                <a:solidFill>
-                  <a:srgbClr val="E7EEF4"/>
-                </a:solidFill>
-                <a:latin typeface="Calibri" pitchFamily="34" charset="0"/>
-                <a:ea typeface="Calibri" pitchFamily="34" charset="-122"/>
-                <a:cs typeface="Calibri" pitchFamily="34" charset="-120"/>
-              </a:rPr>
-              <a:t>SnNOut / SpPIn: sensitive tests rule out, specific tests rule in.</a:t>
-            </a:r>
-            <a:endParaRPr lang="en-US" sz="1350" dirty="0"/>
-          </a:p>
-        </p:txBody>
-      </p:sp>
-      <p:sp>
-        <p:nvSpPr>
-          <p:cNvPr id="12" name="Shape 10"/>
-          <p:cNvSpPr/>
-          <p:nvPr/>
-        </p:nvSpPr>
-        <p:spPr>
-          <a:xfrm>
-            <a:off x="566928" y="3493008"/>
-            <a:ext cx="11057839" cy="841248"/>
-          </a:xfrm>
-          <a:prstGeom prst="roundRect">
-            <a:avLst>
-              <a:gd name="adj" fmla="val 7609"/>
-            </a:avLst>
-          </a:prstGeom>
-          <a:solidFill>
-            <a:srgbClr val="143651"/>
-          </a:solidFill>
-          <a:ln/>
-        </p:spPr>
-      </p:sp>
-      <p:sp>
-        <p:nvSpPr>
-          <p:cNvPr id="13" name="Shape 11"/>
-          <p:cNvSpPr/>
-          <p:nvPr/>
-        </p:nvSpPr>
-        <p:spPr>
-          <a:xfrm>
-            <a:off x="749808" y="3730752"/>
-            <a:ext cx="365760" cy="365760"/>
-          </a:xfrm>
-          <a:prstGeom prst="ellipse">
-            <a:avLst/>
-          </a:prstGeom>
-          <a:solidFill>
-            <a:srgbClr val="6A1B9A"/>
-          </a:solidFill>
-          <a:ln/>
-          <a:effectLst>
-            <a:outerShdw sx="100000" sy="100000" kx="0" ky="0" algn="bl" rotWithShape="0" blurRad="88900" dist="25400" dir="5400000">
-              <a:srgbClr val="22303C">
-                <a:alpha val="12000"/>
-              </a:srgbClr>
-            </a:outerShdw>
-          </a:effectLst>
-        </p:spPr>
-      </p:sp>
-      <p:sp>
-        <p:nvSpPr>
-          <p:cNvPr id="14" name="Text 12"/>
-          <p:cNvSpPr/>
-          <p:nvPr/>
-        </p:nvSpPr>
-        <p:spPr>
-          <a:xfrm>
-            <a:off x="749808" y="3730752"/>
-            <a:ext cx="365760" cy="365760"/>
-          </a:xfrm>
-          <a:prstGeom prst="rect">
-            <a:avLst/>
-          </a:prstGeom>
-          <a:noFill/>
-          <a:ln/>
-        </p:spPr>
-        <p:txBody>
-          <a:bodyPr wrap="square" lIns="0" tIns="0" rIns="0" bIns="0" rtlCol="0" anchor="ctr"/>
-          <a:lstStyle/>
-          <a:p>
-            <a:pPr algn="ctr" indent="0" marL="0">
-              <a:buNone/>
-            </a:pPr>
-            <a:r>
-              <a:rPr lang="en-US" sz="1500" b="1" dirty="0">
-                <a:solidFill>
-                  <a:srgbClr val="FFFFFF"/>
-                </a:solidFill>
-                <a:latin typeface="Calibri" pitchFamily="34" charset="0"/>
-                <a:ea typeface="Calibri" pitchFamily="34" charset="-122"/>
-                <a:cs typeface="Calibri" pitchFamily="34" charset="-120"/>
-              </a:rPr>
-              <a:t>3</a:t>
-            </a:r>
-            <a:endParaRPr lang="en-US" sz="1500" dirty="0"/>
-          </a:p>
-        </p:txBody>
-      </p:sp>
-      <p:sp>
-        <p:nvSpPr>
-          <p:cNvPr id="15" name="Text 13"/>
-          <p:cNvSpPr/>
-          <p:nvPr/>
-        </p:nvSpPr>
-        <p:spPr>
-          <a:xfrm>
-            <a:off x="1280160" y="3493008"/>
-            <a:ext cx="10143439" cy="841248"/>
-          </a:xfrm>
-          <a:prstGeom prst="rect">
-            <a:avLst/>
-          </a:prstGeom>
-          <a:noFill/>
-          <a:ln/>
-        </p:spPr>
-        <p:txBody>
-          <a:bodyPr wrap="square" lIns="0" tIns="0" rIns="0" bIns="0" rtlCol="0" anchor="ctr"/>
-          <a:lstStyle/>
-          <a:p>
-            <a:pPr algn="l" indent="0" marL="0">
-              <a:buNone/>
-            </a:pPr>
-            <a:r>
-              <a:rPr lang="en-US" sz="1350" dirty="0">
-                <a:solidFill>
-                  <a:srgbClr val="E7EEF4"/>
-                </a:solidFill>
-                <a:latin typeface="Calibri" pitchFamily="34" charset="0"/>
-                <a:ea typeface="Calibri" pitchFamily="34" charset="-122"/>
-                <a:cs typeface="Calibri" pitchFamily="34" charset="-120"/>
-              </a:rPr>
-              <a:t>Screen-then-confirm controls false positives; report presumptive vs confirmed.</a:t>
-            </a:r>
-            <a:endParaRPr lang="en-US" sz="1350" dirty="0"/>
-          </a:p>
-        </p:txBody>
-      </p:sp>
-      <p:sp>
-        <p:nvSpPr>
-          <p:cNvPr id="16" name="Shape 14"/>
-          <p:cNvSpPr/>
-          <p:nvPr/>
-        </p:nvSpPr>
-        <p:spPr>
-          <a:xfrm>
-            <a:off x="566928" y="4480560"/>
-            <a:ext cx="11057839" cy="841248"/>
-          </a:xfrm>
-          <a:prstGeom prst="roundRect">
-            <a:avLst>
-              <a:gd name="adj" fmla="val 7609"/>
-            </a:avLst>
-          </a:prstGeom>
-          <a:solidFill>
-            <a:srgbClr val="143651"/>
-          </a:solidFill>
-          <a:ln/>
-        </p:spPr>
-      </p:sp>
-      <p:sp>
-        <p:nvSpPr>
-          <p:cNvPr id="17" name="Shape 15"/>
-          <p:cNvSpPr/>
-          <p:nvPr/>
-        </p:nvSpPr>
-        <p:spPr>
-          <a:xfrm>
-            <a:off x="749808" y="4718304"/>
-            <a:ext cx="365760" cy="365760"/>
-          </a:xfrm>
-          <a:prstGeom prst="ellipse">
-            <a:avLst/>
-          </a:prstGeom>
-          <a:solidFill>
-            <a:srgbClr val="6A1B9A"/>
-          </a:solidFill>
-          <a:ln/>
-          <a:effectLst>
-            <a:outerShdw sx="100000" sy="100000" kx="0" ky="0" algn="bl" rotWithShape="0" blurRad="88900" dist="25400" dir="5400000">
-              <a:srgbClr val="22303C">
-                <a:alpha val="12000"/>
-              </a:srgbClr>
-            </a:outerShdw>
-          </a:effectLst>
-        </p:spPr>
-      </p:sp>
-      <p:sp>
-        <p:nvSpPr>
-          <p:cNvPr id="18" name="Text 16"/>
-          <p:cNvSpPr/>
-          <p:nvPr/>
-        </p:nvSpPr>
-        <p:spPr>
-          <a:xfrm>
-            <a:off x="749808" y="4718304"/>
-            <a:ext cx="365760" cy="365760"/>
-          </a:xfrm>
-          <a:prstGeom prst="rect">
-            <a:avLst/>
-          </a:prstGeom>
-          <a:noFill/>
-          <a:ln/>
-        </p:spPr>
-        <p:txBody>
-          <a:bodyPr wrap="square" lIns="0" tIns="0" rIns="0" bIns="0" rtlCol="0" anchor="ctr"/>
-          <a:lstStyle/>
-          <a:p>
-            <a:pPr algn="ctr" indent="0" marL="0">
-              <a:buNone/>
-            </a:pPr>
-            <a:r>
-              <a:rPr lang="en-US" sz="1500" b="1" dirty="0">
-                <a:solidFill>
-                  <a:srgbClr val="FFFFFF"/>
-                </a:solidFill>
-                <a:latin typeface="Calibri" pitchFamily="34" charset="0"/>
-                <a:ea typeface="Calibri" pitchFamily="34" charset="-122"/>
-                <a:cs typeface="Calibri" pitchFamily="34" charset="-120"/>
-              </a:rPr>
-              <a:t>4</a:t>
-            </a:r>
-            <a:endParaRPr lang="en-US" sz="1500" dirty="0"/>
-          </a:p>
-        </p:txBody>
-      </p:sp>
-      <p:sp>
-        <p:nvSpPr>
-          <p:cNvPr id="19" name="Text 17"/>
-          <p:cNvSpPr/>
-          <p:nvPr/>
-        </p:nvSpPr>
-        <p:spPr>
-          <a:xfrm>
-            <a:off x="1280160" y="4480560"/>
-            <a:ext cx="10143439" cy="841248"/>
-          </a:xfrm>
-          <a:prstGeom prst="rect">
-            <a:avLst/>
-          </a:prstGeom>
-          <a:noFill/>
-          <a:ln/>
-        </p:spPr>
-        <p:txBody>
-          <a:bodyPr wrap="square" lIns="0" tIns="0" rIns="0" bIns="0" rtlCol="0" anchor="ctr"/>
-          <a:lstStyle/>
-          <a:p>
-            <a:pPr algn="l" indent="0" marL="0">
-              <a:buNone/>
-            </a:pPr>
-            <a:r>
-              <a:rPr lang="en-US" sz="1350" dirty="0">
-                <a:solidFill>
-                  <a:srgbClr val="E7EEF4"/>
-                </a:solidFill>
-                <a:latin typeface="Calibri" pitchFamily="34" charset="0"/>
-                <a:ea typeface="Calibri" pitchFamily="34" charset="-122"/>
-                <a:cs typeface="Calibri" pitchFamily="34" charset="-120"/>
-              </a:rPr>
-              <a:t>Suspect interference (heterophile, biotin, hook) when a result defies the clinic; dilution non-linearity is a clue.</a:t>
-            </a:r>
-            <a:endParaRPr lang="en-US" sz="1350" dirty="0"/>
-          </a:p>
-        </p:txBody>
-      </p:sp>
-      <p:sp>
-        <p:nvSpPr>
-          <p:cNvPr id="20" name="Shape 18"/>
-          <p:cNvSpPr/>
-          <p:nvPr/>
-        </p:nvSpPr>
-        <p:spPr>
-          <a:xfrm>
-            <a:off x="566928" y="5468112"/>
-            <a:ext cx="11057839" cy="841248"/>
-          </a:xfrm>
-          <a:prstGeom prst="roundRect">
-            <a:avLst>
-              <a:gd name="adj" fmla="val 7609"/>
-            </a:avLst>
-          </a:prstGeom>
-          <a:solidFill>
-            <a:srgbClr val="143651"/>
-          </a:solidFill>
-          <a:ln/>
-        </p:spPr>
-      </p:sp>
-      <p:sp>
-        <p:nvSpPr>
-          <p:cNvPr id="21" name="Shape 19"/>
-          <p:cNvSpPr/>
-          <p:nvPr/>
-        </p:nvSpPr>
-        <p:spPr>
-          <a:xfrm>
-            <a:off x="749808" y="5705856"/>
-            <a:ext cx="365760" cy="365760"/>
-          </a:xfrm>
-          <a:prstGeom prst="ellipse">
-            <a:avLst/>
-          </a:prstGeom>
-          <a:solidFill>
-            <a:srgbClr val="6A1B9A"/>
-          </a:solidFill>
-          <a:ln/>
-          <a:effectLst>
-            <a:outerShdw sx="100000" sy="100000" kx="0" ky="0" algn="bl" rotWithShape="0" blurRad="88900" dist="25400" dir="5400000">
-              <a:srgbClr val="22303C">
-                <a:alpha val="12000"/>
-              </a:srgbClr>
-            </a:outerShdw>
-          </a:effectLst>
-        </p:spPr>
-      </p:sp>
-      <p:sp>
-        <p:nvSpPr>
-          <p:cNvPr id="22" name="Text 20"/>
-          <p:cNvSpPr/>
-          <p:nvPr/>
-        </p:nvSpPr>
-        <p:spPr>
-          <a:xfrm>
-            <a:off x="749808" y="5705856"/>
-            <a:ext cx="365760" cy="365760"/>
-          </a:xfrm>
-          <a:prstGeom prst="rect">
-            <a:avLst/>
-          </a:prstGeom>
-          <a:noFill/>
-          <a:ln/>
-        </p:spPr>
-        <p:txBody>
-          <a:bodyPr wrap="square" lIns="0" tIns="0" rIns="0" bIns="0" rtlCol="0" anchor="ctr"/>
-          <a:lstStyle/>
-          <a:p>
-            <a:pPr algn="ctr" indent="0" marL="0">
-              <a:buNone/>
-            </a:pPr>
-            <a:r>
-              <a:rPr lang="en-US" sz="1500" b="1" dirty="0">
-                <a:solidFill>
-                  <a:srgbClr val="FFFFFF"/>
-                </a:solidFill>
-                <a:latin typeface="Calibri" pitchFamily="34" charset="0"/>
-                <a:ea typeface="Calibri" pitchFamily="34" charset="-122"/>
-                <a:cs typeface="Calibri" pitchFamily="34" charset="-120"/>
-              </a:rPr>
-              <a:t>5</a:t>
-            </a:r>
-            <a:endParaRPr lang="en-US" sz="1500" dirty="0"/>
-          </a:p>
-        </p:txBody>
-      </p:sp>
-      <p:sp>
-        <p:nvSpPr>
-          <p:cNvPr id="23" name="Text 21"/>
-          <p:cNvSpPr/>
-          <p:nvPr/>
-        </p:nvSpPr>
-        <p:spPr>
-          <a:xfrm>
-            <a:off x="1280160" y="5468112"/>
-            <a:ext cx="10143439" cy="841248"/>
-          </a:xfrm>
-          <a:prstGeom prst="rect">
-            <a:avLst/>
-          </a:prstGeom>
-          <a:noFill/>
-          <a:ln/>
-        </p:spPr>
-        <p:txBody>
-          <a:bodyPr wrap="square" lIns="0" tIns="0" rIns="0" bIns="0" rtlCol="0" anchor="ctr"/>
-          <a:lstStyle/>
-          <a:p>
-            <a:pPr algn="l" indent="0" marL="0">
-              <a:buNone/>
-            </a:pPr>
-            <a:r>
-              <a:rPr lang="en-US" sz="1350" dirty="0">
-                <a:solidFill>
-                  <a:srgbClr val="E7EEF4"/>
-                </a:solidFill>
-                <a:latin typeface="Calibri" pitchFamily="34" charset="0"/>
-                <a:ea typeface="Calibri" pitchFamily="34" charset="-122"/>
-                <a:cs typeface="Calibri" pitchFamily="34" charset="-120"/>
-              </a:rPr>
-              <a:t>A positive screen in a low-prevalence setting is often false — confirm before acting.</a:t>
-            </a:r>
-            <a:endParaRPr lang="en-US" sz="1350" dirty="0"/>
-          </a:p>
-        </p:txBody>
-      </p:sp>
-      <p:sp>
-        <p:nvSpPr>
-          <p:cNvPr id="24" name="Text 22"/>
-          <p:cNvSpPr/>
-          <p:nvPr/>
-        </p:nvSpPr>
-        <p:spPr>
-          <a:xfrm>
-            <a:off x="566928" y="6473952"/>
-            <a:ext cx="8229600" cy="274320"/>
-          </a:xfrm>
-          <a:prstGeom prst="rect">
-            <a:avLst/>
-          </a:prstGeom>
-          <a:noFill/>
-          <a:ln/>
-        </p:spPr>
-        <p:txBody>
-          <a:bodyPr wrap="square" lIns="0" tIns="0" rIns="0" bIns="0" rtlCol="0" anchor="ctr"/>
-          <a:lstStyle/>
-          <a:p>
-            <a:pPr indent="0" marL="0">
+            <a:pPr algn="r" indent="0" marL="0">
               <a:buNone/>
             </a:pPr>
             <a:r>
               <a:rPr lang="en-US" sz="850" dirty="0">
                 <a:solidFill>
-                  <a:srgbClr val="5E7488"/>
-                </a:solidFill>
-                <a:latin typeface="Calibri" pitchFamily="34" charset="0"/>
-                <a:ea typeface="Calibri" pitchFamily="34" charset="-122"/>
-                <a:cs typeface="Calibri" pitchFamily="34" charset="-120"/>
-              </a:rPr>
-              <a:t>Makassed General Hospital  ·  Department of Laboratory Medicine</a:t>
-            </a:r>
-            <a:endParaRPr lang="en-US" sz="850" dirty="0"/>
-          </a:p>
-        </p:txBody>
-      </p:sp>
-      <p:sp>
-        <p:nvSpPr>
-          <p:cNvPr id="25" name="Text 23"/>
-          <p:cNvSpPr/>
-          <p:nvPr/>
-        </p:nvSpPr>
-        <p:spPr>
-          <a:xfrm>
-            <a:off x="11002975" y="6473952"/>
-            <a:ext cx="640080" cy="274320"/>
-          </a:xfrm>
-          <a:prstGeom prst="rect">
-            <a:avLst/>
-          </a:prstGeom>
-          <a:noFill/>
-          <a:ln/>
-        </p:spPr>
-        <p:txBody>
-          <a:bodyPr wrap="square" lIns="0" tIns="0" rIns="0" bIns="0" rtlCol="0" anchor="ctr"/>
-          <a:lstStyle/>
-          <a:p>
+                  <a:srgbClr val="9AA8B4"/>
+                </a:solidFill>
+                <a:latin typeface="Calibri" pitchFamily="34" charset="0"/>
+                <a:ea typeface="Calibri" pitchFamily="34" charset="-122"/>
+                <a:cs typeface="Calibri" pitchFamily="34" charset="-120"/>
+              </a:rPr>
+              <a:t>CP Lecture Series</a:t>
+            </a:r>
+            <a:pPr algn="r" indent="0" marL="0">
+              <a:buNone/>
+            </a:pPr>
+            <a:r>
+              <a:rPr lang="en-US" sz="850" dirty="0">
+                <a:solidFill>
+                  <a:srgbClr val="DCE4EC"/>
+                </a:solidFill>
+                <a:latin typeface="Calibri" pitchFamily="34" charset="0"/>
+                <a:ea typeface="Calibri" pitchFamily="34" charset="-122"/>
+                <a:cs typeface="Calibri" pitchFamily="34" charset="-120"/>
+              </a:rPr>
+              <a:t>   ·   </a:t>
+            </a:r>
             <a:pPr algn="r" indent="0" marL="0">
               <a:buNone/>
             </a:pPr>
@@ -8030,7 +7777,7 @@
                 <a:ea typeface="Calibri" pitchFamily="34" charset="-122"/>
                 <a:cs typeface="Calibri" pitchFamily="34" charset="-120"/>
               </a:rPr>
-              <a:t>PPV</a:t>
+              <a:t>Sandwich</a:t>
             </a:r>
             <a:endParaRPr lang="en-US" sz="3600" dirty="0"/>
           </a:p>
@@ -8069,7 +7816,7 @@
                 <a:ea typeface="Calibri" pitchFamily="34" charset="-122"/>
                 <a:cs typeface="Calibri" pitchFamily="34" charset="-120"/>
               </a:rPr>
-              <a:t>Depends on prevalence — a great test can still mislead in low-probability settings</a:t>
+              <a:t>Two-antibody capture detects antigen</a:t>
             </a:r>
             <a:endParaRPr lang="en-US" sz="1150" dirty="0"/>
           </a:p>
@@ -8137,7 +7884,7 @@
                 <a:ea typeface="Calibri" pitchFamily="34" charset="-122"/>
                 <a:cs typeface="Calibri" pitchFamily="34" charset="-120"/>
               </a:rPr>
-              <a:t>Reflex</a:t>
+              <a:t>Hook</a:t>
             </a:r>
             <a:endParaRPr lang="en-US" sz="3600" dirty="0"/>
           </a:p>
@@ -8176,7 +7923,7 @@
                 <a:ea typeface="Calibri" pitchFamily="34" charset="-122"/>
                 <a:cs typeface="Calibri" pitchFamily="34" charset="-120"/>
               </a:rPr>
-              <a:t>Screen-then-confirm algorithms control false positives</a:t>
+              <a:t>Very high analyte can paradoxically read low</a:t>
             </a:r>
             <a:endParaRPr lang="en-US" sz="1150" dirty="0"/>
           </a:p>
@@ -8244,7 +7991,7 @@
                 <a:ea typeface="Calibri" pitchFamily="34" charset="-122"/>
                 <a:cs typeface="Calibri" pitchFamily="34" charset="-120"/>
               </a:rPr>
-              <a:t>Hetero</a:t>
+              <a:t>PPV</a:t>
             </a:r>
             <a:endParaRPr lang="en-US" sz="3600" dirty="0"/>
           </a:p>
@@ -8283,7 +8030,7 @@
                 <a:ea typeface="Calibri" pitchFamily="34" charset="-122"/>
                 <a:cs typeface="Calibri" pitchFamily="34" charset="-120"/>
               </a:rPr>
-              <a:t>Heterophile antibodies are the classic immunoassay trap</a:t>
+              <a:t>Prevalence governs what a positive result means</a:t>
             </a:r>
             <a:endParaRPr lang="en-US" sz="1150" dirty="0"/>
           </a:p>
@@ -8354,7 +8101,7 @@
                 <a:ea typeface="Calibri" pitchFamily="34" charset="-122"/>
                 <a:cs typeface="Calibri" pitchFamily="34" charset="-120"/>
               </a:rPr>
-              <a:t>Every serologic result is a probability statement. Knowing how sensitivity, specificity, and prevalence interact — and how immunoassays fail — lets you interpret results as a consultant rather than a number-reader.</a:t>
+              <a:t>Immunoassays underpin endocrine, cardiac, infectious, and autoimmune testing. Reliable interpretation requires understanding the assay format, the classic interferences, and how disease prevalence shapes predictive value.</a:t>
             </a:r>
             <a:endParaRPr lang="en-US" sz="1450" dirty="0"/>
           </a:p>
@@ -8397,7 +8144,7 @@
                 <a:ea typeface="Calibri" pitchFamily="34" charset="-122"/>
                 <a:cs typeface="Calibri" pitchFamily="34" charset="-120"/>
               </a:rPr>
-              <a:t>Pretest probability is part of the result: the same positive test means different things in different patients.</a:t>
+              <a:t>A result is the product of an assay format and a population — know both before you trust the number.</a:t>
             </a:r>
             <a:endParaRPr lang="en-US" sz="1300" dirty="0"/>
           </a:p>
@@ -8574,6 +8321,2845 @@
                 <a:ea typeface="Calibri" pitchFamily="34" charset="-122"/>
                 <a:cs typeface="Calibri" pitchFamily="34" charset="-120"/>
               </a:rPr>
+              <a:t>IMMUNOLOGY &amp; SEROLOGY   ·   BOARD REVIEW  ·  Q1</a:t>
+            </a:r>
+            <a:endParaRPr lang="en-US" sz="1100" dirty="0"/>
+          </a:p>
+        </p:txBody>
+      </p:sp>
+      <p:sp>
+        <p:nvSpPr>
+          <p:cNvPr id="3" name="Text 1"/>
+          <p:cNvSpPr/>
+          <p:nvPr/>
+        </p:nvSpPr>
+        <p:spPr>
+          <a:xfrm>
+            <a:off x="566928" y="713232"/>
+            <a:ext cx="11064240" cy="749808"/>
+          </a:xfrm>
+          <a:prstGeom prst="rect">
+            <a:avLst/>
+          </a:prstGeom>
+          <a:noFill/>
+          <a:ln/>
+        </p:spPr>
+        <p:txBody>
+          <a:bodyPr wrap="square" lIns="0" tIns="0" rIns="0" bIns="0" rtlCol="0" anchor="ctr"/>
+          <a:lstStyle/>
+          <a:p>
+            <a:pPr algn="l" indent="0" marL="0">
+              <a:buNone/>
+            </a:pPr>
+            <a:r>
+              <a:rPr lang="en-US" sz="2600" b="1" dirty="0">
+                <a:solidFill>
+                  <a:srgbClr val="0E3A5F"/>
+                </a:solidFill>
+                <a:latin typeface="Calibri" pitchFamily="34" charset="0"/>
+                <a:ea typeface="Calibri" pitchFamily="34" charset="-122"/>
+                <a:cs typeface="Calibri" pitchFamily="34" charset="-120"/>
+              </a:rPr>
+              <a:t>Board-Style Review</a:t>
+            </a:r>
+            <a:endParaRPr lang="en-US" sz="2600" dirty="0"/>
+          </a:p>
+        </p:txBody>
+      </p:sp>
+      <p:sp>
+        <p:nvSpPr>
+          <p:cNvPr id="4" name="Text 2"/>
+          <p:cNvSpPr/>
+          <p:nvPr/>
+        </p:nvSpPr>
+        <p:spPr>
+          <a:xfrm>
+            <a:off x="566928" y="1417320"/>
+            <a:ext cx="11057839" cy="914400"/>
+          </a:xfrm>
+          <a:prstGeom prst="rect">
+            <a:avLst/>
+          </a:prstGeom>
+          <a:noFill/>
+          <a:ln/>
+        </p:spPr>
+        <p:txBody>
+          <a:bodyPr wrap="square" lIns="0" tIns="0" rIns="0" bIns="0" rtlCol="0" anchor="t"/>
+          <a:lstStyle/>
+          <a:p>
+            <a:pPr algn="l" indent="0" marL="0">
+              <a:lnSpc>
+                <a:spcPct val="105000"/>
+              </a:lnSpc>
+              <a:buNone/>
+            </a:pPr>
+            <a:r>
+              <a:rPr lang="en-US" sz="1450" b="1" dirty="0">
+                <a:solidFill>
+                  <a:srgbClr val="1B2A38"/>
+                </a:solidFill>
+                <a:latin typeface="Calibri" pitchFamily="34" charset="0"/>
+                <a:ea typeface="Calibri" pitchFamily="34" charset="-122"/>
+                <a:cs typeface="Calibri" pitchFamily="34" charset="-120"/>
+              </a:rPr>
+              <a:t>The high-dose hook effect causes:</a:t>
+            </a:r>
+            <a:endParaRPr lang="en-US" sz="1450" dirty="0"/>
+          </a:p>
+        </p:txBody>
+      </p:sp>
+      <p:sp>
+        <p:nvSpPr>
+          <p:cNvPr id="5" name="Text 3"/>
+          <p:cNvSpPr/>
+          <p:nvPr/>
+        </p:nvSpPr>
+        <p:spPr>
+          <a:xfrm>
+            <a:off x="658368" y="2395728"/>
+            <a:ext cx="6192390" cy="3017520"/>
+          </a:xfrm>
+          <a:prstGeom prst="rect">
+            <a:avLst/>
+          </a:prstGeom>
+          <a:noFill/>
+          <a:ln/>
+        </p:spPr>
+        <p:txBody>
+          <a:bodyPr wrap="square" lIns="0" tIns="0" rIns="0" bIns="0" rtlCol="0" anchor="t"/>
+          <a:lstStyle/>
+          <a:p>
+            <a:pPr algn="l" indent="0" marL="0">
+              <a:spcAft>
+                <a:spcPts val="600"/>
+              </a:spcAft>
+              <a:buNone/>
+            </a:pPr>
+            <a:r>
+              <a:rPr lang="en-US" sz="1350" dirty="0">
+                <a:solidFill>
+                  <a:srgbClr val="33444F"/>
+                </a:solidFill>
+                <a:latin typeface="Calibri" pitchFamily="34" charset="0"/>
+                <a:ea typeface="Calibri" pitchFamily="34" charset="-122"/>
+                <a:cs typeface="Calibri" pitchFamily="34" charset="-120"/>
+              </a:rPr>
+              <a:t>A. A falsely high result</a:t>
+            </a:r>
+            <a:endParaRPr lang="en-US" sz="1350" dirty="0"/>
+          </a:p>
+          <a:p>
+            <a:pPr algn="l" indent="0" marL="0">
+              <a:spcAft>
+                <a:spcPts val="600"/>
+              </a:spcAft>
+              <a:buNone/>
+            </a:pPr>
+            <a:r>
+              <a:rPr lang="en-US" sz="1350" b="1" dirty="0">
+                <a:solidFill>
+                  <a:srgbClr val="4A1269"/>
+                </a:solidFill>
+                <a:latin typeface="Calibri" pitchFamily="34" charset="0"/>
+                <a:ea typeface="Calibri" pitchFamily="34" charset="-122"/>
+                <a:cs typeface="Calibri" pitchFamily="34" charset="-120"/>
+              </a:rPr>
+              <a:t>B. A falsely low result at very high analyte concentrations</a:t>
+            </a:r>
+            <a:endParaRPr lang="en-US" sz="1350" dirty="0"/>
+          </a:p>
+          <a:p>
+            <a:pPr algn="l" indent="0" marL="0">
+              <a:spcAft>
+                <a:spcPts val="600"/>
+              </a:spcAft>
+              <a:buNone/>
+            </a:pPr>
+            <a:r>
+              <a:rPr lang="en-US" sz="1350" dirty="0">
+                <a:solidFill>
+                  <a:srgbClr val="33444F"/>
+                </a:solidFill>
+                <a:latin typeface="Calibri" pitchFamily="34" charset="0"/>
+                <a:ea typeface="Calibri" pitchFamily="34" charset="-122"/>
+                <a:cs typeface="Calibri" pitchFamily="34" charset="-120"/>
+              </a:rPr>
+              <a:t>C. No effect</a:t>
+            </a:r>
+            <a:endParaRPr lang="en-US" sz="1350" dirty="0"/>
+          </a:p>
+          <a:p>
+            <a:pPr algn="l" indent="0" marL="0">
+              <a:spcAft>
+                <a:spcPts val="600"/>
+              </a:spcAft>
+              <a:buNone/>
+            </a:pPr>
+            <a:r>
+              <a:rPr lang="en-US" sz="1350" dirty="0">
+                <a:solidFill>
+                  <a:srgbClr val="33444F"/>
+                </a:solidFill>
+                <a:latin typeface="Calibri" pitchFamily="34" charset="0"/>
+                <a:ea typeface="Calibri" pitchFamily="34" charset="-122"/>
+                <a:cs typeface="Calibri" pitchFamily="34" charset="-120"/>
+              </a:rPr>
+              <a:t>D. Increased specificity</a:t>
+            </a:r>
+            <a:endParaRPr lang="en-US" sz="1350" dirty="0"/>
+          </a:p>
+          <a:p>
+            <a:pPr algn="l" indent="0" marL="0">
+              <a:spcAft>
+                <a:spcPts val="600"/>
+              </a:spcAft>
+              <a:buNone/>
+            </a:pPr>
+            <a:r>
+              <a:rPr lang="en-US" sz="1350" dirty="0">
+                <a:solidFill>
+                  <a:srgbClr val="33444F"/>
+                </a:solidFill>
+                <a:latin typeface="Calibri" pitchFamily="34" charset="0"/>
+                <a:ea typeface="Calibri" pitchFamily="34" charset="-122"/>
+                <a:cs typeface="Calibri" pitchFamily="34" charset="-120"/>
+              </a:rPr>
+              <a:t>E. A shifted calibration only</a:t>
+            </a:r>
+            <a:endParaRPr lang="en-US" sz="1350" dirty="0"/>
+          </a:p>
+        </p:txBody>
+      </p:sp>
+      <p:sp>
+        <p:nvSpPr>
+          <p:cNvPr id="6" name="Shape 4"/>
+          <p:cNvSpPr/>
+          <p:nvPr/>
+        </p:nvSpPr>
+        <p:spPr>
+          <a:xfrm>
+            <a:off x="7201632" y="2395728"/>
+            <a:ext cx="4423136" cy="3246120"/>
+          </a:xfrm>
+          <a:prstGeom prst="roundRect">
+            <a:avLst>
+              <a:gd name="adj" fmla="val 2535"/>
+            </a:avLst>
+          </a:prstGeom>
+          <a:solidFill>
+            <a:srgbClr val="F1E8F7"/>
+          </a:solidFill>
+          <a:ln/>
+          <a:effectLst>
+            <a:outerShdw sx="100000" sy="100000" kx="0" ky="0" algn="bl" rotWithShape="0" blurRad="88900" dist="25400" dir="5400000">
+              <a:srgbClr val="22303C">
+                <a:alpha val="12000"/>
+              </a:srgbClr>
+            </a:outerShdw>
+          </a:effectLst>
+        </p:spPr>
+      </p:sp>
+      <p:sp>
+        <p:nvSpPr>
+          <p:cNvPr id="7" name="Text 5"/>
+          <p:cNvSpPr/>
+          <p:nvPr/>
+        </p:nvSpPr>
+        <p:spPr>
+          <a:xfrm>
+            <a:off x="7439376" y="2578608"/>
+            <a:ext cx="3965936" cy="457200"/>
+          </a:xfrm>
+          <a:prstGeom prst="rect">
+            <a:avLst/>
+          </a:prstGeom>
+          <a:noFill/>
+          <a:ln/>
+        </p:spPr>
+        <p:txBody>
+          <a:bodyPr wrap="square" lIns="0" tIns="0" rIns="0" bIns="0" rtlCol="0" anchor="ctr"/>
+          <a:lstStyle/>
+          <a:p>
+            <a:pPr indent="0" marL="0">
+              <a:buNone/>
+            </a:pPr>
+            <a:r>
+              <a:rPr lang="en-US" sz="1500" b="1" dirty="0">
+                <a:solidFill>
+                  <a:srgbClr val="6A1B9A"/>
+                </a:solidFill>
+                <a:latin typeface="Calibri" pitchFamily="34" charset="0"/>
+                <a:ea typeface="Calibri" pitchFamily="34" charset="-122"/>
+                <a:cs typeface="Calibri" pitchFamily="34" charset="-120"/>
+              </a:rPr>
+              <a:t>ANSWER  </a:t>
+            </a:r>
+            <a:pPr indent="0" marL="0">
+              <a:buNone/>
+            </a:pPr>
+            <a:r>
+              <a:rPr lang="en-US" sz="1500" b="1" dirty="0">
+                <a:solidFill>
+                  <a:srgbClr val="1B2A38"/>
+                </a:solidFill>
+                <a:latin typeface="Calibri" pitchFamily="34" charset="0"/>
+                <a:ea typeface="Calibri" pitchFamily="34" charset="-122"/>
+                <a:cs typeface="Calibri" pitchFamily="34" charset="-120"/>
+              </a:rPr>
+              <a:t>B — Falsely low at very high concentrations</a:t>
+            </a:r>
+            <a:endParaRPr lang="en-US" sz="1500" dirty="0"/>
+          </a:p>
+        </p:txBody>
+      </p:sp>
+      <p:sp>
+        <p:nvSpPr>
+          <p:cNvPr id="8" name="Text 6"/>
+          <p:cNvSpPr/>
+          <p:nvPr/>
+        </p:nvSpPr>
+        <p:spPr>
+          <a:xfrm>
+            <a:off x="7439376" y="3127248"/>
+            <a:ext cx="3947648" cy="2377440"/>
+          </a:xfrm>
+          <a:prstGeom prst="rect">
+            <a:avLst/>
+          </a:prstGeom>
+          <a:noFill/>
+          <a:ln/>
+        </p:spPr>
+        <p:txBody>
+          <a:bodyPr wrap="square" lIns="0" tIns="0" rIns="0" bIns="0" rtlCol="0" anchor="t"/>
+          <a:lstStyle/>
+          <a:p>
+            <a:pPr algn="l" indent="0" marL="0">
+              <a:lnSpc>
+                <a:spcPct val="108000"/>
+              </a:lnSpc>
+              <a:buNone/>
+            </a:pPr>
+            <a:r>
+              <a:rPr lang="en-US" sz="1250" dirty="0">
+                <a:solidFill>
+                  <a:srgbClr val="33444F"/>
+                </a:solidFill>
+                <a:latin typeface="Calibri" pitchFamily="34" charset="0"/>
+                <a:ea typeface="Calibri" pitchFamily="34" charset="-122"/>
+                <a:cs typeface="Calibri" pitchFamily="34" charset="-120"/>
+              </a:rPr>
+              <a:t>Antibody saturation in one-step sandwich assays produces a paradoxically low signal; dilution reveals the true value.</a:t>
+            </a:r>
+            <a:endParaRPr lang="en-US" sz="1250" dirty="0"/>
+          </a:p>
+        </p:txBody>
+      </p:sp>
+      <p:sp>
+        <p:nvSpPr>
+          <p:cNvPr id="9" name="Text 7"/>
+          <p:cNvSpPr/>
+          <p:nvPr/>
+        </p:nvSpPr>
+        <p:spPr>
+          <a:xfrm>
+            <a:off x="566928" y="6473952"/>
+            <a:ext cx="7772400" cy="274320"/>
+          </a:xfrm>
+          <a:prstGeom prst="rect">
+            <a:avLst/>
+          </a:prstGeom>
+          <a:noFill/>
+          <a:ln/>
+        </p:spPr>
+        <p:txBody>
+          <a:bodyPr wrap="square" lIns="0" tIns="0" rIns="0" bIns="0" rtlCol="0" anchor="ctr"/>
+          <a:lstStyle/>
+          <a:p>
+            <a:pPr algn="l" indent="0" marL="0">
+              <a:buNone/>
+            </a:pPr>
+            <a:r>
+              <a:rPr lang="en-US" sz="850" dirty="0">
+                <a:solidFill>
+                  <a:srgbClr val="9AA8B4"/>
+                </a:solidFill>
+                <a:latin typeface="Calibri" pitchFamily="34" charset="0"/>
+                <a:ea typeface="Calibri" pitchFamily="34" charset="-122"/>
+                <a:cs typeface="Calibri" pitchFamily="34" charset="-120"/>
+              </a:rPr>
+              <a:t>Makassed General Hospital  ·  Department of Laboratory Medicine</a:t>
+            </a:r>
+            <a:endParaRPr lang="en-US" sz="850" dirty="0"/>
+          </a:p>
+        </p:txBody>
+      </p:sp>
+      <p:sp>
+        <p:nvSpPr>
+          <p:cNvPr id="10" name="Text 8"/>
+          <p:cNvSpPr/>
+          <p:nvPr/>
+        </p:nvSpPr>
+        <p:spPr>
+          <a:xfrm>
+            <a:off x="9814255" y="6473952"/>
+            <a:ext cx="1828800" cy="274320"/>
+          </a:xfrm>
+          <a:prstGeom prst="rect">
+            <a:avLst/>
+          </a:prstGeom>
+          <a:noFill/>
+          <a:ln/>
+        </p:spPr>
+        <p:txBody>
+          <a:bodyPr wrap="square" lIns="0" tIns="0" rIns="0" bIns="0" rtlCol="0" anchor="ctr"/>
+          <a:lstStyle/>
+          <a:p>
+            <a:pPr algn="r" indent="0" marL="0">
+              <a:buNone/>
+            </a:pPr>
+            <a:r>
+              <a:rPr lang="en-US" sz="850" dirty="0">
+                <a:solidFill>
+                  <a:srgbClr val="9AA8B4"/>
+                </a:solidFill>
+                <a:latin typeface="Calibri" pitchFamily="34" charset="0"/>
+                <a:ea typeface="Calibri" pitchFamily="34" charset="-122"/>
+                <a:cs typeface="Calibri" pitchFamily="34" charset="-120"/>
+              </a:rPr>
+              <a:t>CP Lecture Series</a:t>
+            </a:r>
+            <a:pPr algn="r" indent="0" marL="0">
+              <a:buNone/>
+            </a:pPr>
+            <a:r>
+              <a:rPr lang="en-US" sz="850" dirty="0">
+                <a:solidFill>
+                  <a:srgbClr val="DCE4EC"/>
+                </a:solidFill>
+                <a:latin typeface="Calibri" pitchFamily="34" charset="0"/>
+                <a:ea typeface="Calibri" pitchFamily="34" charset="-122"/>
+                <a:cs typeface="Calibri" pitchFamily="34" charset="-120"/>
+              </a:rPr>
+              <a:t>   ·   </a:t>
+            </a:r>
+            <a:pPr algn="r" indent="0" marL="0">
+              <a:buNone/>
+            </a:pPr>
+            <a:r>
+              <a:rPr lang="en-US" sz="850" b="1" dirty="0">
+                <a:solidFill>
+                  <a:srgbClr val="6A1B9A"/>
+                </a:solidFill>
+                <a:latin typeface="Calibri" pitchFamily="34" charset="0"/>
+                <a:ea typeface="Calibri" pitchFamily="34" charset="-122"/>
+                <a:cs typeface="Calibri" pitchFamily="34" charset="-120"/>
+              </a:rPr>
+              <a:t>17</a:t>
+            </a:r>
+            <a:endParaRPr lang="en-US" sz="850" dirty="0"/>
+          </a:p>
+        </p:txBody>
+      </p:sp>
+    </p:spTree>
+  </p:cSld>
+  <p:clrMapOvr>
+    <a:masterClrMapping/>
+  </p:clrMapOvr>
+</p:sld>
+</file>
+
+<file path=ppt/slides/slide21.xml><?xml version="1.0" encoding="utf-8"?>
+<p:sld xmlns:a="http://schemas.openxmlformats.org/drawingml/2006/main" xmlns:r="http://schemas.openxmlformats.org/officeDocument/2006/relationships" xmlns:p="http://schemas.openxmlformats.org/presentationml/2006/main">
+  <p:cSld name="Slide 21">
+    <p:bg>
+      <p:bgPr>
+        <a:solidFill>
+          <a:srgbClr val="FFFFFF"/>
+        </a:solidFill>
+      </p:bgPr>
+    </p:bg>
+    <p:spTree>
+      <p:nvGrpSpPr>
+        <p:cNvPr id="1" name=""/>
+        <p:cNvGrpSpPr/>
+        <p:nvPr/>
+      </p:nvGrpSpPr>
+      <p:grpSpPr>
+        <a:xfrm>
+          <a:off x="0" y="0"/>
+          <a:ext cx="0" cy="0"/>
+          <a:chOff x="0" y="0"/>
+          <a:chExt cx="0" cy="0"/>
+        </a:xfrm>
+      </p:grpSpPr>
+      <p:sp>
+        <p:nvSpPr>
+          <p:cNvPr id="2" name="Text 0"/>
+          <p:cNvSpPr/>
+          <p:nvPr/>
+        </p:nvSpPr>
+        <p:spPr>
+          <a:xfrm>
+            <a:off x="566928" y="329184"/>
+            <a:ext cx="10515600" cy="310896"/>
+          </a:xfrm>
+          <a:prstGeom prst="rect">
+            <a:avLst/>
+          </a:prstGeom>
+          <a:noFill/>
+          <a:ln/>
+        </p:spPr>
+        <p:txBody>
+          <a:bodyPr wrap="square" lIns="0" tIns="0" rIns="0" bIns="0" rtlCol="0" anchor="ctr"/>
+          <a:lstStyle/>
+          <a:p>
+            <a:pPr algn="l" indent="0" marL="0">
+              <a:buNone/>
+            </a:pPr>
+            <a:r>
+              <a:rPr lang="en-US" sz="1100" b="1" spc="150" kern="0" dirty="0">
+                <a:solidFill>
+                  <a:srgbClr val="6A1B9A"/>
+                </a:solidFill>
+                <a:latin typeface="Calibri" pitchFamily="34" charset="0"/>
+                <a:ea typeface="Calibri" pitchFamily="34" charset="-122"/>
+                <a:cs typeface="Calibri" pitchFamily="34" charset="-120"/>
+              </a:rPr>
+              <a:t>IMMUNOLOGY &amp; SEROLOGY   ·   BOARD REVIEW  ·  Q2</a:t>
+            </a:r>
+            <a:endParaRPr lang="en-US" sz="1100" dirty="0"/>
+          </a:p>
+        </p:txBody>
+      </p:sp>
+      <p:sp>
+        <p:nvSpPr>
+          <p:cNvPr id="3" name="Text 1"/>
+          <p:cNvSpPr/>
+          <p:nvPr/>
+        </p:nvSpPr>
+        <p:spPr>
+          <a:xfrm>
+            <a:off x="566928" y="713232"/>
+            <a:ext cx="11064240" cy="749808"/>
+          </a:xfrm>
+          <a:prstGeom prst="rect">
+            <a:avLst/>
+          </a:prstGeom>
+          <a:noFill/>
+          <a:ln/>
+        </p:spPr>
+        <p:txBody>
+          <a:bodyPr wrap="square" lIns="0" tIns="0" rIns="0" bIns="0" rtlCol="0" anchor="ctr"/>
+          <a:lstStyle/>
+          <a:p>
+            <a:pPr algn="l" indent="0" marL="0">
+              <a:buNone/>
+            </a:pPr>
+            <a:r>
+              <a:rPr lang="en-US" sz="2600" b="1" dirty="0">
+                <a:solidFill>
+                  <a:srgbClr val="0E3A5F"/>
+                </a:solidFill>
+                <a:latin typeface="Calibri" pitchFamily="34" charset="0"/>
+                <a:ea typeface="Calibri" pitchFamily="34" charset="-122"/>
+                <a:cs typeface="Calibri" pitchFamily="34" charset="-120"/>
+              </a:rPr>
+              <a:t>Board-Style Review</a:t>
+            </a:r>
+            <a:endParaRPr lang="en-US" sz="2600" dirty="0"/>
+          </a:p>
+        </p:txBody>
+      </p:sp>
+      <p:sp>
+        <p:nvSpPr>
+          <p:cNvPr id="4" name="Text 2"/>
+          <p:cNvSpPr/>
+          <p:nvPr/>
+        </p:nvSpPr>
+        <p:spPr>
+          <a:xfrm>
+            <a:off x="566928" y="1417320"/>
+            <a:ext cx="11057839" cy="914400"/>
+          </a:xfrm>
+          <a:prstGeom prst="rect">
+            <a:avLst/>
+          </a:prstGeom>
+          <a:noFill/>
+          <a:ln/>
+        </p:spPr>
+        <p:txBody>
+          <a:bodyPr wrap="square" lIns="0" tIns="0" rIns="0" bIns="0" rtlCol="0" anchor="t"/>
+          <a:lstStyle/>
+          <a:p>
+            <a:pPr algn="l" indent="0" marL="0">
+              <a:lnSpc>
+                <a:spcPct val="105000"/>
+              </a:lnSpc>
+              <a:buNone/>
+            </a:pPr>
+            <a:r>
+              <a:rPr lang="en-US" sz="1450" b="1" dirty="0">
+                <a:solidFill>
+                  <a:srgbClr val="1B2A38"/>
+                </a:solidFill>
+                <a:latin typeface="Calibri" pitchFamily="34" charset="0"/>
+                <a:ea typeface="Calibri" pitchFamily="34" charset="-122"/>
+                <a:cs typeface="Calibri" pitchFamily="34" charset="-120"/>
+              </a:rPr>
+              <a:t>Positive predictive value decreases when:</a:t>
+            </a:r>
+            <a:endParaRPr lang="en-US" sz="1450" dirty="0"/>
+          </a:p>
+        </p:txBody>
+      </p:sp>
+      <p:sp>
+        <p:nvSpPr>
+          <p:cNvPr id="5" name="Text 3"/>
+          <p:cNvSpPr/>
+          <p:nvPr/>
+        </p:nvSpPr>
+        <p:spPr>
+          <a:xfrm>
+            <a:off x="658368" y="2395728"/>
+            <a:ext cx="6192390" cy="3017520"/>
+          </a:xfrm>
+          <a:prstGeom prst="rect">
+            <a:avLst/>
+          </a:prstGeom>
+          <a:noFill/>
+          <a:ln/>
+        </p:spPr>
+        <p:txBody>
+          <a:bodyPr wrap="square" lIns="0" tIns="0" rIns="0" bIns="0" rtlCol="0" anchor="t"/>
+          <a:lstStyle/>
+          <a:p>
+            <a:pPr algn="l" indent="0" marL="0">
+              <a:spcAft>
+                <a:spcPts val="600"/>
+              </a:spcAft>
+              <a:buNone/>
+            </a:pPr>
+            <a:r>
+              <a:rPr lang="en-US" sz="1350" dirty="0">
+                <a:solidFill>
+                  <a:srgbClr val="33444F"/>
+                </a:solidFill>
+                <a:latin typeface="Calibri" pitchFamily="34" charset="0"/>
+                <a:ea typeface="Calibri" pitchFamily="34" charset="-122"/>
+                <a:cs typeface="Calibri" pitchFamily="34" charset="-120"/>
+              </a:rPr>
+              <a:t>A. Sensitivity increases</a:t>
+            </a:r>
+            <a:endParaRPr lang="en-US" sz="1350" dirty="0"/>
+          </a:p>
+          <a:p>
+            <a:pPr algn="l" indent="0" marL="0">
+              <a:spcAft>
+                <a:spcPts val="600"/>
+              </a:spcAft>
+              <a:buNone/>
+            </a:pPr>
+            <a:r>
+              <a:rPr lang="en-US" sz="1350" dirty="0">
+                <a:solidFill>
+                  <a:srgbClr val="33444F"/>
+                </a:solidFill>
+                <a:latin typeface="Calibri" pitchFamily="34" charset="0"/>
+                <a:ea typeface="Calibri" pitchFamily="34" charset="-122"/>
+                <a:cs typeface="Calibri" pitchFamily="34" charset="-120"/>
+              </a:rPr>
+              <a:t>B. Specificity increases</a:t>
+            </a:r>
+            <a:endParaRPr lang="en-US" sz="1350" dirty="0"/>
+          </a:p>
+          <a:p>
+            <a:pPr algn="l" indent="0" marL="0">
+              <a:spcAft>
+                <a:spcPts val="600"/>
+              </a:spcAft>
+              <a:buNone/>
+            </a:pPr>
+            <a:r>
+              <a:rPr lang="en-US" sz="1350" b="1" dirty="0">
+                <a:solidFill>
+                  <a:srgbClr val="4A1269"/>
+                </a:solidFill>
+                <a:latin typeface="Calibri" pitchFamily="34" charset="0"/>
+                <a:ea typeface="Calibri" pitchFamily="34" charset="-122"/>
+                <a:cs typeface="Calibri" pitchFamily="34" charset="-120"/>
+              </a:rPr>
+              <a:t>C. Disease prevalence decreases</a:t>
+            </a:r>
+            <a:endParaRPr lang="en-US" sz="1350" dirty="0"/>
+          </a:p>
+          <a:p>
+            <a:pPr algn="l" indent="0" marL="0">
+              <a:spcAft>
+                <a:spcPts val="600"/>
+              </a:spcAft>
+              <a:buNone/>
+            </a:pPr>
+            <a:r>
+              <a:rPr lang="en-US" sz="1350" dirty="0">
+                <a:solidFill>
+                  <a:srgbClr val="33444F"/>
+                </a:solidFill>
+                <a:latin typeface="Calibri" pitchFamily="34" charset="0"/>
+                <a:ea typeface="Calibri" pitchFamily="34" charset="-122"/>
+                <a:cs typeface="Calibri" pitchFamily="34" charset="-120"/>
+              </a:rPr>
+              <a:t>D. The cutoff is raised</a:t>
+            </a:r>
+            <a:endParaRPr lang="en-US" sz="1350" dirty="0"/>
+          </a:p>
+          <a:p>
+            <a:pPr algn="l" indent="0" marL="0">
+              <a:spcAft>
+                <a:spcPts val="600"/>
+              </a:spcAft>
+              <a:buNone/>
+            </a:pPr>
+            <a:r>
+              <a:rPr lang="en-US" sz="1350" dirty="0">
+                <a:solidFill>
+                  <a:srgbClr val="33444F"/>
+                </a:solidFill>
+                <a:latin typeface="Calibri" pitchFamily="34" charset="0"/>
+                <a:ea typeface="Calibri" pitchFamily="34" charset="-122"/>
+                <a:cs typeface="Calibri" pitchFamily="34" charset="-120"/>
+              </a:rPr>
+              <a:t>E. Precision improves</a:t>
+            </a:r>
+            <a:endParaRPr lang="en-US" sz="1350" dirty="0"/>
+          </a:p>
+        </p:txBody>
+      </p:sp>
+      <p:sp>
+        <p:nvSpPr>
+          <p:cNvPr id="6" name="Shape 4"/>
+          <p:cNvSpPr/>
+          <p:nvPr/>
+        </p:nvSpPr>
+        <p:spPr>
+          <a:xfrm>
+            <a:off x="7201632" y="2395728"/>
+            <a:ext cx="4423136" cy="3246120"/>
+          </a:xfrm>
+          <a:prstGeom prst="roundRect">
+            <a:avLst>
+              <a:gd name="adj" fmla="val 2535"/>
+            </a:avLst>
+          </a:prstGeom>
+          <a:solidFill>
+            <a:srgbClr val="F1E8F7"/>
+          </a:solidFill>
+          <a:ln/>
+          <a:effectLst>
+            <a:outerShdw sx="100000" sy="100000" kx="0" ky="0" algn="bl" rotWithShape="0" blurRad="88900" dist="25400" dir="5400000">
+              <a:srgbClr val="22303C">
+                <a:alpha val="12000"/>
+              </a:srgbClr>
+            </a:outerShdw>
+          </a:effectLst>
+        </p:spPr>
+      </p:sp>
+      <p:sp>
+        <p:nvSpPr>
+          <p:cNvPr id="7" name="Text 5"/>
+          <p:cNvSpPr/>
+          <p:nvPr/>
+        </p:nvSpPr>
+        <p:spPr>
+          <a:xfrm>
+            <a:off x="7439376" y="2578608"/>
+            <a:ext cx="3965936" cy="457200"/>
+          </a:xfrm>
+          <a:prstGeom prst="rect">
+            <a:avLst/>
+          </a:prstGeom>
+          <a:noFill/>
+          <a:ln/>
+        </p:spPr>
+        <p:txBody>
+          <a:bodyPr wrap="square" lIns="0" tIns="0" rIns="0" bIns="0" rtlCol="0" anchor="ctr"/>
+          <a:lstStyle/>
+          <a:p>
+            <a:pPr indent="0" marL="0">
+              <a:buNone/>
+            </a:pPr>
+            <a:r>
+              <a:rPr lang="en-US" sz="1500" b="1" dirty="0">
+                <a:solidFill>
+                  <a:srgbClr val="6A1B9A"/>
+                </a:solidFill>
+                <a:latin typeface="Calibri" pitchFamily="34" charset="0"/>
+                <a:ea typeface="Calibri" pitchFamily="34" charset="-122"/>
+                <a:cs typeface="Calibri" pitchFamily="34" charset="-120"/>
+              </a:rPr>
+              <a:t>ANSWER  </a:t>
+            </a:r>
+            <a:pPr indent="0" marL="0">
+              <a:buNone/>
+            </a:pPr>
+            <a:r>
+              <a:rPr lang="en-US" sz="1500" b="1" dirty="0">
+                <a:solidFill>
+                  <a:srgbClr val="1B2A38"/>
+                </a:solidFill>
+                <a:latin typeface="Calibri" pitchFamily="34" charset="0"/>
+                <a:ea typeface="Calibri" pitchFamily="34" charset="-122"/>
+                <a:cs typeface="Calibri" pitchFamily="34" charset="-120"/>
+              </a:rPr>
+              <a:t>C — Prevalence decreases</a:t>
+            </a:r>
+            <a:endParaRPr lang="en-US" sz="1500" dirty="0"/>
+          </a:p>
+        </p:txBody>
+      </p:sp>
+      <p:sp>
+        <p:nvSpPr>
+          <p:cNvPr id="8" name="Text 6"/>
+          <p:cNvSpPr/>
+          <p:nvPr/>
+        </p:nvSpPr>
+        <p:spPr>
+          <a:xfrm>
+            <a:off x="7439376" y="3127248"/>
+            <a:ext cx="3947648" cy="2377440"/>
+          </a:xfrm>
+          <a:prstGeom prst="rect">
+            <a:avLst/>
+          </a:prstGeom>
+          <a:noFill/>
+          <a:ln/>
+        </p:spPr>
+        <p:txBody>
+          <a:bodyPr wrap="square" lIns="0" tIns="0" rIns="0" bIns="0" rtlCol="0" anchor="t"/>
+          <a:lstStyle/>
+          <a:p>
+            <a:pPr algn="l" indent="0" marL="0">
+              <a:lnSpc>
+                <a:spcPct val="108000"/>
+              </a:lnSpc>
+              <a:buNone/>
+            </a:pPr>
+            <a:r>
+              <a:rPr lang="en-US" sz="1250" dirty="0">
+                <a:solidFill>
+                  <a:srgbClr val="33444F"/>
+                </a:solidFill>
+                <a:latin typeface="Calibri" pitchFamily="34" charset="0"/>
+                <a:ea typeface="Calibri" pitchFamily="34" charset="-122"/>
+                <a:cs typeface="Calibri" pitchFamily="34" charset="-120"/>
+              </a:rPr>
+              <a:t>With fixed sensitivity/specificity, lower prevalence yields more false positives and a lower PPV.</a:t>
+            </a:r>
+            <a:endParaRPr lang="en-US" sz="1250" dirty="0"/>
+          </a:p>
+        </p:txBody>
+      </p:sp>
+      <p:sp>
+        <p:nvSpPr>
+          <p:cNvPr id="9" name="Text 7"/>
+          <p:cNvSpPr/>
+          <p:nvPr/>
+        </p:nvSpPr>
+        <p:spPr>
+          <a:xfrm>
+            <a:off x="566928" y="6473952"/>
+            <a:ext cx="7772400" cy="274320"/>
+          </a:xfrm>
+          <a:prstGeom prst="rect">
+            <a:avLst/>
+          </a:prstGeom>
+          <a:noFill/>
+          <a:ln/>
+        </p:spPr>
+        <p:txBody>
+          <a:bodyPr wrap="square" lIns="0" tIns="0" rIns="0" bIns="0" rtlCol="0" anchor="ctr"/>
+          <a:lstStyle/>
+          <a:p>
+            <a:pPr algn="l" indent="0" marL="0">
+              <a:buNone/>
+            </a:pPr>
+            <a:r>
+              <a:rPr lang="en-US" sz="850" dirty="0">
+                <a:solidFill>
+                  <a:srgbClr val="9AA8B4"/>
+                </a:solidFill>
+                <a:latin typeface="Calibri" pitchFamily="34" charset="0"/>
+                <a:ea typeface="Calibri" pitchFamily="34" charset="-122"/>
+                <a:cs typeface="Calibri" pitchFamily="34" charset="-120"/>
+              </a:rPr>
+              <a:t>Makassed General Hospital  ·  Department of Laboratory Medicine</a:t>
+            </a:r>
+            <a:endParaRPr lang="en-US" sz="850" dirty="0"/>
+          </a:p>
+        </p:txBody>
+      </p:sp>
+      <p:sp>
+        <p:nvSpPr>
+          <p:cNvPr id="10" name="Text 8"/>
+          <p:cNvSpPr/>
+          <p:nvPr/>
+        </p:nvSpPr>
+        <p:spPr>
+          <a:xfrm>
+            <a:off x="9814255" y="6473952"/>
+            <a:ext cx="1828800" cy="274320"/>
+          </a:xfrm>
+          <a:prstGeom prst="rect">
+            <a:avLst/>
+          </a:prstGeom>
+          <a:noFill/>
+          <a:ln/>
+        </p:spPr>
+        <p:txBody>
+          <a:bodyPr wrap="square" lIns="0" tIns="0" rIns="0" bIns="0" rtlCol="0" anchor="ctr"/>
+          <a:lstStyle/>
+          <a:p>
+            <a:pPr algn="r" indent="0" marL="0">
+              <a:buNone/>
+            </a:pPr>
+            <a:r>
+              <a:rPr lang="en-US" sz="850" dirty="0">
+                <a:solidFill>
+                  <a:srgbClr val="9AA8B4"/>
+                </a:solidFill>
+                <a:latin typeface="Calibri" pitchFamily="34" charset="0"/>
+                <a:ea typeface="Calibri" pitchFamily="34" charset="-122"/>
+                <a:cs typeface="Calibri" pitchFamily="34" charset="-120"/>
+              </a:rPr>
+              <a:t>CP Lecture Series</a:t>
+            </a:r>
+            <a:pPr algn="r" indent="0" marL="0">
+              <a:buNone/>
+            </a:pPr>
+            <a:r>
+              <a:rPr lang="en-US" sz="850" dirty="0">
+                <a:solidFill>
+                  <a:srgbClr val="DCE4EC"/>
+                </a:solidFill>
+                <a:latin typeface="Calibri" pitchFamily="34" charset="0"/>
+                <a:ea typeface="Calibri" pitchFamily="34" charset="-122"/>
+                <a:cs typeface="Calibri" pitchFamily="34" charset="-120"/>
+              </a:rPr>
+              <a:t>   ·   </a:t>
+            </a:r>
+            <a:pPr algn="r" indent="0" marL="0">
+              <a:buNone/>
+            </a:pPr>
+            <a:r>
+              <a:rPr lang="en-US" sz="850" b="1" dirty="0">
+                <a:solidFill>
+                  <a:srgbClr val="6A1B9A"/>
+                </a:solidFill>
+                <a:latin typeface="Calibri" pitchFamily="34" charset="0"/>
+                <a:ea typeface="Calibri" pitchFamily="34" charset="-122"/>
+                <a:cs typeface="Calibri" pitchFamily="34" charset="-120"/>
+              </a:rPr>
+              <a:t>18</a:t>
+            </a:r>
+            <a:endParaRPr lang="en-US" sz="850" dirty="0"/>
+          </a:p>
+        </p:txBody>
+      </p:sp>
+    </p:spTree>
+  </p:cSld>
+  <p:clrMapOvr>
+    <a:masterClrMapping/>
+  </p:clrMapOvr>
+</p:sld>
+</file>
+
+<file path=ppt/slides/slide22.xml><?xml version="1.0" encoding="utf-8"?>
+<p:sld xmlns:a="http://schemas.openxmlformats.org/drawingml/2006/main" xmlns:r="http://schemas.openxmlformats.org/officeDocument/2006/relationships" xmlns:p="http://schemas.openxmlformats.org/presentationml/2006/main">
+  <p:cSld name="Slide 22">
+    <p:bg>
+      <p:bgPr>
+        <a:solidFill>
+          <a:srgbClr val="FFFFFF"/>
+        </a:solidFill>
+      </p:bgPr>
+    </p:bg>
+    <p:spTree>
+      <p:nvGrpSpPr>
+        <p:cNvPr id="1" name=""/>
+        <p:cNvGrpSpPr/>
+        <p:nvPr/>
+      </p:nvGrpSpPr>
+      <p:grpSpPr>
+        <a:xfrm>
+          <a:off x="0" y="0"/>
+          <a:ext cx="0" cy="0"/>
+          <a:chOff x="0" y="0"/>
+          <a:chExt cx="0" cy="0"/>
+        </a:xfrm>
+      </p:grpSpPr>
+      <p:sp>
+        <p:nvSpPr>
+          <p:cNvPr id="2" name="Text 0"/>
+          <p:cNvSpPr/>
+          <p:nvPr/>
+        </p:nvSpPr>
+        <p:spPr>
+          <a:xfrm>
+            <a:off x="566928" y="329184"/>
+            <a:ext cx="10515600" cy="310896"/>
+          </a:xfrm>
+          <a:prstGeom prst="rect">
+            <a:avLst/>
+          </a:prstGeom>
+          <a:noFill/>
+          <a:ln/>
+        </p:spPr>
+        <p:txBody>
+          <a:bodyPr wrap="square" lIns="0" tIns="0" rIns="0" bIns="0" rtlCol="0" anchor="ctr"/>
+          <a:lstStyle/>
+          <a:p>
+            <a:pPr algn="l" indent="0" marL="0">
+              <a:buNone/>
+            </a:pPr>
+            <a:r>
+              <a:rPr lang="en-US" sz="1100" b="1" spc="150" kern="0" dirty="0">
+                <a:solidFill>
+                  <a:srgbClr val="6A1B9A"/>
+                </a:solidFill>
+                <a:latin typeface="Calibri" pitchFamily="34" charset="0"/>
+                <a:ea typeface="Calibri" pitchFamily="34" charset="-122"/>
+                <a:cs typeface="Calibri" pitchFamily="34" charset="-120"/>
+              </a:rPr>
+              <a:t>IMMUNOLOGY &amp; SEROLOGY   ·   BOARD REVIEW  ·  Q3</a:t>
+            </a:r>
+            <a:endParaRPr lang="en-US" sz="1100" dirty="0"/>
+          </a:p>
+        </p:txBody>
+      </p:sp>
+      <p:sp>
+        <p:nvSpPr>
+          <p:cNvPr id="3" name="Text 1"/>
+          <p:cNvSpPr/>
+          <p:nvPr/>
+        </p:nvSpPr>
+        <p:spPr>
+          <a:xfrm>
+            <a:off x="566928" y="713232"/>
+            <a:ext cx="11064240" cy="749808"/>
+          </a:xfrm>
+          <a:prstGeom prst="rect">
+            <a:avLst/>
+          </a:prstGeom>
+          <a:noFill/>
+          <a:ln/>
+        </p:spPr>
+        <p:txBody>
+          <a:bodyPr wrap="square" lIns="0" tIns="0" rIns="0" bIns="0" rtlCol="0" anchor="ctr"/>
+          <a:lstStyle/>
+          <a:p>
+            <a:pPr algn="l" indent="0" marL="0">
+              <a:buNone/>
+            </a:pPr>
+            <a:r>
+              <a:rPr lang="en-US" sz="2600" b="1" dirty="0">
+                <a:solidFill>
+                  <a:srgbClr val="0E3A5F"/>
+                </a:solidFill>
+                <a:latin typeface="Calibri" pitchFamily="34" charset="0"/>
+                <a:ea typeface="Calibri" pitchFamily="34" charset="-122"/>
+                <a:cs typeface="Calibri" pitchFamily="34" charset="-120"/>
+              </a:rPr>
+              <a:t>Board-Style Review</a:t>
+            </a:r>
+            <a:endParaRPr lang="en-US" sz="2600" dirty="0"/>
+          </a:p>
+        </p:txBody>
+      </p:sp>
+      <p:sp>
+        <p:nvSpPr>
+          <p:cNvPr id="4" name="Text 2"/>
+          <p:cNvSpPr/>
+          <p:nvPr/>
+        </p:nvSpPr>
+        <p:spPr>
+          <a:xfrm>
+            <a:off x="566928" y="1417320"/>
+            <a:ext cx="11057839" cy="914400"/>
+          </a:xfrm>
+          <a:prstGeom prst="rect">
+            <a:avLst/>
+          </a:prstGeom>
+          <a:noFill/>
+          <a:ln/>
+        </p:spPr>
+        <p:txBody>
+          <a:bodyPr wrap="square" lIns="0" tIns="0" rIns="0" bIns="0" rtlCol="0" anchor="t"/>
+          <a:lstStyle/>
+          <a:p>
+            <a:pPr algn="l" indent="0" marL="0">
+              <a:lnSpc>
+                <a:spcPct val="105000"/>
+              </a:lnSpc>
+              <a:buNone/>
+            </a:pPr>
+            <a:r>
+              <a:rPr lang="en-US" sz="1450" b="1" dirty="0">
+                <a:solidFill>
+                  <a:srgbClr val="1B2A38"/>
+                </a:solidFill>
+                <a:latin typeface="Calibri" pitchFamily="34" charset="0"/>
+                <a:ea typeface="Calibri" pitchFamily="34" charset="-122"/>
+                <a:cs typeface="Calibri" pitchFamily="34" charset="-120"/>
+              </a:rPr>
+              <a:t>A sandwich immunoassay is best suited for:</a:t>
+            </a:r>
+            <a:endParaRPr lang="en-US" sz="1450" dirty="0"/>
+          </a:p>
+        </p:txBody>
+      </p:sp>
+      <p:sp>
+        <p:nvSpPr>
+          <p:cNvPr id="5" name="Text 3"/>
+          <p:cNvSpPr/>
+          <p:nvPr/>
+        </p:nvSpPr>
+        <p:spPr>
+          <a:xfrm>
+            <a:off x="658368" y="2395728"/>
+            <a:ext cx="6192390" cy="3017520"/>
+          </a:xfrm>
+          <a:prstGeom prst="rect">
+            <a:avLst/>
+          </a:prstGeom>
+          <a:noFill/>
+          <a:ln/>
+        </p:spPr>
+        <p:txBody>
+          <a:bodyPr wrap="square" lIns="0" tIns="0" rIns="0" bIns="0" rtlCol="0" anchor="t"/>
+          <a:lstStyle/>
+          <a:p>
+            <a:pPr algn="l" indent="0" marL="0">
+              <a:spcAft>
+                <a:spcPts val="600"/>
+              </a:spcAft>
+              <a:buNone/>
+            </a:pPr>
+            <a:r>
+              <a:rPr lang="en-US" sz="1350" dirty="0">
+                <a:solidFill>
+                  <a:srgbClr val="33444F"/>
+                </a:solidFill>
+                <a:latin typeface="Calibri" pitchFamily="34" charset="0"/>
+                <a:ea typeface="Calibri" pitchFamily="34" charset="-122"/>
+                <a:cs typeface="Calibri" pitchFamily="34" charset="-120"/>
+              </a:rPr>
+              <a:t>A. Small haptens with one epitope</a:t>
+            </a:r>
+            <a:endParaRPr lang="en-US" sz="1350" dirty="0"/>
+          </a:p>
+          <a:p>
+            <a:pPr algn="l" indent="0" marL="0">
+              <a:spcAft>
+                <a:spcPts val="600"/>
+              </a:spcAft>
+              <a:buNone/>
+            </a:pPr>
+            <a:r>
+              <a:rPr lang="en-US" sz="1350" b="1" dirty="0">
+                <a:solidFill>
+                  <a:srgbClr val="4A1269"/>
+                </a:solidFill>
+                <a:latin typeface="Calibri" pitchFamily="34" charset="0"/>
+                <a:ea typeface="Calibri" pitchFamily="34" charset="-122"/>
+                <a:cs typeface="Calibri" pitchFamily="34" charset="-120"/>
+              </a:rPr>
+              <a:t>B. Large analytes with two or more epitopes</a:t>
+            </a:r>
+            <a:endParaRPr lang="en-US" sz="1350" dirty="0"/>
+          </a:p>
+          <a:p>
+            <a:pPr algn="l" indent="0" marL="0">
+              <a:spcAft>
+                <a:spcPts val="600"/>
+              </a:spcAft>
+              <a:buNone/>
+            </a:pPr>
+            <a:r>
+              <a:rPr lang="en-US" sz="1350" dirty="0">
+                <a:solidFill>
+                  <a:srgbClr val="33444F"/>
+                </a:solidFill>
+                <a:latin typeface="Calibri" pitchFamily="34" charset="0"/>
+                <a:ea typeface="Calibri" pitchFamily="34" charset="-122"/>
+                <a:cs typeface="Calibri" pitchFamily="34" charset="-120"/>
+              </a:rPr>
+              <a:t>C. Electrolytes</a:t>
+            </a:r>
+            <a:endParaRPr lang="en-US" sz="1350" dirty="0"/>
+          </a:p>
+          <a:p>
+            <a:pPr algn="l" indent="0" marL="0">
+              <a:spcAft>
+                <a:spcPts val="600"/>
+              </a:spcAft>
+              <a:buNone/>
+            </a:pPr>
+            <a:r>
+              <a:rPr lang="en-US" sz="1350" dirty="0">
+                <a:solidFill>
+                  <a:srgbClr val="33444F"/>
+                </a:solidFill>
+                <a:latin typeface="Calibri" pitchFamily="34" charset="0"/>
+                <a:ea typeface="Calibri" pitchFamily="34" charset="-122"/>
+                <a:cs typeface="Calibri" pitchFamily="34" charset="-120"/>
+              </a:rPr>
+              <a:t>D. Blood gases</a:t>
+            </a:r>
+            <a:endParaRPr lang="en-US" sz="1350" dirty="0"/>
+          </a:p>
+          <a:p>
+            <a:pPr algn="l" indent="0" marL="0">
+              <a:spcAft>
+                <a:spcPts val="600"/>
+              </a:spcAft>
+              <a:buNone/>
+            </a:pPr>
+            <a:r>
+              <a:rPr lang="en-US" sz="1350" dirty="0">
+                <a:solidFill>
+                  <a:srgbClr val="33444F"/>
+                </a:solidFill>
+                <a:latin typeface="Calibri" pitchFamily="34" charset="0"/>
+                <a:ea typeface="Calibri" pitchFamily="34" charset="-122"/>
+                <a:cs typeface="Calibri" pitchFamily="34" charset="-120"/>
+              </a:rPr>
+              <a:t>E. Osmolality</a:t>
+            </a:r>
+            <a:endParaRPr lang="en-US" sz="1350" dirty="0"/>
+          </a:p>
+        </p:txBody>
+      </p:sp>
+      <p:sp>
+        <p:nvSpPr>
+          <p:cNvPr id="6" name="Shape 4"/>
+          <p:cNvSpPr/>
+          <p:nvPr/>
+        </p:nvSpPr>
+        <p:spPr>
+          <a:xfrm>
+            <a:off x="7201632" y="2395728"/>
+            <a:ext cx="4423136" cy="3246120"/>
+          </a:xfrm>
+          <a:prstGeom prst="roundRect">
+            <a:avLst>
+              <a:gd name="adj" fmla="val 2535"/>
+            </a:avLst>
+          </a:prstGeom>
+          <a:solidFill>
+            <a:srgbClr val="F1E8F7"/>
+          </a:solidFill>
+          <a:ln/>
+          <a:effectLst>
+            <a:outerShdw sx="100000" sy="100000" kx="0" ky="0" algn="bl" rotWithShape="0" blurRad="88900" dist="25400" dir="5400000">
+              <a:srgbClr val="22303C">
+                <a:alpha val="12000"/>
+              </a:srgbClr>
+            </a:outerShdw>
+          </a:effectLst>
+        </p:spPr>
+      </p:sp>
+      <p:sp>
+        <p:nvSpPr>
+          <p:cNvPr id="7" name="Text 5"/>
+          <p:cNvSpPr/>
+          <p:nvPr/>
+        </p:nvSpPr>
+        <p:spPr>
+          <a:xfrm>
+            <a:off x="7439376" y="2578608"/>
+            <a:ext cx="3965936" cy="457200"/>
+          </a:xfrm>
+          <a:prstGeom prst="rect">
+            <a:avLst/>
+          </a:prstGeom>
+          <a:noFill/>
+          <a:ln/>
+        </p:spPr>
+        <p:txBody>
+          <a:bodyPr wrap="square" lIns="0" tIns="0" rIns="0" bIns="0" rtlCol="0" anchor="ctr"/>
+          <a:lstStyle/>
+          <a:p>
+            <a:pPr indent="0" marL="0">
+              <a:buNone/>
+            </a:pPr>
+            <a:r>
+              <a:rPr lang="en-US" sz="1500" b="1" dirty="0">
+                <a:solidFill>
+                  <a:srgbClr val="6A1B9A"/>
+                </a:solidFill>
+                <a:latin typeface="Calibri" pitchFamily="34" charset="0"/>
+                <a:ea typeface="Calibri" pitchFamily="34" charset="-122"/>
+                <a:cs typeface="Calibri" pitchFamily="34" charset="-120"/>
+              </a:rPr>
+              <a:t>ANSWER  </a:t>
+            </a:r>
+            <a:pPr indent="0" marL="0">
+              <a:buNone/>
+            </a:pPr>
+            <a:r>
+              <a:rPr lang="en-US" sz="1500" b="1" dirty="0">
+                <a:solidFill>
+                  <a:srgbClr val="1B2A38"/>
+                </a:solidFill>
+                <a:latin typeface="Calibri" pitchFamily="34" charset="0"/>
+                <a:ea typeface="Calibri" pitchFamily="34" charset="-122"/>
+                <a:cs typeface="Calibri" pitchFamily="34" charset="-120"/>
+              </a:rPr>
+              <a:t>B — Large analytes with ≥2 epitopes</a:t>
+            </a:r>
+            <a:endParaRPr lang="en-US" sz="1500" dirty="0"/>
+          </a:p>
+        </p:txBody>
+      </p:sp>
+      <p:sp>
+        <p:nvSpPr>
+          <p:cNvPr id="8" name="Text 6"/>
+          <p:cNvSpPr/>
+          <p:nvPr/>
+        </p:nvSpPr>
+        <p:spPr>
+          <a:xfrm>
+            <a:off x="7439376" y="3127248"/>
+            <a:ext cx="3947648" cy="2377440"/>
+          </a:xfrm>
+          <a:prstGeom prst="rect">
+            <a:avLst/>
+          </a:prstGeom>
+          <a:noFill/>
+          <a:ln/>
+        </p:spPr>
+        <p:txBody>
+          <a:bodyPr wrap="square" lIns="0" tIns="0" rIns="0" bIns="0" rtlCol="0" anchor="t"/>
+          <a:lstStyle/>
+          <a:p>
+            <a:pPr algn="l" indent="0" marL="0">
+              <a:lnSpc>
+                <a:spcPct val="108000"/>
+              </a:lnSpc>
+              <a:buNone/>
+            </a:pPr>
+            <a:r>
+              <a:rPr lang="en-US" sz="1250" dirty="0">
+                <a:solidFill>
+                  <a:srgbClr val="33444F"/>
+                </a:solidFill>
+                <a:latin typeface="Calibri" pitchFamily="34" charset="0"/>
+                <a:ea typeface="Calibri" pitchFamily="34" charset="-122"/>
+                <a:cs typeface="Calibri" pitchFamily="34" charset="-120"/>
+              </a:rPr>
+              <a:t>Two antibodies must bind distinct epitopes; small single-epitope molecules use competitive formats.</a:t>
+            </a:r>
+            <a:endParaRPr lang="en-US" sz="1250" dirty="0"/>
+          </a:p>
+        </p:txBody>
+      </p:sp>
+      <p:sp>
+        <p:nvSpPr>
+          <p:cNvPr id="9" name="Text 7"/>
+          <p:cNvSpPr/>
+          <p:nvPr/>
+        </p:nvSpPr>
+        <p:spPr>
+          <a:xfrm>
+            <a:off x="566928" y="6473952"/>
+            <a:ext cx="7772400" cy="274320"/>
+          </a:xfrm>
+          <a:prstGeom prst="rect">
+            <a:avLst/>
+          </a:prstGeom>
+          <a:noFill/>
+          <a:ln/>
+        </p:spPr>
+        <p:txBody>
+          <a:bodyPr wrap="square" lIns="0" tIns="0" rIns="0" bIns="0" rtlCol="0" anchor="ctr"/>
+          <a:lstStyle/>
+          <a:p>
+            <a:pPr algn="l" indent="0" marL="0">
+              <a:buNone/>
+            </a:pPr>
+            <a:r>
+              <a:rPr lang="en-US" sz="850" dirty="0">
+                <a:solidFill>
+                  <a:srgbClr val="9AA8B4"/>
+                </a:solidFill>
+                <a:latin typeface="Calibri" pitchFamily="34" charset="0"/>
+                <a:ea typeface="Calibri" pitchFamily="34" charset="-122"/>
+                <a:cs typeface="Calibri" pitchFamily="34" charset="-120"/>
+              </a:rPr>
+              <a:t>Makassed General Hospital  ·  Department of Laboratory Medicine</a:t>
+            </a:r>
+            <a:endParaRPr lang="en-US" sz="850" dirty="0"/>
+          </a:p>
+        </p:txBody>
+      </p:sp>
+      <p:sp>
+        <p:nvSpPr>
+          <p:cNvPr id="10" name="Text 8"/>
+          <p:cNvSpPr/>
+          <p:nvPr/>
+        </p:nvSpPr>
+        <p:spPr>
+          <a:xfrm>
+            <a:off x="9814255" y="6473952"/>
+            <a:ext cx="1828800" cy="274320"/>
+          </a:xfrm>
+          <a:prstGeom prst="rect">
+            <a:avLst/>
+          </a:prstGeom>
+          <a:noFill/>
+          <a:ln/>
+        </p:spPr>
+        <p:txBody>
+          <a:bodyPr wrap="square" lIns="0" tIns="0" rIns="0" bIns="0" rtlCol="0" anchor="ctr"/>
+          <a:lstStyle/>
+          <a:p>
+            <a:pPr algn="r" indent="0" marL="0">
+              <a:buNone/>
+            </a:pPr>
+            <a:r>
+              <a:rPr lang="en-US" sz="850" dirty="0">
+                <a:solidFill>
+                  <a:srgbClr val="9AA8B4"/>
+                </a:solidFill>
+                <a:latin typeface="Calibri" pitchFamily="34" charset="0"/>
+                <a:ea typeface="Calibri" pitchFamily="34" charset="-122"/>
+                <a:cs typeface="Calibri" pitchFamily="34" charset="-120"/>
+              </a:rPr>
+              <a:t>CP Lecture Series</a:t>
+            </a:r>
+            <a:pPr algn="r" indent="0" marL="0">
+              <a:buNone/>
+            </a:pPr>
+            <a:r>
+              <a:rPr lang="en-US" sz="850" dirty="0">
+                <a:solidFill>
+                  <a:srgbClr val="DCE4EC"/>
+                </a:solidFill>
+                <a:latin typeface="Calibri" pitchFamily="34" charset="0"/>
+                <a:ea typeface="Calibri" pitchFamily="34" charset="-122"/>
+                <a:cs typeface="Calibri" pitchFamily="34" charset="-120"/>
+              </a:rPr>
+              <a:t>   ·   </a:t>
+            </a:r>
+            <a:pPr algn="r" indent="0" marL="0">
+              <a:buNone/>
+            </a:pPr>
+            <a:r>
+              <a:rPr lang="en-US" sz="850" b="1" dirty="0">
+                <a:solidFill>
+                  <a:srgbClr val="6A1B9A"/>
+                </a:solidFill>
+                <a:latin typeface="Calibri" pitchFamily="34" charset="0"/>
+                <a:ea typeface="Calibri" pitchFamily="34" charset="-122"/>
+                <a:cs typeface="Calibri" pitchFamily="34" charset="-120"/>
+              </a:rPr>
+              <a:t>19</a:t>
+            </a:r>
+            <a:endParaRPr lang="en-US" sz="850" dirty="0"/>
+          </a:p>
+        </p:txBody>
+      </p:sp>
+    </p:spTree>
+  </p:cSld>
+  <p:clrMapOvr>
+    <a:masterClrMapping/>
+  </p:clrMapOvr>
+</p:sld>
+</file>
+
+<file path=ppt/slides/slide23.xml><?xml version="1.0" encoding="utf-8"?>
+<p:sld xmlns:a="http://schemas.openxmlformats.org/drawingml/2006/main" xmlns:r="http://schemas.openxmlformats.org/officeDocument/2006/relationships" xmlns:p="http://schemas.openxmlformats.org/presentationml/2006/main">
+  <p:cSld name="Slide 23">
+    <p:bg>
+      <p:bgPr>
+        <a:solidFill>
+          <a:srgbClr val="FFFFFF"/>
+        </a:solidFill>
+      </p:bgPr>
+    </p:bg>
+    <p:spTree>
+      <p:nvGrpSpPr>
+        <p:cNvPr id="1" name=""/>
+        <p:cNvGrpSpPr/>
+        <p:nvPr/>
+      </p:nvGrpSpPr>
+      <p:grpSpPr>
+        <a:xfrm>
+          <a:off x="0" y="0"/>
+          <a:ext cx="0" cy="0"/>
+          <a:chOff x="0" y="0"/>
+          <a:chExt cx="0" cy="0"/>
+        </a:xfrm>
+      </p:grpSpPr>
+      <p:sp>
+        <p:nvSpPr>
+          <p:cNvPr id="2" name="Text 0"/>
+          <p:cNvSpPr/>
+          <p:nvPr/>
+        </p:nvSpPr>
+        <p:spPr>
+          <a:xfrm>
+            <a:off x="566928" y="329184"/>
+            <a:ext cx="10515600" cy="310896"/>
+          </a:xfrm>
+          <a:prstGeom prst="rect">
+            <a:avLst/>
+          </a:prstGeom>
+          <a:noFill/>
+          <a:ln/>
+        </p:spPr>
+        <p:txBody>
+          <a:bodyPr wrap="square" lIns="0" tIns="0" rIns="0" bIns="0" rtlCol="0" anchor="ctr"/>
+          <a:lstStyle/>
+          <a:p>
+            <a:pPr algn="l" indent="0" marL="0">
+              <a:buNone/>
+            </a:pPr>
+            <a:r>
+              <a:rPr lang="en-US" sz="1100" b="1" spc="150" kern="0" dirty="0">
+                <a:solidFill>
+                  <a:srgbClr val="6A1B9A"/>
+                </a:solidFill>
+                <a:latin typeface="Calibri" pitchFamily="34" charset="0"/>
+                <a:ea typeface="Calibri" pitchFamily="34" charset="-122"/>
+                <a:cs typeface="Calibri" pitchFamily="34" charset="-120"/>
+              </a:rPr>
+              <a:t>IMMUNOLOGY &amp; SEROLOGY   ·   BOARD REVIEW  ·  Q4</a:t>
+            </a:r>
+            <a:endParaRPr lang="en-US" sz="1100" dirty="0"/>
+          </a:p>
+        </p:txBody>
+      </p:sp>
+      <p:sp>
+        <p:nvSpPr>
+          <p:cNvPr id="3" name="Text 1"/>
+          <p:cNvSpPr/>
+          <p:nvPr/>
+        </p:nvSpPr>
+        <p:spPr>
+          <a:xfrm>
+            <a:off x="566928" y="713232"/>
+            <a:ext cx="11064240" cy="749808"/>
+          </a:xfrm>
+          <a:prstGeom prst="rect">
+            <a:avLst/>
+          </a:prstGeom>
+          <a:noFill/>
+          <a:ln/>
+        </p:spPr>
+        <p:txBody>
+          <a:bodyPr wrap="square" lIns="0" tIns="0" rIns="0" bIns="0" rtlCol="0" anchor="ctr"/>
+          <a:lstStyle/>
+          <a:p>
+            <a:pPr algn="l" indent="0" marL="0">
+              <a:buNone/>
+            </a:pPr>
+            <a:r>
+              <a:rPr lang="en-US" sz="2600" b="1" dirty="0">
+                <a:solidFill>
+                  <a:srgbClr val="0E3A5F"/>
+                </a:solidFill>
+                <a:latin typeface="Calibri" pitchFamily="34" charset="0"/>
+                <a:ea typeface="Calibri" pitchFamily="34" charset="-122"/>
+                <a:cs typeface="Calibri" pitchFamily="34" charset="-120"/>
+              </a:rPr>
+              <a:t>Board-Style Review</a:t>
+            </a:r>
+            <a:endParaRPr lang="en-US" sz="2600" dirty="0"/>
+          </a:p>
+        </p:txBody>
+      </p:sp>
+      <p:sp>
+        <p:nvSpPr>
+          <p:cNvPr id="4" name="Text 2"/>
+          <p:cNvSpPr/>
+          <p:nvPr/>
+        </p:nvSpPr>
+        <p:spPr>
+          <a:xfrm>
+            <a:off x="566928" y="1417320"/>
+            <a:ext cx="11057839" cy="914400"/>
+          </a:xfrm>
+          <a:prstGeom prst="rect">
+            <a:avLst/>
+          </a:prstGeom>
+          <a:noFill/>
+          <a:ln/>
+        </p:spPr>
+        <p:txBody>
+          <a:bodyPr wrap="square" lIns="0" tIns="0" rIns="0" bIns="0" rtlCol="0" anchor="t"/>
+          <a:lstStyle/>
+          <a:p>
+            <a:pPr algn="l" indent="0" marL="0">
+              <a:lnSpc>
+                <a:spcPct val="105000"/>
+              </a:lnSpc>
+              <a:buNone/>
+            </a:pPr>
+            <a:r>
+              <a:rPr lang="en-US" sz="1450" b="1" dirty="0">
+                <a:solidFill>
+                  <a:srgbClr val="1B2A38"/>
+                </a:solidFill>
+                <a:latin typeface="Calibri" pitchFamily="34" charset="0"/>
+                <a:ea typeface="Calibri" pitchFamily="34" charset="-122"/>
+                <a:cs typeface="Calibri" pitchFamily="34" charset="-120"/>
+              </a:rPr>
+              <a:t>Heterophile antibody interference is best suspected when:</a:t>
+            </a:r>
+            <a:endParaRPr lang="en-US" sz="1450" dirty="0"/>
+          </a:p>
+        </p:txBody>
+      </p:sp>
+      <p:sp>
+        <p:nvSpPr>
+          <p:cNvPr id="5" name="Text 3"/>
+          <p:cNvSpPr/>
+          <p:nvPr/>
+        </p:nvSpPr>
+        <p:spPr>
+          <a:xfrm>
+            <a:off x="658368" y="2395728"/>
+            <a:ext cx="6192390" cy="3017520"/>
+          </a:xfrm>
+          <a:prstGeom prst="rect">
+            <a:avLst/>
+          </a:prstGeom>
+          <a:noFill/>
+          <a:ln/>
+        </p:spPr>
+        <p:txBody>
+          <a:bodyPr wrap="square" lIns="0" tIns="0" rIns="0" bIns="0" rtlCol="0" anchor="t"/>
+          <a:lstStyle/>
+          <a:p>
+            <a:pPr algn="l" indent="0" marL="0">
+              <a:spcAft>
+                <a:spcPts val="600"/>
+              </a:spcAft>
+              <a:buNone/>
+            </a:pPr>
+            <a:r>
+              <a:rPr lang="en-US" sz="1350" dirty="0">
+                <a:solidFill>
+                  <a:srgbClr val="33444F"/>
+                </a:solidFill>
+                <a:latin typeface="Calibri" pitchFamily="34" charset="0"/>
+                <a:ea typeface="Calibri" pitchFamily="34" charset="-122"/>
+                <a:cs typeface="Calibri" pitchFamily="34" charset="-120"/>
+              </a:rPr>
+              <a:t>A. Results match the clinical picture</a:t>
+            </a:r>
+            <a:endParaRPr lang="en-US" sz="1350" dirty="0"/>
+          </a:p>
+          <a:p>
+            <a:pPr algn="l" indent="0" marL="0">
+              <a:spcAft>
+                <a:spcPts val="600"/>
+              </a:spcAft>
+              <a:buNone/>
+            </a:pPr>
+            <a:r>
+              <a:rPr lang="en-US" sz="1350" b="1" dirty="0">
+                <a:solidFill>
+                  <a:srgbClr val="4A1269"/>
+                </a:solidFill>
+                <a:latin typeface="Calibri" pitchFamily="34" charset="0"/>
+                <a:ea typeface="Calibri" pitchFamily="34" charset="-122"/>
+                <a:cs typeface="Calibri" pitchFamily="34" charset="-120"/>
+              </a:rPr>
+              <a:t>B. A result is discordant with the clinical scenario and other tests</a:t>
+            </a:r>
+            <a:endParaRPr lang="en-US" sz="1350" dirty="0"/>
+          </a:p>
+          <a:p>
+            <a:pPr algn="l" indent="0" marL="0">
+              <a:spcAft>
+                <a:spcPts val="600"/>
+              </a:spcAft>
+              <a:buNone/>
+            </a:pPr>
+            <a:r>
+              <a:rPr lang="en-US" sz="1350" dirty="0">
+                <a:solidFill>
+                  <a:srgbClr val="33444F"/>
+                </a:solidFill>
+                <a:latin typeface="Calibri" pitchFamily="34" charset="0"/>
+                <a:ea typeface="Calibri" pitchFamily="34" charset="-122"/>
+                <a:cs typeface="Calibri" pitchFamily="34" charset="-120"/>
+              </a:rPr>
+              <a:t>C. QC is out of range</a:t>
+            </a:r>
+            <a:endParaRPr lang="en-US" sz="1350" dirty="0"/>
+          </a:p>
+          <a:p>
+            <a:pPr algn="l" indent="0" marL="0">
+              <a:spcAft>
+                <a:spcPts val="600"/>
+              </a:spcAft>
+              <a:buNone/>
+            </a:pPr>
+            <a:r>
+              <a:rPr lang="en-US" sz="1350" dirty="0">
+                <a:solidFill>
+                  <a:srgbClr val="33444F"/>
+                </a:solidFill>
+                <a:latin typeface="Calibri" pitchFamily="34" charset="0"/>
+                <a:ea typeface="Calibri" pitchFamily="34" charset="-122"/>
+                <a:cs typeface="Calibri" pitchFamily="34" charset="-120"/>
+              </a:rPr>
+              <a:t>D. The calibration failed</a:t>
+            </a:r>
+            <a:endParaRPr lang="en-US" sz="1350" dirty="0"/>
+          </a:p>
+          <a:p>
+            <a:pPr algn="l" indent="0" marL="0">
+              <a:spcAft>
+                <a:spcPts val="600"/>
+              </a:spcAft>
+              <a:buNone/>
+            </a:pPr>
+            <a:r>
+              <a:rPr lang="en-US" sz="1350" dirty="0">
+                <a:solidFill>
+                  <a:srgbClr val="33444F"/>
+                </a:solidFill>
+                <a:latin typeface="Calibri" pitchFamily="34" charset="0"/>
+                <a:ea typeface="Calibri" pitchFamily="34" charset="-122"/>
+                <a:cs typeface="Calibri" pitchFamily="34" charset="-120"/>
+              </a:rPr>
+              <a:t>E. The sample is lipemic</a:t>
+            </a:r>
+            <a:endParaRPr lang="en-US" sz="1350" dirty="0"/>
+          </a:p>
+        </p:txBody>
+      </p:sp>
+      <p:sp>
+        <p:nvSpPr>
+          <p:cNvPr id="6" name="Shape 4"/>
+          <p:cNvSpPr/>
+          <p:nvPr/>
+        </p:nvSpPr>
+        <p:spPr>
+          <a:xfrm>
+            <a:off x="7201632" y="2395728"/>
+            <a:ext cx="4423136" cy="3246120"/>
+          </a:xfrm>
+          <a:prstGeom prst="roundRect">
+            <a:avLst>
+              <a:gd name="adj" fmla="val 2535"/>
+            </a:avLst>
+          </a:prstGeom>
+          <a:solidFill>
+            <a:srgbClr val="F1E8F7"/>
+          </a:solidFill>
+          <a:ln/>
+          <a:effectLst>
+            <a:outerShdw sx="100000" sy="100000" kx="0" ky="0" algn="bl" rotWithShape="0" blurRad="88900" dist="25400" dir="5400000">
+              <a:srgbClr val="22303C">
+                <a:alpha val="12000"/>
+              </a:srgbClr>
+            </a:outerShdw>
+          </a:effectLst>
+        </p:spPr>
+      </p:sp>
+      <p:sp>
+        <p:nvSpPr>
+          <p:cNvPr id="7" name="Text 5"/>
+          <p:cNvSpPr/>
+          <p:nvPr/>
+        </p:nvSpPr>
+        <p:spPr>
+          <a:xfrm>
+            <a:off x="7439376" y="2578608"/>
+            <a:ext cx="3965936" cy="457200"/>
+          </a:xfrm>
+          <a:prstGeom prst="rect">
+            <a:avLst/>
+          </a:prstGeom>
+          <a:noFill/>
+          <a:ln/>
+        </p:spPr>
+        <p:txBody>
+          <a:bodyPr wrap="square" lIns="0" tIns="0" rIns="0" bIns="0" rtlCol="0" anchor="ctr"/>
+          <a:lstStyle/>
+          <a:p>
+            <a:pPr indent="0" marL="0">
+              <a:buNone/>
+            </a:pPr>
+            <a:r>
+              <a:rPr lang="en-US" sz="1500" b="1" dirty="0">
+                <a:solidFill>
+                  <a:srgbClr val="6A1B9A"/>
+                </a:solidFill>
+                <a:latin typeface="Calibri" pitchFamily="34" charset="0"/>
+                <a:ea typeface="Calibri" pitchFamily="34" charset="-122"/>
+                <a:cs typeface="Calibri" pitchFamily="34" charset="-120"/>
+              </a:rPr>
+              <a:t>ANSWER  </a:t>
+            </a:r>
+            <a:pPr indent="0" marL="0">
+              <a:buNone/>
+            </a:pPr>
+            <a:r>
+              <a:rPr lang="en-US" sz="1500" b="1" dirty="0">
+                <a:solidFill>
+                  <a:srgbClr val="1B2A38"/>
+                </a:solidFill>
+                <a:latin typeface="Calibri" pitchFamily="34" charset="0"/>
+                <a:ea typeface="Calibri" pitchFamily="34" charset="-122"/>
+                <a:cs typeface="Calibri" pitchFamily="34" charset="-120"/>
+              </a:rPr>
+              <a:t>B — Result discordant with clinical picture</a:t>
+            </a:r>
+            <a:endParaRPr lang="en-US" sz="1500" dirty="0"/>
+          </a:p>
+        </p:txBody>
+      </p:sp>
+      <p:sp>
+        <p:nvSpPr>
+          <p:cNvPr id="8" name="Text 6"/>
+          <p:cNvSpPr/>
+          <p:nvPr/>
+        </p:nvSpPr>
+        <p:spPr>
+          <a:xfrm>
+            <a:off x="7439376" y="3127248"/>
+            <a:ext cx="3947648" cy="2377440"/>
+          </a:xfrm>
+          <a:prstGeom prst="rect">
+            <a:avLst/>
+          </a:prstGeom>
+          <a:noFill/>
+          <a:ln/>
+        </p:spPr>
+        <p:txBody>
+          <a:bodyPr wrap="square" lIns="0" tIns="0" rIns="0" bIns="0" rtlCol="0" anchor="t"/>
+          <a:lstStyle/>
+          <a:p>
+            <a:pPr algn="l" indent="0" marL="0">
+              <a:lnSpc>
+                <a:spcPct val="108000"/>
+              </a:lnSpc>
+              <a:buNone/>
+            </a:pPr>
+            <a:r>
+              <a:rPr lang="en-US" sz="1250" dirty="0">
+                <a:solidFill>
+                  <a:srgbClr val="33444F"/>
+                </a:solidFill>
+                <a:latin typeface="Calibri" pitchFamily="34" charset="0"/>
+                <a:ea typeface="Calibri" pitchFamily="34" charset="-122"/>
+                <a:cs typeface="Calibri" pitchFamily="34" charset="-120"/>
+              </a:rPr>
+              <a:t>Heterophile antibodies cause clinically implausible results; blocking reagents or alternate platforms confirm the artifact.</a:t>
+            </a:r>
+            <a:endParaRPr lang="en-US" sz="1250" dirty="0"/>
+          </a:p>
+        </p:txBody>
+      </p:sp>
+      <p:sp>
+        <p:nvSpPr>
+          <p:cNvPr id="9" name="Text 7"/>
+          <p:cNvSpPr/>
+          <p:nvPr/>
+        </p:nvSpPr>
+        <p:spPr>
+          <a:xfrm>
+            <a:off x="566928" y="6473952"/>
+            <a:ext cx="7772400" cy="274320"/>
+          </a:xfrm>
+          <a:prstGeom prst="rect">
+            <a:avLst/>
+          </a:prstGeom>
+          <a:noFill/>
+          <a:ln/>
+        </p:spPr>
+        <p:txBody>
+          <a:bodyPr wrap="square" lIns="0" tIns="0" rIns="0" bIns="0" rtlCol="0" anchor="ctr"/>
+          <a:lstStyle/>
+          <a:p>
+            <a:pPr algn="l" indent="0" marL="0">
+              <a:buNone/>
+            </a:pPr>
+            <a:r>
+              <a:rPr lang="en-US" sz="850" dirty="0">
+                <a:solidFill>
+                  <a:srgbClr val="9AA8B4"/>
+                </a:solidFill>
+                <a:latin typeface="Calibri" pitchFamily="34" charset="0"/>
+                <a:ea typeface="Calibri" pitchFamily="34" charset="-122"/>
+                <a:cs typeface="Calibri" pitchFamily="34" charset="-120"/>
+              </a:rPr>
+              <a:t>Makassed General Hospital  ·  Department of Laboratory Medicine</a:t>
+            </a:r>
+            <a:endParaRPr lang="en-US" sz="850" dirty="0"/>
+          </a:p>
+        </p:txBody>
+      </p:sp>
+      <p:sp>
+        <p:nvSpPr>
+          <p:cNvPr id="10" name="Text 8"/>
+          <p:cNvSpPr/>
+          <p:nvPr/>
+        </p:nvSpPr>
+        <p:spPr>
+          <a:xfrm>
+            <a:off x="9814255" y="6473952"/>
+            <a:ext cx="1828800" cy="274320"/>
+          </a:xfrm>
+          <a:prstGeom prst="rect">
+            <a:avLst/>
+          </a:prstGeom>
+          <a:noFill/>
+          <a:ln/>
+        </p:spPr>
+        <p:txBody>
+          <a:bodyPr wrap="square" lIns="0" tIns="0" rIns="0" bIns="0" rtlCol="0" anchor="ctr"/>
+          <a:lstStyle/>
+          <a:p>
+            <a:pPr algn="r" indent="0" marL="0">
+              <a:buNone/>
+            </a:pPr>
+            <a:r>
+              <a:rPr lang="en-US" sz="850" dirty="0">
+                <a:solidFill>
+                  <a:srgbClr val="9AA8B4"/>
+                </a:solidFill>
+                <a:latin typeface="Calibri" pitchFamily="34" charset="0"/>
+                <a:ea typeface="Calibri" pitchFamily="34" charset="-122"/>
+                <a:cs typeface="Calibri" pitchFamily="34" charset="-120"/>
+              </a:rPr>
+              <a:t>CP Lecture Series</a:t>
+            </a:r>
+            <a:pPr algn="r" indent="0" marL="0">
+              <a:buNone/>
+            </a:pPr>
+            <a:r>
+              <a:rPr lang="en-US" sz="850" dirty="0">
+                <a:solidFill>
+                  <a:srgbClr val="DCE4EC"/>
+                </a:solidFill>
+                <a:latin typeface="Calibri" pitchFamily="34" charset="0"/>
+                <a:ea typeface="Calibri" pitchFamily="34" charset="-122"/>
+                <a:cs typeface="Calibri" pitchFamily="34" charset="-120"/>
+              </a:rPr>
+              <a:t>   ·   </a:t>
+            </a:r>
+            <a:pPr algn="r" indent="0" marL="0">
+              <a:buNone/>
+            </a:pPr>
+            <a:r>
+              <a:rPr lang="en-US" sz="850" b="1" dirty="0">
+                <a:solidFill>
+                  <a:srgbClr val="6A1B9A"/>
+                </a:solidFill>
+                <a:latin typeface="Calibri" pitchFamily="34" charset="0"/>
+                <a:ea typeface="Calibri" pitchFamily="34" charset="-122"/>
+                <a:cs typeface="Calibri" pitchFamily="34" charset="-120"/>
+              </a:rPr>
+              <a:t>20</a:t>
+            </a:r>
+            <a:endParaRPr lang="en-US" sz="850" dirty="0"/>
+          </a:p>
+        </p:txBody>
+      </p:sp>
+    </p:spTree>
+  </p:cSld>
+  <p:clrMapOvr>
+    <a:masterClrMapping/>
+  </p:clrMapOvr>
+</p:sld>
+</file>
+
+<file path=ppt/slides/slide24.xml><?xml version="1.0" encoding="utf-8"?>
+<p:sld xmlns:a="http://schemas.openxmlformats.org/drawingml/2006/main" xmlns:r="http://schemas.openxmlformats.org/officeDocument/2006/relationships" xmlns:p="http://schemas.openxmlformats.org/presentationml/2006/main">
+  <p:cSld name="Slide 24">
+    <p:bg>
+      <p:bgPr>
+        <a:solidFill>
+          <a:srgbClr val="0A2A45"/>
+        </a:solidFill>
+      </p:bgPr>
+    </p:bg>
+    <p:spTree>
+      <p:nvGrpSpPr>
+        <p:cNvPr id="1" name=""/>
+        <p:cNvGrpSpPr/>
+        <p:nvPr/>
+      </p:nvGrpSpPr>
+      <p:grpSpPr>
+        <a:xfrm>
+          <a:off x="0" y="0"/>
+          <a:ext cx="0" cy="0"/>
+          <a:chOff x="0" y="0"/>
+          <a:chExt cx="0" cy="0"/>
+        </a:xfrm>
+      </p:grpSpPr>
+      <p:sp>
+        <p:nvSpPr>
+          <p:cNvPr id="2" name="Text 0"/>
+          <p:cNvSpPr/>
+          <p:nvPr/>
+        </p:nvSpPr>
+        <p:spPr>
+          <a:xfrm>
+            <a:off x="566928" y="329184"/>
+            <a:ext cx="10058400" cy="310896"/>
+          </a:xfrm>
+          <a:prstGeom prst="rect">
+            <a:avLst/>
+          </a:prstGeom>
+          <a:noFill/>
+          <a:ln/>
+        </p:spPr>
+        <p:txBody>
+          <a:bodyPr wrap="square" lIns="0" tIns="0" rIns="0" bIns="0" rtlCol="0" anchor="ctr"/>
+          <a:lstStyle/>
+          <a:p>
+            <a:pPr indent="0" marL="0">
+              <a:buNone/>
+            </a:pPr>
+            <a:r>
+              <a:rPr lang="en-US" sz="1100" b="1" spc="150" kern="0" dirty="0">
+                <a:solidFill>
+                  <a:srgbClr val="6A1B9A"/>
+                </a:solidFill>
+                <a:latin typeface="Calibri" pitchFamily="34" charset="0"/>
+                <a:ea typeface="Calibri" pitchFamily="34" charset="-122"/>
+                <a:cs typeface="Calibri" pitchFamily="34" charset="-120"/>
+              </a:rPr>
+              <a:t>IMMUNOLOGY &amp; SEROLOGY</a:t>
+            </a:r>
+            <a:endParaRPr lang="en-US" sz="1100" dirty="0"/>
+          </a:p>
+        </p:txBody>
+      </p:sp>
+      <p:sp>
+        <p:nvSpPr>
+          <p:cNvPr id="3" name="Text 1"/>
+          <p:cNvSpPr/>
+          <p:nvPr/>
+        </p:nvSpPr>
+        <p:spPr>
+          <a:xfrm>
+            <a:off x="566928" y="676656"/>
+            <a:ext cx="10972800" cy="749808"/>
+          </a:xfrm>
+          <a:prstGeom prst="rect">
+            <a:avLst/>
+          </a:prstGeom>
+          <a:noFill/>
+          <a:ln/>
+        </p:spPr>
+        <p:txBody>
+          <a:bodyPr wrap="square" lIns="0" tIns="0" rIns="0" bIns="0" rtlCol="0" anchor="ctr"/>
+          <a:lstStyle/>
+          <a:p>
+            <a:pPr indent="0" marL="0">
+              <a:buNone/>
+            </a:pPr>
+            <a:r>
+              <a:rPr lang="en-US" sz="3000" b="1" dirty="0">
+                <a:solidFill>
+                  <a:srgbClr val="FFFFFF"/>
+                </a:solidFill>
+                <a:latin typeface="Calibri" pitchFamily="34" charset="0"/>
+                <a:ea typeface="Calibri" pitchFamily="34" charset="-122"/>
+                <a:cs typeface="Calibri" pitchFamily="34" charset="-120"/>
+              </a:rPr>
+              <a:t>Key Take-Home Points</a:t>
+            </a:r>
+            <a:endParaRPr lang="en-US" sz="3000" dirty="0"/>
+          </a:p>
+        </p:txBody>
+      </p:sp>
+      <p:sp>
+        <p:nvSpPr>
+          <p:cNvPr id="4" name="Shape 2"/>
+          <p:cNvSpPr/>
+          <p:nvPr/>
+        </p:nvSpPr>
+        <p:spPr>
+          <a:xfrm>
+            <a:off x="566928" y="1517904"/>
+            <a:ext cx="11057839" cy="841248"/>
+          </a:xfrm>
+          <a:prstGeom prst="roundRect">
+            <a:avLst>
+              <a:gd name="adj" fmla="val 7609"/>
+            </a:avLst>
+          </a:prstGeom>
+          <a:solidFill>
+            <a:srgbClr val="143651"/>
+          </a:solidFill>
+          <a:ln/>
+        </p:spPr>
+      </p:sp>
+      <p:sp>
+        <p:nvSpPr>
+          <p:cNvPr id="5" name="Shape 3"/>
+          <p:cNvSpPr/>
+          <p:nvPr/>
+        </p:nvSpPr>
+        <p:spPr>
+          <a:xfrm>
+            <a:off x="749808" y="1755648"/>
+            <a:ext cx="365760" cy="365760"/>
+          </a:xfrm>
+          <a:prstGeom prst="ellipse">
+            <a:avLst/>
+          </a:prstGeom>
+          <a:solidFill>
+            <a:srgbClr val="6A1B9A"/>
+          </a:solidFill>
+          <a:ln/>
+          <a:effectLst>
+            <a:outerShdw sx="100000" sy="100000" kx="0" ky="0" algn="bl" rotWithShape="0" blurRad="88900" dist="25400" dir="5400000">
+              <a:srgbClr val="22303C">
+                <a:alpha val="12000"/>
+              </a:srgbClr>
+            </a:outerShdw>
+          </a:effectLst>
+        </p:spPr>
+      </p:sp>
+      <p:sp>
+        <p:nvSpPr>
+          <p:cNvPr id="6" name="Text 4"/>
+          <p:cNvSpPr/>
+          <p:nvPr/>
+        </p:nvSpPr>
+        <p:spPr>
+          <a:xfrm>
+            <a:off x="749808" y="1755648"/>
+            <a:ext cx="365760" cy="365760"/>
+          </a:xfrm>
+          <a:prstGeom prst="rect">
+            <a:avLst/>
+          </a:prstGeom>
+          <a:noFill/>
+          <a:ln/>
+        </p:spPr>
+        <p:txBody>
+          <a:bodyPr wrap="square" lIns="0" tIns="0" rIns="0" bIns="0" rtlCol="0" anchor="ctr"/>
+          <a:lstStyle/>
+          <a:p>
+            <a:pPr algn="ctr" indent="0" marL="0">
+              <a:buNone/>
+            </a:pPr>
+            <a:r>
+              <a:rPr lang="en-US" sz="1500" b="1" dirty="0">
+                <a:solidFill>
+                  <a:srgbClr val="FFFFFF"/>
+                </a:solidFill>
+                <a:latin typeface="Calibri" pitchFamily="34" charset="0"/>
+                <a:ea typeface="Calibri" pitchFamily="34" charset="-122"/>
+                <a:cs typeface="Calibri" pitchFamily="34" charset="-120"/>
+              </a:rPr>
+              <a:t>1</a:t>
+            </a:r>
+            <a:endParaRPr lang="en-US" sz="1500" dirty="0"/>
+          </a:p>
+        </p:txBody>
+      </p:sp>
+      <p:sp>
+        <p:nvSpPr>
+          <p:cNvPr id="7" name="Text 5"/>
+          <p:cNvSpPr/>
+          <p:nvPr/>
+        </p:nvSpPr>
+        <p:spPr>
+          <a:xfrm>
+            <a:off x="1280160" y="1517904"/>
+            <a:ext cx="10143439" cy="841248"/>
+          </a:xfrm>
+          <a:prstGeom prst="rect">
+            <a:avLst/>
+          </a:prstGeom>
+          <a:noFill/>
+          <a:ln/>
+        </p:spPr>
+        <p:txBody>
+          <a:bodyPr wrap="square" lIns="0" tIns="0" rIns="0" bIns="0" rtlCol="0" anchor="ctr"/>
+          <a:lstStyle/>
+          <a:p>
+            <a:pPr algn="l" indent="0" marL="0">
+              <a:buNone/>
+            </a:pPr>
+            <a:r>
+              <a:rPr lang="en-US" sz="1350" dirty="0">
+                <a:solidFill>
+                  <a:srgbClr val="E7EEF4"/>
+                </a:solidFill>
+                <a:latin typeface="Calibri" pitchFamily="34" charset="0"/>
+                <a:ea typeface="Calibri" pitchFamily="34" charset="-122"/>
+                <a:cs typeface="Calibri" pitchFamily="34" charset="-120"/>
+              </a:rPr>
+              <a:t>Sandwich assays detect larger multi-epitope analytes (signal rises with concentration); competitive assays suit small molecules (signal falls).</a:t>
+            </a:r>
+            <a:endParaRPr lang="en-US" sz="1350" dirty="0"/>
+          </a:p>
+        </p:txBody>
+      </p:sp>
+      <p:sp>
+        <p:nvSpPr>
+          <p:cNvPr id="8" name="Shape 6"/>
+          <p:cNvSpPr/>
+          <p:nvPr/>
+        </p:nvSpPr>
+        <p:spPr>
+          <a:xfrm>
+            <a:off x="566928" y="2505456"/>
+            <a:ext cx="11057839" cy="841248"/>
+          </a:xfrm>
+          <a:prstGeom prst="roundRect">
+            <a:avLst>
+              <a:gd name="adj" fmla="val 7609"/>
+            </a:avLst>
+          </a:prstGeom>
+          <a:solidFill>
+            <a:srgbClr val="143651"/>
+          </a:solidFill>
+          <a:ln/>
+        </p:spPr>
+      </p:sp>
+      <p:sp>
+        <p:nvSpPr>
+          <p:cNvPr id="9" name="Shape 7"/>
+          <p:cNvSpPr/>
+          <p:nvPr/>
+        </p:nvSpPr>
+        <p:spPr>
+          <a:xfrm>
+            <a:off x="749808" y="2743200"/>
+            <a:ext cx="365760" cy="365760"/>
+          </a:xfrm>
+          <a:prstGeom prst="ellipse">
+            <a:avLst/>
+          </a:prstGeom>
+          <a:solidFill>
+            <a:srgbClr val="6A1B9A"/>
+          </a:solidFill>
+          <a:ln/>
+          <a:effectLst>
+            <a:outerShdw sx="100000" sy="100000" kx="0" ky="0" algn="bl" rotWithShape="0" blurRad="88900" dist="25400" dir="5400000">
+              <a:srgbClr val="22303C">
+                <a:alpha val="12000"/>
+              </a:srgbClr>
+            </a:outerShdw>
+          </a:effectLst>
+        </p:spPr>
+      </p:sp>
+      <p:sp>
+        <p:nvSpPr>
+          <p:cNvPr id="10" name="Text 8"/>
+          <p:cNvSpPr/>
+          <p:nvPr/>
+        </p:nvSpPr>
+        <p:spPr>
+          <a:xfrm>
+            <a:off x="749808" y="2743200"/>
+            <a:ext cx="365760" cy="365760"/>
+          </a:xfrm>
+          <a:prstGeom prst="rect">
+            <a:avLst/>
+          </a:prstGeom>
+          <a:noFill/>
+          <a:ln/>
+        </p:spPr>
+        <p:txBody>
+          <a:bodyPr wrap="square" lIns="0" tIns="0" rIns="0" bIns="0" rtlCol="0" anchor="ctr"/>
+          <a:lstStyle/>
+          <a:p>
+            <a:pPr algn="ctr" indent="0" marL="0">
+              <a:buNone/>
+            </a:pPr>
+            <a:r>
+              <a:rPr lang="en-US" sz="1500" b="1" dirty="0">
+                <a:solidFill>
+                  <a:srgbClr val="FFFFFF"/>
+                </a:solidFill>
+                <a:latin typeface="Calibri" pitchFamily="34" charset="0"/>
+                <a:ea typeface="Calibri" pitchFamily="34" charset="-122"/>
+                <a:cs typeface="Calibri" pitchFamily="34" charset="-120"/>
+              </a:rPr>
+              <a:t>2</a:t>
+            </a:r>
+            <a:endParaRPr lang="en-US" sz="1500" dirty="0"/>
+          </a:p>
+        </p:txBody>
+      </p:sp>
+      <p:sp>
+        <p:nvSpPr>
+          <p:cNvPr id="11" name="Text 9"/>
+          <p:cNvSpPr/>
+          <p:nvPr/>
+        </p:nvSpPr>
+        <p:spPr>
+          <a:xfrm>
+            <a:off x="1280160" y="2505456"/>
+            <a:ext cx="10143439" cy="841248"/>
+          </a:xfrm>
+          <a:prstGeom prst="rect">
+            <a:avLst/>
+          </a:prstGeom>
+          <a:noFill/>
+          <a:ln/>
+        </p:spPr>
+        <p:txBody>
+          <a:bodyPr wrap="square" lIns="0" tIns="0" rIns="0" bIns="0" rtlCol="0" anchor="ctr"/>
+          <a:lstStyle/>
+          <a:p>
+            <a:pPr algn="l" indent="0" marL="0">
+              <a:buNone/>
+            </a:pPr>
+            <a:r>
+              <a:rPr lang="en-US" sz="1350" dirty="0">
+                <a:solidFill>
+                  <a:srgbClr val="E7EEF4"/>
+                </a:solidFill>
+                <a:latin typeface="Calibri" pitchFamily="34" charset="0"/>
+                <a:ea typeface="Calibri" pitchFamily="34" charset="-122"/>
+                <a:cs typeface="Calibri" pitchFamily="34" charset="-120"/>
+              </a:rPr>
+              <a:t>Know the classic interferences: hook effect (falsely low), biotin, heterophile antibodies, cross-reactivity, macro-analytes.</a:t>
+            </a:r>
+            <a:endParaRPr lang="en-US" sz="1350" dirty="0"/>
+          </a:p>
+        </p:txBody>
+      </p:sp>
+      <p:sp>
+        <p:nvSpPr>
+          <p:cNvPr id="12" name="Shape 10"/>
+          <p:cNvSpPr/>
+          <p:nvPr/>
+        </p:nvSpPr>
+        <p:spPr>
+          <a:xfrm>
+            <a:off x="566928" y="3493008"/>
+            <a:ext cx="11057839" cy="841248"/>
+          </a:xfrm>
+          <a:prstGeom prst="roundRect">
+            <a:avLst>
+              <a:gd name="adj" fmla="val 7609"/>
+            </a:avLst>
+          </a:prstGeom>
+          <a:solidFill>
+            <a:srgbClr val="143651"/>
+          </a:solidFill>
+          <a:ln/>
+        </p:spPr>
+      </p:sp>
+      <p:sp>
+        <p:nvSpPr>
+          <p:cNvPr id="13" name="Shape 11"/>
+          <p:cNvSpPr/>
+          <p:nvPr/>
+        </p:nvSpPr>
+        <p:spPr>
+          <a:xfrm>
+            <a:off x="749808" y="3730752"/>
+            <a:ext cx="365760" cy="365760"/>
+          </a:xfrm>
+          <a:prstGeom prst="ellipse">
+            <a:avLst/>
+          </a:prstGeom>
+          <a:solidFill>
+            <a:srgbClr val="6A1B9A"/>
+          </a:solidFill>
+          <a:ln/>
+          <a:effectLst>
+            <a:outerShdw sx="100000" sy="100000" kx="0" ky="0" algn="bl" rotWithShape="0" blurRad="88900" dist="25400" dir="5400000">
+              <a:srgbClr val="22303C">
+                <a:alpha val="12000"/>
+              </a:srgbClr>
+            </a:outerShdw>
+          </a:effectLst>
+        </p:spPr>
+      </p:sp>
+      <p:sp>
+        <p:nvSpPr>
+          <p:cNvPr id="14" name="Text 12"/>
+          <p:cNvSpPr/>
+          <p:nvPr/>
+        </p:nvSpPr>
+        <p:spPr>
+          <a:xfrm>
+            <a:off x="749808" y="3730752"/>
+            <a:ext cx="365760" cy="365760"/>
+          </a:xfrm>
+          <a:prstGeom prst="rect">
+            <a:avLst/>
+          </a:prstGeom>
+          <a:noFill/>
+          <a:ln/>
+        </p:spPr>
+        <p:txBody>
+          <a:bodyPr wrap="square" lIns="0" tIns="0" rIns="0" bIns="0" rtlCol="0" anchor="ctr"/>
+          <a:lstStyle/>
+          <a:p>
+            <a:pPr algn="ctr" indent="0" marL="0">
+              <a:buNone/>
+            </a:pPr>
+            <a:r>
+              <a:rPr lang="en-US" sz="1500" b="1" dirty="0">
+                <a:solidFill>
+                  <a:srgbClr val="FFFFFF"/>
+                </a:solidFill>
+                <a:latin typeface="Calibri" pitchFamily="34" charset="0"/>
+                <a:ea typeface="Calibri" pitchFamily="34" charset="-122"/>
+                <a:cs typeface="Calibri" pitchFamily="34" charset="-120"/>
+              </a:rPr>
+              <a:t>3</a:t>
+            </a:r>
+            <a:endParaRPr lang="en-US" sz="1500" dirty="0"/>
+          </a:p>
+        </p:txBody>
+      </p:sp>
+      <p:sp>
+        <p:nvSpPr>
+          <p:cNvPr id="15" name="Text 13"/>
+          <p:cNvSpPr/>
+          <p:nvPr/>
+        </p:nvSpPr>
+        <p:spPr>
+          <a:xfrm>
+            <a:off x="1280160" y="3493008"/>
+            <a:ext cx="10143439" cy="841248"/>
+          </a:xfrm>
+          <a:prstGeom prst="rect">
+            <a:avLst/>
+          </a:prstGeom>
+          <a:noFill/>
+          <a:ln/>
+        </p:spPr>
+        <p:txBody>
+          <a:bodyPr wrap="square" lIns="0" tIns="0" rIns="0" bIns="0" rtlCol="0" anchor="ctr"/>
+          <a:lstStyle/>
+          <a:p>
+            <a:pPr algn="l" indent="0" marL="0">
+              <a:buNone/>
+            </a:pPr>
+            <a:r>
+              <a:rPr lang="en-US" sz="1350" dirty="0">
+                <a:solidFill>
+                  <a:srgbClr val="E7EEF4"/>
+                </a:solidFill>
+                <a:latin typeface="Calibri" pitchFamily="34" charset="0"/>
+                <a:ea typeface="Calibri" pitchFamily="34" charset="-122"/>
+                <a:cs typeface="Calibri" pitchFamily="34" charset="-120"/>
+              </a:rPr>
+              <a:t>Sensitivity/specificity are assay properties; predictive values depend on prevalence — confirm screen-positives in low-prevalence settings.</a:t>
+            </a:r>
+            <a:endParaRPr lang="en-US" sz="1350" dirty="0"/>
+          </a:p>
+        </p:txBody>
+      </p:sp>
+      <p:sp>
+        <p:nvSpPr>
+          <p:cNvPr id="16" name="Shape 14"/>
+          <p:cNvSpPr/>
+          <p:nvPr/>
+        </p:nvSpPr>
+        <p:spPr>
+          <a:xfrm>
+            <a:off x="566928" y="4480560"/>
+            <a:ext cx="11057839" cy="841248"/>
+          </a:xfrm>
+          <a:prstGeom prst="roundRect">
+            <a:avLst>
+              <a:gd name="adj" fmla="val 7609"/>
+            </a:avLst>
+          </a:prstGeom>
+          <a:solidFill>
+            <a:srgbClr val="143651"/>
+          </a:solidFill>
+          <a:ln/>
+        </p:spPr>
+      </p:sp>
+      <p:sp>
+        <p:nvSpPr>
+          <p:cNvPr id="17" name="Shape 15"/>
+          <p:cNvSpPr/>
+          <p:nvPr/>
+        </p:nvSpPr>
+        <p:spPr>
+          <a:xfrm>
+            <a:off x="749808" y="4718304"/>
+            <a:ext cx="365760" cy="365760"/>
+          </a:xfrm>
+          <a:prstGeom prst="ellipse">
+            <a:avLst/>
+          </a:prstGeom>
+          <a:solidFill>
+            <a:srgbClr val="6A1B9A"/>
+          </a:solidFill>
+          <a:ln/>
+          <a:effectLst>
+            <a:outerShdw sx="100000" sy="100000" kx="0" ky="0" algn="bl" rotWithShape="0" blurRad="88900" dist="25400" dir="5400000">
+              <a:srgbClr val="22303C">
+                <a:alpha val="12000"/>
+              </a:srgbClr>
+            </a:outerShdw>
+          </a:effectLst>
+        </p:spPr>
+      </p:sp>
+      <p:sp>
+        <p:nvSpPr>
+          <p:cNvPr id="18" name="Text 16"/>
+          <p:cNvSpPr/>
+          <p:nvPr/>
+        </p:nvSpPr>
+        <p:spPr>
+          <a:xfrm>
+            <a:off x="749808" y="4718304"/>
+            <a:ext cx="365760" cy="365760"/>
+          </a:xfrm>
+          <a:prstGeom prst="rect">
+            <a:avLst/>
+          </a:prstGeom>
+          <a:noFill/>
+          <a:ln/>
+        </p:spPr>
+        <p:txBody>
+          <a:bodyPr wrap="square" lIns="0" tIns="0" rIns="0" bIns="0" rtlCol="0" anchor="ctr"/>
+          <a:lstStyle/>
+          <a:p>
+            <a:pPr algn="ctr" indent="0" marL="0">
+              <a:buNone/>
+            </a:pPr>
+            <a:r>
+              <a:rPr lang="en-US" sz="1500" b="1" dirty="0">
+                <a:solidFill>
+                  <a:srgbClr val="FFFFFF"/>
+                </a:solidFill>
+                <a:latin typeface="Calibri" pitchFamily="34" charset="0"/>
+                <a:ea typeface="Calibri" pitchFamily="34" charset="-122"/>
+                <a:cs typeface="Calibri" pitchFamily="34" charset="-120"/>
+              </a:rPr>
+              <a:t>4</a:t>
+            </a:r>
+            <a:endParaRPr lang="en-US" sz="1500" dirty="0"/>
+          </a:p>
+        </p:txBody>
+      </p:sp>
+      <p:sp>
+        <p:nvSpPr>
+          <p:cNvPr id="19" name="Text 17"/>
+          <p:cNvSpPr/>
+          <p:nvPr/>
+        </p:nvSpPr>
+        <p:spPr>
+          <a:xfrm>
+            <a:off x="1280160" y="4480560"/>
+            <a:ext cx="10143439" cy="841248"/>
+          </a:xfrm>
+          <a:prstGeom prst="rect">
+            <a:avLst/>
+          </a:prstGeom>
+          <a:noFill/>
+          <a:ln/>
+        </p:spPr>
+        <p:txBody>
+          <a:bodyPr wrap="square" lIns="0" tIns="0" rIns="0" bIns="0" rtlCol="0" anchor="ctr"/>
+          <a:lstStyle/>
+          <a:p>
+            <a:pPr algn="l" indent="0" marL="0">
+              <a:buNone/>
+            </a:pPr>
+            <a:r>
+              <a:rPr lang="en-US" sz="1350" dirty="0">
+                <a:solidFill>
+                  <a:srgbClr val="E7EEF4"/>
+                </a:solidFill>
+                <a:latin typeface="Calibri" pitchFamily="34" charset="0"/>
+                <a:ea typeface="Calibri" pitchFamily="34" charset="-122"/>
+                <a:cs typeface="Calibri" pitchFamily="34" charset="-120"/>
+              </a:rPr>
+              <a:t>Suspect interference when results don’t fit the patient; dilute, switch platforms, or use blocking reagents.</a:t>
+            </a:r>
+            <a:endParaRPr lang="en-US" sz="1350" dirty="0"/>
+          </a:p>
+        </p:txBody>
+      </p:sp>
+      <p:sp>
+        <p:nvSpPr>
+          <p:cNvPr id="20" name="Shape 18"/>
+          <p:cNvSpPr/>
+          <p:nvPr/>
+        </p:nvSpPr>
+        <p:spPr>
+          <a:xfrm>
+            <a:off x="566928" y="5468112"/>
+            <a:ext cx="11057839" cy="841248"/>
+          </a:xfrm>
+          <a:prstGeom prst="roundRect">
+            <a:avLst>
+              <a:gd name="adj" fmla="val 7609"/>
+            </a:avLst>
+          </a:prstGeom>
+          <a:solidFill>
+            <a:srgbClr val="143651"/>
+          </a:solidFill>
+          <a:ln/>
+        </p:spPr>
+      </p:sp>
+      <p:sp>
+        <p:nvSpPr>
+          <p:cNvPr id="21" name="Shape 19"/>
+          <p:cNvSpPr/>
+          <p:nvPr/>
+        </p:nvSpPr>
+        <p:spPr>
+          <a:xfrm>
+            <a:off x="749808" y="5705856"/>
+            <a:ext cx="365760" cy="365760"/>
+          </a:xfrm>
+          <a:prstGeom prst="ellipse">
+            <a:avLst/>
+          </a:prstGeom>
+          <a:solidFill>
+            <a:srgbClr val="6A1B9A"/>
+          </a:solidFill>
+          <a:ln/>
+          <a:effectLst>
+            <a:outerShdw sx="100000" sy="100000" kx="0" ky="0" algn="bl" rotWithShape="0" blurRad="88900" dist="25400" dir="5400000">
+              <a:srgbClr val="22303C">
+                <a:alpha val="12000"/>
+              </a:srgbClr>
+            </a:outerShdw>
+          </a:effectLst>
+        </p:spPr>
+      </p:sp>
+      <p:sp>
+        <p:nvSpPr>
+          <p:cNvPr id="22" name="Text 20"/>
+          <p:cNvSpPr/>
+          <p:nvPr/>
+        </p:nvSpPr>
+        <p:spPr>
+          <a:xfrm>
+            <a:off x="749808" y="5705856"/>
+            <a:ext cx="365760" cy="365760"/>
+          </a:xfrm>
+          <a:prstGeom prst="rect">
+            <a:avLst/>
+          </a:prstGeom>
+          <a:noFill/>
+          <a:ln/>
+        </p:spPr>
+        <p:txBody>
+          <a:bodyPr wrap="square" lIns="0" tIns="0" rIns="0" bIns="0" rtlCol="0" anchor="ctr"/>
+          <a:lstStyle/>
+          <a:p>
+            <a:pPr algn="ctr" indent="0" marL="0">
+              <a:buNone/>
+            </a:pPr>
+            <a:r>
+              <a:rPr lang="en-US" sz="1500" b="1" dirty="0">
+                <a:solidFill>
+                  <a:srgbClr val="FFFFFF"/>
+                </a:solidFill>
+                <a:latin typeface="Calibri" pitchFamily="34" charset="0"/>
+                <a:ea typeface="Calibri" pitchFamily="34" charset="-122"/>
+                <a:cs typeface="Calibri" pitchFamily="34" charset="-120"/>
+              </a:rPr>
+              <a:t>5</a:t>
+            </a:r>
+            <a:endParaRPr lang="en-US" sz="1500" dirty="0"/>
+          </a:p>
+        </p:txBody>
+      </p:sp>
+      <p:sp>
+        <p:nvSpPr>
+          <p:cNvPr id="23" name="Text 21"/>
+          <p:cNvSpPr/>
+          <p:nvPr/>
+        </p:nvSpPr>
+        <p:spPr>
+          <a:xfrm>
+            <a:off x="1280160" y="5468112"/>
+            <a:ext cx="10143439" cy="841248"/>
+          </a:xfrm>
+          <a:prstGeom prst="rect">
+            <a:avLst/>
+          </a:prstGeom>
+          <a:noFill/>
+          <a:ln/>
+        </p:spPr>
+        <p:txBody>
+          <a:bodyPr wrap="square" lIns="0" tIns="0" rIns="0" bIns="0" rtlCol="0" anchor="ctr"/>
+          <a:lstStyle/>
+          <a:p>
+            <a:pPr algn="l" indent="0" marL="0">
+              <a:buNone/>
+            </a:pPr>
+            <a:r>
+              <a:rPr lang="en-US" sz="1350" dirty="0">
+                <a:solidFill>
+                  <a:srgbClr val="E7EEF4"/>
+                </a:solidFill>
+                <a:latin typeface="Calibri" pitchFamily="34" charset="0"/>
+                <a:ea typeface="Calibri" pitchFamily="34" charset="-122"/>
+                <a:cs typeface="Calibri" pitchFamily="34" charset="-120"/>
+              </a:rPr>
+              <a:t>Valid calibration and in-control QC underlie every result.</a:t>
+            </a:r>
+            <a:endParaRPr lang="en-US" sz="1350" dirty="0"/>
+          </a:p>
+        </p:txBody>
+      </p:sp>
+      <p:sp>
+        <p:nvSpPr>
+          <p:cNvPr id="24" name="Text 22"/>
+          <p:cNvSpPr/>
+          <p:nvPr/>
+        </p:nvSpPr>
+        <p:spPr>
+          <a:xfrm>
+            <a:off x="566928" y="6473952"/>
+            <a:ext cx="8229600" cy="274320"/>
+          </a:xfrm>
+          <a:prstGeom prst="rect">
+            <a:avLst/>
+          </a:prstGeom>
+          <a:noFill/>
+          <a:ln/>
+        </p:spPr>
+        <p:txBody>
+          <a:bodyPr wrap="square" lIns="0" tIns="0" rIns="0" bIns="0" rtlCol="0" anchor="ctr"/>
+          <a:lstStyle/>
+          <a:p>
+            <a:pPr indent="0" marL="0">
+              <a:buNone/>
+            </a:pPr>
+            <a:r>
+              <a:rPr lang="en-US" sz="850" dirty="0">
+                <a:solidFill>
+                  <a:srgbClr val="5E7488"/>
+                </a:solidFill>
+                <a:latin typeface="Calibri" pitchFamily="34" charset="0"/>
+                <a:ea typeface="Calibri" pitchFamily="34" charset="-122"/>
+                <a:cs typeface="Calibri" pitchFamily="34" charset="-120"/>
+              </a:rPr>
+              <a:t>Makassed General Hospital  ·  Department of Laboratory Medicine</a:t>
+            </a:r>
+            <a:endParaRPr lang="en-US" sz="850" dirty="0"/>
+          </a:p>
+        </p:txBody>
+      </p:sp>
+      <p:sp>
+        <p:nvSpPr>
+          <p:cNvPr id="25" name="Text 23"/>
+          <p:cNvSpPr/>
+          <p:nvPr/>
+        </p:nvSpPr>
+        <p:spPr>
+          <a:xfrm>
+            <a:off x="11002975" y="6473952"/>
+            <a:ext cx="640080" cy="274320"/>
+          </a:xfrm>
+          <a:prstGeom prst="rect">
+            <a:avLst/>
+          </a:prstGeom>
+          <a:noFill/>
+          <a:ln/>
+        </p:spPr>
+        <p:txBody>
+          <a:bodyPr wrap="square" lIns="0" tIns="0" rIns="0" bIns="0" rtlCol="0" anchor="ctr"/>
+          <a:lstStyle/>
+          <a:p>
+            <a:pPr algn="r" indent="0" marL="0">
+              <a:buNone/>
+            </a:pPr>
+            <a:r>
+              <a:rPr lang="en-US" sz="850" b="1" dirty="0">
+                <a:solidFill>
+                  <a:srgbClr val="6A1B9A"/>
+                </a:solidFill>
+                <a:latin typeface="Calibri" pitchFamily="34" charset="0"/>
+                <a:ea typeface="Calibri" pitchFamily="34" charset="-122"/>
+                <a:cs typeface="Calibri" pitchFamily="34" charset="-120"/>
+              </a:rPr>
+              <a:t>21</a:t>
+            </a:r>
+            <a:endParaRPr lang="en-US" sz="850" dirty="0"/>
+          </a:p>
+        </p:txBody>
+      </p:sp>
+    </p:spTree>
+  </p:cSld>
+  <p:clrMapOvr>
+    <a:masterClrMapping/>
+  </p:clrMapOvr>
+</p:sld>
+</file>
+
+<file path=ppt/slides/slide25.xml><?xml version="1.0" encoding="utf-8"?>
+<p:sld xmlns:a="http://schemas.openxmlformats.org/drawingml/2006/main" xmlns:r="http://schemas.openxmlformats.org/officeDocument/2006/relationships" xmlns:p="http://schemas.openxmlformats.org/presentationml/2006/main">
+  <p:cSld name="Slide 25">
+    <p:bg>
+      <p:bgPr>
+        <a:solidFill>
+          <a:srgbClr val="FFFFFF"/>
+        </a:solidFill>
+      </p:bgPr>
+    </p:bg>
+    <p:spTree>
+      <p:nvGrpSpPr>
+        <p:cNvPr id="1" name=""/>
+        <p:cNvGrpSpPr/>
+        <p:nvPr/>
+      </p:nvGrpSpPr>
+      <p:grpSpPr>
+        <a:xfrm>
+          <a:off x="0" y="0"/>
+          <a:ext cx="0" cy="0"/>
+          <a:chOff x="0" y="0"/>
+          <a:chExt cx="0" cy="0"/>
+        </a:xfrm>
+      </p:grpSpPr>
+      <p:sp>
+        <p:nvSpPr>
+          <p:cNvPr id="2" name="Text 0"/>
+          <p:cNvSpPr/>
+          <p:nvPr/>
+        </p:nvSpPr>
+        <p:spPr>
+          <a:xfrm>
+            <a:off x="566928" y="329184"/>
+            <a:ext cx="10515600" cy="310896"/>
+          </a:xfrm>
+          <a:prstGeom prst="rect">
+            <a:avLst/>
+          </a:prstGeom>
+          <a:noFill/>
+          <a:ln/>
+        </p:spPr>
+        <p:txBody>
+          <a:bodyPr wrap="square" lIns="0" tIns="0" rIns="0" bIns="0" rtlCol="0" anchor="ctr"/>
+          <a:lstStyle/>
+          <a:p>
+            <a:pPr algn="l" indent="0" marL="0">
+              <a:buNone/>
+            </a:pPr>
+            <a:r>
+              <a:rPr lang="en-US" sz="1100" b="1" spc="150" kern="0" dirty="0">
+                <a:solidFill>
+                  <a:srgbClr val="6A1B9A"/>
+                </a:solidFill>
+                <a:latin typeface="Calibri" pitchFamily="34" charset="0"/>
+                <a:ea typeface="Calibri" pitchFamily="34" charset="-122"/>
+                <a:cs typeface="Calibri" pitchFamily="34" charset="-120"/>
+              </a:rPr>
               <a:t>IMMUNOLOGY &amp; SEROLOGY   ·   REFERENCES &amp; FURTHER READING</a:t>
             </a:r>
             <a:endParaRPr lang="en-US" sz="1100" dirty="0"/>
@@ -8655,7 +11241,7 @@
                 <a:ea typeface="Calibri" pitchFamily="34" charset="-122"/>
                 <a:cs typeface="Calibri" pitchFamily="34" charset="-120"/>
               </a:rPr>
-              <a:t>1.   Rifai N, et al. Tietz Textbook of Clinical Chemistry and Molecular Diagnostics, 6th ed. Elsevier, 2018.</a:t>
+              <a:t>1.   Rifai N, et al. Tietz Textbook of Clinical Chemistry, 6th ed. Elsevier, 2018.</a:t>
             </a:r>
             <a:endParaRPr lang="en-US" sz="1150" dirty="0"/>
           </a:p>
@@ -8675,7 +11261,7 @@
                 <a:ea typeface="Calibri" pitchFamily="34" charset="-122"/>
                 <a:cs typeface="Calibri" pitchFamily="34" charset="-120"/>
               </a:rPr>
-              <a:t>2.   Fritsma GA / textbook chapters on test performance and predictive value.</a:t>
+              <a:t>2.   Wild D (ed). The Immunoassay Handbook, 4th ed.</a:t>
             </a:r>
             <a:endParaRPr lang="en-US" sz="1150" dirty="0"/>
           </a:p>
@@ -8695,7 +11281,7 @@
                 <a:ea typeface="Calibri" pitchFamily="34" charset="-122"/>
                 <a:cs typeface="Calibri" pitchFamily="34" charset="-120"/>
               </a:rPr>
-              <a:t>3.   Sturgeon CM, et al. Immunoassay interference (heterophile). Clin Chem reviews.</a:t>
+              <a:t>3.   CLSI EP07: interference testing.</a:t>
             </a:r>
             <a:endParaRPr lang="en-US" sz="1150" dirty="0"/>
           </a:p>
@@ -8715,7 +11301,7 @@
                 <a:ea typeface="Calibri" pitchFamily="34" charset="-122"/>
                 <a:cs typeface="Calibri" pitchFamily="34" charset="-120"/>
               </a:rPr>
-              <a:t>4.   CLSI EP12: User Protocol for Evaluation of Qualitative Test Performance.</a:t>
+              <a:t>4.   Ward G, et al. Interferences in immunoassay. Clin Biochem Rev.</a:t>
             </a:r>
             <a:endParaRPr lang="en-US" sz="1150" dirty="0"/>
           </a:p>
@@ -8821,7 +11407,7 @@
                 <a:ea typeface="Calibri" pitchFamily="34" charset="-122"/>
                 <a:cs typeface="Calibri" pitchFamily="34" charset="-120"/>
               </a:rPr>
-              <a:t>17</a:t>
+              <a:t>22</a:t>
             </a:r>
             <a:endParaRPr lang="en-US" sz="850" dirty="0"/>
           </a:p>
@@ -9065,7 +11651,7 @@
                 <a:ea typeface="Calibri" pitchFamily="34" charset="-122"/>
                 <a:cs typeface="Calibri" pitchFamily="34" charset="-120"/>
               </a:rPr>
-              <a:t>Define sensitivity, specificity, PPV, and NPV.</a:t>
+              <a:t>Describe competitive and sandwich (immunometric) immunoassay formats.</a:t>
             </a:r>
             <a:endParaRPr lang="en-US" sz="1350" dirty="0"/>
           </a:p>
@@ -9199,7 +11785,7 @@
                 <a:ea typeface="Calibri" pitchFamily="34" charset="-122"/>
                 <a:cs typeface="Calibri" pitchFamily="34" charset="-120"/>
               </a:rPr>
-              <a:t>Explain how prevalence drives predictive values.</a:t>
+              <a:t>Explain labels and signal detection (enzyme, chemiluminescence).</a:t>
             </a:r>
             <a:endParaRPr lang="en-US" sz="1350" dirty="0"/>
           </a:p>
@@ -9333,7 +11919,7 @@
                 <a:ea typeface="Calibri" pitchFamily="34" charset="-122"/>
                 <a:cs typeface="Calibri" pitchFamily="34" charset="-120"/>
               </a:rPr>
-              <a:t>Recognize heterophile and other immunoassay interferences.</a:t>
+              <a:t>Recognize key interferences: hook effect, heterophile/biotin, cross-reactivity.</a:t>
             </a:r>
             <a:endParaRPr lang="en-US" sz="1350" dirty="0"/>
           </a:p>
@@ -9467,7 +12053,7 @@
                 <a:ea typeface="Calibri" pitchFamily="34" charset="-122"/>
                 <a:cs typeface="Calibri" pitchFamily="34" charset="-120"/>
               </a:rPr>
-              <a:t>Apply reflex and confirmatory testing logic.</a:t>
+              <a:t>Apply sensitivity, specificity, and predictive values with prevalence.</a:t>
             </a:r>
             <a:endParaRPr lang="en-US" sz="1350" dirty="0"/>
           </a:p>
@@ -9601,7 +12187,7 @@
                 <a:ea typeface="Calibri" pitchFamily="34" charset="-122"/>
                 <a:cs typeface="Calibri" pitchFamily="34" charset="-120"/>
               </a:rPr>
-              <a:t>Interpret likelihood ratios at a working level.</a:t>
+              <a:t>Interpret borderline and discordant results.</a:t>
             </a:r>
             <a:endParaRPr lang="en-US" sz="1350" dirty="0"/>
           </a:p>
@@ -9735,7 +12321,7 @@
                 <a:ea typeface="Calibri" pitchFamily="34" charset="-122"/>
                 <a:cs typeface="Calibri" pitchFamily="34" charset="-120"/>
               </a:rPr>
-              <a:t>Handle gray-zone and equivocal results.</a:t>
+              <a:t>State confirmation strategies for high-stakes results.</a:t>
             </a:r>
             <a:endParaRPr lang="en-US" sz="1350" dirty="0"/>
           </a:p>
@@ -10085,7 +12671,7 @@
                 <a:ea typeface="Calibri" pitchFamily="34" charset="-122"/>
                 <a:cs typeface="Calibri" pitchFamily="34" charset="-120"/>
               </a:rPr>
-              <a:t>Performance metrics</a:t>
+              <a:t>Assay formats</a:t>
             </a:r>
             <a:pPr algn="l" indent="0" marL="0">
               <a:buNone/>
@@ -10099,7 +12685,7 @@
                 <a:ea typeface="Calibri" pitchFamily="34" charset="-122"/>
                 <a:cs typeface="Calibri" pitchFamily="34" charset="-120"/>
               </a:rPr>
-              <a:t>   —  sensitivity, specificity, PPV, NPV</a:t>
+              <a:t>   —  competitive vs sandwich</a:t>
             </a:r>
             <a:endParaRPr lang="en-US" sz="1400" dirty="0"/>
           </a:p>
@@ -10226,7 +12812,7 @@
                 <a:ea typeface="Calibri" pitchFamily="34" charset="-122"/>
                 <a:cs typeface="Calibri" pitchFamily="34" charset="-120"/>
               </a:rPr>
-              <a:t>Prevalence &amp; predictive value</a:t>
+              <a:t>Detection</a:t>
             </a:r>
             <a:pPr algn="l" indent="0" marL="0">
               <a:buNone/>
@@ -10240,7 +12826,7 @@
                 <a:ea typeface="Calibri" pitchFamily="34" charset="-122"/>
                 <a:cs typeface="Calibri" pitchFamily="34" charset="-120"/>
               </a:rPr>
-              <a:t>   —  why context matters</a:t>
+              <a:t>   —  labels and signal</a:t>
             </a:r>
             <a:endParaRPr lang="en-US" sz="1400" dirty="0"/>
           </a:p>
@@ -10388,7 +12974,7 @@
                 <a:ea typeface="Calibri" pitchFamily="34" charset="-122"/>
                 <a:cs typeface="Calibri" pitchFamily="34" charset="-120"/>
               </a:rPr>
-              <a:t>   —  heterophile, biotin, cross-reactivity</a:t>
+              <a:t>   —  hook, heterophile, biotin</a:t>
             </a:r>
             <a:endParaRPr lang="en-US" sz="1400" dirty="0"/>
           </a:p>
@@ -10515,7 +13101,7 @@
                 <a:ea typeface="Calibri" pitchFamily="34" charset="-122"/>
                 <a:cs typeface="Calibri" pitchFamily="34" charset="-120"/>
               </a:rPr>
-              <a:t>Algorithms</a:t>
+              <a:t>Performance</a:t>
             </a:r>
             <a:pPr algn="l" indent="0" marL="0">
               <a:buNone/>
@@ -10529,7 +13115,7 @@
                 <a:ea typeface="Calibri" pitchFamily="34" charset="-122"/>
                 <a:cs typeface="Calibri" pitchFamily="34" charset="-120"/>
               </a:rPr>
-              <a:t>   —  reflex and confirmation</a:t>
+              <a:t>   —  predictive value and prevalence</a:t>
             </a:r>
             <a:endParaRPr lang="en-US" sz="1400" dirty="0"/>
           </a:p>
@@ -10663,7 +13249,7 @@
                 <a:ea typeface="Calibri" pitchFamily="34" charset="-122"/>
                 <a:cs typeface="Calibri" pitchFamily="34" charset="-120"/>
               </a:rPr>
-              <a:t>Cases &amp; board</a:t>
+              <a:t>Cases &amp; board review</a:t>
             </a:r>
             <a:endParaRPr lang="en-US" sz="1400" dirty="0"/>
           </a:p>
@@ -10962,7 +13548,7 @@
                 <a:ea typeface="Calibri" pitchFamily="34" charset="-122"/>
                 <a:cs typeface="Calibri" pitchFamily="34" charset="-120"/>
               </a:rPr>
-              <a:t>Performance &amp; Predictive Value</a:t>
+              <a:t>Formats &amp; Detection</a:t>
             </a:r>
             <a:endParaRPr lang="en-US" sz="3800" dirty="0"/>
           </a:p>
@@ -11033,7 +13619,7 @@
                 <a:ea typeface="Calibri" pitchFamily="34" charset="-122"/>
                 <a:cs typeface="Calibri" pitchFamily="34" charset="-120"/>
               </a:rPr>
-              <a:t>IMMUNOLOGY &amp; SEROLOGY   ·   TEST PERFORMANCE</a:t>
+              <a:t>IMMUNOLOGY &amp; SEROLOGY   ·   FORMATS</a:t>
             </a:r>
             <a:endParaRPr lang="en-US" sz="1100" dirty="0"/>
           </a:p>
@@ -11072,7 +13658,7 @@
                 <a:ea typeface="Calibri" pitchFamily="34" charset="-122"/>
                 <a:cs typeface="Calibri" pitchFamily="34" charset="-120"/>
               </a:rPr>
-              <a:t>The 2×2 Table and the Power of Prevalence</a:t>
+              <a:t>Competitive vs Sandwich Immunoassay</a:t>
             </a:r>
             <a:endParaRPr lang="en-US" sz="3000" dirty="0"/>
           </a:p>
@@ -11087,11 +13673,11 @@
         <p:spPr>
           <a:xfrm>
             <a:off x="1066648" y="1481328"/>
-            <a:ext cx="10058400" cy="4288536"/>
+            <a:ext cx="10058400" cy="4187952"/>
           </a:xfrm>
           <a:prstGeom prst="roundRect">
             <a:avLst>
-              <a:gd name="adj" fmla="val 1919"/>
+              <a:gd name="adj" fmla="val 1965"/>
             </a:avLst>
           </a:prstGeom>
           <a:solidFill>
@@ -11114,7 +13700,7 @@
       </p:sp>
       <p:pic>
         <p:nvPicPr>
-          <p:cNvPr id="5" name="Image 0" descr="/tmp/cp_work2/art/immuno_perf.png">    </p:cNvPr>
+          <p:cNvPr id="5" name="Image 0" descr="/tmp/cp_work2/art/chem_immunoassay.png">    </p:cNvPr>
           <p:cNvPicPr>
             <a:picLocks noChangeAspect="1"/>
           </p:cNvPicPr>
@@ -11129,7 +13715,7 @@
         <p:spPr>
           <a:xfrm>
             <a:off x="1194664" y="1609344"/>
-            <a:ext cx="9802368" cy="4032504"/>
+            <a:ext cx="9802368" cy="3931920"/>
           </a:xfrm>
           <a:prstGeom prst="rect">
             <a:avLst/>
@@ -11144,7 +13730,7 @@
         </p:nvSpPr>
         <p:spPr>
           <a:xfrm>
-            <a:off x="566928" y="5843016"/>
+            <a:off x="566928" y="5742432"/>
             <a:ext cx="11057839" cy="365760"/>
           </a:xfrm>
           <a:prstGeom prst="rect">
@@ -11169,7 +13755,7 @@
                 <a:ea typeface="Calibri" pitchFamily="34" charset="-122"/>
                 <a:cs typeface="Calibri" pitchFamily="34" charset="-120"/>
               </a:rPr>
-              <a:t>Original schematic. Sensitivity/specificity are test properties; PPV/NPV depend on prevalence (pretest probability).</a:t>
+              <a:t>Original schematic. Sandwich assays suit larger analytes with two epitopes; competitive assays suit small molecules.</a:t>
             </a:r>
             <a:endParaRPr lang="en-US" sz="1150" dirty="0"/>
           </a:p>
@@ -11346,7 +13932,7 @@
                 <a:ea typeface="Calibri" pitchFamily="34" charset="-122"/>
                 <a:cs typeface="Calibri" pitchFamily="34" charset="-120"/>
               </a:rPr>
-              <a:t>IMMUNOLOGY &amp; SEROLOGY   ·   METRICS</a:t>
+              <a:t>IMMUNOLOGY &amp; SEROLOGY   ·   FORMATS</a:t>
             </a:r>
             <a:endParaRPr lang="en-US" sz="1100" dirty="0"/>
           </a:p>
@@ -11385,7 +13971,7 @@
                 <a:ea typeface="Calibri" pitchFamily="34" charset="-122"/>
                 <a:cs typeface="Calibri" pitchFamily="34" charset="-120"/>
               </a:rPr>
-              <a:t>What Each Metric Tells You</a:t>
+              <a:t>How the Two Formats Behave</a:t>
             </a:r>
             <a:endParaRPr lang="en-US" sz="3000" dirty="0"/>
           </a:p>
@@ -11453,7 +14039,7 @@
                 <a:ea typeface="Calibri" pitchFamily="34" charset="-122"/>
                 <a:cs typeface="Calibri" pitchFamily="34" charset="-120"/>
               </a:rPr>
-              <a:t>FIXED TEST PROPERTIES</a:t>
+              <a:t>SANDWICH (IMMUNOMETRIC)</a:t>
             </a:r>
             <a:endParaRPr lang="en-US" sz="1200" dirty="0"/>
           </a:p>
@@ -11496,7 +14082,7 @@
                 <a:ea typeface="Calibri" pitchFamily="34" charset="-122"/>
                 <a:cs typeface="Calibri" pitchFamily="34" charset="-120"/>
               </a:rPr>
-              <a:t>Sensitivity: proportion of diseased correctly called positive — high sensitivity, a negative rules OUT (SnNOut).</a:t>
+              <a:t>Capture + detection antibody bracket the analyte; signal increases with concentration.</a:t>
             </a:r>
             <a:endParaRPr lang="en-US" sz="1250" dirty="0"/>
           </a:p>
@@ -11517,7 +14103,7 @@
                 <a:ea typeface="Calibri" pitchFamily="34" charset="-122"/>
                 <a:cs typeface="Calibri" pitchFamily="34" charset="-120"/>
               </a:rPr>
-              <a:t>Specificity: proportion of well correctly called negative — high specificity, a positive rules IN (SpPIn).</a:t>
+              <a:t>Best for larger molecules with ≥2 epitopes.</a:t>
             </a:r>
             <a:endParaRPr lang="en-US" sz="1250" dirty="0"/>
           </a:p>
@@ -11538,7 +14124,7 @@
                 <a:ea typeface="Calibri" pitchFamily="34" charset="-122"/>
                 <a:cs typeface="Calibri" pitchFamily="34" charset="-120"/>
               </a:rPr>
-              <a:t>Useful for choosing screening (sensitive) vs confirmatory (specific) tests.</a:t>
+              <a:t>High sensitivity and specificity.</a:t>
             </a:r>
             <a:endParaRPr lang="en-US" sz="1250" dirty="0"/>
           </a:p>
@@ -11559,7 +14145,7 @@
                 <a:ea typeface="Calibri" pitchFamily="34" charset="-122"/>
                 <a:cs typeface="Calibri" pitchFamily="34" charset="-120"/>
               </a:rPr>
-              <a:t>Independent of prevalence.</a:t>
+              <a:t>Susceptible to the high-dose hook effect.</a:t>
             </a:r>
             <a:endParaRPr lang="en-US" sz="1250" dirty="0"/>
           </a:p>
@@ -11582,7 +14168,7 @@
             </a:avLst>
           </a:prstGeom>
           <a:solidFill>
-            <a:srgbClr val="F1E8F7"/>
+            <a:srgbClr val="F1E9F7"/>
           </a:solidFill>
           <a:ln/>
           <a:effectLst>
@@ -11627,7 +14213,7 @@
                 <a:ea typeface="Calibri" pitchFamily="34" charset="-122"/>
                 <a:cs typeface="Calibri" pitchFamily="34" charset="-120"/>
               </a:rPr>
-              <a:t>CONTEXT-DEPENDENT VALUES</a:t>
+              <a:t>COMPETITIVE</a:t>
             </a:r>
             <a:endParaRPr lang="en-US" sz="1200" dirty="0"/>
           </a:p>
@@ -11670,7 +14256,7 @@
                 <a:ea typeface="Calibri" pitchFamily="34" charset="-122"/>
                 <a:cs typeface="Calibri" pitchFamily="34" charset="-120"/>
               </a:rPr>
-              <a:t>PPV/NPV depend on prevalence (pretest probability).</a:t>
+              <a:t>Labeled analyte competes with patient analyte; signal is inversely related to concentration.</a:t>
             </a:r>
             <a:endParaRPr lang="en-US" sz="1250" dirty="0"/>
           </a:p>
@@ -11691,7 +14277,7 @@
                 <a:ea typeface="Calibri" pitchFamily="34" charset="-122"/>
                 <a:cs typeface="Calibri" pitchFamily="34" charset="-120"/>
               </a:rPr>
-              <a:t>In low-prevalence screening, even specific tests yield many false positives (low PPV).</a:t>
+              <a:t>Used for small molecules (haptens, many drugs/hormones).</a:t>
             </a:r>
             <a:endParaRPr lang="en-US" sz="1250" dirty="0"/>
           </a:p>
@@ -11712,7 +14298,7 @@
                 <a:ea typeface="Calibri" pitchFamily="34" charset="-122"/>
                 <a:cs typeface="Calibri" pitchFamily="34" charset="-120"/>
               </a:rPr>
-              <a:t>Likelihood ratios combine with pretest odds to give posttest odds.</a:t>
+              <a:t>One epitope is sufficient.</a:t>
             </a:r>
             <a:endParaRPr lang="en-US" sz="1250" dirty="0"/>
           </a:p>
@@ -11733,7 +14319,7 @@
                 <a:ea typeface="Calibri" pitchFamily="34" charset="-122"/>
                 <a:cs typeface="Calibri" pitchFamily="34" charset="-120"/>
               </a:rPr>
-              <a:t>Always interpret the result against the clinical probability.</a:t>
+              <a:t>Different interference profile.</a:t>
             </a:r>
             <a:endParaRPr lang="en-US" sz="1250" dirty="0"/>
           </a:p>
@@ -11856,6 +14442,570 @@
 <file path=ppt/slides/slide8.xml><?xml version="1.0" encoding="utf-8"?>
 <p:sld xmlns:a="http://schemas.openxmlformats.org/drawingml/2006/main" xmlns:r="http://schemas.openxmlformats.org/officeDocument/2006/relationships" xmlns:p="http://schemas.openxmlformats.org/presentationml/2006/main">
   <p:cSld name="Slide 8">
+    <p:bg>
+      <p:bgPr>
+        <a:solidFill>
+          <a:srgbClr val="FFFFFF"/>
+        </a:solidFill>
+      </p:bgPr>
+    </p:bg>
+    <p:spTree>
+      <p:nvGrpSpPr>
+        <p:cNvPr id="1" name=""/>
+        <p:cNvGrpSpPr/>
+        <p:nvPr/>
+      </p:nvGrpSpPr>
+      <p:grpSpPr>
+        <a:xfrm>
+          <a:off x="0" y="0"/>
+          <a:ext cx="0" cy="0"/>
+          <a:chOff x="0" y="0"/>
+          <a:chExt cx="0" cy="0"/>
+        </a:xfrm>
+      </p:grpSpPr>
+      <p:sp>
+        <p:nvSpPr>
+          <p:cNvPr id="2" name="Text 0"/>
+          <p:cNvSpPr/>
+          <p:nvPr/>
+        </p:nvSpPr>
+        <p:spPr>
+          <a:xfrm>
+            <a:off x="566928" y="329184"/>
+            <a:ext cx="10515600" cy="310896"/>
+          </a:xfrm>
+          <a:prstGeom prst="rect">
+            <a:avLst/>
+          </a:prstGeom>
+          <a:noFill/>
+          <a:ln/>
+        </p:spPr>
+        <p:txBody>
+          <a:bodyPr wrap="square" lIns="0" tIns="0" rIns="0" bIns="0" rtlCol="0" anchor="ctr"/>
+          <a:lstStyle/>
+          <a:p>
+            <a:pPr algn="l" indent="0" marL="0">
+              <a:buNone/>
+            </a:pPr>
+            <a:r>
+              <a:rPr lang="en-US" sz="1100" b="1" spc="150" kern="0" dirty="0">
+                <a:solidFill>
+                  <a:srgbClr val="6A1B9A"/>
+                </a:solidFill>
+                <a:latin typeface="Calibri" pitchFamily="34" charset="0"/>
+                <a:ea typeface="Calibri" pitchFamily="34" charset="-122"/>
+                <a:cs typeface="Calibri" pitchFamily="34" charset="-120"/>
+              </a:rPr>
+              <a:t>IMMUNOLOGY &amp; SEROLOGY   ·   DETECTION</a:t>
+            </a:r>
+            <a:endParaRPr lang="en-US" sz="1100" dirty="0"/>
+          </a:p>
+        </p:txBody>
+      </p:sp>
+      <p:sp>
+        <p:nvSpPr>
+          <p:cNvPr id="3" name="Text 1"/>
+          <p:cNvSpPr/>
+          <p:nvPr/>
+        </p:nvSpPr>
+        <p:spPr>
+          <a:xfrm>
+            <a:off x="566928" y="713232"/>
+            <a:ext cx="11064240" cy="749808"/>
+          </a:xfrm>
+          <a:prstGeom prst="rect">
+            <a:avLst/>
+          </a:prstGeom>
+          <a:noFill/>
+          <a:ln/>
+        </p:spPr>
+        <p:txBody>
+          <a:bodyPr wrap="square" lIns="0" tIns="0" rIns="0" bIns="0" rtlCol="0" anchor="ctr"/>
+          <a:lstStyle/>
+          <a:p>
+            <a:pPr algn="l" indent="0" marL="0">
+              <a:buNone/>
+            </a:pPr>
+            <a:r>
+              <a:rPr lang="en-US" sz="3000" b="1" dirty="0">
+                <a:solidFill>
+                  <a:srgbClr val="0E3A5F"/>
+                </a:solidFill>
+                <a:latin typeface="Calibri" pitchFamily="34" charset="0"/>
+                <a:ea typeface="Calibri" pitchFamily="34" charset="-122"/>
+                <a:cs typeface="Calibri" pitchFamily="34" charset="-120"/>
+              </a:rPr>
+              <a:t>Labels &amp; Signal</a:t>
+            </a:r>
+            <a:endParaRPr lang="en-US" sz="3000" dirty="0"/>
+          </a:p>
+        </p:txBody>
+      </p:sp>
+      <p:sp>
+        <p:nvSpPr>
+          <p:cNvPr id="4" name="Shape 2"/>
+          <p:cNvSpPr/>
+          <p:nvPr/>
+        </p:nvSpPr>
+        <p:spPr>
+          <a:xfrm>
+            <a:off x="566928" y="1517904"/>
+            <a:ext cx="5346040" cy="4114800"/>
+          </a:xfrm>
+          <a:prstGeom prst="roundRect">
+            <a:avLst>
+              <a:gd name="adj" fmla="val 2000"/>
+            </a:avLst>
+          </a:prstGeom>
+          <a:solidFill>
+            <a:srgbClr val="F1E8F7"/>
+          </a:solidFill>
+          <a:ln/>
+          <a:effectLst>
+            <a:outerShdw sx="100000" sy="100000" kx="0" ky="0" algn="bl" rotWithShape="0" blurRad="88900" dist="25400" dir="5400000">
+              <a:srgbClr val="22303C">
+                <a:alpha val="12000"/>
+              </a:srgbClr>
+            </a:outerShdw>
+          </a:effectLst>
+        </p:spPr>
+      </p:sp>
+      <p:sp>
+        <p:nvSpPr>
+          <p:cNvPr id="5" name="Text 3"/>
+          <p:cNvSpPr/>
+          <p:nvPr/>
+        </p:nvSpPr>
+        <p:spPr>
+          <a:xfrm>
+            <a:off x="804672" y="1682496"/>
+            <a:ext cx="4888840" cy="274320"/>
+          </a:xfrm>
+          <a:prstGeom prst="rect">
+            <a:avLst/>
+          </a:prstGeom>
+          <a:noFill/>
+          <a:ln/>
+        </p:spPr>
+        <p:txBody>
+          <a:bodyPr wrap="square" lIns="0" tIns="0" rIns="0" bIns="0" rtlCol="0" anchor="ctr"/>
+          <a:lstStyle/>
+          <a:p>
+            <a:pPr indent="0" marL="0">
+              <a:buNone/>
+            </a:pPr>
+            <a:r>
+              <a:rPr lang="en-US" sz="1200" b="1" spc="100" kern="0" dirty="0">
+                <a:solidFill>
+                  <a:srgbClr val="4A1269"/>
+                </a:solidFill>
+                <a:latin typeface="Calibri" pitchFamily="34" charset="0"/>
+                <a:ea typeface="Calibri" pitchFamily="34" charset="-122"/>
+                <a:cs typeface="Calibri" pitchFamily="34" charset="-120"/>
+              </a:rPr>
+              <a:t>COMMON LABELS</a:t>
+            </a:r>
+            <a:endParaRPr lang="en-US" sz="1200" dirty="0"/>
+          </a:p>
+        </p:txBody>
+      </p:sp>
+      <p:sp>
+        <p:nvSpPr>
+          <p:cNvPr id="6" name="Text 4"/>
+          <p:cNvSpPr/>
+          <p:nvPr/>
+        </p:nvSpPr>
+        <p:spPr>
+          <a:xfrm>
+            <a:off x="804672" y="2029968"/>
+            <a:ext cx="4870552" cy="3474720"/>
+          </a:xfrm>
+          <a:prstGeom prst="rect">
+            <a:avLst/>
+          </a:prstGeom>
+          <a:noFill/>
+          <a:ln/>
+        </p:spPr>
+        <p:txBody>
+          <a:bodyPr wrap="square" lIns="0" tIns="0" rIns="0" bIns="0" rtlCol="0" anchor="t"/>
+          <a:lstStyle/>
+          <a:p>
+            <a:pPr algn="l" marL="177800" indent="-177800">
+              <a:spcAft>
+                <a:spcPts val="900"/>
+              </a:spcAft>
+              <a:buSzPct val="100000"/>
+              <a:buChar char="•"/>
+            </a:pPr>
+            <a:r>
+              <a:rPr lang="en-US" sz="1250" b="1" dirty="0">
+                <a:solidFill>
+                  <a:srgbClr val="1B2A38"/>
+                </a:solidFill>
+                <a:latin typeface="Calibri" pitchFamily="34" charset="0"/>
+                <a:ea typeface="Calibri" pitchFamily="34" charset="-122"/>
+                <a:cs typeface="Calibri" pitchFamily="34" charset="-120"/>
+              </a:rPr>
+              <a:t>Enzyme (EIA/ELISA), chemiluminescent, and fluorescent labels generate measurable signal.</a:t>
+            </a:r>
+            <a:endParaRPr lang="en-US" sz="1250" dirty="0"/>
+          </a:p>
+          <a:p>
+            <a:pPr algn="l" marL="177800" indent="-177800">
+              <a:spcAft>
+                <a:spcPts val="900"/>
+              </a:spcAft>
+              <a:buSzPct val="100000"/>
+              <a:buChar char="•"/>
+            </a:pPr>
+            <a:r>
+              <a:rPr lang="en-US" sz="1250" dirty="0">
+                <a:solidFill>
+                  <a:srgbClr val="33444F"/>
+                </a:solidFill>
+                <a:latin typeface="Calibri" pitchFamily="34" charset="0"/>
+                <a:ea typeface="Calibri" pitchFamily="34" charset="-122"/>
+                <a:cs typeface="Calibri" pitchFamily="34" charset="-120"/>
+              </a:rPr>
+              <a:t>Chemiluminescence offers wide dynamic range and automation.</a:t>
+            </a:r>
+            <a:endParaRPr lang="en-US" sz="1250" dirty="0"/>
+          </a:p>
+          <a:p>
+            <a:pPr algn="l" marL="177800" indent="-177800">
+              <a:spcAft>
+                <a:spcPts val="900"/>
+              </a:spcAft>
+              <a:buSzPct val="100000"/>
+              <a:buChar char="•"/>
+            </a:pPr>
+            <a:r>
+              <a:rPr lang="en-US" sz="1250" dirty="0">
+                <a:solidFill>
+                  <a:srgbClr val="33444F"/>
+                </a:solidFill>
+                <a:latin typeface="Calibri" pitchFamily="34" charset="0"/>
+                <a:ea typeface="Calibri" pitchFamily="34" charset="-122"/>
+                <a:cs typeface="Calibri" pitchFamily="34" charset="-120"/>
+              </a:rPr>
+              <a:t>Calibration curves relate signal to concentration.</a:t>
+            </a:r>
+            <a:endParaRPr lang="en-US" sz="1250" dirty="0"/>
+          </a:p>
+          <a:p>
+            <a:pPr algn="l" marL="177800" indent="-177800">
+              <a:spcAft>
+                <a:spcPts val="900"/>
+              </a:spcAft>
+              <a:buSzPct val="100000"/>
+              <a:buChar char="•"/>
+            </a:pPr>
+            <a:r>
+              <a:rPr lang="en-US" sz="1250" dirty="0">
+                <a:solidFill>
+                  <a:srgbClr val="33444F"/>
+                </a:solidFill>
+                <a:latin typeface="Calibri" pitchFamily="34" charset="0"/>
+                <a:ea typeface="Calibri" pitchFamily="34" charset="-122"/>
+                <a:cs typeface="Calibri" pitchFamily="34" charset="-120"/>
+              </a:rPr>
+              <a:t>Lot-to-lot calibration and QC are essential.</a:t>
+            </a:r>
+            <a:endParaRPr lang="en-US" sz="1250" dirty="0"/>
+          </a:p>
+        </p:txBody>
+      </p:sp>
+      <p:sp>
+        <p:nvSpPr>
+          <p:cNvPr id="7" name="Shape 5"/>
+          <p:cNvSpPr/>
+          <p:nvPr/>
+        </p:nvSpPr>
+        <p:spPr>
+          <a:xfrm>
+            <a:off x="6278728" y="1517904"/>
+            <a:ext cx="5346040" cy="4114800"/>
+          </a:xfrm>
+          <a:prstGeom prst="roundRect">
+            <a:avLst>
+              <a:gd name="adj" fmla="val 2000"/>
+            </a:avLst>
+          </a:prstGeom>
+          <a:solidFill>
+            <a:srgbClr val="F1E9F7"/>
+          </a:solidFill>
+          <a:ln/>
+          <a:effectLst>
+            <a:outerShdw sx="100000" sy="100000" kx="0" ky="0" algn="bl" rotWithShape="0" blurRad="88900" dist="25400" dir="5400000">
+              <a:srgbClr val="22303C">
+                <a:alpha val="12000"/>
+              </a:srgbClr>
+            </a:outerShdw>
+          </a:effectLst>
+        </p:spPr>
+      </p:sp>
+      <p:sp>
+        <p:nvSpPr>
+          <p:cNvPr id="8" name="Text 6"/>
+          <p:cNvSpPr/>
+          <p:nvPr/>
+        </p:nvSpPr>
+        <p:spPr>
+          <a:xfrm>
+            <a:off x="6516472" y="1682496"/>
+            <a:ext cx="4888840" cy="274320"/>
+          </a:xfrm>
+          <a:prstGeom prst="rect">
+            <a:avLst/>
+          </a:prstGeom>
+          <a:noFill/>
+          <a:ln/>
+        </p:spPr>
+        <p:txBody>
+          <a:bodyPr wrap="square" lIns="0" tIns="0" rIns="0" bIns="0" rtlCol="0" anchor="ctr"/>
+          <a:lstStyle/>
+          <a:p>
+            <a:pPr indent="0" marL="0">
+              <a:buNone/>
+            </a:pPr>
+            <a:r>
+              <a:rPr lang="en-US" sz="1200" b="1" spc="100" kern="0" dirty="0">
+                <a:solidFill>
+                  <a:srgbClr val="4A1269"/>
+                </a:solidFill>
+                <a:latin typeface="Calibri" pitchFamily="34" charset="0"/>
+                <a:ea typeface="Calibri" pitchFamily="34" charset="-122"/>
+                <a:cs typeface="Calibri" pitchFamily="34" charset="-120"/>
+              </a:rPr>
+              <a:t>CALIBRATION &amp; QC</a:t>
+            </a:r>
+            <a:endParaRPr lang="en-US" sz="1200" dirty="0"/>
+          </a:p>
+        </p:txBody>
+      </p:sp>
+      <p:sp>
+        <p:nvSpPr>
+          <p:cNvPr id="9" name="Text 7"/>
+          <p:cNvSpPr/>
+          <p:nvPr/>
+        </p:nvSpPr>
+        <p:spPr>
+          <a:xfrm>
+            <a:off x="6516472" y="2029968"/>
+            <a:ext cx="4870552" cy="3474720"/>
+          </a:xfrm>
+          <a:prstGeom prst="rect">
+            <a:avLst/>
+          </a:prstGeom>
+          <a:noFill/>
+          <a:ln/>
+        </p:spPr>
+        <p:txBody>
+          <a:bodyPr wrap="square" lIns="0" tIns="0" rIns="0" bIns="0" rtlCol="0" anchor="t"/>
+          <a:lstStyle/>
+          <a:p>
+            <a:pPr algn="l" marL="177800" indent="-177800">
+              <a:spcAft>
+                <a:spcPts val="900"/>
+              </a:spcAft>
+              <a:buSzPct val="100000"/>
+              <a:buChar char="•"/>
+            </a:pPr>
+            <a:r>
+              <a:rPr lang="en-US" sz="1250" b="1" dirty="0">
+                <a:solidFill>
+                  <a:srgbClr val="1B2A38"/>
+                </a:solidFill>
+                <a:latin typeface="Calibri" pitchFamily="34" charset="0"/>
+                <a:ea typeface="Calibri" pitchFamily="34" charset="-122"/>
+                <a:cs typeface="Calibri" pitchFamily="34" charset="-120"/>
+              </a:rPr>
+              <a:t>Results depend on a valid calibration curve and in-control QC.</a:t>
+            </a:r>
+            <a:endParaRPr lang="en-US" sz="1250" dirty="0"/>
+          </a:p>
+          <a:p>
+            <a:pPr algn="l" marL="177800" indent="-177800">
+              <a:spcAft>
+                <a:spcPts val="900"/>
+              </a:spcAft>
+              <a:buSzPct val="100000"/>
+              <a:buChar char="•"/>
+            </a:pPr>
+            <a:r>
+              <a:rPr lang="en-US" sz="1250" dirty="0">
+                <a:solidFill>
+                  <a:srgbClr val="33444F"/>
+                </a:solidFill>
+                <a:latin typeface="Calibri" pitchFamily="34" charset="0"/>
+                <a:ea typeface="Calibri" pitchFamily="34" charset="-122"/>
+                <a:cs typeface="Calibri" pitchFamily="34" charset="-120"/>
+              </a:rPr>
+              <a:t>Standardization/harmonization affects comparability across platforms.</a:t>
+            </a:r>
+            <a:endParaRPr lang="en-US" sz="1250" dirty="0"/>
+          </a:p>
+          <a:p>
+            <a:pPr algn="l" marL="177800" indent="-177800">
+              <a:spcAft>
+                <a:spcPts val="900"/>
+              </a:spcAft>
+              <a:buSzPct val="100000"/>
+              <a:buChar char="•"/>
+            </a:pPr>
+            <a:r>
+              <a:rPr lang="en-US" sz="1250" dirty="0">
+                <a:solidFill>
+                  <a:srgbClr val="33444F"/>
+                </a:solidFill>
+                <a:latin typeface="Calibri" pitchFamily="34" charset="0"/>
+                <a:ea typeface="Calibri" pitchFamily="34" charset="-122"/>
+                <a:cs typeface="Calibri" pitchFamily="34" charset="-120"/>
+              </a:rPr>
+              <a:t>Carryover and matrix effects must be controlled.</a:t>
+            </a:r>
+            <a:endParaRPr lang="en-US" sz="1250" dirty="0"/>
+          </a:p>
+          <a:p>
+            <a:pPr algn="l" marL="177800" indent="-177800">
+              <a:spcAft>
+                <a:spcPts val="900"/>
+              </a:spcAft>
+              <a:buSzPct val="100000"/>
+              <a:buChar char="•"/>
+            </a:pPr>
+            <a:r>
+              <a:rPr lang="en-US" sz="1250" dirty="0">
+                <a:solidFill>
+                  <a:srgbClr val="33444F"/>
+                </a:solidFill>
+                <a:latin typeface="Calibri" pitchFamily="34" charset="0"/>
+                <a:ea typeface="Calibri" pitchFamily="34" charset="-122"/>
+                <a:cs typeface="Calibri" pitchFamily="34" charset="-120"/>
+              </a:rPr>
+              <a:t>Method changes can shift reference intervals.</a:t>
+            </a:r>
+            <a:endParaRPr lang="en-US" sz="1250" dirty="0"/>
+          </a:p>
+        </p:txBody>
+      </p:sp>
+      <p:sp>
+        <p:nvSpPr>
+          <p:cNvPr id="10" name="Text 8"/>
+          <p:cNvSpPr/>
+          <p:nvPr/>
+        </p:nvSpPr>
+        <p:spPr>
+          <a:xfrm>
+            <a:off x="566928" y="6473952"/>
+            <a:ext cx="7772400" cy="274320"/>
+          </a:xfrm>
+          <a:prstGeom prst="rect">
+            <a:avLst/>
+          </a:prstGeom>
+          <a:noFill/>
+          <a:ln/>
+        </p:spPr>
+        <p:txBody>
+          <a:bodyPr wrap="square" lIns="0" tIns="0" rIns="0" bIns="0" rtlCol="0" anchor="ctr"/>
+          <a:lstStyle/>
+          <a:p>
+            <a:pPr algn="l" indent="0" marL="0">
+              <a:buNone/>
+            </a:pPr>
+            <a:r>
+              <a:rPr lang="en-US" sz="850" dirty="0">
+                <a:solidFill>
+                  <a:srgbClr val="9AA8B4"/>
+                </a:solidFill>
+                <a:latin typeface="Calibri" pitchFamily="34" charset="0"/>
+                <a:ea typeface="Calibri" pitchFamily="34" charset="-122"/>
+                <a:cs typeface="Calibri" pitchFamily="34" charset="-120"/>
+              </a:rPr>
+              <a:t>Makassed General Hospital  ·  Department of Laboratory Medicine</a:t>
+            </a:r>
+            <a:endParaRPr lang="en-US" sz="850" dirty="0"/>
+          </a:p>
+        </p:txBody>
+      </p:sp>
+      <p:sp>
+        <p:nvSpPr>
+          <p:cNvPr id="11" name="Text 9"/>
+          <p:cNvSpPr/>
+          <p:nvPr/>
+        </p:nvSpPr>
+        <p:spPr>
+          <a:xfrm>
+            <a:off x="9814255" y="6473952"/>
+            <a:ext cx="1828800" cy="274320"/>
+          </a:xfrm>
+          <a:prstGeom prst="rect">
+            <a:avLst/>
+          </a:prstGeom>
+          <a:noFill/>
+          <a:ln/>
+        </p:spPr>
+        <p:txBody>
+          <a:bodyPr wrap="square" lIns="0" tIns="0" rIns="0" bIns="0" rtlCol="0" anchor="ctr"/>
+          <a:lstStyle/>
+          <a:p>
+            <a:pPr algn="r" indent="0" marL="0">
+              <a:buNone/>
+            </a:pPr>
+            <a:r>
+              <a:rPr lang="en-US" sz="850" dirty="0">
+                <a:solidFill>
+                  <a:srgbClr val="9AA8B4"/>
+                </a:solidFill>
+                <a:latin typeface="Calibri" pitchFamily="34" charset="0"/>
+                <a:ea typeface="Calibri" pitchFamily="34" charset="-122"/>
+                <a:cs typeface="Calibri" pitchFamily="34" charset="-120"/>
+              </a:rPr>
+              <a:t>CP Lecture Series</a:t>
+            </a:r>
+            <a:pPr algn="r" indent="0" marL="0">
+              <a:buNone/>
+            </a:pPr>
+            <a:r>
+              <a:rPr lang="en-US" sz="850" dirty="0">
+                <a:solidFill>
+                  <a:srgbClr val="DCE4EC"/>
+                </a:solidFill>
+                <a:latin typeface="Calibri" pitchFamily="34" charset="0"/>
+                <a:ea typeface="Calibri" pitchFamily="34" charset="-122"/>
+                <a:cs typeface="Calibri" pitchFamily="34" charset="-120"/>
+              </a:rPr>
+              <a:t>   ·   </a:t>
+            </a:r>
+            <a:pPr algn="r" indent="0" marL="0">
+              <a:buNone/>
+            </a:pPr>
+            <a:r>
+              <a:rPr lang="en-US" sz="850" b="1" dirty="0">
+                <a:solidFill>
+                  <a:srgbClr val="6A1B9A"/>
+                </a:solidFill>
+                <a:latin typeface="Calibri" pitchFamily="34" charset="0"/>
+                <a:ea typeface="Calibri" pitchFamily="34" charset="-122"/>
+                <a:cs typeface="Calibri" pitchFamily="34" charset="-120"/>
+              </a:rPr>
+              <a:t>7</a:t>
+            </a:r>
+            <a:endParaRPr lang="en-US" sz="850" dirty="0"/>
+          </a:p>
+        </p:txBody>
+      </p:sp>
+    </p:spTree>
+  </p:cSld>
+  <p:clrMapOvr>
+    <a:masterClrMapping/>
+  </p:clrMapOvr>
+</p:sld>
+</file>
+
+<file path=ppt/slides/slide9.xml><?xml version="1.0" encoding="utf-8"?>
+<p:sld xmlns:a="http://schemas.openxmlformats.org/drawingml/2006/main" xmlns:r="http://schemas.openxmlformats.org/officeDocument/2006/relationships" xmlns:p="http://schemas.openxmlformats.org/presentationml/2006/main">
+  <p:cSld name="Slide 9">
     <p:bg>
       <p:bgPr>
         <a:solidFill>
@@ -12032,573 +15182,9 @@
                 <a:ea typeface="Calibri" pitchFamily="34" charset="-122"/>
                 <a:cs typeface="Calibri" pitchFamily="34" charset="-120"/>
               </a:rPr>
-              <a:t>Interference &amp; Algorithms</a:t>
+              <a:t>Interferences &amp; Performance</a:t>
             </a:r>
             <a:endParaRPr lang="en-US" sz="3800" dirty="0"/>
-          </a:p>
-        </p:txBody>
-      </p:sp>
-    </p:spTree>
-  </p:cSld>
-  <p:clrMapOvr>
-    <a:masterClrMapping/>
-  </p:clrMapOvr>
-</p:sld>
-</file>
-
-<file path=ppt/slides/slide9.xml><?xml version="1.0" encoding="utf-8"?>
-<p:sld xmlns:a="http://schemas.openxmlformats.org/drawingml/2006/main" xmlns:r="http://schemas.openxmlformats.org/officeDocument/2006/relationships" xmlns:p="http://schemas.openxmlformats.org/presentationml/2006/main">
-  <p:cSld name="Slide 9">
-    <p:bg>
-      <p:bgPr>
-        <a:solidFill>
-          <a:srgbClr val="FFFFFF"/>
-        </a:solidFill>
-      </p:bgPr>
-    </p:bg>
-    <p:spTree>
-      <p:nvGrpSpPr>
-        <p:cNvPr id="1" name=""/>
-        <p:cNvGrpSpPr/>
-        <p:nvPr/>
-      </p:nvGrpSpPr>
-      <p:grpSpPr>
-        <a:xfrm>
-          <a:off x="0" y="0"/>
-          <a:ext cx="0" cy="0"/>
-          <a:chOff x="0" y="0"/>
-          <a:chExt cx="0" cy="0"/>
-        </a:xfrm>
-      </p:grpSpPr>
-      <p:sp>
-        <p:nvSpPr>
-          <p:cNvPr id="2" name="Text 0"/>
-          <p:cNvSpPr/>
-          <p:nvPr/>
-        </p:nvSpPr>
-        <p:spPr>
-          <a:xfrm>
-            <a:off x="566928" y="329184"/>
-            <a:ext cx="10515600" cy="310896"/>
-          </a:xfrm>
-          <a:prstGeom prst="rect">
-            <a:avLst/>
-          </a:prstGeom>
-          <a:noFill/>
-          <a:ln/>
-        </p:spPr>
-        <p:txBody>
-          <a:bodyPr wrap="square" lIns="0" tIns="0" rIns="0" bIns="0" rtlCol="0" anchor="ctr"/>
-          <a:lstStyle/>
-          <a:p>
-            <a:pPr algn="l" indent="0" marL="0">
-              <a:buNone/>
-            </a:pPr>
-            <a:r>
-              <a:rPr lang="en-US" sz="1100" b="1" spc="150" kern="0" dirty="0">
-                <a:solidFill>
-                  <a:srgbClr val="6A1B9A"/>
-                </a:solidFill>
-                <a:latin typeface="Calibri" pitchFamily="34" charset="0"/>
-                <a:ea typeface="Calibri" pitchFamily="34" charset="-122"/>
-                <a:cs typeface="Calibri" pitchFamily="34" charset="-120"/>
-              </a:rPr>
-              <a:t>IMMUNOLOGY &amp; SEROLOGY   ·   INTERFERENCE</a:t>
-            </a:r>
-            <a:endParaRPr lang="en-US" sz="1100" dirty="0"/>
-          </a:p>
-        </p:txBody>
-      </p:sp>
-      <p:sp>
-        <p:nvSpPr>
-          <p:cNvPr id="3" name="Text 1"/>
-          <p:cNvSpPr/>
-          <p:nvPr/>
-        </p:nvSpPr>
-        <p:spPr>
-          <a:xfrm>
-            <a:off x="566928" y="713232"/>
-            <a:ext cx="11064240" cy="749808"/>
-          </a:xfrm>
-          <a:prstGeom prst="rect">
-            <a:avLst/>
-          </a:prstGeom>
-          <a:noFill/>
-          <a:ln/>
-        </p:spPr>
-        <p:txBody>
-          <a:bodyPr wrap="square" lIns="0" tIns="0" rIns="0" bIns="0" rtlCol="0" anchor="ctr"/>
-          <a:lstStyle/>
-          <a:p>
-            <a:pPr algn="l" indent="0" marL="0">
-              <a:buNone/>
-            </a:pPr>
-            <a:r>
-              <a:rPr lang="en-US" sz="3000" b="1" dirty="0">
-                <a:solidFill>
-                  <a:srgbClr val="0E3A5F"/>
-                </a:solidFill>
-                <a:latin typeface="Calibri" pitchFamily="34" charset="0"/>
-                <a:ea typeface="Calibri" pitchFamily="34" charset="-122"/>
-                <a:cs typeface="Calibri" pitchFamily="34" charset="-120"/>
-              </a:rPr>
-              <a:t>How Immunoassays Mislead</a:t>
-            </a:r>
-            <a:endParaRPr lang="en-US" sz="3000" dirty="0"/>
-          </a:p>
-        </p:txBody>
-      </p:sp>
-      <p:sp>
-        <p:nvSpPr>
-          <p:cNvPr id="4" name="Shape 2"/>
-          <p:cNvSpPr/>
-          <p:nvPr/>
-        </p:nvSpPr>
-        <p:spPr>
-          <a:xfrm>
-            <a:off x="566928" y="1517904"/>
-            <a:ext cx="5346040" cy="4114800"/>
-          </a:xfrm>
-          <a:prstGeom prst="roundRect">
-            <a:avLst>
-              <a:gd name="adj" fmla="val 2000"/>
-            </a:avLst>
-          </a:prstGeom>
-          <a:solidFill>
-            <a:srgbClr val="F1E8F7"/>
-          </a:solidFill>
-          <a:ln/>
-          <a:effectLst>
-            <a:outerShdw sx="100000" sy="100000" kx="0" ky="0" algn="bl" rotWithShape="0" blurRad="88900" dist="25400" dir="5400000">
-              <a:srgbClr val="22303C">
-                <a:alpha val="12000"/>
-              </a:srgbClr>
-            </a:outerShdw>
-          </a:effectLst>
-        </p:spPr>
-      </p:sp>
-      <p:sp>
-        <p:nvSpPr>
-          <p:cNvPr id="5" name="Text 3"/>
-          <p:cNvSpPr/>
-          <p:nvPr/>
-        </p:nvSpPr>
-        <p:spPr>
-          <a:xfrm>
-            <a:off x="804672" y="1682496"/>
-            <a:ext cx="4888840" cy="274320"/>
-          </a:xfrm>
-          <a:prstGeom prst="rect">
-            <a:avLst/>
-          </a:prstGeom>
-          <a:noFill/>
-          <a:ln/>
-        </p:spPr>
-        <p:txBody>
-          <a:bodyPr wrap="square" lIns="0" tIns="0" rIns="0" bIns="0" rtlCol="0" anchor="ctr"/>
-          <a:lstStyle/>
-          <a:p>
-            <a:pPr indent="0" marL="0">
-              <a:buNone/>
-            </a:pPr>
-            <a:r>
-              <a:rPr lang="en-US" sz="1200" b="1" spc="100" kern="0" dirty="0">
-                <a:solidFill>
-                  <a:srgbClr val="4A1269"/>
-                </a:solidFill>
-                <a:latin typeface="Calibri" pitchFamily="34" charset="0"/>
-                <a:ea typeface="Calibri" pitchFamily="34" charset="-122"/>
-                <a:cs typeface="Calibri" pitchFamily="34" charset="-120"/>
-              </a:rPr>
-              <a:t>ANTIBODY &amp; ANALYTE INTERFERENCES</a:t>
-            </a:r>
-            <a:endParaRPr lang="en-US" sz="1200" dirty="0"/>
-          </a:p>
-        </p:txBody>
-      </p:sp>
-      <p:sp>
-        <p:nvSpPr>
-          <p:cNvPr id="6" name="Text 4"/>
-          <p:cNvSpPr/>
-          <p:nvPr/>
-        </p:nvSpPr>
-        <p:spPr>
-          <a:xfrm>
-            <a:off x="804672" y="2029968"/>
-            <a:ext cx="4870552" cy="3474720"/>
-          </a:xfrm>
-          <a:prstGeom prst="rect">
-            <a:avLst/>
-          </a:prstGeom>
-          <a:noFill/>
-          <a:ln/>
-        </p:spPr>
-        <p:txBody>
-          <a:bodyPr wrap="square" lIns="0" tIns="0" rIns="0" bIns="0" rtlCol="0" anchor="t"/>
-          <a:lstStyle/>
-          <a:p>
-            <a:pPr algn="l" marL="177800" indent="-177800">
-              <a:spcAft>
-                <a:spcPts val="900"/>
-              </a:spcAft>
-              <a:buSzPct val="100000"/>
-              <a:buChar char="•"/>
-            </a:pPr>
-            <a:r>
-              <a:rPr lang="en-US" sz="1250" b="1" dirty="0">
-                <a:solidFill>
-                  <a:srgbClr val="1B2A38"/>
-                </a:solidFill>
-                <a:latin typeface="Calibri" pitchFamily="34" charset="0"/>
-                <a:ea typeface="Calibri" pitchFamily="34" charset="-122"/>
-                <a:cs typeface="Calibri" pitchFamily="34" charset="-120"/>
-              </a:rPr>
-              <a:t>Heterophile antibodies bridge capture/detection antibodies → false positives/elevations.</a:t>
-            </a:r>
-            <a:endParaRPr lang="en-US" sz="1250" dirty="0"/>
-          </a:p>
-          <a:p>
-            <a:pPr algn="l" marL="177800" indent="-177800">
-              <a:spcAft>
-                <a:spcPts val="900"/>
-              </a:spcAft>
-              <a:buSzPct val="100000"/>
-              <a:buChar char="•"/>
-            </a:pPr>
-            <a:r>
-              <a:rPr lang="en-US" sz="1250" dirty="0">
-                <a:solidFill>
-                  <a:srgbClr val="33444F"/>
-                </a:solidFill>
-                <a:latin typeface="Calibri" pitchFamily="34" charset="0"/>
-                <a:ea typeface="Calibri" pitchFamily="34" charset="-122"/>
-                <a:cs typeface="Calibri" pitchFamily="34" charset="-120"/>
-              </a:rPr>
-              <a:t>Biotin (streptavidin-biotin assays) shifts results by assay design.</a:t>
-            </a:r>
-            <a:endParaRPr lang="en-US" sz="1250" dirty="0"/>
-          </a:p>
-          <a:p>
-            <a:pPr algn="l" marL="177800" indent="-177800">
-              <a:spcAft>
-                <a:spcPts val="900"/>
-              </a:spcAft>
-              <a:buSzPct val="100000"/>
-              <a:buChar char="•"/>
-            </a:pPr>
-            <a:r>
-              <a:rPr lang="en-US" sz="1250" dirty="0">
-                <a:solidFill>
-                  <a:srgbClr val="33444F"/>
-                </a:solidFill>
-                <a:latin typeface="Calibri" pitchFamily="34" charset="0"/>
-                <a:ea typeface="Calibri" pitchFamily="34" charset="-122"/>
-                <a:cs typeface="Calibri" pitchFamily="34" charset="-120"/>
-              </a:rPr>
-              <a:t>Cross-reactivity with structurally similar molecules.</a:t>
-            </a:r>
-            <a:endParaRPr lang="en-US" sz="1250" dirty="0"/>
-          </a:p>
-          <a:p>
-            <a:pPr algn="l" marL="177800" indent="-177800">
-              <a:spcAft>
-                <a:spcPts val="900"/>
-              </a:spcAft>
-              <a:buSzPct val="100000"/>
-              <a:buChar char="•"/>
-            </a:pPr>
-            <a:r>
-              <a:rPr lang="en-US" sz="1250" dirty="0">
-                <a:solidFill>
-                  <a:srgbClr val="33444F"/>
-                </a:solidFill>
-                <a:latin typeface="Calibri" pitchFamily="34" charset="0"/>
-                <a:ea typeface="Calibri" pitchFamily="34" charset="-122"/>
-                <a:cs typeface="Calibri" pitchFamily="34" charset="-120"/>
-              </a:rPr>
-              <a:t>The high-dose hook effect (very high analyte reads low).</a:t>
-            </a:r>
-            <a:endParaRPr lang="en-US" sz="1250" dirty="0"/>
-          </a:p>
-        </p:txBody>
-      </p:sp>
-      <p:sp>
-        <p:nvSpPr>
-          <p:cNvPr id="7" name="Shape 5"/>
-          <p:cNvSpPr/>
-          <p:nvPr/>
-        </p:nvSpPr>
-        <p:spPr>
-          <a:xfrm>
-            <a:off x="6278728" y="1517904"/>
-            <a:ext cx="5346040" cy="4114800"/>
-          </a:xfrm>
-          <a:prstGeom prst="roundRect">
-            <a:avLst>
-              <a:gd name="adj" fmla="val 2000"/>
-            </a:avLst>
-          </a:prstGeom>
-          <a:solidFill>
-            <a:srgbClr val="F1E8F7"/>
-          </a:solidFill>
-          <a:ln/>
-          <a:effectLst>
-            <a:outerShdw sx="100000" sy="100000" kx="0" ky="0" algn="bl" rotWithShape="0" blurRad="88900" dist="25400" dir="5400000">
-              <a:srgbClr val="22303C">
-                <a:alpha val="12000"/>
-              </a:srgbClr>
-            </a:outerShdw>
-          </a:effectLst>
-        </p:spPr>
-      </p:sp>
-      <p:sp>
-        <p:nvSpPr>
-          <p:cNvPr id="8" name="Text 6"/>
-          <p:cNvSpPr/>
-          <p:nvPr/>
-        </p:nvSpPr>
-        <p:spPr>
-          <a:xfrm>
-            <a:off x="6516472" y="1682496"/>
-            <a:ext cx="4888840" cy="274320"/>
-          </a:xfrm>
-          <a:prstGeom prst="rect">
-            <a:avLst/>
-          </a:prstGeom>
-          <a:noFill/>
-          <a:ln/>
-        </p:spPr>
-        <p:txBody>
-          <a:bodyPr wrap="square" lIns="0" tIns="0" rIns="0" bIns="0" rtlCol="0" anchor="ctr"/>
-          <a:lstStyle/>
-          <a:p>
-            <a:pPr indent="0" marL="0">
-              <a:buNone/>
-            </a:pPr>
-            <a:r>
-              <a:rPr lang="en-US" sz="1200" b="1" spc="100" kern="0" dirty="0">
-                <a:solidFill>
-                  <a:srgbClr val="4A1269"/>
-                </a:solidFill>
-                <a:latin typeface="Calibri" pitchFamily="34" charset="0"/>
-                <a:ea typeface="Calibri" pitchFamily="34" charset="-122"/>
-                <a:cs typeface="Calibri" pitchFamily="34" charset="-120"/>
-              </a:rPr>
-              <a:t>RECOGNIZE AND RESOLVE</a:t>
-            </a:r>
-            <a:endParaRPr lang="en-US" sz="1200" dirty="0"/>
-          </a:p>
-        </p:txBody>
-      </p:sp>
-      <p:sp>
-        <p:nvSpPr>
-          <p:cNvPr id="9" name="Text 7"/>
-          <p:cNvSpPr/>
-          <p:nvPr/>
-        </p:nvSpPr>
-        <p:spPr>
-          <a:xfrm>
-            <a:off x="6516472" y="2029968"/>
-            <a:ext cx="4870552" cy="3474720"/>
-          </a:xfrm>
-          <a:prstGeom prst="rect">
-            <a:avLst/>
-          </a:prstGeom>
-          <a:noFill/>
-          <a:ln/>
-        </p:spPr>
-        <p:txBody>
-          <a:bodyPr wrap="square" lIns="0" tIns="0" rIns="0" bIns="0" rtlCol="0" anchor="t"/>
-          <a:lstStyle/>
-          <a:p>
-            <a:pPr algn="l" marL="177800" indent="-177800">
-              <a:spcAft>
-                <a:spcPts val="900"/>
-              </a:spcAft>
-              <a:buSzPct val="100000"/>
-              <a:buChar char="•"/>
-            </a:pPr>
-            <a:r>
-              <a:rPr lang="en-US" sz="1250" b="1" dirty="0">
-                <a:solidFill>
-                  <a:srgbClr val="1B2A38"/>
-                </a:solidFill>
-                <a:latin typeface="Calibri" pitchFamily="34" charset="0"/>
-                <a:ea typeface="Calibri" pitchFamily="34" charset="-122"/>
-                <a:cs typeface="Calibri" pitchFamily="34" charset="-120"/>
-              </a:rPr>
-              <a:t>Suspect interference when the result defies the clinical picture.</a:t>
-            </a:r>
-            <a:endParaRPr lang="en-US" sz="1250" dirty="0"/>
-          </a:p>
-          <a:p>
-            <a:pPr algn="l" marL="177800" indent="-177800">
-              <a:spcAft>
-                <a:spcPts val="900"/>
-              </a:spcAft>
-              <a:buSzPct val="100000"/>
-              <a:buChar char="•"/>
-            </a:pPr>
-            <a:r>
-              <a:rPr lang="en-US" sz="1250" dirty="0">
-                <a:solidFill>
-                  <a:srgbClr val="33444F"/>
-                </a:solidFill>
-                <a:latin typeface="Calibri" pitchFamily="34" charset="0"/>
-                <a:ea typeface="Calibri" pitchFamily="34" charset="-122"/>
-                <a:cs typeface="Calibri" pitchFamily="34" charset="-120"/>
-              </a:rPr>
-              <a:t>Non-linearity on serial dilution suggests interference.</a:t>
-            </a:r>
-            <a:endParaRPr lang="en-US" sz="1250" dirty="0"/>
-          </a:p>
-          <a:p>
-            <a:pPr algn="l" marL="177800" indent="-177800">
-              <a:spcAft>
-                <a:spcPts val="900"/>
-              </a:spcAft>
-              <a:buSzPct val="100000"/>
-              <a:buChar char="•"/>
-            </a:pPr>
-            <a:r>
-              <a:rPr lang="en-US" sz="1250" dirty="0">
-                <a:solidFill>
-                  <a:srgbClr val="33444F"/>
-                </a:solidFill>
-                <a:latin typeface="Calibri" pitchFamily="34" charset="0"/>
-                <a:ea typeface="Calibri" pitchFamily="34" charset="-122"/>
-                <a:cs typeface="Calibri" pitchFamily="34" charset="-120"/>
-              </a:rPr>
-              <a:t>Heterophile-blocking tubes or an alternative platform confirm.</a:t>
-            </a:r>
-            <a:endParaRPr lang="en-US" sz="1250" dirty="0"/>
-          </a:p>
-          <a:p>
-            <a:pPr algn="l" marL="177800" indent="-177800">
-              <a:spcAft>
-                <a:spcPts val="900"/>
-              </a:spcAft>
-              <a:buSzPct val="100000"/>
-              <a:buChar char="•"/>
-            </a:pPr>
-            <a:r>
-              <a:rPr lang="en-US" sz="1250" dirty="0">
-                <a:solidFill>
-                  <a:srgbClr val="33444F"/>
-                </a:solidFill>
-                <a:latin typeface="Calibri" pitchFamily="34" charset="0"/>
-                <a:ea typeface="Calibri" pitchFamily="34" charset="-122"/>
-                <a:cs typeface="Calibri" pitchFamily="34" charset="-120"/>
-              </a:rPr>
-              <a:t>Hold biotin before testing; reconcile with context.</a:t>
-            </a:r>
-            <a:endParaRPr lang="en-US" sz="1250" dirty="0"/>
-          </a:p>
-        </p:txBody>
-      </p:sp>
-      <p:sp>
-        <p:nvSpPr>
-          <p:cNvPr id="10" name="Text 8"/>
-          <p:cNvSpPr/>
-          <p:nvPr/>
-        </p:nvSpPr>
-        <p:spPr>
-          <a:xfrm>
-            <a:off x="566928" y="6473952"/>
-            <a:ext cx="7772400" cy="274320"/>
-          </a:xfrm>
-          <a:prstGeom prst="rect">
-            <a:avLst/>
-          </a:prstGeom>
-          <a:noFill/>
-          <a:ln/>
-        </p:spPr>
-        <p:txBody>
-          <a:bodyPr wrap="square" lIns="0" tIns="0" rIns="0" bIns="0" rtlCol="0" anchor="ctr"/>
-          <a:lstStyle/>
-          <a:p>
-            <a:pPr algn="l" indent="0" marL="0">
-              <a:buNone/>
-            </a:pPr>
-            <a:r>
-              <a:rPr lang="en-US" sz="850" dirty="0">
-                <a:solidFill>
-                  <a:srgbClr val="9AA8B4"/>
-                </a:solidFill>
-                <a:latin typeface="Calibri" pitchFamily="34" charset="0"/>
-                <a:ea typeface="Calibri" pitchFamily="34" charset="-122"/>
-                <a:cs typeface="Calibri" pitchFamily="34" charset="-120"/>
-              </a:rPr>
-              <a:t>Makassed General Hospital  ·  Department of Laboratory Medicine</a:t>
-            </a:r>
-            <a:endParaRPr lang="en-US" sz="850" dirty="0"/>
-          </a:p>
-        </p:txBody>
-      </p:sp>
-      <p:sp>
-        <p:nvSpPr>
-          <p:cNvPr id="11" name="Text 9"/>
-          <p:cNvSpPr/>
-          <p:nvPr/>
-        </p:nvSpPr>
-        <p:spPr>
-          <a:xfrm>
-            <a:off x="9814255" y="6473952"/>
-            <a:ext cx="1828800" cy="274320"/>
-          </a:xfrm>
-          <a:prstGeom prst="rect">
-            <a:avLst/>
-          </a:prstGeom>
-          <a:noFill/>
-          <a:ln/>
-        </p:spPr>
-        <p:txBody>
-          <a:bodyPr wrap="square" lIns="0" tIns="0" rIns="0" bIns="0" rtlCol="0" anchor="ctr"/>
-          <a:lstStyle/>
-          <a:p>
-            <a:pPr algn="r" indent="0" marL="0">
-              <a:buNone/>
-            </a:pPr>
-            <a:r>
-              <a:rPr lang="en-US" sz="850" dirty="0">
-                <a:solidFill>
-                  <a:srgbClr val="9AA8B4"/>
-                </a:solidFill>
-                <a:latin typeface="Calibri" pitchFamily="34" charset="0"/>
-                <a:ea typeface="Calibri" pitchFamily="34" charset="-122"/>
-                <a:cs typeface="Calibri" pitchFamily="34" charset="-120"/>
-              </a:rPr>
-              <a:t>CP Lecture Series</a:t>
-            </a:r>
-            <a:pPr algn="r" indent="0" marL="0">
-              <a:buNone/>
-            </a:pPr>
-            <a:r>
-              <a:rPr lang="en-US" sz="850" dirty="0">
-                <a:solidFill>
-                  <a:srgbClr val="DCE4EC"/>
-                </a:solidFill>
-                <a:latin typeface="Calibri" pitchFamily="34" charset="0"/>
-                <a:ea typeface="Calibri" pitchFamily="34" charset="-122"/>
-                <a:cs typeface="Calibri" pitchFamily="34" charset="-120"/>
-              </a:rPr>
-              <a:t>   ·   </a:t>
-            </a:r>
-            <a:pPr algn="r" indent="0" marL="0">
-              <a:buNone/>
-            </a:pPr>
-            <a:r>
-              <a:rPr lang="en-US" sz="850" b="1" dirty="0">
-                <a:solidFill>
-                  <a:srgbClr val="6A1B9A"/>
-                </a:solidFill>
-                <a:latin typeface="Calibri" pitchFamily="34" charset="0"/>
-                <a:ea typeface="Calibri" pitchFamily="34" charset="-122"/>
-                <a:cs typeface="Calibri" pitchFamily="34" charset="-120"/>
-              </a:rPr>
-              <a:t>7</a:t>
-            </a:r>
-            <a:endParaRPr lang="en-US" sz="850" dirty="0"/>
           </a:p>
         </p:txBody>
       </p:sp>

--- a/decks/Immuno_01_Immunoassay-Principles-Test-Performance.pptx
+++ b/decks/Immuno_01_Immunoassay-Principles-Test-Performance.pptx
@@ -25,9 +25,13 @@
     <p:sldId id="273" r:id="rId19"/>
     <p:sldId id="274" r:id="rId20"/>
     <p:sldId id="275" r:id="rId21"/>
+    <p:sldId id="284" r:id="rId35"/>
     <p:sldId id="276" r:id="rId22"/>
+    <p:sldId id="283" r:id="rId34"/>
     <p:sldId id="277" r:id="rId23"/>
+    <p:sldId id="282" r:id="rId33"/>
     <p:sldId id="278" r:id="rId24"/>
+    <p:sldId id="281" r:id="rId32"/>
     <p:sldId id="279" r:id="rId25"/>
     <p:sldId id="280" r:id="rId26"/>
   </p:sldIdLst>
@@ -3032,6 +3036,10 @@
           </a:solidFill>
           <a:ln/>
         </p:spPr>
+        <p:txBody>
+          <a:bodyPr/>
+          <a:p/>
+        </p:txBody>
       </p:sp>
       <p:sp>
         <p:nvSpPr>
@@ -3054,6 +3062,10 @@
           </a:solidFill>
           <a:ln/>
         </p:spPr>
+        <p:txBody>
+          <a:bodyPr/>
+          <a:p/>
+        </p:txBody>
       </p:sp>
       <p:sp>
         <p:nvSpPr>
@@ -3076,6 +3088,10 @@
           </a:solidFill>
           <a:ln/>
         </p:spPr>
+        <p:txBody>
+          <a:bodyPr/>
+          <a:p/>
+        </p:txBody>
       </p:sp>
       <p:sp>
         <p:nvSpPr>
@@ -3098,6 +3114,10 @@
           </a:solidFill>
           <a:ln/>
         </p:spPr>
+        <p:txBody>
+          <a:bodyPr/>
+          <a:p/>
+        </p:txBody>
       </p:sp>
       <p:sp>
         <p:nvSpPr>
@@ -3519,6 +3539,10 @@
             </a:outerShdw>
           </a:effectLst>
         </p:spPr>
+        <p:txBody>
+          <a:bodyPr/>
+          <a:p/>
+        </p:txBody>
       </p:sp>
       <p:pic>
         <p:nvPicPr>
@@ -3827,6 +3851,10 @@
             </a:outerShdw>
           </a:effectLst>
         </p:spPr>
+        <p:txBody>
+          <a:bodyPr/>
+          <a:p/>
+        </p:txBody>
       </p:sp>
       <p:sp>
         <p:nvSpPr>
@@ -4001,6 +4029,10 @@
             </a:outerShdw>
           </a:effectLst>
         </p:spPr>
+        <p:txBody>
+          <a:bodyPr/>
+          <a:p/>
+        </p:txBody>
       </p:sp>
       <p:sp>
         <p:nvSpPr>
@@ -4391,6 +4423,10 @@
             </a:outerShdw>
           </a:effectLst>
         </p:spPr>
+        <p:txBody>
+          <a:bodyPr/>
+          <a:p/>
+        </p:txBody>
       </p:sp>
       <p:sp>
         <p:nvSpPr>
@@ -4565,6 +4601,10 @@
             </a:outerShdw>
           </a:effectLst>
         </p:spPr>
+        <p:txBody>
+          <a:bodyPr/>
+          <a:p/>
+        </p:txBody>
       </p:sp>
       <p:sp>
         <p:nvSpPr>
@@ -4870,6 +4910,10 @@
           </a:solidFill>
           <a:ln/>
         </p:spPr>
+        <p:txBody>
+          <a:bodyPr/>
+          <a:p/>
+        </p:txBody>
       </p:sp>
       <p:sp>
         <p:nvSpPr>
@@ -4892,6 +4936,10 @@
           </a:solidFill>
           <a:ln/>
         </p:spPr>
+        <p:txBody>
+          <a:bodyPr/>
+          <a:p/>
+        </p:txBody>
       </p:sp>
       <p:sp>
         <p:nvSpPr>
@@ -5148,6 +5196,10 @@
             </a:outerShdw>
           </a:effectLst>
         </p:spPr>
+        <p:txBody>
+          <a:bodyPr/>
+          <a:p/>
+        </p:txBody>
       </p:sp>
       <p:sp>
         <p:nvSpPr>
@@ -5258,6 +5310,10 @@
             </a:outerShdw>
           </a:effectLst>
         </p:spPr>
+        <p:txBody>
+          <a:bodyPr/>
+          <a:p/>
+        </p:txBody>
       </p:sp>
       <p:sp>
         <p:nvSpPr>
@@ -5687,6 +5743,10 @@
             </a:outerShdw>
           </a:effectLst>
         </p:spPr>
+        <p:txBody>
+          <a:bodyPr/>
+          <a:p/>
+        </p:txBody>
       </p:sp>
       <p:sp>
         <p:nvSpPr>
@@ -6013,6 +6073,10 @@
             </a:outerShdw>
           </a:effectLst>
         </p:spPr>
+        <p:txBody>
+          <a:bodyPr/>
+          <a:p/>
+        </p:txBody>
       </p:sp>
       <p:sp>
         <p:nvSpPr>
@@ -6123,6 +6187,10 @@
             </a:outerShdw>
           </a:effectLst>
         </p:spPr>
+        <p:txBody>
+          <a:bodyPr/>
+          <a:p/>
+        </p:txBody>
       </p:sp>
       <p:sp>
         <p:nvSpPr>
@@ -6552,6 +6620,10 @@
             </a:outerShdw>
           </a:effectLst>
         </p:spPr>
+        <p:txBody>
+          <a:bodyPr/>
+          <a:p/>
+        </p:txBody>
       </p:sp>
       <p:sp>
         <p:nvSpPr>
@@ -6878,6 +6950,10 @@
             </a:outerShdw>
           </a:effectLst>
         </p:spPr>
+        <p:txBody>
+          <a:bodyPr/>
+          <a:p/>
+        </p:txBody>
       </p:sp>
       <p:sp>
         <p:nvSpPr>
@@ -6988,6 +7064,10 @@
             </a:outerShdw>
           </a:effectLst>
         </p:spPr>
+        <p:txBody>
+          <a:bodyPr/>
+          <a:p/>
+        </p:txBody>
       </p:sp>
       <p:sp>
         <p:nvSpPr>
@@ -7417,6 +7497,10 @@
             </a:outerShdw>
           </a:effectLst>
         </p:spPr>
+        <p:txBody>
+          <a:bodyPr/>
+          <a:p/>
+        </p:txBody>
       </p:sp>
       <p:sp>
         <p:nvSpPr>
@@ -7743,6 +7827,10 @@
             </a:outerShdw>
           </a:effectLst>
         </p:spPr>
+        <p:txBody>
+          <a:bodyPr/>
+          <a:p/>
+        </p:txBody>
       </p:sp>
       <p:sp>
         <p:nvSpPr>
@@ -7850,6 +7938,10 @@
             </a:outerShdw>
           </a:effectLst>
         </p:spPr>
+        <p:txBody>
+          <a:bodyPr/>
+          <a:p/>
+        </p:txBody>
       </p:sp>
       <p:sp>
         <p:nvSpPr>
@@ -7957,6 +8049,10 @@
             </a:outerShdw>
           </a:effectLst>
         </p:spPr>
+        <p:txBody>
+          <a:bodyPr/>
+          <a:p/>
+        </p:txBody>
       </p:sp>
       <p:sp>
         <p:nvSpPr>
@@ -8064,6 +8160,10 @@
             </a:outerShdw>
           </a:effectLst>
         </p:spPr>
+        <p:txBody>
+          <a:bodyPr/>
+          <a:p/>
+        </p:txBody>
       </p:sp>
       <p:sp>
         <p:nvSpPr>
@@ -8456,9 +8556,9 @@
               <a:buNone/>
             </a:pPr>
             <a:r>
-              <a:rPr lang="en-US" sz="1350" b="1" dirty="0">
-                <a:solidFill>
-                  <a:srgbClr val="4A1269"/>
+              <a:rPr lang="en-US" sz="1350" b="0" dirty="0">
+                <a:solidFill>
+                  <a:srgbClr val="33444F"/>
                 </a:solidFill>
                 <a:latin typeface="Calibri" pitchFamily="34" charset="0"/>
                 <a:ea typeface="Calibri" pitchFamily="34" charset="-122"/>
@@ -8527,130 +8627,6 @@
               <a:t>E. A shifted calibration only</a:t>
             </a:r>
             <a:endParaRPr lang="en-US" sz="1350" dirty="0"/>
-          </a:p>
-        </p:txBody>
-      </p:sp>
-      <p:sp>
-        <p:nvSpPr>
-          <p:cNvPr id="6" name="Shape 4"/>
-          <p:cNvSpPr/>
-          <p:nvPr/>
-        </p:nvSpPr>
-        <p:spPr>
-          <a:xfrm>
-            <a:off x="7201632" y="2395728"/>
-            <a:ext cx="4423136" cy="3246120"/>
-          </a:xfrm>
-          <a:prstGeom prst="roundRect">
-            <a:avLst>
-              <a:gd name="adj" fmla="val 2535"/>
-            </a:avLst>
-          </a:prstGeom>
-          <a:solidFill>
-            <a:srgbClr val="F1E8F7"/>
-          </a:solidFill>
-          <a:ln/>
-          <a:effectLst>
-            <a:outerShdw sx="100000" sy="100000" kx="0" ky="0" algn="bl" rotWithShape="0" blurRad="88900" dist="25400" dir="5400000">
-              <a:srgbClr val="22303C">
-                <a:alpha val="12000"/>
-              </a:srgbClr>
-            </a:outerShdw>
-          </a:effectLst>
-        </p:spPr>
-      </p:sp>
-      <p:sp>
-        <p:nvSpPr>
-          <p:cNvPr id="7" name="Text 5"/>
-          <p:cNvSpPr/>
-          <p:nvPr/>
-        </p:nvSpPr>
-        <p:spPr>
-          <a:xfrm>
-            <a:off x="7439376" y="2578608"/>
-            <a:ext cx="3965936" cy="457200"/>
-          </a:xfrm>
-          <a:prstGeom prst="rect">
-            <a:avLst/>
-          </a:prstGeom>
-          <a:noFill/>
-          <a:ln/>
-        </p:spPr>
-        <p:txBody>
-          <a:bodyPr wrap="square" lIns="0" tIns="0" rIns="0" bIns="0" rtlCol="0" anchor="ctr"/>
-          <a:lstStyle/>
-          <a:p>
-            <a:pPr indent="0" marL="0">
-              <a:buNone/>
-            </a:pPr>
-            <a:r>
-              <a:rPr lang="en-US" sz="1500" b="1" dirty="0">
-                <a:solidFill>
-                  <a:srgbClr val="6A1B9A"/>
-                </a:solidFill>
-                <a:latin typeface="Calibri" pitchFamily="34" charset="0"/>
-                <a:ea typeface="Calibri" pitchFamily="34" charset="-122"/>
-                <a:cs typeface="Calibri" pitchFamily="34" charset="-120"/>
-              </a:rPr>
-              <a:t>ANSWER  </a:t>
-            </a:r>
-            <a:pPr indent="0" marL="0">
-              <a:buNone/>
-            </a:pPr>
-            <a:r>
-              <a:rPr lang="en-US" sz="1500" b="1" dirty="0">
-                <a:solidFill>
-                  <a:srgbClr val="1B2A38"/>
-                </a:solidFill>
-                <a:latin typeface="Calibri" pitchFamily="34" charset="0"/>
-                <a:ea typeface="Calibri" pitchFamily="34" charset="-122"/>
-                <a:cs typeface="Calibri" pitchFamily="34" charset="-120"/>
-              </a:rPr>
-              <a:t>B — Falsely low at very high concentrations</a:t>
-            </a:r>
-            <a:endParaRPr lang="en-US" sz="1500" dirty="0"/>
-          </a:p>
-        </p:txBody>
-      </p:sp>
-      <p:sp>
-        <p:nvSpPr>
-          <p:cNvPr id="8" name="Text 6"/>
-          <p:cNvSpPr/>
-          <p:nvPr/>
-        </p:nvSpPr>
-        <p:spPr>
-          <a:xfrm>
-            <a:off x="7439376" y="3127248"/>
-            <a:ext cx="3947648" cy="2377440"/>
-          </a:xfrm>
-          <a:prstGeom prst="rect">
-            <a:avLst/>
-          </a:prstGeom>
-          <a:noFill/>
-          <a:ln/>
-        </p:spPr>
-        <p:txBody>
-          <a:bodyPr wrap="square" lIns="0" tIns="0" rIns="0" bIns="0" rtlCol="0" anchor="t"/>
-          <a:lstStyle/>
-          <a:p>
-            <a:pPr algn="l" indent="0" marL="0">
-              <a:lnSpc>
-                <a:spcPct val="108000"/>
-              </a:lnSpc>
-              <a:buNone/>
-            </a:pPr>
-            <a:r>
-              <a:rPr lang="en-US" sz="1250" dirty="0">
-                <a:solidFill>
-                  <a:srgbClr val="33444F"/>
-                </a:solidFill>
-                <a:latin typeface="Calibri" pitchFamily="34" charset="0"/>
-                <a:ea typeface="Calibri" pitchFamily="34" charset="-122"/>
-                <a:cs typeface="Calibri" pitchFamily="34" charset="-120"/>
-              </a:rPr>
-              <a:t>Antibody saturation in one-step sandwich assays produces a paradoxically low signal; dilution reveals the true value.</a:t>
-            </a:r>
-            <a:endParaRPr lang="en-US" sz="1250" dirty="0"/>
           </a:p>
         </p:txBody>
       </p:sp>
@@ -8980,9 +8956,9 @@
               <a:buNone/>
             </a:pPr>
             <a:r>
-              <a:rPr lang="en-US" sz="1350" b="1" dirty="0">
-                <a:solidFill>
-                  <a:srgbClr val="4A1269"/>
+              <a:rPr lang="en-US" sz="1350" b="0" dirty="0">
+                <a:solidFill>
+                  <a:srgbClr val="33444F"/>
                 </a:solidFill>
                 <a:latin typeface="Calibri" pitchFamily="34" charset="0"/>
                 <a:ea typeface="Calibri" pitchFamily="34" charset="-122"/>
@@ -9031,130 +9007,6 @@
               <a:t>E. Precision improves</a:t>
             </a:r>
             <a:endParaRPr lang="en-US" sz="1350" dirty="0"/>
-          </a:p>
-        </p:txBody>
-      </p:sp>
-      <p:sp>
-        <p:nvSpPr>
-          <p:cNvPr id="6" name="Shape 4"/>
-          <p:cNvSpPr/>
-          <p:nvPr/>
-        </p:nvSpPr>
-        <p:spPr>
-          <a:xfrm>
-            <a:off x="7201632" y="2395728"/>
-            <a:ext cx="4423136" cy="3246120"/>
-          </a:xfrm>
-          <a:prstGeom prst="roundRect">
-            <a:avLst>
-              <a:gd name="adj" fmla="val 2535"/>
-            </a:avLst>
-          </a:prstGeom>
-          <a:solidFill>
-            <a:srgbClr val="F1E8F7"/>
-          </a:solidFill>
-          <a:ln/>
-          <a:effectLst>
-            <a:outerShdw sx="100000" sy="100000" kx="0" ky="0" algn="bl" rotWithShape="0" blurRad="88900" dist="25400" dir="5400000">
-              <a:srgbClr val="22303C">
-                <a:alpha val="12000"/>
-              </a:srgbClr>
-            </a:outerShdw>
-          </a:effectLst>
-        </p:spPr>
-      </p:sp>
-      <p:sp>
-        <p:nvSpPr>
-          <p:cNvPr id="7" name="Text 5"/>
-          <p:cNvSpPr/>
-          <p:nvPr/>
-        </p:nvSpPr>
-        <p:spPr>
-          <a:xfrm>
-            <a:off x="7439376" y="2578608"/>
-            <a:ext cx="3965936" cy="457200"/>
-          </a:xfrm>
-          <a:prstGeom prst="rect">
-            <a:avLst/>
-          </a:prstGeom>
-          <a:noFill/>
-          <a:ln/>
-        </p:spPr>
-        <p:txBody>
-          <a:bodyPr wrap="square" lIns="0" tIns="0" rIns="0" bIns="0" rtlCol="0" anchor="ctr"/>
-          <a:lstStyle/>
-          <a:p>
-            <a:pPr indent="0" marL="0">
-              <a:buNone/>
-            </a:pPr>
-            <a:r>
-              <a:rPr lang="en-US" sz="1500" b="1" dirty="0">
-                <a:solidFill>
-                  <a:srgbClr val="6A1B9A"/>
-                </a:solidFill>
-                <a:latin typeface="Calibri" pitchFamily="34" charset="0"/>
-                <a:ea typeface="Calibri" pitchFamily="34" charset="-122"/>
-                <a:cs typeface="Calibri" pitchFamily="34" charset="-120"/>
-              </a:rPr>
-              <a:t>ANSWER  </a:t>
-            </a:r>
-            <a:pPr indent="0" marL="0">
-              <a:buNone/>
-            </a:pPr>
-            <a:r>
-              <a:rPr lang="en-US" sz="1500" b="1" dirty="0">
-                <a:solidFill>
-                  <a:srgbClr val="1B2A38"/>
-                </a:solidFill>
-                <a:latin typeface="Calibri" pitchFamily="34" charset="0"/>
-                <a:ea typeface="Calibri" pitchFamily="34" charset="-122"/>
-                <a:cs typeface="Calibri" pitchFamily="34" charset="-120"/>
-              </a:rPr>
-              <a:t>C — Prevalence decreases</a:t>
-            </a:r>
-            <a:endParaRPr lang="en-US" sz="1500" dirty="0"/>
-          </a:p>
-        </p:txBody>
-      </p:sp>
-      <p:sp>
-        <p:nvSpPr>
-          <p:cNvPr id="8" name="Text 6"/>
-          <p:cNvSpPr/>
-          <p:nvPr/>
-        </p:nvSpPr>
-        <p:spPr>
-          <a:xfrm>
-            <a:off x="7439376" y="3127248"/>
-            <a:ext cx="3947648" cy="2377440"/>
-          </a:xfrm>
-          <a:prstGeom prst="rect">
-            <a:avLst/>
-          </a:prstGeom>
-          <a:noFill/>
-          <a:ln/>
-        </p:spPr>
-        <p:txBody>
-          <a:bodyPr wrap="square" lIns="0" tIns="0" rIns="0" bIns="0" rtlCol="0" anchor="t"/>
-          <a:lstStyle/>
-          <a:p>
-            <a:pPr algn="l" indent="0" marL="0">
-              <a:lnSpc>
-                <a:spcPct val="108000"/>
-              </a:lnSpc>
-              <a:buNone/>
-            </a:pPr>
-            <a:r>
-              <a:rPr lang="en-US" sz="1250" dirty="0">
-                <a:solidFill>
-                  <a:srgbClr val="33444F"/>
-                </a:solidFill>
-                <a:latin typeface="Calibri" pitchFamily="34" charset="0"/>
-                <a:ea typeface="Calibri" pitchFamily="34" charset="-122"/>
-                <a:cs typeface="Calibri" pitchFamily="34" charset="-120"/>
-              </a:rPr>
-              <a:t>With fixed sensitivity/specificity, lower prevalence yields more false positives and a lower PPV.</a:t>
-            </a:r>
-            <a:endParaRPr lang="en-US" sz="1250" dirty="0"/>
           </a:p>
         </p:txBody>
       </p:sp>
@@ -9464,9 +9316,9 @@
               <a:buNone/>
             </a:pPr>
             <a:r>
-              <a:rPr lang="en-US" sz="1350" b="1" dirty="0">
-                <a:solidFill>
-                  <a:srgbClr val="4A1269"/>
+              <a:rPr lang="en-US" sz="1350" b="0" dirty="0">
+                <a:solidFill>
+                  <a:srgbClr val="33444F"/>
                 </a:solidFill>
                 <a:latin typeface="Calibri" pitchFamily="34" charset="0"/>
                 <a:ea typeface="Calibri" pitchFamily="34" charset="-122"/>
@@ -9535,130 +9387,6 @@
               <a:t>E. Osmolality</a:t>
             </a:r>
             <a:endParaRPr lang="en-US" sz="1350" dirty="0"/>
-          </a:p>
-        </p:txBody>
-      </p:sp>
-      <p:sp>
-        <p:nvSpPr>
-          <p:cNvPr id="6" name="Shape 4"/>
-          <p:cNvSpPr/>
-          <p:nvPr/>
-        </p:nvSpPr>
-        <p:spPr>
-          <a:xfrm>
-            <a:off x="7201632" y="2395728"/>
-            <a:ext cx="4423136" cy="3246120"/>
-          </a:xfrm>
-          <a:prstGeom prst="roundRect">
-            <a:avLst>
-              <a:gd name="adj" fmla="val 2535"/>
-            </a:avLst>
-          </a:prstGeom>
-          <a:solidFill>
-            <a:srgbClr val="F1E8F7"/>
-          </a:solidFill>
-          <a:ln/>
-          <a:effectLst>
-            <a:outerShdw sx="100000" sy="100000" kx="0" ky="0" algn="bl" rotWithShape="0" blurRad="88900" dist="25400" dir="5400000">
-              <a:srgbClr val="22303C">
-                <a:alpha val="12000"/>
-              </a:srgbClr>
-            </a:outerShdw>
-          </a:effectLst>
-        </p:spPr>
-      </p:sp>
-      <p:sp>
-        <p:nvSpPr>
-          <p:cNvPr id="7" name="Text 5"/>
-          <p:cNvSpPr/>
-          <p:nvPr/>
-        </p:nvSpPr>
-        <p:spPr>
-          <a:xfrm>
-            <a:off x="7439376" y="2578608"/>
-            <a:ext cx="3965936" cy="457200"/>
-          </a:xfrm>
-          <a:prstGeom prst="rect">
-            <a:avLst/>
-          </a:prstGeom>
-          <a:noFill/>
-          <a:ln/>
-        </p:spPr>
-        <p:txBody>
-          <a:bodyPr wrap="square" lIns="0" tIns="0" rIns="0" bIns="0" rtlCol="0" anchor="ctr"/>
-          <a:lstStyle/>
-          <a:p>
-            <a:pPr indent="0" marL="0">
-              <a:buNone/>
-            </a:pPr>
-            <a:r>
-              <a:rPr lang="en-US" sz="1500" b="1" dirty="0">
-                <a:solidFill>
-                  <a:srgbClr val="6A1B9A"/>
-                </a:solidFill>
-                <a:latin typeface="Calibri" pitchFamily="34" charset="0"/>
-                <a:ea typeface="Calibri" pitchFamily="34" charset="-122"/>
-                <a:cs typeface="Calibri" pitchFamily="34" charset="-120"/>
-              </a:rPr>
-              <a:t>ANSWER  </a:t>
-            </a:r>
-            <a:pPr indent="0" marL="0">
-              <a:buNone/>
-            </a:pPr>
-            <a:r>
-              <a:rPr lang="en-US" sz="1500" b="1" dirty="0">
-                <a:solidFill>
-                  <a:srgbClr val="1B2A38"/>
-                </a:solidFill>
-                <a:latin typeface="Calibri" pitchFamily="34" charset="0"/>
-                <a:ea typeface="Calibri" pitchFamily="34" charset="-122"/>
-                <a:cs typeface="Calibri" pitchFamily="34" charset="-120"/>
-              </a:rPr>
-              <a:t>B — Large analytes with ≥2 epitopes</a:t>
-            </a:r>
-            <a:endParaRPr lang="en-US" sz="1500" dirty="0"/>
-          </a:p>
-        </p:txBody>
-      </p:sp>
-      <p:sp>
-        <p:nvSpPr>
-          <p:cNvPr id="8" name="Text 6"/>
-          <p:cNvSpPr/>
-          <p:nvPr/>
-        </p:nvSpPr>
-        <p:spPr>
-          <a:xfrm>
-            <a:off x="7439376" y="3127248"/>
-            <a:ext cx="3947648" cy="2377440"/>
-          </a:xfrm>
-          <a:prstGeom prst="rect">
-            <a:avLst/>
-          </a:prstGeom>
-          <a:noFill/>
-          <a:ln/>
-        </p:spPr>
-        <p:txBody>
-          <a:bodyPr wrap="square" lIns="0" tIns="0" rIns="0" bIns="0" rtlCol="0" anchor="t"/>
-          <a:lstStyle/>
-          <a:p>
-            <a:pPr algn="l" indent="0" marL="0">
-              <a:lnSpc>
-                <a:spcPct val="108000"/>
-              </a:lnSpc>
-              <a:buNone/>
-            </a:pPr>
-            <a:r>
-              <a:rPr lang="en-US" sz="1250" dirty="0">
-                <a:solidFill>
-                  <a:srgbClr val="33444F"/>
-                </a:solidFill>
-                <a:latin typeface="Calibri" pitchFamily="34" charset="0"/>
-                <a:ea typeface="Calibri" pitchFamily="34" charset="-122"/>
-                <a:cs typeface="Calibri" pitchFamily="34" charset="-120"/>
-              </a:rPr>
-              <a:t>Two antibodies must bind distinct epitopes; small single-epitope molecules use competitive formats.</a:t>
-            </a:r>
-            <a:endParaRPr lang="en-US" sz="1250" dirty="0"/>
           </a:p>
         </p:txBody>
       </p:sp>
@@ -9968,9 +9696,9 @@
               <a:buNone/>
             </a:pPr>
             <a:r>
-              <a:rPr lang="en-US" sz="1350" b="1" dirty="0">
-                <a:solidFill>
-                  <a:srgbClr val="4A1269"/>
+              <a:rPr lang="en-US" sz="1350" b="0" dirty="0">
+                <a:solidFill>
+                  <a:srgbClr val="33444F"/>
                 </a:solidFill>
                 <a:latin typeface="Calibri" pitchFamily="34" charset="0"/>
                 <a:ea typeface="Calibri" pitchFamily="34" charset="-122"/>
@@ -10039,130 +9767,6 @@
               <a:t>E. The sample is lipemic</a:t>
             </a:r>
             <a:endParaRPr lang="en-US" sz="1350" dirty="0"/>
-          </a:p>
-        </p:txBody>
-      </p:sp>
-      <p:sp>
-        <p:nvSpPr>
-          <p:cNvPr id="6" name="Shape 4"/>
-          <p:cNvSpPr/>
-          <p:nvPr/>
-        </p:nvSpPr>
-        <p:spPr>
-          <a:xfrm>
-            <a:off x="7201632" y="2395728"/>
-            <a:ext cx="4423136" cy="3246120"/>
-          </a:xfrm>
-          <a:prstGeom prst="roundRect">
-            <a:avLst>
-              <a:gd name="adj" fmla="val 2535"/>
-            </a:avLst>
-          </a:prstGeom>
-          <a:solidFill>
-            <a:srgbClr val="F1E8F7"/>
-          </a:solidFill>
-          <a:ln/>
-          <a:effectLst>
-            <a:outerShdw sx="100000" sy="100000" kx="0" ky="0" algn="bl" rotWithShape="0" blurRad="88900" dist="25400" dir="5400000">
-              <a:srgbClr val="22303C">
-                <a:alpha val="12000"/>
-              </a:srgbClr>
-            </a:outerShdw>
-          </a:effectLst>
-        </p:spPr>
-      </p:sp>
-      <p:sp>
-        <p:nvSpPr>
-          <p:cNvPr id="7" name="Text 5"/>
-          <p:cNvSpPr/>
-          <p:nvPr/>
-        </p:nvSpPr>
-        <p:spPr>
-          <a:xfrm>
-            <a:off x="7439376" y="2578608"/>
-            <a:ext cx="3965936" cy="457200"/>
-          </a:xfrm>
-          <a:prstGeom prst="rect">
-            <a:avLst/>
-          </a:prstGeom>
-          <a:noFill/>
-          <a:ln/>
-        </p:spPr>
-        <p:txBody>
-          <a:bodyPr wrap="square" lIns="0" tIns="0" rIns="0" bIns="0" rtlCol="0" anchor="ctr"/>
-          <a:lstStyle/>
-          <a:p>
-            <a:pPr indent="0" marL="0">
-              <a:buNone/>
-            </a:pPr>
-            <a:r>
-              <a:rPr lang="en-US" sz="1500" b="1" dirty="0">
-                <a:solidFill>
-                  <a:srgbClr val="6A1B9A"/>
-                </a:solidFill>
-                <a:latin typeface="Calibri" pitchFamily="34" charset="0"/>
-                <a:ea typeface="Calibri" pitchFamily="34" charset="-122"/>
-                <a:cs typeface="Calibri" pitchFamily="34" charset="-120"/>
-              </a:rPr>
-              <a:t>ANSWER  </a:t>
-            </a:r>
-            <a:pPr indent="0" marL="0">
-              <a:buNone/>
-            </a:pPr>
-            <a:r>
-              <a:rPr lang="en-US" sz="1500" b="1" dirty="0">
-                <a:solidFill>
-                  <a:srgbClr val="1B2A38"/>
-                </a:solidFill>
-                <a:latin typeface="Calibri" pitchFamily="34" charset="0"/>
-                <a:ea typeface="Calibri" pitchFamily="34" charset="-122"/>
-                <a:cs typeface="Calibri" pitchFamily="34" charset="-120"/>
-              </a:rPr>
-              <a:t>B — Result discordant with clinical picture</a:t>
-            </a:r>
-            <a:endParaRPr lang="en-US" sz="1500" dirty="0"/>
-          </a:p>
-        </p:txBody>
-      </p:sp>
-      <p:sp>
-        <p:nvSpPr>
-          <p:cNvPr id="8" name="Text 6"/>
-          <p:cNvSpPr/>
-          <p:nvPr/>
-        </p:nvSpPr>
-        <p:spPr>
-          <a:xfrm>
-            <a:off x="7439376" y="3127248"/>
-            <a:ext cx="3947648" cy="2377440"/>
-          </a:xfrm>
-          <a:prstGeom prst="rect">
-            <a:avLst/>
-          </a:prstGeom>
-          <a:noFill/>
-          <a:ln/>
-        </p:spPr>
-        <p:txBody>
-          <a:bodyPr wrap="square" lIns="0" tIns="0" rIns="0" bIns="0" rtlCol="0" anchor="t"/>
-          <a:lstStyle/>
-          <a:p>
-            <a:pPr algn="l" indent="0" marL="0">
-              <a:lnSpc>
-                <a:spcPct val="108000"/>
-              </a:lnSpc>
-              <a:buNone/>
-            </a:pPr>
-            <a:r>
-              <a:rPr lang="en-US" sz="1250" dirty="0">
-                <a:solidFill>
-                  <a:srgbClr val="33444F"/>
-                </a:solidFill>
-                <a:latin typeface="Calibri" pitchFamily="34" charset="0"/>
-                <a:ea typeface="Calibri" pitchFamily="34" charset="-122"/>
-                <a:cs typeface="Calibri" pitchFamily="34" charset="-120"/>
-              </a:rPr>
-              <a:t>Heterophile antibodies cause clinically implausible results; blocking reagents or alternate platforms confirm the artifact.</a:t>
-            </a:r>
-            <a:endParaRPr lang="en-US" sz="1250" dirty="0"/>
           </a:p>
         </p:txBody>
       </p:sp>
@@ -10403,6 +10007,10 @@
           </a:solidFill>
           <a:ln/>
         </p:spPr>
+        <p:txBody>
+          <a:bodyPr/>
+          <a:p/>
+        </p:txBody>
       </p:sp>
       <p:sp>
         <p:nvSpPr>
@@ -10430,6 +10038,10 @@
             </a:outerShdw>
           </a:effectLst>
         </p:spPr>
+        <p:txBody>
+          <a:bodyPr/>
+          <a:p/>
+        </p:txBody>
       </p:sp>
       <p:sp>
         <p:nvSpPr>
@@ -10530,6 +10142,10 @@
           </a:solidFill>
           <a:ln/>
         </p:spPr>
+        <p:txBody>
+          <a:bodyPr/>
+          <a:p/>
+        </p:txBody>
       </p:sp>
       <p:sp>
         <p:nvSpPr>
@@ -10557,6 +10173,10 @@
             </a:outerShdw>
           </a:effectLst>
         </p:spPr>
+        <p:txBody>
+          <a:bodyPr/>
+          <a:p/>
+        </p:txBody>
       </p:sp>
       <p:sp>
         <p:nvSpPr>
@@ -10657,6 +10277,10 @@
           </a:solidFill>
           <a:ln/>
         </p:spPr>
+        <p:txBody>
+          <a:bodyPr/>
+          <a:p/>
+        </p:txBody>
       </p:sp>
       <p:sp>
         <p:nvSpPr>
@@ -10684,6 +10308,10 @@
             </a:outerShdw>
           </a:effectLst>
         </p:spPr>
+        <p:txBody>
+          <a:bodyPr/>
+          <a:p/>
+        </p:txBody>
       </p:sp>
       <p:sp>
         <p:nvSpPr>
@@ -10784,6 +10412,10 @@
           </a:solidFill>
           <a:ln/>
         </p:spPr>
+        <p:txBody>
+          <a:bodyPr/>
+          <a:p/>
+        </p:txBody>
       </p:sp>
       <p:sp>
         <p:nvSpPr>
@@ -10811,6 +10443,10 @@
             </a:outerShdw>
           </a:effectLst>
         </p:spPr>
+        <p:txBody>
+          <a:bodyPr/>
+          <a:p/>
+        </p:txBody>
       </p:sp>
       <p:sp>
         <p:nvSpPr>
@@ -10911,6 +10547,10 @@
           </a:solidFill>
           <a:ln/>
         </p:spPr>
+        <p:txBody>
+          <a:bodyPr/>
+          <a:p/>
+        </p:txBody>
       </p:sp>
       <p:sp>
         <p:nvSpPr>
@@ -10938,6 +10578,10 @@
             </a:outerShdw>
           </a:effectLst>
         </p:spPr>
+        <p:txBody>
+          <a:bodyPr/>
+          <a:p/>
+        </p:txBody>
       </p:sp>
       <p:sp>
         <p:nvSpPr>
@@ -11421,6 +11065,1982 @@
 </p:sld>
 </file>
 
+<file path=ppt/slides/slide26.xml><?xml version="1.0" encoding="utf-8"?>
+<p:sld xmlns:a="http://schemas.openxmlformats.org/drawingml/2006/main" xmlns:p="http://schemas.openxmlformats.org/presentationml/2006/main" xmlns:r="http://schemas.openxmlformats.org/officeDocument/2006/relationships">
+  <p:cSld>
+    <p:spTree>
+      <p:nvGrpSpPr>
+        <p:cNvPr id="1" name=""/>
+        <p:cNvGrpSpPr/>
+        <p:nvPr/>
+      </p:nvGrpSpPr>
+      <p:grpSpPr/>
+      <p:sp>
+        <p:nvSpPr>
+          <p:cNvPr id="2" name="Text 0"/>
+          <p:cNvSpPr/>
+          <p:nvPr/>
+        </p:nvSpPr>
+        <p:spPr>
+          <a:xfrm>
+            <a:off x="566928" y="329184"/>
+            <a:ext cx="10515600" cy="310896"/>
+          </a:xfrm>
+          <a:prstGeom prst="rect">
+            <a:avLst/>
+          </a:prstGeom>
+          <a:noFill/>
+          <a:ln/>
+        </p:spPr>
+        <p:txBody>
+          <a:bodyPr wrap="square" lIns="0" tIns="0" rIns="0" bIns="0" rtlCol="0" anchor="ctr"/>
+          <a:lstStyle/>
+          <a:p>
+            <a:pPr algn="l" indent="0" marL="0">
+              <a:buNone/>
+            </a:pPr>
+            <a:r>
+              <a:rPr lang="en-US" sz="1100" b="1" spc="150" kern="0" dirty="0">
+                <a:solidFill>
+                  <a:srgbClr val="6A1B9A"/>
+                </a:solidFill>
+                <a:latin typeface="Calibri" pitchFamily="34" charset="0"/>
+                <a:ea typeface="Calibri" pitchFamily="34" charset="-122"/>
+                <a:cs typeface="Calibri" pitchFamily="34" charset="-120"/>
+              </a:rPr>
+              <a:t>IMMUNOLOGY &amp; SEROLOGY   ·   BOARD REVIEW  ·  Q4</a:t>
+            </a:r>
+            <a:endParaRPr lang="en-US" sz="1100" dirty="0"/>
+          </a:p>
+        </p:txBody>
+      </p:sp>
+      <p:sp>
+        <p:nvSpPr>
+          <p:cNvPr id="3" name="Text 1"/>
+          <p:cNvSpPr/>
+          <p:nvPr/>
+        </p:nvSpPr>
+        <p:spPr>
+          <a:xfrm>
+            <a:off x="566928" y="713232"/>
+            <a:ext cx="11064240" cy="749808"/>
+          </a:xfrm>
+          <a:prstGeom prst="rect">
+            <a:avLst/>
+          </a:prstGeom>
+          <a:noFill/>
+          <a:ln/>
+        </p:spPr>
+        <p:txBody>
+          <a:bodyPr wrap="square" lIns="0" tIns="0" rIns="0" bIns="0" rtlCol="0" anchor="ctr"/>
+          <a:lstStyle/>
+          <a:p>
+            <a:pPr algn="l" indent="0" marL="0">
+              <a:buNone/>
+            </a:pPr>
+            <a:r>
+              <a:rPr lang="en-US" sz="2600" b="1" dirty="0">
+                <a:solidFill>
+                  <a:srgbClr val="0E3A5F"/>
+                </a:solidFill>
+                <a:latin typeface="Calibri" pitchFamily="34" charset="0"/>
+                <a:ea typeface="Calibri" pitchFamily="34" charset="-122"/>
+                <a:cs typeface="Calibri" pitchFamily="34" charset="-120"/>
+              </a:rPr>
+              <a:t>Board-Style Review</a:t>
+            </a:r>
+            <a:endParaRPr lang="en-US" sz="2600" dirty="0"/>
+          </a:p>
+        </p:txBody>
+      </p:sp>
+      <p:sp>
+        <p:nvSpPr>
+          <p:cNvPr id="4" name="Text 2"/>
+          <p:cNvSpPr/>
+          <p:nvPr/>
+        </p:nvSpPr>
+        <p:spPr>
+          <a:xfrm>
+            <a:off x="566928" y="1417320"/>
+            <a:ext cx="11057839" cy="914400"/>
+          </a:xfrm>
+          <a:prstGeom prst="rect">
+            <a:avLst/>
+          </a:prstGeom>
+          <a:noFill/>
+          <a:ln/>
+        </p:spPr>
+        <p:txBody>
+          <a:bodyPr wrap="square" lIns="0" tIns="0" rIns="0" bIns="0" rtlCol="0" anchor="t"/>
+          <a:lstStyle/>
+          <a:p>
+            <a:pPr algn="l" indent="0" marL="0">
+              <a:lnSpc>
+                <a:spcPct val="105000"/>
+              </a:lnSpc>
+              <a:buNone/>
+            </a:pPr>
+            <a:r>
+              <a:rPr lang="en-US" sz="1450" b="1" dirty="0">
+                <a:solidFill>
+                  <a:srgbClr val="1B2A38"/>
+                </a:solidFill>
+                <a:latin typeface="Calibri" pitchFamily="34" charset="0"/>
+                <a:ea typeface="Calibri" pitchFamily="34" charset="-122"/>
+                <a:cs typeface="Calibri" pitchFamily="34" charset="-120"/>
+              </a:rPr>
+              <a:t>Heterophile antibody interference is best suspected when:</a:t>
+            </a:r>
+            <a:endParaRPr lang="en-US" sz="1450" dirty="0"/>
+          </a:p>
+        </p:txBody>
+      </p:sp>
+      <p:sp>
+        <p:nvSpPr>
+          <p:cNvPr id="5" name="Text 3"/>
+          <p:cNvSpPr/>
+          <p:nvPr/>
+        </p:nvSpPr>
+        <p:spPr>
+          <a:xfrm>
+            <a:off x="658368" y="2395728"/>
+            <a:ext cx="6192390" cy="3017520"/>
+          </a:xfrm>
+          <a:prstGeom prst="rect">
+            <a:avLst/>
+          </a:prstGeom>
+          <a:noFill/>
+          <a:ln/>
+        </p:spPr>
+        <p:txBody>
+          <a:bodyPr wrap="square" lIns="0" tIns="0" rIns="0" bIns="0" rtlCol="0" anchor="t"/>
+          <a:lstStyle/>
+          <a:p>
+            <a:pPr algn="l" indent="0" marL="0">
+              <a:spcAft>
+                <a:spcPts val="600"/>
+              </a:spcAft>
+              <a:buNone/>
+            </a:pPr>
+            <a:r>
+              <a:rPr lang="en-US" sz="1350" dirty="0">
+                <a:solidFill>
+                  <a:srgbClr val="33444F"/>
+                </a:solidFill>
+                <a:latin typeface="Calibri" pitchFamily="34" charset="0"/>
+                <a:ea typeface="Calibri" pitchFamily="34" charset="-122"/>
+                <a:cs typeface="Calibri" pitchFamily="34" charset="-120"/>
+              </a:rPr>
+              <a:t>A. Results match the clinical picture</a:t>
+            </a:r>
+            <a:endParaRPr lang="en-US" sz="1350" dirty="0"/>
+          </a:p>
+          <a:p>
+            <a:pPr algn="l" indent="0" marL="0">
+              <a:spcAft>
+                <a:spcPts val="600"/>
+              </a:spcAft>
+              <a:buNone/>
+            </a:pPr>
+            <a:r>
+              <a:rPr lang="en-US" sz="1350" b="1" dirty="0">
+                <a:solidFill>
+                  <a:srgbClr val="4A1269"/>
+                </a:solidFill>
+                <a:latin typeface="Calibri" pitchFamily="34" charset="0"/>
+                <a:ea typeface="Calibri" pitchFamily="34" charset="-122"/>
+                <a:cs typeface="Calibri" pitchFamily="34" charset="-120"/>
+              </a:rPr>
+              <a:t>B. A result is discordant with the clinical scenario and other tests</a:t>
+            </a:r>
+            <a:endParaRPr lang="en-US" sz="1350" dirty="0"/>
+          </a:p>
+          <a:p>
+            <a:pPr algn="l" indent="0" marL="0">
+              <a:spcAft>
+                <a:spcPts val="600"/>
+              </a:spcAft>
+              <a:buNone/>
+            </a:pPr>
+            <a:r>
+              <a:rPr lang="en-US" sz="1350" dirty="0">
+                <a:solidFill>
+                  <a:srgbClr val="33444F"/>
+                </a:solidFill>
+                <a:latin typeface="Calibri" pitchFamily="34" charset="0"/>
+                <a:ea typeface="Calibri" pitchFamily="34" charset="-122"/>
+                <a:cs typeface="Calibri" pitchFamily="34" charset="-120"/>
+              </a:rPr>
+              <a:t>C. QC is out of range</a:t>
+            </a:r>
+            <a:endParaRPr lang="en-US" sz="1350" dirty="0"/>
+          </a:p>
+          <a:p>
+            <a:pPr algn="l" indent="0" marL="0">
+              <a:spcAft>
+                <a:spcPts val="600"/>
+              </a:spcAft>
+              <a:buNone/>
+            </a:pPr>
+            <a:r>
+              <a:rPr lang="en-US" sz="1350" dirty="0">
+                <a:solidFill>
+                  <a:srgbClr val="33444F"/>
+                </a:solidFill>
+                <a:latin typeface="Calibri" pitchFamily="34" charset="0"/>
+                <a:ea typeface="Calibri" pitchFamily="34" charset="-122"/>
+                <a:cs typeface="Calibri" pitchFamily="34" charset="-120"/>
+              </a:rPr>
+              <a:t>D. The calibration failed</a:t>
+            </a:r>
+            <a:endParaRPr lang="en-US" sz="1350" dirty="0"/>
+          </a:p>
+          <a:p>
+            <a:pPr algn="l" indent="0" marL="0">
+              <a:spcAft>
+                <a:spcPts val="600"/>
+              </a:spcAft>
+              <a:buNone/>
+            </a:pPr>
+            <a:r>
+              <a:rPr lang="en-US" sz="1350" dirty="0">
+                <a:solidFill>
+                  <a:srgbClr val="33444F"/>
+                </a:solidFill>
+                <a:latin typeface="Calibri" pitchFamily="34" charset="0"/>
+                <a:ea typeface="Calibri" pitchFamily="34" charset="-122"/>
+                <a:cs typeface="Calibri" pitchFamily="34" charset="-120"/>
+              </a:rPr>
+              <a:t>E. The sample is lipemic</a:t>
+            </a:r>
+            <a:endParaRPr lang="en-US" sz="1350" dirty="0"/>
+          </a:p>
+        </p:txBody>
+      </p:sp>
+      <p:sp>
+        <p:nvSpPr>
+          <p:cNvPr id="6" name="Shape 4"/>
+          <p:cNvSpPr/>
+          <p:nvPr/>
+        </p:nvSpPr>
+        <p:spPr>
+          <a:xfrm>
+            <a:off x="7201632" y="2395728"/>
+            <a:ext cx="4423136" cy="3246120"/>
+          </a:xfrm>
+          <a:prstGeom prst="roundRect">
+            <a:avLst>
+              <a:gd name="adj" fmla="val 2535"/>
+            </a:avLst>
+          </a:prstGeom>
+          <a:solidFill>
+            <a:srgbClr val="F1E8F7"/>
+          </a:solidFill>
+          <a:ln/>
+          <a:effectLst>
+            <a:outerShdw sx="100000" sy="100000" kx="0" ky="0" algn="bl" rotWithShape="0" blurRad="88900" dist="25400" dir="5400000">
+              <a:srgbClr val="22303C">
+                <a:alpha val="12000"/>
+              </a:srgbClr>
+            </a:outerShdw>
+          </a:effectLst>
+        </p:spPr>
+        <p:txBody>
+          <a:bodyPr/>
+          <a:p/>
+        </p:txBody>
+      </p:sp>
+      <p:sp>
+        <p:nvSpPr>
+          <p:cNvPr id="7" name="Text 5"/>
+          <p:cNvSpPr/>
+          <p:nvPr/>
+        </p:nvSpPr>
+        <p:spPr>
+          <a:xfrm>
+            <a:off x="7439376" y="2578608"/>
+            <a:ext cx="3965936" cy="457200"/>
+          </a:xfrm>
+          <a:prstGeom prst="rect">
+            <a:avLst/>
+          </a:prstGeom>
+          <a:noFill/>
+          <a:ln/>
+        </p:spPr>
+        <p:txBody>
+          <a:bodyPr wrap="square" lIns="0" tIns="0" rIns="0" bIns="0" rtlCol="0" anchor="ctr"/>
+          <a:lstStyle/>
+          <a:p>
+            <a:pPr indent="0" marL="0">
+              <a:buNone/>
+            </a:pPr>
+            <a:r>
+              <a:rPr lang="en-US" sz="1500" b="1" dirty="0">
+                <a:solidFill>
+                  <a:srgbClr val="6A1B9A"/>
+                </a:solidFill>
+                <a:latin typeface="Calibri" pitchFamily="34" charset="0"/>
+                <a:ea typeface="Calibri" pitchFamily="34" charset="-122"/>
+                <a:cs typeface="Calibri" pitchFamily="34" charset="-120"/>
+              </a:rPr>
+              <a:t>ANSWER  </a:t>
+            </a:r>
+            <a:pPr indent="0" marL="0">
+              <a:buNone/>
+            </a:pPr>
+            <a:r>
+              <a:rPr lang="en-US" sz="1500" b="1" dirty="0">
+                <a:solidFill>
+                  <a:srgbClr val="1B2A38"/>
+                </a:solidFill>
+                <a:latin typeface="Calibri" pitchFamily="34" charset="0"/>
+                <a:ea typeface="Calibri" pitchFamily="34" charset="-122"/>
+                <a:cs typeface="Calibri" pitchFamily="34" charset="-120"/>
+              </a:rPr>
+              <a:t>B — Result discordant with clinical picture</a:t>
+            </a:r>
+            <a:endParaRPr lang="en-US" sz="1500" dirty="0"/>
+          </a:p>
+        </p:txBody>
+      </p:sp>
+      <p:sp>
+        <p:nvSpPr>
+          <p:cNvPr id="8" name="Text 6"/>
+          <p:cNvSpPr/>
+          <p:nvPr/>
+        </p:nvSpPr>
+        <p:spPr>
+          <a:xfrm>
+            <a:off x="7439376" y="3127248"/>
+            <a:ext cx="3947648" cy="2377440"/>
+          </a:xfrm>
+          <a:prstGeom prst="rect">
+            <a:avLst/>
+          </a:prstGeom>
+          <a:noFill/>
+          <a:ln/>
+        </p:spPr>
+        <p:txBody>
+          <a:bodyPr wrap="square" lIns="0" tIns="0" rIns="0" bIns="0" rtlCol="0" anchor="t"/>
+          <a:lstStyle/>
+          <a:p>
+            <a:pPr algn="l" indent="0" marL="0">
+              <a:lnSpc>
+                <a:spcPct val="108000"/>
+              </a:lnSpc>
+              <a:buNone/>
+            </a:pPr>
+            <a:r>
+              <a:rPr lang="en-US" sz="1250" dirty="0">
+                <a:solidFill>
+                  <a:srgbClr val="33444F"/>
+                </a:solidFill>
+                <a:latin typeface="Calibri" pitchFamily="34" charset="0"/>
+                <a:ea typeface="Calibri" pitchFamily="34" charset="-122"/>
+                <a:cs typeface="Calibri" pitchFamily="34" charset="-120"/>
+              </a:rPr>
+              <a:t>Heterophile antibodies cause clinically implausible results; blocking reagents or alternate platforms confirm the artifact.</a:t>
+            </a:r>
+            <a:endParaRPr lang="en-US" sz="1250" dirty="0"/>
+          </a:p>
+        </p:txBody>
+      </p:sp>
+      <p:sp>
+        <p:nvSpPr>
+          <p:cNvPr id="9" name="Text 7"/>
+          <p:cNvSpPr/>
+          <p:nvPr/>
+        </p:nvSpPr>
+        <p:spPr>
+          <a:xfrm>
+            <a:off x="566928" y="6473952"/>
+            <a:ext cx="7772400" cy="274320"/>
+          </a:xfrm>
+          <a:prstGeom prst="rect">
+            <a:avLst/>
+          </a:prstGeom>
+          <a:noFill/>
+          <a:ln/>
+        </p:spPr>
+        <p:txBody>
+          <a:bodyPr wrap="square" lIns="0" tIns="0" rIns="0" bIns="0" rtlCol="0" anchor="ctr"/>
+          <a:lstStyle/>
+          <a:p>
+            <a:pPr algn="l" indent="0" marL="0">
+              <a:buNone/>
+            </a:pPr>
+            <a:r>
+              <a:rPr lang="en-US" sz="850" dirty="0">
+                <a:solidFill>
+                  <a:srgbClr val="9AA8B4"/>
+                </a:solidFill>
+                <a:latin typeface="Calibri" pitchFamily="34" charset="0"/>
+                <a:ea typeface="Calibri" pitchFamily="34" charset="-122"/>
+                <a:cs typeface="Calibri" pitchFamily="34" charset="-120"/>
+              </a:rPr>
+              <a:t>Makassed General Hospital  ·  Department of Laboratory Medicine</a:t>
+            </a:r>
+            <a:endParaRPr lang="en-US" sz="850" dirty="0"/>
+          </a:p>
+        </p:txBody>
+      </p:sp>
+      <p:sp>
+        <p:nvSpPr>
+          <p:cNvPr id="10" name="Text 8"/>
+          <p:cNvSpPr/>
+          <p:nvPr/>
+        </p:nvSpPr>
+        <p:spPr>
+          <a:xfrm>
+            <a:off x="9814255" y="6473952"/>
+            <a:ext cx="1828800" cy="274320"/>
+          </a:xfrm>
+          <a:prstGeom prst="rect">
+            <a:avLst/>
+          </a:prstGeom>
+          <a:noFill/>
+          <a:ln/>
+        </p:spPr>
+        <p:txBody>
+          <a:bodyPr wrap="square" lIns="0" tIns="0" rIns="0" bIns="0" rtlCol="0" anchor="ctr"/>
+          <a:lstStyle/>
+          <a:p>
+            <a:pPr algn="r" indent="0" marL="0">
+              <a:buNone/>
+            </a:pPr>
+            <a:r>
+              <a:rPr lang="en-US" sz="850" dirty="0">
+                <a:solidFill>
+                  <a:srgbClr val="9AA8B4"/>
+                </a:solidFill>
+                <a:latin typeface="Calibri" pitchFamily="34" charset="0"/>
+                <a:ea typeface="Calibri" pitchFamily="34" charset="-122"/>
+                <a:cs typeface="Calibri" pitchFamily="34" charset="-120"/>
+              </a:rPr>
+              <a:t>CP Lecture Series</a:t>
+            </a:r>
+            <a:pPr algn="r" indent="0" marL="0">
+              <a:buNone/>
+            </a:pPr>
+            <a:r>
+              <a:rPr lang="en-US" sz="850" dirty="0">
+                <a:solidFill>
+                  <a:srgbClr val="DCE4EC"/>
+                </a:solidFill>
+                <a:latin typeface="Calibri" pitchFamily="34" charset="0"/>
+                <a:ea typeface="Calibri" pitchFamily="34" charset="-122"/>
+                <a:cs typeface="Calibri" pitchFamily="34" charset="-120"/>
+              </a:rPr>
+              <a:t>   ·   </a:t>
+            </a:r>
+            <a:pPr algn="r" indent="0" marL="0">
+              <a:buNone/>
+            </a:pPr>
+            <a:r>
+              <a:rPr lang="en-US" sz="850" b="1" dirty="0">
+                <a:solidFill>
+                  <a:srgbClr val="6A1B9A"/>
+                </a:solidFill>
+                <a:latin typeface="Calibri" pitchFamily="34" charset="0"/>
+                <a:ea typeface="Calibri" pitchFamily="34" charset="-122"/>
+                <a:cs typeface="Calibri" pitchFamily="34" charset="-120"/>
+              </a:rPr>
+              <a:t>20</a:t>
+            </a:r>
+            <a:endParaRPr lang="en-US" sz="850" dirty="0"/>
+          </a:p>
+        </p:txBody>
+      </p:sp>
+    </p:spTree>
+  </p:cSld>
+  <p:clrMapOvr>
+    <a:masterClrMapping/>
+  </p:clrMapOvr>
+</p:sld>
+</file>
+
+<file path=ppt/slides/slide27.xml><?xml version="1.0" encoding="utf-8"?>
+<p:sld xmlns:a="http://schemas.openxmlformats.org/drawingml/2006/main" xmlns:p="http://schemas.openxmlformats.org/presentationml/2006/main" xmlns:r="http://schemas.openxmlformats.org/officeDocument/2006/relationships">
+  <p:cSld>
+    <p:spTree>
+      <p:nvGrpSpPr>
+        <p:cNvPr id="1" name=""/>
+        <p:cNvGrpSpPr/>
+        <p:nvPr/>
+      </p:nvGrpSpPr>
+      <p:grpSpPr/>
+      <p:sp>
+        <p:nvSpPr>
+          <p:cNvPr id="2" name="Text 0"/>
+          <p:cNvSpPr/>
+          <p:nvPr/>
+        </p:nvSpPr>
+        <p:spPr>
+          <a:xfrm>
+            <a:off x="566928" y="329184"/>
+            <a:ext cx="10515600" cy="310896"/>
+          </a:xfrm>
+          <a:prstGeom prst="rect">
+            <a:avLst/>
+          </a:prstGeom>
+          <a:noFill/>
+          <a:ln/>
+        </p:spPr>
+        <p:txBody>
+          <a:bodyPr wrap="square" lIns="0" tIns="0" rIns="0" bIns="0" rtlCol="0" anchor="ctr"/>
+          <a:lstStyle/>
+          <a:p>
+            <a:pPr algn="l" indent="0" marL="0">
+              <a:buNone/>
+            </a:pPr>
+            <a:r>
+              <a:rPr lang="en-US" sz="1100" b="1" spc="150" kern="0" dirty="0">
+                <a:solidFill>
+                  <a:srgbClr val="6A1B9A"/>
+                </a:solidFill>
+                <a:latin typeface="Calibri" pitchFamily="34" charset="0"/>
+                <a:ea typeface="Calibri" pitchFamily="34" charset="-122"/>
+                <a:cs typeface="Calibri" pitchFamily="34" charset="-120"/>
+              </a:rPr>
+              <a:t>IMMUNOLOGY &amp; SEROLOGY   ·   BOARD REVIEW  ·  Q3</a:t>
+            </a:r>
+            <a:endParaRPr lang="en-US" sz="1100" dirty="0"/>
+          </a:p>
+        </p:txBody>
+      </p:sp>
+      <p:sp>
+        <p:nvSpPr>
+          <p:cNvPr id="3" name="Text 1"/>
+          <p:cNvSpPr/>
+          <p:nvPr/>
+        </p:nvSpPr>
+        <p:spPr>
+          <a:xfrm>
+            <a:off x="566928" y="713232"/>
+            <a:ext cx="11064240" cy="749808"/>
+          </a:xfrm>
+          <a:prstGeom prst="rect">
+            <a:avLst/>
+          </a:prstGeom>
+          <a:noFill/>
+          <a:ln/>
+        </p:spPr>
+        <p:txBody>
+          <a:bodyPr wrap="square" lIns="0" tIns="0" rIns="0" bIns="0" rtlCol="0" anchor="ctr"/>
+          <a:lstStyle/>
+          <a:p>
+            <a:pPr algn="l" indent="0" marL="0">
+              <a:buNone/>
+            </a:pPr>
+            <a:r>
+              <a:rPr lang="en-US" sz="2600" b="1" dirty="0">
+                <a:solidFill>
+                  <a:srgbClr val="0E3A5F"/>
+                </a:solidFill>
+                <a:latin typeface="Calibri" pitchFamily="34" charset="0"/>
+                <a:ea typeface="Calibri" pitchFamily="34" charset="-122"/>
+                <a:cs typeface="Calibri" pitchFamily="34" charset="-120"/>
+              </a:rPr>
+              <a:t>Board-Style Review</a:t>
+            </a:r>
+            <a:endParaRPr lang="en-US" sz="2600" dirty="0"/>
+          </a:p>
+        </p:txBody>
+      </p:sp>
+      <p:sp>
+        <p:nvSpPr>
+          <p:cNvPr id="4" name="Text 2"/>
+          <p:cNvSpPr/>
+          <p:nvPr/>
+        </p:nvSpPr>
+        <p:spPr>
+          <a:xfrm>
+            <a:off x="566928" y="1417320"/>
+            <a:ext cx="11057839" cy="914400"/>
+          </a:xfrm>
+          <a:prstGeom prst="rect">
+            <a:avLst/>
+          </a:prstGeom>
+          <a:noFill/>
+          <a:ln/>
+        </p:spPr>
+        <p:txBody>
+          <a:bodyPr wrap="square" lIns="0" tIns="0" rIns="0" bIns="0" rtlCol="0" anchor="t"/>
+          <a:lstStyle/>
+          <a:p>
+            <a:pPr algn="l" indent="0" marL="0">
+              <a:lnSpc>
+                <a:spcPct val="105000"/>
+              </a:lnSpc>
+              <a:buNone/>
+            </a:pPr>
+            <a:r>
+              <a:rPr lang="en-US" sz="1450" b="1" dirty="0">
+                <a:solidFill>
+                  <a:srgbClr val="1B2A38"/>
+                </a:solidFill>
+                <a:latin typeface="Calibri" pitchFamily="34" charset="0"/>
+                <a:ea typeface="Calibri" pitchFamily="34" charset="-122"/>
+                <a:cs typeface="Calibri" pitchFamily="34" charset="-120"/>
+              </a:rPr>
+              <a:t>A sandwich immunoassay is best suited for:</a:t>
+            </a:r>
+            <a:endParaRPr lang="en-US" sz="1450" dirty="0"/>
+          </a:p>
+        </p:txBody>
+      </p:sp>
+      <p:sp>
+        <p:nvSpPr>
+          <p:cNvPr id="5" name="Text 3"/>
+          <p:cNvSpPr/>
+          <p:nvPr/>
+        </p:nvSpPr>
+        <p:spPr>
+          <a:xfrm>
+            <a:off x="658368" y="2395728"/>
+            <a:ext cx="6192390" cy="3017520"/>
+          </a:xfrm>
+          <a:prstGeom prst="rect">
+            <a:avLst/>
+          </a:prstGeom>
+          <a:noFill/>
+          <a:ln/>
+        </p:spPr>
+        <p:txBody>
+          <a:bodyPr wrap="square" lIns="0" tIns="0" rIns="0" bIns="0" rtlCol="0" anchor="t"/>
+          <a:lstStyle/>
+          <a:p>
+            <a:pPr algn="l" indent="0" marL="0">
+              <a:spcAft>
+                <a:spcPts val="600"/>
+              </a:spcAft>
+              <a:buNone/>
+            </a:pPr>
+            <a:r>
+              <a:rPr lang="en-US" sz="1350" dirty="0">
+                <a:solidFill>
+                  <a:srgbClr val="33444F"/>
+                </a:solidFill>
+                <a:latin typeface="Calibri" pitchFamily="34" charset="0"/>
+                <a:ea typeface="Calibri" pitchFamily="34" charset="-122"/>
+                <a:cs typeface="Calibri" pitchFamily="34" charset="-120"/>
+              </a:rPr>
+              <a:t>A. Small haptens with one epitope</a:t>
+            </a:r>
+            <a:endParaRPr lang="en-US" sz="1350" dirty="0"/>
+          </a:p>
+          <a:p>
+            <a:pPr algn="l" indent="0" marL="0">
+              <a:spcAft>
+                <a:spcPts val="600"/>
+              </a:spcAft>
+              <a:buNone/>
+            </a:pPr>
+            <a:r>
+              <a:rPr lang="en-US" sz="1350" b="1" dirty="0">
+                <a:solidFill>
+                  <a:srgbClr val="4A1269"/>
+                </a:solidFill>
+                <a:latin typeface="Calibri" pitchFamily="34" charset="0"/>
+                <a:ea typeface="Calibri" pitchFamily="34" charset="-122"/>
+                <a:cs typeface="Calibri" pitchFamily="34" charset="-120"/>
+              </a:rPr>
+              <a:t>B. Large analytes with two or more epitopes</a:t>
+            </a:r>
+            <a:endParaRPr lang="en-US" sz="1350" dirty="0"/>
+          </a:p>
+          <a:p>
+            <a:pPr algn="l" indent="0" marL="0">
+              <a:spcAft>
+                <a:spcPts val="600"/>
+              </a:spcAft>
+              <a:buNone/>
+            </a:pPr>
+            <a:r>
+              <a:rPr lang="en-US" sz="1350" dirty="0">
+                <a:solidFill>
+                  <a:srgbClr val="33444F"/>
+                </a:solidFill>
+                <a:latin typeface="Calibri" pitchFamily="34" charset="0"/>
+                <a:ea typeface="Calibri" pitchFamily="34" charset="-122"/>
+                <a:cs typeface="Calibri" pitchFamily="34" charset="-120"/>
+              </a:rPr>
+              <a:t>C. Electrolytes</a:t>
+            </a:r>
+            <a:endParaRPr lang="en-US" sz="1350" dirty="0"/>
+          </a:p>
+          <a:p>
+            <a:pPr algn="l" indent="0" marL="0">
+              <a:spcAft>
+                <a:spcPts val="600"/>
+              </a:spcAft>
+              <a:buNone/>
+            </a:pPr>
+            <a:r>
+              <a:rPr lang="en-US" sz="1350" dirty="0">
+                <a:solidFill>
+                  <a:srgbClr val="33444F"/>
+                </a:solidFill>
+                <a:latin typeface="Calibri" pitchFamily="34" charset="0"/>
+                <a:ea typeface="Calibri" pitchFamily="34" charset="-122"/>
+                <a:cs typeface="Calibri" pitchFamily="34" charset="-120"/>
+              </a:rPr>
+              <a:t>D. Blood gases</a:t>
+            </a:r>
+            <a:endParaRPr lang="en-US" sz="1350" dirty="0"/>
+          </a:p>
+          <a:p>
+            <a:pPr algn="l" indent="0" marL="0">
+              <a:spcAft>
+                <a:spcPts val="600"/>
+              </a:spcAft>
+              <a:buNone/>
+            </a:pPr>
+            <a:r>
+              <a:rPr lang="en-US" sz="1350" dirty="0">
+                <a:solidFill>
+                  <a:srgbClr val="33444F"/>
+                </a:solidFill>
+                <a:latin typeface="Calibri" pitchFamily="34" charset="0"/>
+                <a:ea typeface="Calibri" pitchFamily="34" charset="-122"/>
+                <a:cs typeface="Calibri" pitchFamily="34" charset="-120"/>
+              </a:rPr>
+              <a:t>E. Osmolality</a:t>
+            </a:r>
+            <a:endParaRPr lang="en-US" sz="1350" dirty="0"/>
+          </a:p>
+        </p:txBody>
+      </p:sp>
+      <p:sp>
+        <p:nvSpPr>
+          <p:cNvPr id="6" name="Shape 4"/>
+          <p:cNvSpPr/>
+          <p:nvPr/>
+        </p:nvSpPr>
+        <p:spPr>
+          <a:xfrm>
+            <a:off x="7201632" y="2395728"/>
+            <a:ext cx="4423136" cy="3246120"/>
+          </a:xfrm>
+          <a:prstGeom prst="roundRect">
+            <a:avLst>
+              <a:gd name="adj" fmla="val 2535"/>
+            </a:avLst>
+          </a:prstGeom>
+          <a:solidFill>
+            <a:srgbClr val="F1E8F7"/>
+          </a:solidFill>
+          <a:ln/>
+          <a:effectLst>
+            <a:outerShdw sx="100000" sy="100000" kx="0" ky="0" algn="bl" rotWithShape="0" blurRad="88900" dist="25400" dir="5400000">
+              <a:srgbClr val="22303C">
+                <a:alpha val="12000"/>
+              </a:srgbClr>
+            </a:outerShdw>
+          </a:effectLst>
+        </p:spPr>
+        <p:txBody>
+          <a:bodyPr/>
+          <a:p/>
+        </p:txBody>
+      </p:sp>
+      <p:sp>
+        <p:nvSpPr>
+          <p:cNvPr id="7" name="Text 5"/>
+          <p:cNvSpPr/>
+          <p:nvPr/>
+        </p:nvSpPr>
+        <p:spPr>
+          <a:xfrm>
+            <a:off x="7439376" y="2578608"/>
+            <a:ext cx="3965936" cy="457200"/>
+          </a:xfrm>
+          <a:prstGeom prst="rect">
+            <a:avLst/>
+          </a:prstGeom>
+          <a:noFill/>
+          <a:ln/>
+        </p:spPr>
+        <p:txBody>
+          <a:bodyPr wrap="square" lIns="0" tIns="0" rIns="0" bIns="0" rtlCol="0" anchor="ctr"/>
+          <a:lstStyle/>
+          <a:p>
+            <a:pPr indent="0" marL="0">
+              <a:buNone/>
+            </a:pPr>
+            <a:r>
+              <a:rPr lang="en-US" sz="1500" b="1" dirty="0">
+                <a:solidFill>
+                  <a:srgbClr val="6A1B9A"/>
+                </a:solidFill>
+                <a:latin typeface="Calibri" pitchFamily="34" charset="0"/>
+                <a:ea typeface="Calibri" pitchFamily="34" charset="-122"/>
+                <a:cs typeface="Calibri" pitchFamily="34" charset="-120"/>
+              </a:rPr>
+              <a:t>ANSWER  </a:t>
+            </a:r>
+            <a:pPr indent="0" marL="0">
+              <a:buNone/>
+            </a:pPr>
+            <a:r>
+              <a:rPr lang="en-US" sz="1500" b="1" dirty="0">
+                <a:solidFill>
+                  <a:srgbClr val="1B2A38"/>
+                </a:solidFill>
+                <a:latin typeface="Calibri" pitchFamily="34" charset="0"/>
+                <a:ea typeface="Calibri" pitchFamily="34" charset="-122"/>
+                <a:cs typeface="Calibri" pitchFamily="34" charset="-120"/>
+              </a:rPr>
+              <a:t>B — Large analytes with ≥2 epitopes</a:t>
+            </a:r>
+            <a:endParaRPr lang="en-US" sz="1500" dirty="0"/>
+          </a:p>
+        </p:txBody>
+      </p:sp>
+      <p:sp>
+        <p:nvSpPr>
+          <p:cNvPr id="8" name="Text 6"/>
+          <p:cNvSpPr/>
+          <p:nvPr/>
+        </p:nvSpPr>
+        <p:spPr>
+          <a:xfrm>
+            <a:off x="7439376" y="3127248"/>
+            <a:ext cx="3947648" cy="2377440"/>
+          </a:xfrm>
+          <a:prstGeom prst="rect">
+            <a:avLst/>
+          </a:prstGeom>
+          <a:noFill/>
+          <a:ln/>
+        </p:spPr>
+        <p:txBody>
+          <a:bodyPr wrap="square" lIns="0" tIns="0" rIns="0" bIns="0" rtlCol="0" anchor="t"/>
+          <a:lstStyle/>
+          <a:p>
+            <a:pPr algn="l" indent="0" marL="0">
+              <a:lnSpc>
+                <a:spcPct val="108000"/>
+              </a:lnSpc>
+              <a:buNone/>
+            </a:pPr>
+            <a:r>
+              <a:rPr lang="en-US" sz="1250" dirty="0">
+                <a:solidFill>
+                  <a:srgbClr val="33444F"/>
+                </a:solidFill>
+                <a:latin typeface="Calibri" pitchFamily="34" charset="0"/>
+                <a:ea typeface="Calibri" pitchFamily="34" charset="-122"/>
+                <a:cs typeface="Calibri" pitchFamily="34" charset="-120"/>
+              </a:rPr>
+              <a:t>Two antibodies must bind distinct epitopes; small single-epitope molecules use competitive formats.</a:t>
+            </a:r>
+            <a:endParaRPr lang="en-US" sz="1250" dirty="0"/>
+          </a:p>
+        </p:txBody>
+      </p:sp>
+      <p:sp>
+        <p:nvSpPr>
+          <p:cNvPr id="9" name="Text 7"/>
+          <p:cNvSpPr/>
+          <p:nvPr/>
+        </p:nvSpPr>
+        <p:spPr>
+          <a:xfrm>
+            <a:off x="566928" y="6473952"/>
+            <a:ext cx="7772400" cy="274320"/>
+          </a:xfrm>
+          <a:prstGeom prst="rect">
+            <a:avLst/>
+          </a:prstGeom>
+          <a:noFill/>
+          <a:ln/>
+        </p:spPr>
+        <p:txBody>
+          <a:bodyPr wrap="square" lIns="0" tIns="0" rIns="0" bIns="0" rtlCol="0" anchor="ctr"/>
+          <a:lstStyle/>
+          <a:p>
+            <a:pPr algn="l" indent="0" marL="0">
+              <a:buNone/>
+            </a:pPr>
+            <a:r>
+              <a:rPr lang="en-US" sz="850" dirty="0">
+                <a:solidFill>
+                  <a:srgbClr val="9AA8B4"/>
+                </a:solidFill>
+                <a:latin typeface="Calibri" pitchFamily="34" charset="0"/>
+                <a:ea typeface="Calibri" pitchFamily="34" charset="-122"/>
+                <a:cs typeface="Calibri" pitchFamily="34" charset="-120"/>
+              </a:rPr>
+              <a:t>Makassed General Hospital  ·  Department of Laboratory Medicine</a:t>
+            </a:r>
+            <a:endParaRPr lang="en-US" sz="850" dirty="0"/>
+          </a:p>
+        </p:txBody>
+      </p:sp>
+      <p:sp>
+        <p:nvSpPr>
+          <p:cNvPr id="10" name="Text 8"/>
+          <p:cNvSpPr/>
+          <p:nvPr/>
+        </p:nvSpPr>
+        <p:spPr>
+          <a:xfrm>
+            <a:off x="9814255" y="6473952"/>
+            <a:ext cx="1828800" cy="274320"/>
+          </a:xfrm>
+          <a:prstGeom prst="rect">
+            <a:avLst/>
+          </a:prstGeom>
+          <a:noFill/>
+          <a:ln/>
+        </p:spPr>
+        <p:txBody>
+          <a:bodyPr wrap="square" lIns="0" tIns="0" rIns="0" bIns="0" rtlCol="0" anchor="ctr"/>
+          <a:lstStyle/>
+          <a:p>
+            <a:pPr algn="r" indent="0" marL="0">
+              <a:buNone/>
+            </a:pPr>
+            <a:r>
+              <a:rPr lang="en-US" sz="850" dirty="0">
+                <a:solidFill>
+                  <a:srgbClr val="9AA8B4"/>
+                </a:solidFill>
+                <a:latin typeface="Calibri" pitchFamily="34" charset="0"/>
+                <a:ea typeface="Calibri" pitchFamily="34" charset="-122"/>
+                <a:cs typeface="Calibri" pitchFamily="34" charset="-120"/>
+              </a:rPr>
+              <a:t>CP Lecture Series</a:t>
+            </a:r>
+            <a:pPr algn="r" indent="0" marL="0">
+              <a:buNone/>
+            </a:pPr>
+            <a:r>
+              <a:rPr lang="en-US" sz="850" dirty="0">
+                <a:solidFill>
+                  <a:srgbClr val="DCE4EC"/>
+                </a:solidFill>
+                <a:latin typeface="Calibri" pitchFamily="34" charset="0"/>
+                <a:ea typeface="Calibri" pitchFamily="34" charset="-122"/>
+                <a:cs typeface="Calibri" pitchFamily="34" charset="-120"/>
+              </a:rPr>
+              <a:t>   ·   </a:t>
+            </a:r>
+            <a:pPr algn="r" indent="0" marL="0">
+              <a:buNone/>
+            </a:pPr>
+            <a:r>
+              <a:rPr lang="en-US" sz="850" b="1" dirty="0">
+                <a:solidFill>
+                  <a:srgbClr val="6A1B9A"/>
+                </a:solidFill>
+                <a:latin typeface="Calibri" pitchFamily="34" charset="0"/>
+                <a:ea typeface="Calibri" pitchFamily="34" charset="-122"/>
+                <a:cs typeface="Calibri" pitchFamily="34" charset="-120"/>
+              </a:rPr>
+              <a:t>19</a:t>
+            </a:r>
+            <a:endParaRPr lang="en-US" sz="850" dirty="0"/>
+          </a:p>
+        </p:txBody>
+      </p:sp>
+    </p:spTree>
+  </p:cSld>
+  <p:clrMapOvr>
+    <a:masterClrMapping/>
+  </p:clrMapOvr>
+</p:sld>
+</file>
+
+<file path=ppt/slides/slide28.xml><?xml version="1.0" encoding="utf-8"?>
+<p:sld xmlns:a="http://schemas.openxmlformats.org/drawingml/2006/main" xmlns:p="http://schemas.openxmlformats.org/presentationml/2006/main" xmlns:r="http://schemas.openxmlformats.org/officeDocument/2006/relationships">
+  <p:cSld>
+    <p:spTree>
+      <p:nvGrpSpPr>
+        <p:cNvPr id="1" name=""/>
+        <p:cNvGrpSpPr/>
+        <p:nvPr/>
+      </p:nvGrpSpPr>
+      <p:grpSpPr/>
+      <p:sp>
+        <p:nvSpPr>
+          <p:cNvPr id="2" name="Text 0"/>
+          <p:cNvSpPr/>
+          <p:nvPr/>
+        </p:nvSpPr>
+        <p:spPr>
+          <a:xfrm>
+            <a:off x="566928" y="329184"/>
+            <a:ext cx="10515600" cy="310896"/>
+          </a:xfrm>
+          <a:prstGeom prst="rect">
+            <a:avLst/>
+          </a:prstGeom>
+          <a:noFill/>
+          <a:ln/>
+        </p:spPr>
+        <p:txBody>
+          <a:bodyPr wrap="square" lIns="0" tIns="0" rIns="0" bIns="0" rtlCol="0" anchor="ctr"/>
+          <a:lstStyle/>
+          <a:p>
+            <a:pPr algn="l" indent="0" marL="0">
+              <a:buNone/>
+            </a:pPr>
+            <a:r>
+              <a:rPr lang="en-US" sz="1100" b="1" spc="150" kern="0" dirty="0">
+                <a:solidFill>
+                  <a:srgbClr val="6A1B9A"/>
+                </a:solidFill>
+                <a:latin typeface="Calibri" pitchFamily="34" charset="0"/>
+                <a:ea typeface="Calibri" pitchFamily="34" charset="-122"/>
+                <a:cs typeface="Calibri" pitchFamily="34" charset="-120"/>
+              </a:rPr>
+              <a:t>IMMUNOLOGY &amp; SEROLOGY   ·   BOARD REVIEW  ·  Q2</a:t>
+            </a:r>
+            <a:endParaRPr lang="en-US" sz="1100" dirty="0"/>
+          </a:p>
+        </p:txBody>
+      </p:sp>
+      <p:sp>
+        <p:nvSpPr>
+          <p:cNvPr id="3" name="Text 1"/>
+          <p:cNvSpPr/>
+          <p:nvPr/>
+        </p:nvSpPr>
+        <p:spPr>
+          <a:xfrm>
+            <a:off x="566928" y="713232"/>
+            <a:ext cx="11064240" cy="749808"/>
+          </a:xfrm>
+          <a:prstGeom prst="rect">
+            <a:avLst/>
+          </a:prstGeom>
+          <a:noFill/>
+          <a:ln/>
+        </p:spPr>
+        <p:txBody>
+          <a:bodyPr wrap="square" lIns="0" tIns="0" rIns="0" bIns="0" rtlCol="0" anchor="ctr"/>
+          <a:lstStyle/>
+          <a:p>
+            <a:pPr algn="l" indent="0" marL="0">
+              <a:buNone/>
+            </a:pPr>
+            <a:r>
+              <a:rPr lang="en-US" sz="2600" b="1" dirty="0">
+                <a:solidFill>
+                  <a:srgbClr val="0E3A5F"/>
+                </a:solidFill>
+                <a:latin typeface="Calibri" pitchFamily="34" charset="0"/>
+                <a:ea typeface="Calibri" pitchFamily="34" charset="-122"/>
+                <a:cs typeface="Calibri" pitchFamily="34" charset="-120"/>
+              </a:rPr>
+              <a:t>Board-Style Review</a:t>
+            </a:r>
+            <a:endParaRPr lang="en-US" sz="2600" dirty="0"/>
+          </a:p>
+        </p:txBody>
+      </p:sp>
+      <p:sp>
+        <p:nvSpPr>
+          <p:cNvPr id="4" name="Text 2"/>
+          <p:cNvSpPr/>
+          <p:nvPr/>
+        </p:nvSpPr>
+        <p:spPr>
+          <a:xfrm>
+            <a:off x="566928" y="1417320"/>
+            <a:ext cx="11057839" cy="914400"/>
+          </a:xfrm>
+          <a:prstGeom prst="rect">
+            <a:avLst/>
+          </a:prstGeom>
+          <a:noFill/>
+          <a:ln/>
+        </p:spPr>
+        <p:txBody>
+          <a:bodyPr wrap="square" lIns="0" tIns="0" rIns="0" bIns="0" rtlCol="0" anchor="t"/>
+          <a:lstStyle/>
+          <a:p>
+            <a:pPr algn="l" indent="0" marL="0">
+              <a:lnSpc>
+                <a:spcPct val="105000"/>
+              </a:lnSpc>
+              <a:buNone/>
+            </a:pPr>
+            <a:r>
+              <a:rPr lang="en-US" sz="1450" b="1" dirty="0">
+                <a:solidFill>
+                  <a:srgbClr val="1B2A38"/>
+                </a:solidFill>
+                <a:latin typeface="Calibri" pitchFamily="34" charset="0"/>
+                <a:ea typeface="Calibri" pitchFamily="34" charset="-122"/>
+                <a:cs typeface="Calibri" pitchFamily="34" charset="-120"/>
+              </a:rPr>
+              <a:t>Positive predictive value decreases when:</a:t>
+            </a:r>
+            <a:endParaRPr lang="en-US" sz="1450" dirty="0"/>
+          </a:p>
+        </p:txBody>
+      </p:sp>
+      <p:sp>
+        <p:nvSpPr>
+          <p:cNvPr id="5" name="Text 3"/>
+          <p:cNvSpPr/>
+          <p:nvPr/>
+        </p:nvSpPr>
+        <p:spPr>
+          <a:xfrm>
+            <a:off x="658368" y="2395728"/>
+            <a:ext cx="6192390" cy="3017520"/>
+          </a:xfrm>
+          <a:prstGeom prst="rect">
+            <a:avLst/>
+          </a:prstGeom>
+          <a:noFill/>
+          <a:ln/>
+        </p:spPr>
+        <p:txBody>
+          <a:bodyPr wrap="square" lIns="0" tIns="0" rIns="0" bIns="0" rtlCol="0" anchor="t"/>
+          <a:lstStyle/>
+          <a:p>
+            <a:pPr algn="l" indent="0" marL="0">
+              <a:spcAft>
+                <a:spcPts val="600"/>
+              </a:spcAft>
+              <a:buNone/>
+            </a:pPr>
+            <a:r>
+              <a:rPr lang="en-US" sz="1350" dirty="0">
+                <a:solidFill>
+                  <a:srgbClr val="33444F"/>
+                </a:solidFill>
+                <a:latin typeface="Calibri" pitchFamily="34" charset="0"/>
+                <a:ea typeface="Calibri" pitchFamily="34" charset="-122"/>
+                <a:cs typeface="Calibri" pitchFamily="34" charset="-120"/>
+              </a:rPr>
+              <a:t>A. Sensitivity increases</a:t>
+            </a:r>
+            <a:endParaRPr lang="en-US" sz="1350" dirty="0"/>
+          </a:p>
+          <a:p>
+            <a:pPr algn="l" indent="0" marL="0">
+              <a:spcAft>
+                <a:spcPts val="600"/>
+              </a:spcAft>
+              <a:buNone/>
+            </a:pPr>
+            <a:r>
+              <a:rPr lang="en-US" sz="1350" dirty="0">
+                <a:solidFill>
+                  <a:srgbClr val="33444F"/>
+                </a:solidFill>
+                <a:latin typeface="Calibri" pitchFamily="34" charset="0"/>
+                <a:ea typeface="Calibri" pitchFamily="34" charset="-122"/>
+                <a:cs typeface="Calibri" pitchFamily="34" charset="-120"/>
+              </a:rPr>
+              <a:t>B. Specificity increases</a:t>
+            </a:r>
+            <a:endParaRPr lang="en-US" sz="1350" dirty="0"/>
+          </a:p>
+          <a:p>
+            <a:pPr algn="l" indent="0" marL="0">
+              <a:spcAft>
+                <a:spcPts val="600"/>
+              </a:spcAft>
+              <a:buNone/>
+            </a:pPr>
+            <a:r>
+              <a:rPr lang="en-US" sz="1350" b="1" dirty="0">
+                <a:solidFill>
+                  <a:srgbClr val="4A1269"/>
+                </a:solidFill>
+                <a:latin typeface="Calibri" pitchFamily="34" charset="0"/>
+                <a:ea typeface="Calibri" pitchFamily="34" charset="-122"/>
+                <a:cs typeface="Calibri" pitchFamily="34" charset="-120"/>
+              </a:rPr>
+              <a:t>C. Disease prevalence decreases</a:t>
+            </a:r>
+            <a:endParaRPr lang="en-US" sz="1350" dirty="0"/>
+          </a:p>
+          <a:p>
+            <a:pPr algn="l" indent="0" marL="0">
+              <a:spcAft>
+                <a:spcPts val="600"/>
+              </a:spcAft>
+              <a:buNone/>
+            </a:pPr>
+            <a:r>
+              <a:rPr lang="en-US" sz="1350" dirty="0">
+                <a:solidFill>
+                  <a:srgbClr val="33444F"/>
+                </a:solidFill>
+                <a:latin typeface="Calibri" pitchFamily="34" charset="0"/>
+                <a:ea typeface="Calibri" pitchFamily="34" charset="-122"/>
+                <a:cs typeface="Calibri" pitchFamily="34" charset="-120"/>
+              </a:rPr>
+              <a:t>D. The cutoff is raised</a:t>
+            </a:r>
+            <a:endParaRPr lang="en-US" sz="1350" dirty="0"/>
+          </a:p>
+          <a:p>
+            <a:pPr algn="l" indent="0" marL="0">
+              <a:spcAft>
+                <a:spcPts val="600"/>
+              </a:spcAft>
+              <a:buNone/>
+            </a:pPr>
+            <a:r>
+              <a:rPr lang="en-US" sz="1350" dirty="0">
+                <a:solidFill>
+                  <a:srgbClr val="33444F"/>
+                </a:solidFill>
+                <a:latin typeface="Calibri" pitchFamily="34" charset="0"/>
+                <a:ea typeface="Calibri" pitchFamily="34" charset="-122"/>
+                <a:cs typeface="Calibri" pitchFamily="34" charset="-120"/>
+              </a:rPr>
+              <a:t>E. Precision improves</a:t>
+            </a:r>
+            <a:endParaRPr lang="en-US" sz="1350" dirty="0"/>
+          </a:p>
+        </p:txBody>
+      </p:sp>
+      <p:sp>
+        <p:nvSpPr>
+          <p:cNvPr id="6" name="Shape 4"/>
+          <p:cNvSpPr/>
+          <p:nvPr/>
+        </p:nvSpPr>
+        <p:spPr>
+          <a:xfrm>
+            <a:off x="7201632" y="2395728"/>
+            <a:ext cx="4423136" cy="3246120"/>
+          </a:xfrm>
+          <a:prstGeom prst="roundRect">
+            <a:avLst>
+              <a:gd name="adj" fmla="val 2535"/>
+            </a:avLst>
+          </a:prstGeom>
+          <a:solidFill>
+            <a:srgbClr val="F1E8F7"/>
+          </a:solidFill>
+          <a:ln/>
+          <a:effectLst>
+            <a:outerShdw sx="100000" sy="100000" kx="0" ky="0" algn="bl" rotWithShape="0" blurRad="88900" dist="25400" dir="5400000">
+              <a:srgbClr val="22303C">
+                <a:alpha val="12000"/>
+              </a:srgbClr>
+            </a:outerShdw>
+          </a:effectLst>
+        </p:spPr>
+        <p:txBody>
+          <a:bodyPr/>
+          <a:p/>
+        </p:txBody>
+      </p:sp>
+      <p:sp>
+        <p:nvSpPr>
+          <p:cNvPr id="7" name="Text 5"/>
+          <p:cNvSpPr/>
+          <p:nvPr/>
+        </p:nvSpPr>
+        <p:spPr>
+          <a:xfrm>
+            <a:off x="7439376" y="2578608"/>
+            <a:ext cx="3965936" cy="457200"/>
+          </a:xfrm>
+          <a:prstGeom prst="rect">
+            <a:avLst/>
+          </a:prstGeom>
+          <a:noFill/>
+          <a:ln/>
+        </p:spPr>
+        <p:txBody>
+          <a:bodyPr wrap="square" lIns="0" tIns="0" rIns="0" bIns="0" rtlCol="0" anchor="ctr"/>
+          <a:lstStyle/>
+          <a:p>
+            <a:pPr indent="0" marL="0">
+              <a:buNone/>
+            </a:pPr>
+            <a:r>
+              <a:rPr lang="en-US" sz="1500" b="1" dirty="0">
+                <a:solidFill>
+                  <a:srgbClr val="6A1B9A"/>
+                </a:solidFill>
+                <a:latin typeface="Calibri" pitchFamily="34" charset="0"/>
+                <a:ea typeface="Calibri" pitchFamily="34" charset="-122"/>
+                <a:cs typeface="Calibri" pitchFamily="34" charset="-120"/>
+              </a:rPr>
+              <a:t>ANSWER  </a:t>
+            </a:r>
+            <a:pPr indent="0" marL="0">
+              <a:buNone/>
+            </a:pPr>
+            <a:r>
+              <a:rPr lang="en-US" sz="1500" b="1" dirty="0">
+                <a:solidFill>
+                  <a:srgbClr val="1B2A38"/>
+                </a:solidFill>
+                <a:latin typeface="Calibri" pitchFamily="34" charset="0"/>
+                <a:ea typeface="Calibri" pitchFamily="34" charset="-122"/>
+                <a:cs typeface="Calibri" pitchFamily="34" charset="-120"/>
+              </a:rPr>
+              <a:t>C — Prevalence decreases</a:t>
+            </a:r>
+            <a:endParaRPr lang="en-US" sz="1500" dirty="0"/>
+          </a:p>
+        </p:txBody>
+      </p:sp>
+      <p:sp>
+        <p:nvSpPr>
+          <p:cNvPr id="8" name="Text 6"/>
+          <p:cNvSpPr/>
+          <p:nvPr/>
+        </p:nvSpPr>
+        <p:spPr>
+          <a:xfrm>
+            <a:off x="7439376" y="3127248"/>
+            <a:ext cx="3947648" cy="2377440"/>
+          </a:xfrm>
+          <a:prstGeom prst="rect">
+            <a:avLst/>
+          </a:prstGeom>
+          <a:noFill/>
+          <a:ln/>
+        </p:spPr>
+        <p:txBody>
+          <a:bodyPr wrap="square" lIns="0" tIns="0" rIns="0" bIns="0" rtlCol="0" anchor="t"/>
+          <a:lstStyle/>
+          <a:p>
+            <a:pPr algn="l" indent="0" marL="0">
+              <a:lnSpc>
+                <a:spcPct val="108000"/>
+              </a:lnSpc>
+              <a:buNone/>
+            </a:pPr>
+            <a:r>
+              <a:rPr lang="en-US" sz="1250" dirty="0">
+                <a:solidFill>
+                  <a:srgbClr val="33444F"/>
+                </a:solidFill>
+                <a:latin typeface="Calibri" pitchFamily="34" charset="0"/>
+                <a:ea typeface="Calibri" pitchFamily="34" charset="-122"/>
+                <a:cs typeface="Calibri" pitchFamily="34" charset="-120"/>
+              </a:rPr>
+              <a:t>With fixed sensitivity/specificity, lower prevalence yields more false positives and a lower PPV.</a:t>
+            </a:r>
+            <a:endParaRPr lang="en-US" sz="1250" dirty="0"/>
+          </a:p>
+        </p:txBody>
+      </p:sp>
+      <p:sp>
+        <p:nvSpPr>
+          <p:cNvPr id="9" name="Text 7"/>
+          <p:cNvSpPr/>
+          <p:nvPr/>
+        </p:nvSpPr>
+        <p:spPr>
+          <a:xfrm>
+            <a:off x="566928" y="6473952"/>
+            <a:ext cx="7772400" cy="274320"/>
+          </a:xfrm>
+          <a:prstGeom prst="rect">
+            <a:avLst/>
+          </a:prstGeom>
+          <a:noFill/>
+          <a:ln/>
+        </p:spPr>
+        <p:txBody>
+          <a:bodyPr wrap="square" lIns="0" tIns="0" rIns="0" bIns="0" rtlCol="0" anchor="ctr"/>
+          <a:lstStyle/>
+          <a:p>
+            <a:pPr algn="l" indent="0" marL="0">
+              <a:buNone/>
+            </a:pPr>
+            <a:r>
+              <a:rPr lang="en-US" sz="850" dirty="0">
+                <a:solidFill>
+                  <a:srgbClr val="9AA8B4"/>
+                </a:solidFill>
+                <a:latin typeface="Calibri" pitchFamily="34" charset="0"/>
+                <a:ea typeface="Calibri" pitchFamily="34" charset="-122"/>
+                <a:cs typeface="Calibri" pitchFamily="34" charset="-120"/>
+              </a:rPr>
+              <a:t>Makassed General Hospital  ·  Department of Laboratory Medicine</a:t>
+            </a:r>
+            <a:endParaRPr lang="en-US" sz="850" dirty="0"/>
+          </a:p>
+        </p:txBody>
+      </p:sp>
+      <p:sp>
+        <p:nvSpPr>
+          <p:cNvPr id="10" name="Text 8"/>
+          <p:cNvSpPr/>
+          <p:nvPr/>
+        </p:nvSpPr>
+        <p:spPr>
+          <a:xfrm>
+            <a:off x="9814255" y="6473952"/>
+            <a:ext cx="1828800" cy="274320"/>
+          </a:xfrm>
+          <a:prstGeom prst="rect">
+            <a:avLst/>
+          </a:prstGeom>
+          <a:noFill/>
+          <a:ln/>
+        </p:spPr>
+        <p:txBody>
+          <a:bodyPr wrap="square" lIns="0" tIns="0" rIns="0" bIns="0" rtlCol="0" anchor="ctr"/>
+          <a:lstStyle/>
+          <a:p>
+            <a:pPr algn="r" indent="0" marL="0">
+              <a:buNone/>
+            </a:pPr>
+            <a:r>
+              <a:rPr lang="en-US" sz="850" dirty="0">
+                <a:solidFill>
+                  <a:srgbClr val="9AA8B4"/>
+                </a:solidFill>
+                <a:latin typeface="Calibri" pitchFamily="34" charset="0"/>
+                <a:ea typeface="Calibri" pitchFamily="34" charset="-122"/>
+                <a:cs typeface="Calibri" pitchFamily="34" charset="-120"/>
+              </a:rPr>
+              <a:t>CP Lecture Series</a:t>
+            </a:r>
+            <a:pPr algn="r" indent="0" marL="0">
+              <a:buNone/>
+            </a:pPr>
+            <a:r>
+              <a:rPr lang="en-US" sz="850" dirty="0">
+                <a:solidFill>
+                  <a:srgbClr val="DCE4EC"/>
+                </a:solidFill>
+                <a:latin typeface="Calibri" pitchFamily="34" charset="0"/>
+                <a:ea typeface="Calibri" pitchFamily="34" charset="-122"/>
+                <a:cs typeface="Calibri" pitchFamily="34" charset="-120"/>
+              </a:rPr>
+              <a:t>   ·   </a:t>
+            </a:r>
+            <a:pPr algn="r" indent="0" marL="0">
+              <a:buNone/>
+            </a:pPr>
+            <a:r>
+              <a:rPr lang="en-US" sz="850" b="1" dirty="0">
+                <a:solidFill>
+                  <a:srgbClr val="6A1B9A"/>
+                </a:solidFill>
+                <a:latin typeface="Calibri" pitchFamily="34" charset="0"/>
+                <a:ea typeface="Calibri" pitchFamily="34" charset="-122"/>
+                <a:cs typeface="Calibri" pitchFamily="34" charset="-120"/>
+              </a:rPr>
+              <a:t>18</a:t>
+            </a:r>
+            <a:endParaRPr lang="en-US" sz="850" dirty="0"/>
+          </a:p>
+        </p:txBody>
+      </p:sp>
+    </p:spTree>
+  </p:cSld>
+  <p:clrMapOvr>
+    <a:masterClrMapping/>
+  </p:clrMapOvr>
+</p:sld>
+</file>
+
+<file path=ppt/slides/slide29.xml><?xml version="1.0" encoding="utf-8"?>
+<p:sld xmlns:a="http://schemas.openxmlformats.org/drawingml/2006/main" xmlns:p="http://schemas.openxmlformats.org/presentationml/2006/main" xmlns:r="http://schemas.openxmlformats.org/officeDocument/2006/relationships">
+  <p:cSld>
+    <p:spTree>
+      <p:nvGrpSpPr>
+        <p:cNvPr id="1" name=""/>
+        <p:cNvGrpSpPr/>
+        <p:nvPr/>
+      </p:nvGrpSpPr>
+      <p:grpSpPr/>
+      <p:sp>
+        <p:nvSpPr>
+          <p:cNvPr id="2" name="Text 0"/>
+          <p:cNvSpPr/>
+          <p:nvPr/>
+        </p:nvSpPr>
+        <p:spPr>
+          <a:xfrm>
+            <a:off x="566928" y="329184"/>
+            <a:ext cx="10515600" cy="310896"/>
+          </a:xfrm>
+          <a:prstGeom prst="rect">
+            <a:avLst/>
+          </a:prstGeom>
+          <a:noFill/>
+          <a:ln/>
+        </p:spPr>
+        <p:txBody>
+          <a:bodyPr wrap="square" lIns="0" tIns="0" rIns="0" bIns="0" rtlCol="0" anchor="ctr"/>
+          <a:lstStyle/>
+          <a:p>
+            <a:pPr algn="l" indent="0" marL="0">
+              <a:buNone/>
+            </a:pPr>
+            <a:r>
+              <a:rPr lang="en-US" sz="1100" b="1" spc="150" kern="0" dirty="0">
+                <a:solidFill>
+                  <a:srgbClr val="6A1B9A"/>
+                </a:solidFill>
+                <a:latin typeface="Calibri" pitchFamily="34" charset="0"/>
+                <a:ea typeface="Calibri" pitchFamily="34" charset="-122"/>
+                <a:cs typeface="Calibri" pitchFamily="34" charset="-120"/>
+              </a:rPr>
+              <a:t>IMMUNOLOGY &amp; SEROLOGY   ·   BOARD REVIEW  ·  Q1</a:t>
+            </a:r>
+            <a:endParaRPr lang="en-US" sz="1100" dirty="0"/>
+          </a:p>
+        </p:txBody>
+      </p:sp>
+      <p:sp>
+        <p:nvSpPr>
+          <p:cNvPr id="3" name="Text 1"/>
+          <p:cNvSpPr/>
+          <p:nvPr/>
+        </p:nvSpPr>
+        <p:spPr>
+          <a:xfrm>
+            <a:off x="566928" y="713232"/>
+            <a:ext cx="11064240" cy="749808"/>
+          </a:xfrm>
+          <a:prstGeom prst="rect">
+            <a:avLst/>
+          </a:prstGeom>
+          <a:noFill/>
+          <a:ln/>
+        </p:spPr>
+        <p:txBody>
+          <a:bodyPr wrap="square" lIns="0" tIns="0" rIns="0" bIns="0" rtlCol="0" anchor="ctr"/>
+          <a:lstStyle/>
+          <a:p>
+            <a:pPr algn="l" indent="0" marL="0">
+              <a:buNone/>
+            </a:pPr>
+            <a:r>
+              <a:rPr lang="en-US" sz="2600" b="1" dirty="0">
+                <a:solidFill>
+                  <a:srgbClr val="0E3A5F"/>
+                </a:solidFill>
+                <a:latin typeface="Calibri" pitchFamily="34" charset="0"/>
+                <a:ea typeface="Calibri" pitchFamily="34" charset="-122"/>
+                <a:cs typeface="Calibri" pitchFamily="34" charset="-120"/>
+              </a:rPr>
+              <a:t>Board-Style Review</a:t>
+            </a:r>
+            <a:endParaRPr lang="en-US" sz="2600" dirty="0"/>
+          </a:p>
+        </p:txBody>
+      </p:sp>
+      <p:sp>
+        <p:nvSpPr>
+          <p:cNvPr id="4" name="Text 2"/>
+          <p:cNvSpPr/>
+          <p:nvPr/>
+        </p:nvSpPr>
+        <p:spPr>
+          <a:xfrm>
+            <a:off x="566928" y="1417320"/>
+            <a:ext cx="11057839" cy="914400"/>
+          </a:xfrm>
+          <a:prstGeom prst="rect">
+            <a:avLst/>
+          </a:prstGeom>
+          <a:noFill/>
+          <a:ln/>
+        </p:spPr>
+        <p:txBody>
+          <a:bodyPr wrap="square" lIns="0" tIns="0" rIns="0" bIns="0" rtlCol="0" anchor="t"/>
+          <a:lstStyle/>
+          <a:p>
+            <a:pPr algn="l" indent="0" marL="0">
+              <a:lnSpc>
+                <a:spcPct val="105000"/>
+              </a:lnSpc>
+              <a:buNone/>
+            </a:pPr>
+            <a:r>
+              <a:rPr lang="en-US" sz="1450" b="1" dirty="0">
+                <a:solidFill>
+                  <a:srgbClr val="1B2A38"/>
+                </a:solidFill>
+                <a:latin typeface="Calibri" pitchFamily="34" charset="0"/>
+                <a:ea typeface="Calibri" pitchFamily="34" charset="-122"/>
+                <a:cs typeface="Calibri" pitchFamily="34" charset="-120"/>
+              </a:rPr>
+              <a:t>The high-dose hook effect causes:</a:t>
+            </a:r>
+            <a:endParaRPr lang="en-US" sz="1450" dirty="0"/>
+          </a:p>
+        </p:txBody>
+      </p:sp>
+      <p:sp>
+        <p:nvSpPr>
+          <p:cNvPr id="5" name="Text 3"/>
+          <p:cNvSpPr/>
+          <p:nvPr/>
+        </p:nvSpPr>
+        <p:spPr>
+          <a:xfrm>
+            <a:off x="658368" y="2395728"/>
+            <a:ext cx="6192390" cy="3017520"/>
+          </a:xfrm>
+          <a:prstGeom prst="rect">
+            <a:avLst/>
+          </a:prstGeom>
+          <a:noFill/>
+          <a:ln/>
+        </p:spPr>
+        <p:txBody>
+          <a:bodyPr wrap="square" lIns="0" tIns="0" rIns="0" bIns="0" rtlCol="0" anchor="t"/>
+          <a:lstStyle/>
+          <a:p>
+            <a:pPr algn="l" indent="0" marL="0">
+              <a:spcAft>
+                <a:spcPts val="600"/>
+              </a:spcAft>
+              <a:buNone/>
+            </a:pPr>
+            <a:r>
+              <a:rPr lang="en-US" sz="1350" dirty="0">
+                <a:solidFill>
+                  <a:srgbClr val="33444F"/>
+                </a:solidFill>
+                <a:latin typeface="Calibri" pitchFamily="34" charset="0"/>
+                <a:ea typeface="Calibri" pitchFamily="34" charset="-122"/>
+                <a:cs typeface="Calibri" pitchFamily="34" charset="-120"/>
+              </a:rPr>
+              <a:t>A. A falsely high result</a:t>
+            </a:r>
+            <a:endParaRPr lang="en-US" sz="1350" dirty="0"/>
+          </a:p>
+          <a:p>
+            <a:pPr algn="l" indent="0" marL="0">
+              <a:spcAft>
+                <a:spcPts val="600"/>
+              </a:spcAft>
+              <a:buNone/>
+            </a:pPr>
+            <a:r>
+              <a:rPr lang="en-US" sz="1350" b="1" dirty="0">
+                <a:solidFill>
+                  <a:srgbClr val="4A1269"/>
+                </a:solidFill>
+                <a:latin typeface="Calibri" pitchFamily="34" charset="0"/>
+                <a:ea typeface="Calibri" pitchFamily="34" charset="-122"/>
+                <a:cs typeface="Calibri" pitchFamily="34" charset="-120"/>
+              </a:rPr>
+              <a:t>B. A falsely low result at very high analyte concentrations</a:t>
+            </a:r>
+            <a:endParaRPr lang="en-US" sz="1350" dirty="0"/>
+          </a:p>
+          <a:p>
+            <a:pPr algn="l" indent="0" marL="0">
+              <a:spcAft>
+                <a:spcPts val="600"/>
+              </a:spcAft>
+              <a:buNone/>
+            </a:pPr>
+            <a:r>
+              <a:rPr lang="en-US" sz="1350" dirty="0">
+                <a:solidFill>
+                  <a:srgbClr val="33444F"/>
+                </a:solidFill>
+                <a:latin typeface="Calibri" pitchFamily="34" charset="0"/>
+                <a:ea typeface="Calibri" pitchFamily="34" charset="-122"/>
+                <a:cs typeface="Calibri" pitchFamily="34" charset="-120"/>
+              </a:rPr>
+              <a:t>C. No effect</a:t>
+            </a:r>
+            <a:endParaRPr lang="en-US" sz="1350" dirty="0"/>
+          </a:p>
+          <a:p>
+            <a:pPr algn="l" indent="0" marL="0">
+              <a:spcAft>
+                <a:spcPts val="600"/>
+              </a:spcAft>
+              <a:buNone/>
+            </a:pPr>
+            <a:r>
+              <a:rPr lang="en-US" sz="1350" dirty="0">
+                <a:solidFill>
+                  <a:srgbClr val="33444F"/>
+                </a:solidFill>
+                <a:latin typeface="Calibri" pitchFamily="34" charset="0"/>
+                <a:ea typeface="Calibri" pitchFamily="34" charset="-122"/>
+                <a:cs typeface="Calibri" pitchFamily="34" charset="-120"/>
+              </a:rPr>
+              <a:t>D. Increased specificity</a:t>
+            </a:r>
+            <a:endParaRPr lang="en-US" sz="1350" dirty="0"/>
+          </a:p>
+          <a:p>
+            <a:pPr algn="l" indent="0" marL="0">
+              <a:spcAft>
+                <a:spcPts val="600"/>
+              </a:spcAft>
+              <a:buNone/>
+            </a:pPr>
+            <a:r>
+              <a:rPr lang="en-US" sz="1350" dirty="0">
+                <a:solidFill>
+                  <a:srgbClr val="33444F"/>
+                </a:solidFill>
+                <a:latin typeface="Calibri" pitchFamily="34" charset="0"/>
+                <a:ea typeface="Calibri" pitchFamily="34" charset="-122"/>
+                <a:cs typeface="Calibri" pitchFamily="34" charset="-120"/>
+              </a:rPr>
+              <a:t>E. A shifted calibration only</a:t>
+            </a:r>
+            <a:endParaRPr lang="en-US" sz="1350" dirty="0"/>
+          </a:p>
+        </p:txBody>
+      </p:sp>
+      <p:sp>
+        <p:nvSpPr>
+          <p:cNvPr id="6" name="Shape 4"/>
+          <p:cNvSpPr/>
+          <p:nvPr/>
+        </p:nvSpPr>
+        <p:spPr>
+          <a:xfrm>
+            <a:off x="7201632" y="2395728"/>
+            <a:ext cx="4423136" cy="3246120"/>
+          </a:xfrm>
+          <a:prstGeom prst="roundRect">
+            <a:avLst>
+              <a:gd name="adj" fmla="val 2535"/>
+            </a:avLst>
+          </a:prstGeom>
+          <a:solidFill>
+            <a:srgbClr val="F1E8F7"/>
+          </a:solidFill>
+          <a:ln/>
+          <a:effectLst>
+            <a:outerShdw sx="100000" sy="100000" kx="0" ky="0" algn="bl" rotWithShape="0" blurRad="88900" dist="25400" dir="5400000">
+              <a:srgbClr val="22303C">
+                <a:alpha val="12000"/>
+              </a:srgbClr>
+            </a:outerShdw>
+          </a:effectLst>
+        </p:spPr>
+        <p:txBody>
+          <a:bodyPr/>
+          <a:p/>
+        </p:txBody>
+      </p:sp>
+      <p:sp>
+        <p:nvSpPr>
+          <p:cNvPr id="7" name="Text 5"/>
+          <p:cNvSpPr/>
+          <p:nvPr/>
+        </p:nvSpPr>
+        <p:spPr>
+          <a:xfrm>
+            <a:off x="7439376" y="2578608"/>
+            <a:ext cx="3965936" cy="457200"/>
+          </a:xfrm>
+          <a:prstGeom prst="rect">
+            <a:avLst/>
+          </a:prstGeom>
+          <a:noFill/>
+          <a:ln/>
+        </p:spPr>
+        <p:txBody>
+          <a:bodyPr wrap="square" lIns="0" tIns="0" rIns="0" bIns="0" rtlCol="0" anchor="ctr"/>
+          <a:lstStyle/>
+          <a:p>
+            <a:pPr indent="0" marL="0">
+              <a:buNone/>
+            </a:pPr>
+            <a:r>
+              <a:rPr lang="en-US" sz="1500" b="1" dirty="0">
+                <a:solidFill>
+                  <a:srgbClr val="6A1B9A"/>
+                </a:solidFill>
+                <a:latin typeface="Calibri" pitchFamily="34" charset="0"/>
+                <a:ea typeface="Calibri" pitchFamily="34" charset="-122"/>
+                <a:cs typeface="Calibri" pitchFamily="34" charset="-120"/>
+              </a:rPr>
+              <a:t>ANSWER  </a:t>
+            </a:r>
+            <a:pPr indent="0" marL="0">
+              <a:buNone/>
+            </a:pPr>
+            <a:r>
+              <a:rPr lang="en-US" sz="1500" b="1" dirty="0">
+                <a:solidFill>
+                  <a:srgbClr val="1B2A38"/>
+                </a:solidFill>
+                <a:latin typeface="Calibri" pitchFamily="34" charset="0"/>
+                <a:ea typeface="Calibri" pitchFamily="34" charset="-122"/>
+                <a:cs typeface="Calibri" pitchFamily="34" charset="-120"/>
+              </a:rPr>
+              <a:t>B — Falsely low at very high concentrations</a:t>
+            </a:r>
+            <a:endParaRPr lang="en-US" sz="1500" dirty="0"/>
+          </a:p>
+        </p:txBody>
+      </p:sp>
+      <p:sp>
+        <p:nvSpPr>
+          <p:cNvPr id="8" name="Text 6"/>
+          <p:cNvSpPr/>
+          <p:nvPr/>
+        </p:nvSpPr>
+        <p:spPr>
+          <a:xfrm>
+            <a:off x="7439376" y="3127248"/>
+            <a:ext cx="3947648" cy="2377440"/>
+          </a:xfrm>
+          <a:prstGeom prst="rect">
+            <a:avLst/>
+          </a:prstGeom>
+          <a:noFill/>
+          <a:ln/>
+        </p:spPr>
+        <p:txBody>
+          <a:bodyPr wrap="square" lIns="0" tIns="0" rIns="0" bIns="0" rtlCol="0" anchor="t"/>
+          <a:lstStyle/>
+          <a:p>
+            <a:pPr algn="l" indent="0" marL="0">
+              <a:lnSpc>
+                <a:spcPct val="108000"/>
+              </a:lnSpc>
+              <a:buNone/>
+            </a:pPr>
+            <a:r>
+              <a:rPr lang="en-US" sz="1250" dirty="0">
+                <a:solidFill>
+                  <a:srgbClr val="33444F"/>
+                </a:solidFill>
+                <a:latin typeface="Calibri" pitchFamily="34" charset="0"/>
+                <a:ea typeface="Calibri" pitchFamily="34" charset="-122"/>
+                <a:cs typeface="Calibri" pitchFamily="34" charset="-120"/>
+              </a:rPr>
+              <a:t>Antibody saturation in one-step sandwich assays produces a paradoxically low signal; dilution reveals the true value.</a:t>
+            </a:r>
+            <a:endParaRPr lang="en-US" sz="1250" dirty="0"/>
+          </a:p>
+        </p:txBody>
+      </p:sp>
+      <p:sp>
+        <p:nvSpPr>
+          <p:cNvPr id="9" name="Text 7"/>
+          <p:cNvSpPr/>
+          <p:nvPr/>
+        </p:nvSpPr>
+        <p:spPr>
+          <a:xfrm>
+            <a:off x="566928" y="6473952"/>
+            <a:ext cx="7772400" cy="274320"/>
+          </a:xfrm>
+          <a:prstGeom prst="rect">
+            <a:avLst/>
+          </a:prstGeom>
+          <a:noFill/>
+          <a:ln/>
+        </p:spPr>
+        <p:txBody>
+          <a:bodyPr wrap="square" lIns="0" tIns="0" rIns="0" bIns="0" rtlCol="0" anchor="ctr"/>
+          <a:lstStyle/>
+          <a:p>
+            <a:pPr algn="l" indent="0" marL="0">
+              <a:buNone/>
+            </a:pPr>
+            <a:r>
+              <a:rPr lang="en-US" sz="850" dirty="0">
+                <a:solidFill>
+                  <a:srgbClr val="9AA8B4"/>
+                </a:solidFill>
+                <a:latin typeface="Calibri" pitchFamily="34" charset="0"/>
+                <a:ea typeface="Calibri" pitchFamily="34" charset="-122"/>
+                <a:cs typeface="Calibri" pitchFamily="34" charset="-120"/>
+              </a:rPr>
+              <a:t>Makassed General Hospital  ·  Department of Laboratory Medicine</a:t>
+            </a:r>
+            <a:endParaRPr lang="en-US" sz="850" dirty="0"/>
+          </a:p>
+        </p:txBody>
+      </p:sp>
+      <p:sp>
+        <p:nvSpPr>
+          <p:cNvPr id="10" name="Text 8"/>
+          <p:cNvSpPr/>
+          <p:nvPr/>
+        </p:nvSpPr>
+        <p:spPr>
+          <a:xfrm>
+            <a:off x="9814255" y="6473952"/>
+            <a:ext cx="1828800" cy="274320"/>
+          </a:xfrm>
+          <a:prstGeom prst="rect">
+            <a:avLst/>
+          </a:prstGeom>
+          <a:noFill/>
+          <a:ln/>
+        </p:spPr>
+        <p:txBody>
+          <a:bodyPr wrap="square" lIns="0" tIns="0" rIns="0" bIns="0" rtlCol="0" anchor="ctr"/>
+          <a:lstStyle/>
+          <a:p>
+            <a:pPr algn="r" indent="0" marL="0">
+              <a:buNone/>
+            </a:pPr>
+            <a:r>
+              <a:rPr lang="en-US" sz="850" dirty="0">
+                <a:solidFill>
+                  <a:srgbClr val="9AA8B4"/>
+                </a:solidFill>
+                <a:latin typeface="Calibri" pitchFamily="34" charset="0"/>
+                <a:ea typeface="Calibri" pitchFamily="34" charset="-122"/>
+                <a:cs typeface="Calibri" pitchFamily="34" charset="-120"/>
+              </a:rPr>
+              <a:t>CP Lecture Series</a:t>
+            </a:r>
+            <a:pPr algn="r" indent="0" marL="0">
+              <a:buNone/>
+            </a:pPr>
+            <a:r>
+              <a:rPr lang="en-US" sz="850" dirty="0">
+                <a:solidFill>
+                  <a:srgbClr val="DCE4EC"/>
+                </a:solidFill>
+                <a:latin typeface="Calibri" pitchFamily="34" charset="0"/>
+                <a:ea typeface="Calibri" pitchFamily="34" charset="-122"/>
+                <a:cs typeface="Calibri" pitchFamily="34" charset="-120"/>
+              </a:rPr>
+              <a:t>   ·   </a:t>
+            </a:r>
+            <a:pPr algn="r" indent="0" marL="0">
+              <a:buNone/>
+            </a:pPr>
+            <a:r>
+              <a:rPr lang="en-US" sz="850" b="1" dirty="0">
+                <a:solidFill>
+                  <a:srgbClr val="6A1B9A"/>
+                </a:solidFill>
+                <a:latin typeface="Calibri" pitchFamily="34" charset="0"/>
+                <a:ea typeface="Calibri" pitchFamily="34" charset="-122"/>
+                <a:cs typeface="Calibri" pitchFamily="34" charset="-120"/>
+              </a:rPr>
+              <a:t>17</a:t>
+            </a:r>
+            <a:endParaRPr lang="en-US" sz="850" dirty="0"/>
+          </a:p>
+        </p:txBody>
+      </p:sp>
+    </p:spTree>
+  </p:cSld>
+  <p:clrMapOvr>
+    <a:masterClrMapping/>
+  </p:clrMapOvr>
+</p:sld>
+</file>
+
 <file path=ppt/slides/slide3.xml><?xml version="1.0" encoding="utf-8"?>
 <p:sld xmlns:a="http://schemas.openxmlformats.org/drawingml/2006/main" xmlns:r="http://schemas.openxmlformats.org/officeDocument/2006/relationships" xmlns:p="http://schemas.openxmlformats.org/presentationml/2006/main">
   <p:cSld name="Slide 3">
@@ -11551,6 +13171,10 @@
             </a:outerShdw>
           </a:effectLst>
         </p:spPr>
+        <p:txBody>
+          <a:bodyPr/>
+          <a:p/>
+        </p:txBody>
       </p:sp>
       <p:sp>
         <p:nvSpPr>
@@ -11578,6 +13202,10 @@
             </a:outerShdw>
           </a:effectLst>
         </p:spPr>
+        <p:txBody>
+          <a:bodyPr/>
+          <a:p/>
+        </p:txBody>
       </p:sp>
       <p:sp>
         <p:nvSpPr>
@@ -11685,6 +13313,10 @@
             </a:outerShdw>
           </a:effectLst>
         </p:spPr>
+        <p:txBody>
+          <a:bodyPr/>
+          <a:p/>
+        </p:txBody>
       </p:sp>
       <p:sp>
         <p:nvSpPr>
@@ -11712,6 +13344,10 @@
             </a:outerShdw>
           </a:effectLst>
         </p:spPr>
+        <p:txBody>
+          <a:bodyPr/>
+          <a:p/>
+        </p:txBody>
       </p:sp>
       <p:sp>
         <p:nvSpPr>
@@ -11819,6 +13455,10 @@
             </a:outerShdw>
           </a:effectLst>
         </p:spPr>
+        <p:txBody>
+          <a:bodyPr/>
+          <a:p/>
+        </p:txBody>
       </p:sp>
       <p:sp>
         <p:nvSpPr>
@@ -11846,6 +13486,10 @@
             </a:outerShdw>
           </a:effectLst>
         </p:spPr>
+        <p:txBody>
+          <a:bodyPr/>
+          <a:p/>
+        </p:txBody>
       </p:sp>
       <p:sp>
         <p:nvSpPr>
@@ -11953,6 +13597,10 @@
             </a:outerShdw>
           </a:effectLst>
         </p:spPr>
+        <p:txBody>
+          <a:bodyPr/>
+          <a:p/>
+        </p:txBody>
       </p:sp>
       <p:sp>
         <p:nvSpPr>
@@ -11980,6 +13628,10 @@
             </a:outerShdw>
           </a:effectLst>
         </p:spPr>
+        <p:txBody>
+          <a:bodyPr/>
+          <a:p/>
+        </p:txBody>
       </p:sp>
       <p:sp>
         <p:nvSpPr>
@@ -12087,6 +13739,10 @@
             </a:outerShdw>
           </a:effectLst>
         </p:spPr>
+        <p:txBody>
+          <a:bodyPr/>
+          <a:p/>
+        </p:txBody>
       </p:sp>
       <p:sp>
         <p:nvSpPr>
@@ -12114,6 +13770,10 @@
             </a:outerShdw>
           </a:effectLst>
         </p:spPr>
+        <p:txBody>
+          <a:bodyPr/>
+          <a:p/>
+        </p:txBody>
       </p:sp>
       <p:sp>
         <p:nvSpPr>
@@ -12221,6 +13881,10 @@
             </a:outerShdw>
           </a:effectLst>
         </p:spPr>
+        <p:txBody>
+          <a:bodyPr/>
+          <a:p/>
+        </p:txBody>
       </p:sp>
       <p:sp>
         <p:nvSpPr>
@@ -12248,6 +13912,10 @@
             </a:outerShdw>
           </a:effectLst>
         </p:spPr>
+        <p:txBody>
+          <a:bodyPr/>
+          <a:p/>
+        </p:txBody>
       </p:sp>
       <p:sp>
         <p:nvSpPr>
@@ -12571,6 +14239,10 @@
             </a:outerShdw>
           </a:effectLst>
         </p:spPr>
+        <p:txBody>
+          <a:bodyPr/>
+          <a:p/>
+        </p:txBody>
       </p:sp>
       <p:sp>
         <p:nvSpPr>
@@ -12598,6 +14270,10 @@
             </a:outerShdw>
           </a:effectLst>
         </p:spPr>
+        <p:txBody>
+          <a:bodyPr/>
+          <a:p/>
+        </p:txBody>
       </p:sp>
       <p:sp>
         <p:nvSpPr>
@@ -12712,6 +14388,10 @@
           </a:solidFill>
           <a:ln/>
         </p:spPr>
+        <p:txBody>
+          <a:bodyPr/>
+          <a:p/>
+        </p:txBody>
       </p:sp>
       <p:sp>
         <p:nvSpPr>
@@ -12739,6 +14419,10 @@
             </a:outerShdw>
           </a:effectLst>
         </p:spPr>
+        <p:txBody>
+          <a:bodyPr/>
+          <a:p/>
+        </p:txBody>
       </p:sp>
       <p:sp>
         <p:nvSpPr>
@@ -12860,6 +14544,10 @@
             </a:outerShdw>
           </a:effectLst>
         </p:spPr>
+        <p:txBody>
+          <a:bodyPr/>
+          <a:p/>
+        </p:txBody>
       </p:sp>
       <p:sp>
         <p:nvSpPr>
@@ -12887,6 +14575,10 @@
             </a:outerShdw>
           </a:effectLst>
         </p:spPr>
+        <p:txBody>
+          <a:bodyPr/>
+          <a:p/>
+        </p:txBody>
       </p:sp>
       <p:sp>
         <p:nvSpPr>
@@ -13001,6 +14693,10 @@
           </a:solidFill>
           <a:ln/>
         </p:spPr>
+        <p:txBody>
+          <a:bodyPr/>
+          <a:p/>
+        </p:txBody>
       </p:sp>
       <p:sp>
         <p:nvSpPr>
@@ -13028,6 +14724,10 @@
             </a:outerShdw>
           </a:effectLst>
         </p:spPr>
+        <p:txBody>
+          <a:bodyPr/>
+          <a:p/>
+        </p:txBody>
       </p:sp>
       <p:sp>
         <p:nvSpPr>
@@ -13149,6 +14849,10 @@
             </a:outerShdw>
           </a:effectLst>
         </p:spPr>
+        <p:txBody>
+          <a:bodyPr/>
+          <a:p/>
+        </p:txBody>
       </p:sp>
       <p:sp>
         <p:nvSpPr>
@@ -13176,6 +14880,10 @@
             </a:outerShdw>
           </a:effectLst>
         </p:spPr>
+        <p:txBody>
+          <a:bodyPr/>
+          <a:p/>
+        </p:txBody>
       </p:sp>
       <p:sp>
         <p:nvSpPr>
@@ -13414,6 +15122,10 @@
           </a:solidFill>
           <a:ln/>
         </p:spPr>
+        <p:txBody>
+          <a:bodyPr/>
+          <a:p/>
+        </p:txBody>
       </p:sp>
       <p:sp>
         <p:nvSpPr>
@@ -13436,6 +15148,10 @@
           </a:solidFill>
           <a:ln/>
         </p:spPr>
+        <p:txBody>
+          <a:bodyPr/>
+          <a:p/>
+        </p:txBody>
       </p:sp>
       <p:sp>
         <p:nvSpPr>
@@ -13697,6 +15413,10 @@
             </a:outerShdw>
           </a:effectLst>
         </p:spPr>
+        <p:txBody>
+          <a:bodyPr/>
+          <a:p/>
+        </p:txBody>
       </p:sp>
       <p:pic>
         <p:nvPicPr>
@@ -14005,6 +15725,10 @@
             </a:outerShdw>
           </a:effectLst>
         </p:spPr>
+        <p:txBody>
+          <a:bodyPr/>
+          <a:p/>
+        </p:txBody>
       </p:sp>
       <p:sp>
         <p:nvSpPr>
@@ -14179,6 +15903,10 @@
             </a:outerShdw>
           </a:effectLst>
         </p:spPr>
+        <p:txBody>
+          <a:bodyPr/>
+          <a:p/>
+        </p:txBody>
       </p:sp>
       <p:sp>
         <p:nvSpPr>
@@ -14569,6 +16297,10 @@
             </a:outerShdw>
           </a:effectLst>
         </p:spPr>
+        <p:txBody>
+          <a:bodyPr/>
+          <a:p/>
+        </p:txBody>
       </p:sp>
       <p:sp>
         <p:nvSpPr>
@@ -14743,6 +16475,10 @@
             </a:outerShdw>
           </a:effectLst>
         </p:spPr>
+        <p:txBody>
+          <a:bodyPr/>
+          <a:p/>
+        </p:txBody>
       </p:sp>
       <p:sp>
         <p:nvSpPr>
@@ -15048,6 +16784,10 @@
           </a:solidFill>
           <a:ln/>
         </p:spPr>
+        <p:txBody>
+          <a:bodyPr/>
+          <a:p/>
+        </p:txBody>
       </p:sp>
       <p:sp>
         <p:nvSpPr>
@@ -15070,6 +16810,10 @@
           </a:solidFill>
           <a:ln/>
         </p:spPr>
+        <p:txBody>
+          <a:bodyPr/>
+          <a:p/>
+        </p:txBody>
       </p:sp>
       <p:sp>
         <p:nvSpPr>
